--- a/Planejamento_Integrado_Operacoes_Topside.pptx
+++ b/Planejamento_Integrado_Operacoes_Topside.pptx
@@ -3451,11 +3451,11 @@
         <p:spPr>
           <a:xfrm>
             <a:off x="365760" y="2212848"/>
-            <a:ext cx="11457432" cy="566928"/>
+            <a:ext cx="11457432" cy="777240"/>
           </a:xfrm>
           <a:prstGeom prst="roundRect">
             <a:avLst>
-              <a:gd name="adj" fmla="val 6452"/>
+              <a:gd name="adj" fmla="val 4706"/>
             </a:avLst>
           </a:prstGeom>
           <a:solidFill>
@@ -3519,7 +3519,7 @@
         <p:spPr>
           <a:xfrm>
             <a:off x="566928" y="2688336"/>
-            <a:ext cx="11055096" cy="-36576"/>
+            <a:ext cx="11055096" cy="219456"/>
           </a:xfrm>
           <a:prstGeom prst="rect">
             <a:avLst/>
@@ -5397,12 +5397,12 @@
         </p:nvSpPr>
         <p:spPr>
           <a:xfrm>
-            <a:off x="365760" y="5257800"/>
-            <a:ext cx="11457432" cy="502920"/>
+            <a:off x="365760" y="5166360"/>
+            <a:ext cx="11457432" cy="731520"/>
           </a:xfrm>
           <a:prstGeom prst="roundRect">
             <a:avLst>
-              <a:gd name="adj" fmla="val 7273"/>
+              <a:gd name="adj" fmla="val 5000"/>
             </a:avLst>
           </a:prstGeom>
           <a:solidFill>
@@ -5426,7 +5426,7 @@
         </p:nvSpPr>
         <p:spPr>
           <a:xfrm>
-            <a:off x="566928" y="5404104"/>
+            <a:off x="566928" y="5312664"/>
             <a:ext cx="11055096" cy="274320"/>
           </a:xfrm>
           <a:prstGeom prst="rect">
@@ -5465,8 +5465,8 @@
         </p:nvSpPr>
         <p:spPr>
           <a:xfrm>
-            <a:off x="566928" y="5733288"/>
-            <a:ext cx="11055096" cy="-100584"/>
+            <a:off x="566928" y="5641848"/>
+            <a:ext cx="11055096" cy="219456"/>
           </a:xfrm>
           <a:prstGeom prst="rect">
             <a:avLst/>
@@ -6366,7 +6366,7 @@
           </a:xfrm>
           <a:prstGeom prst="roundRect">
             <a:avLst>
-              <a:gd name="adj" fmla="val 192308"/>
+              <a:gd name="adj" fmla="val 50000"/>
             </a:avLst>
           </a:prstGeom>
           <a:solidFill>
@@ -6545,7 +6545,7 @@
           </a:xfrm>
           <a:prstGeom prst="roundRect">
             <a:avLst>
-              <a:gd name="adj" fmla="val 192308"/>
+              <a:gd name="adj" fmla="val 50000"/>
             </a:avLst>
           </a:prstGeom>
           <a:solidFill>
@@ -6724,7 +6724,7 @@
           </a:xfrm>
           <a:prstGeom prst="roundRect">
             <a:avLst>
-              <a:gd name="adj" fmla="val 192308"/>
+              <a:gd name="adj" fmla="val 50000"/>
             </a:avLst>
           </a:prstGeom>
           <a:solidFill>
@@ -6903,7 +6903,7 @@
           </a:xfrm>
           <a:prstGeom prst="roundRect">
             <a:avLst>
-              <a:gd name="adj" fmla="val 192308"/>
+              <a:gd name="adj" fmla="val 50000"/>
             </a:avLst>
           </a:prstGeom>
           <a:solidFill>
@@ -7082,7 +7082,7 @@
           </a:xfrm>
           <a:prstGeom prst="roundRect">
             <a:avLst>
-              <a:gd name="adj" fmla="val 192308"/>
+              <a:gd name="adj" fmla="val 50000"/>
             </a:avLst>
           </a:prstGeom>
           <a:solidFill>
@@ -7261,7 +7261,7 @@
           </a:xfrm>
           <a:prstGeom prst="roundRect">
             <a:avLst>
-              <a:gd name="adj" fmla="val 192308"/>
+              <a:gd name="adj" fmla="val 50000"/>
             </a:avLst>
           </a:prstGeom>
           <a:solidFill>
@@ -17168,7 +17168,7 @@
           </a:xfrm>
           <a:prstGeom prst="roundRect">
             <a:avLst>
-              <a:gd name="adj" fmla="val 156250"/>
+              <a:gd name="adj" fmla="val 50000"/>
             </a:avLst>
           </a:prstGeom>
           <a:solidFill>
@@ -17445,7 +17445,7 @@
           </a:xfrm>
           <a:prstGeom prst="roundRect">
             <a:avLst>
-              <a:gd name="adj" fmla="val 156250"/>
+              <a:gd name="adj" fmla="val 50000"/>
             </a:avLst>
           </a:prstGeom>
           <a:solidFill>
@@ -17722,7 +17722,7 @@
           </a:xfrm>
           <a:prstGeom prst="roundRect">
             <a:avLst>
-              <a:gd name="adj" fmla="val 156250"/>
+              <a:gd name="adj" fmla="val 50000"/>
             </a:avLst>
           </a:prstGeom>
           <a:solidFill>
@@ -17999,7 +17999,7 @@
           </a:xfrm>
           <a:prstGeom prst="roundRect">
             <a:avLst>
-              <a:gd name="adj" fmla="val 156250"/>
+              <a:gd name="adj" fmla="val 50000"/>
             </a:avLst>
           </a:prstGeom>
           <a:solidFill>
@@ -18276,7 +18276,7 @@
           </a:xfrm>
           <a:prstGeom prst="roundRect">
             <a:avLst>
-              <a:gd name="adj" fmla="val 156250"/>
+              <a:gd name="adj" fmla="val 50000"/>
             </a:avLst>
           </a:prstGeom>
           <a:solidFill>
@@ -21270,12 +21270,12 @@
         </p:nvSpPr>
         <p:spPr>
           <a:xfrm>
-            <a:off x="365760" y="5486400"/>
-            <a:ext cx="11457432" cy="777240"/>
+            <a:off x="365760" y="5440680"/>
+            <a:ext cx="11457432" cy="914400"/>
           </a:xfrm>
           <a:prstGeom prst="roundRect">
             <a:avLst>
-              <a:gd name="adj" fmla="val 4706"/>
+              <a:gd name="adj" fmla="val 4000"/>
             </a:avLst>
           </a:prstGeom>
           <a:solidFill>
@@ -21299,7 +21299,7 @@
         </p:nvSpPr>
         <p:spPr>
           <a:xfrm>
-            <a:off x="566928" y="5632704"/>
+            <a:off x="566928" y="5586984"/>
             <a:ext cx="11055096" cy="274320"/>
           </a:xfrm>
           <a:prstGeom prst="rect">
@@ -21338,8 +21338,8 @@
         </p:nvSpPr>
         <p:spPr>
           <a:xfrm>
-            <a:off x="566928" y="5961888"/>
-            <a:ext cx="11055096" cy="173736"/>
+            <a:off x="566928" y="5916168"/>
+            <a:ext cx="11055096" cy="310896"/>
           </a:xfrm>
           <a:prstGeom prst="rect">
             <a:avLst/>
@@ -21665,7 +21665,7 @@
           </a:xfrm>
           <a:prstGeom prst="roundRect">
             <a:avLst>
-              <a:gd name="adj" fmla="val 100000"/>
+              <a:gd name="adj" fmla="val 50000"/>
             </a:avLst>
           </a:prstGeom>
           <a:solidFill>
@@ -21809,7 +21809,7 @@
           </a:xfrm>
           <a:prstGeom prst="roundRect">
             <a:avLst>
-              <a:gd name="adj" fmla="val 100000"/>
+              <a:gd name="adj" fmla="val 50000"/>
             </a:avLst>
           </a:prstGeom>
           <a:solidFill>
@@ -21953,7 +21953,7 @@
           </a:xfrm>
           <a:prstGeom prst="roundRect">
             <a:avLst>
-              <a:gd name="adj" fmla="val 100000"/>
+              <a:gd name="adj" fmla="val 50000"/>
             </a:avLst>
           </a:prstGeom>
           <a:solidFill>
@@ -22097,7 +22097,7 @@
           </a:xfrm>
           <a:prstGeom prst="roundRect">
             <a:avLst>
-              <a:gd name="adj" fmla="val 100000"/>
+              <a:gd name="adj" fmla="val 50000"/>
             </a:avLst>
           </a:prstGeom>
           <a:solidFill>
@@ -22241,7 +22241,7 @@
           </a:xfrm>
           <a:prstGeom prst="roundRect">
             <a:avLst>
-              <a:gd name="adj" fmla="val 100000"/>
+              <a:gd name="adj" fmla="val 50000"/>
             </a:avLst>
           </a:prstGeom>
           <a:solidFill>
@@ -22385,7 +22385,7 @@
           </a:xfrm>
           <a:prstGeom prst="roundRect">
             <a:avLst>
-              <a:gd name="adj" fmla="val 100000"/>
+              <a:gd name="adj" fmla="val 50000"/>
             </a:avLst>
           </a:prstGeom>
           <a:solidFill>
@@ -22529,7 +22529,7 @@
           </a:xfrm>
           <a:prstGeom prst="roundRect">
             <a:avLst>
-              <a:gd name="adj" fmla="val 100000"/>
+              <a:gd name="adj" fmla="val 50000"/>
             </a:avLst>
           </a:prstGeom>
           <a:solidFill>
@@ -22673,7 +22673,7 @@
           </a:xfrm>
           <a:prstGeom prst="roundRect">
             <a:avLst>
-              <a:gd name="adj" fmla="val 100000"/>
+              <a:gd name="adj" fmla="val 50000"/>
             </a:avLst>
           </a:prstGeom>
           <a:solidFill>
@@ -22817,7 +22817,7 @@
           </a:xfrm>
           <a:prstGeom prst="roundRect">
             <a:avLst>
-              <a:gd name="adj" fmla="val 100000"/>
+              <a:gd name="adj" fmla="val 50000"/>
             </a:avLst>
           </a:prstGeom>
           <a:solidFill>
@@ -22961,7 +22961,7 @@
           </a:xfrm>
           <a:prstGeom prst="roundRect">
             <a:avLst>
-              <a:gd name="adj" fmla="val 100000"/>
+              <a:gd name="adj" fmla="val 50000"/>
             </a:avLst>
           </a:prstGeom>
           <a:solidFill>
@@ -23105,7 +23105,7 @@
           </a:xfrm>
           <a:prstGeom prst="roundRect">
             <a:avLst>
-              <a:gd name="adj" fmla="val 100000"/>
+              <a:gd name="adj" fmla="val 50000"/>
             </a:avLst>
           </a:prstGeom>
           <a:solidFill>
@@ -23249,7 +23249,7 @@
           </a:xfrm>
           <a:prstGeom prst="roundRect">
             <a:avLst>
-              <a:gd name="adj" fmla="val 100000"/>
+              <a:gd name="adj" fmla="val 50000"/>
             </a:avLst>
           </a:prstGeom>
           <a:solidFill>
@@ -23393,7 +23393,7 @@
           </a:xfrm>
           <a:prstGeom prst="roundRect">
             <a:avLst>
-              <a:gd name="adj" fmla="val 100000"/>
+              <a:gd name="adj" fmla="val 50000"/>
             </a:avLst>
           </a:prstGeom>
           <a:solidFill>
@@ -24282,7 +24282,7 @@
           </a:xfrm>
           <a:prstGeom prst="roundRect">
             <a:avLst>
-              <a:gd name="adj" fmla="val 156250"/>
+              <a:gd name="adj" fmla="val 50000"/>
             </a:avLst>
           </a:prstGeom>
           <a:solidFill>
@@ -24559,7 +24559,7 @@
           </a:xfrm>
           <a:prstGeom prst="roundRect">
             <a:avLst>
-              <a:gd name="adj" fmla="val 156250"/>
+              <a:gd name="adj" fmla="val 50000"/>
             </a:avLst>
           </a:prstGeom>
           <a:solidFill>
@@ -24836,7 +24836,7 @@
           </a:xfrm>
           <a:prstGeom prst="roundRect">
             <a:avLst>
-              <a:gd name="adj" fmla="val 156250"/>
+              <a:gd name="adj" fmla="val 50000"/>
             </a:avLst>
           </a:prstGeom>
           <a:solidFill>
@@ -25113,7 +25113,7 @@
           </a:xfrm>
           <a:prstGeom prst="roundRect">
             <a:avLst>
-              <a:gd name="adj" fmla="val 156250"/>
+              <a:gd name="adj" fmla="val 50000"/>
             </a:avLst>
           </a:prstGeom>
           <a:solidFill>
@@ -25390,7 +25390,7 @@
           </a:xfrm>
           <a:prstGeom prst="roundRect">
             <a:avLst>
-              <a:gd name="adj" fmla="val 156250"/>
+              <a:gd name="adj" fmla="val 50000"/>
             </a:avLst>
           </a:prstGeom>
           <a:solidFill>
@@ -32158,18 +32158,15 @@
         <p:spPr>
           <a:xfrm>
             <a:off x="365760" y="2578608"/>
-            <a:ext cx="11457432" cy="0"/>
-          </a:xfrm>
-          <a:prstGeom prst="line">
-            <a:avLst/>
-          </a:prstGeom>
-          <a:noFill/>
-          <a:ln w="12700">
-            <a:solidFill>
-              <a:srgbClr val="E1DDEC"/>
-            </a:solidFill>
-            <a:prstDash val="solid"/>
-          </a:ln>
+            <a:ext cx="11457432" cy="12802"/>
+          </a:xfrm>
+          <a:prstGeom prst="rect">
+            <a:avLst/>
+          </a:prstGeom>
+          <a:solidFill>
+            <a:srgbClr val="E1DDEC"/>
+          </a:solidFill>
+          <a:ln/>
         </p:spPr>
       </p:sp>
       <p:sp>
@@ -32421,7 +32418,7 @@
           </a:xfrm>
           <a:prstGeom prst="roundRect">
             <a:avLst>
-              <a:gd name="adj" fmla="val 100000"/>
+              <a:gd name="adj" fmla="val 50000"/>
             </a:avLst>
           </a:prstGeom>
           <a:solidFill>
@@ -32679,7 +32676,7 @@
           </a:xfrm>
           <a:prstGeom prst="roundRect">
             <a:avLst>
-              <a:gd name="adj" fmla="val 100000"/>
+              <a:gd name="adj" fmla="val 50000"/>
             </a:avLst>
           </a:prstGeom>
           <a:solidFill>
@@ -32937,7 +32934,7 @@
           </a:xfrm>
           <a:prstGeom prst="roundRect">
             <a:avLst>
-              <a:gd name="adj" fmla="val 100000"/>
+              <a:gd name="adj" fmla="val 50000"/>
             </a:avLst>
           </a:prstGeom>
           <a:solidFill>
@@ -33259,7 +33256,7 @@
           </a:xfrm>
           <a:prstGeom prst="roundRect">
             <a:avLst>
-              <a:gd name="adj" fmla="val 100000"/>
+              <a:gd name="adj" fmla="val 50000"/>
             </a:avLst>
           </a:prstGeom>
           <a:solidFill>
@@ -33517,7 +33514,7 @@
           </a:xfrm>
           <a:prstGeom prst="roundRect">
             <a:avLst>
-              <a:gd name="adj" fmla="val 100000"/>
+              <a:gd name="adj" fmla="val 50000"/>
             </a:avLst>
           </a:prstGeom>
           <a:solidFill>
@@ -33775,7 +33772,7 @@
           </a:xfrm>
           <a:prstGeom prst="roundRect">
             <a:avLst>
-              <a:gd name="adj" fmla="val 100000"/>
+              <a:gd name="adj" fmla="val 50000"/>
             </a:avLst>
           </a:prstGeom>
           <a:solidFill>
@@ -34033,7 +34030,7 @@
           </a:xfrm>
           <a:prstGeom prst="roundRect">
             <a:avLst>
-              <a:gd name="adj" fmla="val 100000"/>
+              <a:gd name="adj" fmla="val 50000"/>
             </a:avLst>
           </a:prstGeom>
           <a:solidFill>
@@ -34291,7 +34288,7 @@
           </a:xfrm>
           <a:prstGeom prst="roundRect">
             <a:avLst>
-              <a:gd name="adj" fmla="val 100000"/>
+              <a:gd name="adj" fmla="val 50000"/>
             </a:avLst>
           </a:prstGeom>
           <a:solidFill>
@@ -35089,18 +35086,15 @@
         <p:spPr>
           <a:xfrm>
             <a:off x="548640" y="2542032"/>
-            <a:ext cx="0" cy="3767328"/>
-          </a:xfrm>
-          <a:prstGeom prst="line">
-            <a:avLst/>
-          </a:prstGeom>
-          <a:noFill/>
-          <a:ln w="15240">
-            <a:solidFill>
-              <a:srgbClr val="6B6682"/>
-            </a:solidFill>
-            <a:prstDash val="solid"/>
-          </a:ln>
+            <a:ext cx="12802" cy="3767328"/>
+          </a:xfrm>
+          <a:prstGeom prst="rect">
+            <a:avLst/>
+          </a:prstGeom>
+          <a:solidFill>
+            <a:srgbClr val="6B6682"/>
+          </a:solidFill>
+          <a:ln/>
         </p:spPr>
       </p:sp>
       <p:sp>
@@ -35112,18 +35106,15 @@
         <p:spPr>
           <a:xfrm>
             <a:off x="548640" y="6309360"/>
-            <a:ext cx="6949440" cy="0"/>
-          </a:xfrm>
-          <a:prstGeom prst="line">
-            <a:avLst/>
-          </a:prstGeom>
-          <a:noFill/>
-          <a:ln w="15240">
-            <a:solidFill>
-              <a:srgbClr val="6B6682"/>
-            </a:solidFill>
-            <a:prstDash val="solid"/>
-          </a:ln>
+            <a:ext cx="6949440" cy="12802"/>
+          </a:xfrm>
+          <a:prstGeom prst="rect">
+            <a:avLst/>
+          </a:prstGeom>
+          <a:solidFill>
+            <a:srgbClr val="6B6682"/>
+          </a:solidFill>
+          <a:ln/>
         </p:spPr>
       </p:sp>
       <p:sp>
@@ -37163,11 +37154,11 @@
         <p:spPr>
           <a:xfrm>
             <a:off x="365760" y="2212848"/>
-            <a:ext cx="11457432" cy="566928"/>
+            <a:ext cx="11457432" cy="777240"/>
           </a:xfrm>
           <a:prstGeom prst="roundRect">
             <a:avLst>
-              <a:gd name="adj" fmla="val 6452"/>
+              <a:gd name="adj" fmla="val 4706"/>
             </a:avLst>
           </a:prstGeom>
           <a:solidFill>
@@ -37231,7 +37222,7 @@
         <p:spPr>
           <a:xfrm>
             <a:off x="566928" y="2688336"/>
-            <a:ext cx="11055096" cy="-36576"/>
+            <a:ext cx="11055096" cy="219456"/>
           </a:xfrm>
           <a:prstGeom prst="rect">
             <a:avLst/>
@@ -37276,7 +37267,7 @@
         </p:nvSpPr>
         <p:spPr>
           <a:xfrm>
-            <a:off x="365760" y="3017520"/>
+            <a:off x="365760" y="3108960"/>
             <a:ext cx="2727198" cy="1691640"/>
           </a:xfrm>
           <a:prstGeom prst="roundRect">
@@ -37310,7 +37301,7 @@
         </p:nvSpPr>
         <p:spPr>
           <a:xfrm>
-            <a:off x="512064" y="3145536"/>
+            <a:off x="512064" y="3236976"/>
             <a:ext cx="2434590" cy="457200"/>
           </a:xfrm>
           <a:prstGeom prst="rect">
@@ -37352,7 +37343,7 @@
         </p:nvSpPr>
         <p:spPr>
           <a:xfrm>
-            <a:off x="512064" y="3584448"/>
+            <a:off x="512064" y="3675888"/>
             <a:ext cx="2434590" cy="365760"/>
           </a:xfrm>
           <a:prstGeom prst="rect">
@@ -37391,12 +37382,12 @@
         </p:nvSpPr>
         <p:spPr>
           <a:xfrm>
-            <a:off x="512064" y="3986784"/>
+            <a:off x="512064" y="4078224"/>
             <a:ext cx="2434590" cy="109728"/>
           </a:xfrm>
           <a:prstGeom prst="roundRect">
             <a:avLst>
-              <a:gd name="adj" fmla="val 416667"/>
+              <a:gd name="adj" fmla="val 50000"/>
             </a:avLst>
           </a:prstGeom>
           <a:solidFill>
@@ -37413,12 +37404,12 @@
         </p:nvSpPr>
         <p:spPr>
           <a:xfrm>
-            <a:off x="512064" y="3986784"/>
+            <a:off x="512064" y="4078224"/>
             <a:ext cx="2434590" cy="109728"/>
           </a:xfrm>
           <a:prstGeom prst="roundRect">
             <a:avLst>
-              <a:gd name="adj" fmla="val 416667"/>
+              <a:gd name="adj" fmla="val 50000"/>
             </a:avLst>
           </a:prstGeom>
           <a:solidFill>
@@ -37435,7 +37426,7 @@
         </p:nvSpPr>
         <p:spPr>
           <a:xfrm>
-            <a:off x="512064" y="4187952"/>
+            <a:off x="512064" y="4279392"/>
             <a:ext cx="2434590" cy="457200"/>
           </a:xfrm>
           <a:prstGeom prst="rect">
@@ -37477,7 +37468,7 @@
         </p:nvSpPr>
         <p:spPr>
           <a:xfrm>
-            <a:off x="3275838" y="3017520"/>
+            <a:off x="3275838" y="3108960"/>
             <a:ext cx="2727198" cy="1691640"/>
           </a:xfrm>
           <a:prstGeom prst="roundRect">
@@ -37511,7 +37502,7 @@
         </p:nvSpPr>
         <p:spPr>
           <a:xfrm>
-            <a:off x="3422142" y="3145536"/>
+            <a:off x="3422142" y="3236976"/>
             <a:ext cx="2434590" cy="457200"/>
           </a:xfrm>
           <a:prstGeom prst="rect">
@@ -37553,7 +37544,7 @@
         </p:nvSpPr>
         <p:spPr>
           <a:xfrm>
-            <a:off x="3422142" y="3584448"/>
+            <a:off x="3422142" y="3675888"/>
             <a:ext cx="2434590" cy="365760"/>
           </a:xfrm>
           <a:prstGeom prst="rect">
@@ -37592,12 +37583,12 @@
         </p:nvSpPr>
         <p:spPr>
           <a:xfrm>
-            <a:off x="3422142" y="3986784"/>
+            <a:off x="3422142" y="4078224"/>
             <a:ext cx="2434590" cy="109728"/>
           </a:xfrm>
           <a:prstGeom prst="roundRect">
             <a:avLst>
-              <a:gd name="adj" fmla="val 416667"/>
+              <a:gd name="adj" fmla="val 50000"/>
             </a:avLst>
           </a:prstGeom>
           <a:solidFill>
@@ -37614,12 +37605,12 @@
         </p:nvSpPr>
         <p:spPr>
           <a:xfrm>
-            <a:off x="3422142" y="3986784"/>
+            <a:off x="3422142" y="4078224"/>
             <a:ext cx="2020710" cy="109728"/>
           </a:xfrm>
           <a:prstGeom prst="roundRect">
             <a:avLst>
-              <a:gd name="adj" fmla="val 416667"/>
+              <a:gd name="adj" fmla="val 50000"/>
             </a:avLst>
           </a:prstGeom>
           <a:solidFill>
@@ -37636,7 +37627,7 @@
         </p:nvSpPr>
         <p:spPr>
           <a:xfrm>
-            <a:off x="3422142" y="4187952"/>
+            <a:off x="3422142" y="4279392"/>
             <a:ext cx="2434590" cy="457200"/>
           </a:xfrm>
           <a:prstGeom prst="rect">
@@ -37678,7 +37669,7 @@
         </p:nvSpPr>
         <p:spPr>
           <a:xfrm>
-            <a:off x="6185916" y="3017520"/>
+            <a:off x="6185916" y="3108960"/>
             <a:ext cx="2727198" cy="1691640"/>
           </a:xfrm>
           <a:prstGeom prst="roundRect">
@@ -37712,7 +37703,7 @@
         </p:nvSpPr>
         <p:spPr>
           <a:xfrm>
-            <a:off x="6332220" y="3145536"/>
+            <a:off x="6332220" y="3236976"/>
             <a:ext cx="2434590" cy="457200"/>
           </a:xfrm>
           <a:prstGeom prst="rect">
@@ -37754,7 +37745,7 @@
         </p:nvSpPr>
         <p:spPr>
           <a:xfrm>
-            <a:off x="6332220" y="3584448"/>
+            <a:off x="6332220" y="3675888"/>
             <a:ext cx="2434590" cy="365760"/>
           </a:xfrm>
           <a:prstGeom prst="rect">
@@ -37793,12 +37784,12 @@
         </p:nvSpPr>
         <p:spPr>
           <a:xfrm>
-            <a:off x="6332220" y="3986784"/>
+            <a:off x="6332220" y="4078224"/>
             <a:ext cx="2434590" cy="109728"/>
           </a:xfrm>
           <a:prstGeom prst="roundRect">
             <a:avLst>
-              <a:gd name="adj" fmla="val 416667"/>
+              <a:gd name="adj" fmla="val 50000"/>
             </a:avLst>
           </a:prstGeom>
           <a:solidFill>
@@ -37815,12 +37806,12 @@
         </p:nvSpPr>
         <p:spPr>
           <a:xfrm>
-            <a:off x="6332220" y="3986784"/>
+            <a:off x="6332220" y="4078224"/>
             <a:ext cx="1631175" cy="109728"/>
           </a:xfrm>
           <a:prstGeom prst="roundRect">
             <a:avLst>
-              <a:gd name="adj" fmla="val 416667"/>
+              <a:gd name="adj" fmla="val 50000"/>
             </a:avLst>
           </a:prstGeom>
           <a:solidFill>
@@ -37837,7 +37828,7 @@
         </p:nvSpPr>
         <p:spPr>
           <a:xfrm>
-            <a:off x="9095994" y="3017520"/>
+            <a:off x="9095994" y="3108960"/>
             <a:ext cx="2727198" cy="1691640"/>
           </a:xfrm>
           <a:prstGeom prst="roundRect">
@@ -37871,7 +37862,7 @@
         </p:nvSpPr>
         <p:spPr>
           <a:xfrm>
-            <a:off x="9242298" y="3145536"/>
+            <a:off x="9242298" y="3236976"/>
             <a:ext cx="2434590" cy="457200"/>
           </a:xfrm>
           <a:prstGeom prst="rect">
@@ -37913,7 +37904,7 @@
         </p:nvSpPr>
         <p:spPr>
           <a:xfrm>
-            <a:off x="9242298" y="3584448"/>
+            <a:off x="9242298" y="3675888"/>
             <a:ext cx="2434590" cy="365760"/>
           </a:xfrm>
           <a:prstGeom prst="rect">
@@ -37952,12 +37943,12 @@
         </p:nvSpPr>
         <p:spPr>
           <a:xfrm>
-            <a:off x="9242298" y="3986784"/>
+            <a:off x="9242298" y="4078224"/>
             <a:ext cx="2434590" cy="109728"/>
           </a:xfrm>
           <a:prstGeom prst="roundRect">
             <a:avLst>
-              <a:gd name="adj" fmla="val 416667"/>
+              <a:gd name="adj" fmla="val 50000"/>
             </a:avLst>
           </a:prstGeom>
           <a:solidFill>
@@ -37974,12 +37965,12 @@
         </p:nvSpPr>
         <p:spPr>
           <a:xfrm>
-            <a:off x="9242298" y="3986784"/>
+            <a:off x="9242298" y="4078224"/>
             <a:ext cx="2020710" cy="109728"/>
           </a:xfrm>
           <a:prstGeom prst="roundRect">
             <a:avLst>
-              <a:gd name="adj" fmla="val 416667"/>
+              <a:gd name="adj" fmla="val 50000"/>
             </a:avLst>
           </a:prstGeom>
           <a:solidFill>
@@ -37996,7 +37987,7 @@
         </p:nvSpPr>
         <p:spPr>
           <a:xfrm>
-            <a:off x="9242298" y="4187952"/>
+            <a:off x="9242298" y="4279392"/>
             <a:ext cx="2434590" cy="457200"/>
           </a:xfrm>
           <a:prstGeom prst="rect">
@@ -38082,7 +38073,7 @@
           </a:xfrm>
           <a:prstGeom prst="roundRect">
             <a:avLst>
-              <a:gd name="adj" fmla="val 119048"/>
+              <a:gd name="adj" fmla="val 50000"/>
             </a:avLst>
           </a:prstGeom>
           <a:solidFill>
@@ -38143,7 +38134,7 @@
           </a:xfrm>
           <a:prstGeom prst="roundRect">
             <a:avLst>
-              <a:gd name="adj" fmla="val 119048"/>
+              <a:gd name="adj" fmla="val 50000"/>
             </a:avLst>
           </a:prstGeom>
           <a:solidFill>
@@ -38204,7 +38195,7 @@
           </a:xfrm>
           <a:prstGeom prst="roundRect">
             <a:avLst>
-              <a:gd name="adj" fmla="val 119048"/>
+              <a:gd name="adj" fmla="val 50000"/>
             </a:avLst>
           </a:prstGeom>
           <a:solidFill>
@@ -38265,7 +38256,7 @@
           </a:xfrm>
           <a:prstGeom prst="roundRect">
             <a:avLst>
-              <a:gd name="adj" fmla="val 119048"/>
+              <a:gd name="adj" fmla="val 50000"/>
             </a:avLst>
           </a:prstGeom>
           <a:solidFill>
@@ -38598,11 +38589,11 @@
         <p:spPr>
           <a:xfrm>
             <a:off x="365760" y="2212848"/>
-            <a:ext cx="11457432" cy="658368"/>
+            <a:ext cx="11457432" cy="1005840"/>
           </a:xfrm>
           <a:prstGeom prst="roundRect">
             <a:avLst>
-              <a:gd name="adj" fmla="val 5556"/>
+              <a:gd name="adj" fmla="val 3636"/>
             </a:avLst>
           </a:prstGeom>
           <a:solidFill>
@@ -38666,7 +38657,7 @@
         <p:spPr>
           <a:xfrm>
             <a:off x="566928" y="2688336"/>
-            <a:ext cx="11055096" cy="54864"/>
+            <a:ext cx="11055096" cy="402336"/>
           </a:xfrm>
           <a:prstGeom prst="rect">
             <a:avLst/>
@@ -38735,7 +38726,7 @@
         </p:nvSpPr>
         <p:spPr>
           <a:xfrm>
-            <a:off x="365760" y="3200400"/>
+            <a:off x="365760" y="3337560"/>
             <a:ext cx="5632704" cy="237744"/>
           </a:xfrm>
           <a:prstGeom prst="rect">
@@ -38781,7 +38772,7 @@
           </p:nvPr>
         </p:nvGraphicFramePr>
         <p:xfrm>
-          <a:off x="365760" y="3474720"/>
+          <a:off x="365760" y="3611880"/>
           <a:ext cx="5632704" cy="1847088"/>
         </p:xfrm>
         <a:graphic>
@@ -39632,7 +39623,7 @@
         </p:nvSpPr>
         <p:spPr>
           <a:xfrm>
-            <a:off x="6181344" y="3200400"/>
+            <a:off x="6181344" y="3337560"/>
             <a:ext cx="5641848" cy="237744"/>
           </a:xfrm>
           <a:prstGeom prst="rect">
@@ -39678,7 +39669,7 @@
           </p:nvPr>
         </p:nvGraphicFramePr>
         <p:xfrm>
-          <a:off x="6181344" y="3474720"/>
+          <a:off x="6181344" y="3611880"/>
           <a:ext cx="5641848" cy="1847088"/>
         </p:xfrm>
         <a:graphic>
@@ -40844,7 +40835,7 @@
           </a:xfrm>
           <a:prstGeom prst="roundRect">
             <a:avLst>
-              <a:gd name="adj" fmla="val 192308"/>
+              <a:gd name="adj" fmla="val 50000"/>
             </a:avLst>
           </a:prstGeom>
           <a:solidFill>
@@ -41023,7 +41014,7 @@
           </a:xfrm>
           <a:prstGeom prst="roundRect">
             <a:avLst>
-              <a:gd name="adj" fmla="val 192308"/>
+              <a:gd name="adj" fmla="val 50000"/>
             </a:avLst>
           </a:prstGeom>
           <a:solidFill>
@@ -41163,12 +41154,12 @@
         </p:nvSpPr>
         <p:spPr>
           <a:xfrm>
-            <a:off x="365760" y="5623560"/>
-            <a:ext cx="11457432" cy="594360"/>
+            <a:off x="365760" y="5486400"/>
+            <a:ext cx="11457432" cy="777240"/>
           </a:xfrm>
           <a:prstGeom prst="roundRect">
             <a:avLst>
-              <a:gd name="adj" fmla="val 6154"/>
+              <a:gd name="adj" fmla="val 4706"/>
             </a:avLst>
           </a:prstGeom>
           <a:solidFill>
@@ -41192,7 +41183,7 @@
         </p:nvSpPr>
         <p:spPr>
           <a:xfrm>
-            <a:off x="566928" y="5769864"/>
+            <a:off x="566928" y="5632704"/>
             <a:ext cx="11055096" cy="274320"/>
           </a:xfrm>
           <a:prstGeom prst="rect">
@@ -41231,8 +41222,8 @@
         </p:nvSpPr>
         <p:spPr>
           <a:xfrm>
-            <a:off x="566928" y="6099048"/>
-            <a:ext cx="11055096" cy="-9144"/>
+            <a:off x="566928" y="5961888"/>
+            <a:ext cx="11055096" cy="219456"/>
           </a:xfrm>
           <a:prstGeom prst="rect">
             <a:avLst/>

--- a/Planejamento_Integrado_Operacoes_Topside.pptx
+++ b/Planejamento_Integrado_Operacoes_Topside.pptx
@@ -17,6 +17,10 @@
     <p:sldId id="262" r:id="rId8"/>
     <p:sldId id="263" r:id="rId9"/>
     <p:sldId id="265" r:id="rId10"/>
+    <p:sldId id="835" r:id="rId30"/>
+    <p:sldId id="836" r:id="rId31"/>
+    <p:sldId id="837" r:id="rId32"/>
+    <p:sldId id="838" r:id="rId33"/>
     <p:sldId id="269" r:id="rId11"/>
     <p:sldId id="270" r:id="rId12"/>
     <p:sldId id="271" r:id="rId13"/>
@@ -3377,6 +3381,4374 @@
 </file>
 
 <file path=ppt/slides/slide10.xml><?xml version="1.0" encoding="utf-8"?>
+<p:sld xmlns:a="http://schemas.openxmlformats.org/drawingml/2006/main" xmlns:p="http://schemas.openxmlformats.org/presentationml/2006/main" xmlns:r="http://schemas.openxmlformats.org/officeDocument/2006/relationships">
+  <p:cSld>
+    <p:bg>
+      <p:bgPr>
+        <a:solidFill>
+          <a:srgbClr val="FFFFFF"/>
+        </a:solidFill>
+        <a:effectLst/>
+      </p:bgPr>
+    </p:bg>
+    <p:spTree>
+      <p:nvGrpSpPr>
+        <p:cNvPr id="1" name=""/>
+        <p:cNvGrpSpPr/>
+        <p:nvPr/>
+      </p:nvGrpSpPr>
+      <p:grpSpPr/>
+      <p:sp>
+        <p:nvSpPr>
+          <p:cNvPr id="2" name="Rounded Rectangle 1"/>
+          <p:cNvSpPr/>
+          <p:nvPr/>
+        </p:nvSpPr>
+        <p:spPr>
+          <a:xfrm>
+            <a:off x="365760" y="292608"/>
+            <a:ext cx="1371600" cy="384048"/>
+          </a:xfrm>
+          <a:prstGeom prst="roundRect">
+            <a:avLst>
+              <a:gd name="adj" fmla="val 20000"/>
+            </a:avLst>
+          </a:prstGeom>
+          <a:solidFill>
+            <a:srgbClr val="2C2849"/>
+          </a:solidFill>
+          <a:ln>
+            <a:noFill/>
+          </a:ln>
+          <a:effectLst/>
+        </p:spPr>
+        <p:style>
+          <a:lnRef idx="1">
+            <a:schemeClr val="accent1"/>
+          </a:lnRef>
+          <a:fillRef idx="3">
+            <a:schemeClr val="accent1"/>
+          </a:fillRef>
+          <a:effectRef idx="2">
+            <a:schemeClr val="accent1"/>
+          </a:effectRef>
+          <a:fontRef idx="minor">
+            <a:schemeClr val="lt1"/>
+          </a:fontRef>
+        </p:style>
+        <p:txBody>
+          <a:bodyPr rtlCol="0" anchor="ctr"/>
+          <a:lstStyle/>
+          <a:p>
+            <a:pPr algn="ctr"/>
+          </a:p>
+        </p:txBody>
+      </p:sp>
+      <p:pic>
+        <p:nvPicPr>
+          <p:cNvPr id="3" name="Picture 2" descr="image.png"/>
+          <p:cNvPicPr>
+            <a:picLocks noChangeAspect="1"/>
+          </p:cNvPicPr>
+          <p:nvPr/>
+        </p:nvPicPr>
+        <p:blipFill>
+          <a:blip r:embed="rId2"/>
+          <a:stretch>
+            <a:fillRect/>
+          </a:stretch>
+        </p:blipFill>
+        <p:spPr>
+          <a:xfrm>
+            <a:off x="530352" y="402336"/>
+            <a:ext cx="1042415" cy="198424"/>
+          </a:xfrm>
+          <a:prstGeom prst="rect">
+            <a:avLst/>
+          </a:prstGeom>
+        </p:spPr>
+      </p:pic>
+      <p:sp>
+        <p:nvSpPr>
+          <p:cNvPr id="4" name="TextBox 3"/>
+          <p:cNvSpPr txBox="1"/>
+          <p:nvPr/>
+        </p:nvSpPr>
+        <p:spPr>
+          <a:xfrm>
+            <a:off x="365760" y="841248"/>
+            <a:ext cx="10058400" cy="274320"/>
+          </a:xfrm>
+          <a:prstGeom prst="rect">
+            <a:avLst/>
+          </a:prstGeom>
+          <a:noFill/>
+        </p:spPr>
+        <p:txBody>
+          <a:bodyPr wrap="square" anchor="t" lIns="0" rIns="0" tIns="0" bIns="0">
+            <a:spAutoFit/>
+          </a:bodyPr>
+          <a:lstStyle/>
+          <a:p>
+            <a:pPr algn="l">
+              <a:lnSpc>
+                <a:spcPct val="100000"/>
+              </a:lnSpc>
+            </a:pPr>
+            <a:r>
+              <a:rPr sz="1200" b="1" i="0">
+                <a:solidFill>
+                  <a:srgbClr val="F2834B"/>
+                </a:solidFill>
+                <a:latin typeface="Calibri"/>
+              </a:rPr>
+              <a:t>GUIA · PASSO 1 DA PRIORIZAÇÃO</a:t>
+            </a:r>
+          </a:p>
+        </p:txBody>
+      </p:sp>
+      <p:sp>
+        <p:nvSpPr>
+          <p:cNvPr id="5" name="TextBox 4"/>
+          <p:cNvSpPr txBox="1"/>
+          <p:nvPr/>
+        </p:nvSpPr>
+        <p:spPr>
+          <a:xfrm>
+            <a:off x="365760" y="1115568"/>
+            <a:ext cx="11457432" cy="566928"/>
+          </a:xfrm>
+          <a:prstGeom prst="rect">
+            <a:avLst/>
+          </a:prstGeom>
+          <a:noFill/>
+        </p:spPr>
+        <p:txBody>
+          <a:bodyPr wrap="square" anchor="t" lIns="0" rIns="0" tIns="0" bIns="0">
+            <a:spAutoFit/>
+          </a:bodyPr>
+          <a:lstStyle/>
+          <a:p>
+            <a:pPr algn="l">
+              <a:lnSpc>
+                <a:spcPct val="100000"/>
+              </a:lnSpc>
+            </a:pPr>
+            <a:r>
+              <a:rPr sz="2700" b="1" i="0">
+                <a:solidFill>
+                  <a:srgbClr val="2C2849"/>
+                </a:solidFill>
+                <a:latin typeface="Calibri"/>
+              </a:rPr>
+              <a:t>Diretrizes estratégicas de Operações</a:t>
+            </a:r>
+          </a:p>
+        </p:txBody>
+      </p:sp>
+      <p:sp>
+        <p:nvSpPr>
+          <p:cNvPr id="6" name="TextBox 5"/>
+          <p:cNvSpPr txBox="1"/>
+          <p:nvPr/>
+        </p:nvSpPr>
+        <p:spPr>
+          <a:xfrm>
+            <a:off x="365760" y="1700784"/>
+            <a:ext cx="11457432" cy="457200"/>
+          </a:xfrm>
+          <a:prstGeom prst="rect">
+            <a:avLst/>
+          </a:prstGeom>
+          <a:noFill/>
+        </p:spPr>
+        <p:txBody>
+          <a:bodyPr wrap="square" anchor="t" lIns="0" rIns="0" tIns="0" bIns="0">
+            <a:spAutoFit/>
+          </a:bodyPr>
+          <a:lstStyle/>
+          <a:p>
+            <a:pPr algn="l">
+              <a:lnSpc>
+                <a:spcPct val="115000"/>
+              </a:lnSpc>
+            </a:pPr>
+            <a:r>
+              <a:rPr sz="1250" b="0" i="0">
+                <a:solidFill>
+                  <a:srgbClr val="6B6682"/>
+                </a:solidFill>
+                <a:latin typeface="Calibri"/>
+              </a:rPr>
+              <a:t>As 4 diretrizes que orientam todas as frentes estratégicas e, a partir delas, o plano de trabalho.</a:t>
+            </a:r>
+          </a:p>
+        </p:txBody>
+      </p:sp>
+      <p:sp>
+        <p:nvSpPr>
+          <p:cNvPr id="7" name="Rounded Rectangle 6"/>
+          <p:cNvSpPr/>
+          <p:nvPr/>
+        </p:nvSpPr>
+        <p:spPr>
+          <a:xfrm>
+            <a:off x="365760" y="2286000"/>
+            <a:ext cx="5637276" cy="1874519"/>
+          </a:xfrm>
+          <a:prstGeom prst="roundRect">
+            <a:avLst>
+              <a:gd name="adj" fmla="val 4000"/>
+            </a:avLst>
+          </a:prstGeom>
+          <a:solidFill>
+            <a:srgbClr val="FFFFFF"/>
+          </a:solidFill>
+          <a:ln w="12700">
+            <a:solidFill>
+              <a:srgbClr val="E1DDEC"/>
+            </a:solidFill>
+          </a:ln>
+          <a:effectLst/>
+        </p:spPr>
+        <p:style>
+          <a:lnRef idx="1">
+            <a:schemeClr val="accent1"/>
+          </a:lnRef>
+          <a:fillRef idx="3">
+            <a:schemeClr val="accent1"/>
+          </a:fillRef>
+          <a:effectRef idx="2">
+            <a:schemeClr val="accent1"/>
+          </a:effectRef>
+          <a:fontRef idx="minor">
+            <a:schemeClr val="lt1"/>
+          </a:fontRef>
+        </p:style>
+        <p:txBody>
+          <a:bodyPr rtlCol="0" anchor="ctr"/>
+          <a:lstStyle/>
+          <a:p>
+            <a:pPr algn="ctr"/>
+          </a:p>
+        </p:txBody>
+      </p:sp>
+      <p:sp>
+        <p:nvSpPr>
+          <p:cNvPr id="8" name="TextBox 7"/>
+          <p:cNvSpPr txBox="1"/>
+          <p:nvPr/>
+        </p:nvSpPr>
+        <p:spPr>
+          <a:xfrm>
+            <a:off x="548640" y="2432304"/>
+            <a:ext cx="731520" cy="365760"/>
+          </a:xfrm>
+          <a:prstGeom prst="rect">
+            <a:avLst/>
+          </a:prstGeom>
+          <a:noFill/>
+        </p:spPr>
+        <p:txBody>
+          <a:bodyPr wrap="square" anchor="t" lIns="0" rIns="0" tIns="0" bIns="0">
+            <a:spAutoFit/>
+          </a:bodyPr>
+          <a:lstStyle/>
+          <a:p>
+            <a:pPr algn="l">
+              <a:lnSpc>
+                <a:spcPct val="100000"/>
+              </a:lnSpc>
+            </a:pPr>
+            <a:r>
+              <a:rPr sz="2000" b="1" i="0">
+                <a:solidFill>
+                  <a:srgbClr val="F2834B"/>
+                </a:solidFill>
+                <a:latin typeface="Calibri"/>
+              </a:rPr>
+              <a:t>01</a:t>
+            </a:r>
+          </a:p>
+        </p:txBody>
+      </p:sp>
+      <p:sp>
+        <p:nvSpPr>
+          <p:cNvPr id="9" name="TextBox 8"/>
+          <p:cNvSpPr txBox="1"/>
+          <p:nvPr/>
+        </p:nvSpPr>
+        <p:spPr>
+          <a:xfrm>
+            <a:off x="548640" y="2798064"/>
+            <a:ext cx="5271516" cy="365760"/>
+          </a:xfrm>
+          <a:prstGeom prst="rect">
+            <a:avLst/>
+          </a:prstGeom>
+          <a:noFill/>
+        </p:spPr>
+        <p:txBody>
+          <a:bodyPr wrap="square" anchor="t" lIns="0" rIns="0" tIns="0" bIns="0">
+            <a:spAutoFit/>
+          </a:bodyPr>
+          <a:lstStyle/>
+          <a:p>
+            <a:pPr algn="l">
+              <a:lnSpc>
+                <a:spcPct val="100000"/>
+              </a:lnSpc>
+            </a:pPr>
+            <a:r>
+              <a:rPr sz="1400" b="1" i="0">
+                <a:solidFill>
+                  <a:srgbClr val="2C2849"/>
+                </a:solidFill>
+                <a:latin typeface="Calibri"/>
+              </a:rPr>
+              <a:t>Eficiência na Produção de Óleo</a:t>
+            </a:r>
+          </a:p>
+        </p:txBody>
+      </p:sp>
+      <p:sp>
+        <p:nvSpPr>
+          <p:cNvPr id="10" name="TextBox 9"/>
+          <p:cNvSpPr txBox="1"/>
+          <p:nvPr/>
+        </p:nvSpPr>
+        <p:spPr>
+          <a:xfrm>
+            <a:off x="548640" y="3127248"/>
+            <a:ext cx="5271516" cy="868679"/>
+          </a:xfrm>
+          <a:prstGeom prst="rect">
+            <a:avLst/>
+          </a:prstGeom>
+          <a:noFill/>
+        </p:spPr>
+        <p:txBody>
+          <a:bodyPr wrap="square" anchor="t" lIns="0" rIns="0" tIns="0" bIns="0">
+            <a:spAutoFit/>
+          </a:bodyPr>
+          <a:lstStyle/>
+          <a:p>
+            <a:pPr algn="l">
+              <a:lnSpc>
+                <a:spcPct val="120000"/>
+              </a:lnSpc>
+            </a:pPr>
+            <a:r>
+              <a:rPr sz="1050" b="0" i="0">
+                <a:solidFill>
+                  <a:srgbClr val="6B6682"/>
+                </a:solidFill>
+                <a:latin typeface="Calibri"/>
+              </a:rPr>
+              <a:t>Maximizar a produção por meio da acuracidade do planejamento, estabilidade operacional, previsibilidade da produção, execução disciplinada dos projetos e utilização eficiente dos recursos.</a:t>
+            </a:r>
+          </a:p>
+        </p:txBody>
+      </p:sp>
+      <p:sp>
+        <p:nvSpPr>
+          <p:cNvPr id="11" name="Rounded Rectangle 10"/>
+          <p:cNvSpPr/>
+          <p:nvPr/>
+        </p:nvSpPr>
+        <p:spPr>
+          <a:xfrm>
+            <a:off x="6185916" y="2286000"/>
+            <a:ext cx="5637276" cy="1874519"/>
+          </a:xfrm>
+          <a:prstGeom prst="roundRect">
+            <a:avLst>
+              <a:gd name="adj" fmla="val 4000"/>
+            </a:avLst>
+          </a:prstGeom>
+          <a:solidFill>
+            <a:srgbClr val="FFFFFF"/>
+          </a:solidFill>
+          <a:ln w="12700">
+            <a:solidFill>
+              <a:srgbClr val="E1DDEC"/>
+            </a:solidFill>
+          </a:ln>
+          <a:effectLst/>
+        </p:spPr>
+        <p:style>
+          <a:lnRef idx="1">
+            <a:schemeClr val="accent1"/>
+          </a:lnRef>
+          <a:fillRef idx="3">
+            <a:schemeClr val="accent1"/>
+          </a:fillRef>
+          <a:effectRef idx="2">
+            <a:schemeClr val="accent1"/>
+          </a:effectRef>
+          <a:fontRef idx="minor">
+            <a:schemeClr val="lt1"/>
+          </a:fontRef>
+        </p:style>
+        <p:txBody>
+          <a:bodyPr rtlCol="0" anchor="ctr"/>
+          <a:lstStyle/>
+          <a:p>
+            <a:pPr algn="ctr"/>
+          </a:p>
+        </p:txBody>
+      </p:sp>
+      <p:sp>
+        <p:nvSpPr>
+          <p:cNvPr id="12" name="TextBox 11"/>
+          <p:cNvSpPr txBox="1"/>
+          <p:nvPr/>
+        </p:nvSpPr>
+        <p:spPr>
+          <a:xfrm>
+            <a:off x="6368796" y="2432304"/>
+            <a:ext cx="731520" cy="365760"/>
+          </a:xfrm>
+          <a:prstGeom prst="rect">
+            <a:avLst/>
+          </a:prstGeom>
+          <a:noFill/>
+        </p:spPr>
+        <p:txBody>
+          <a:bodyPr wrap="square" anchor="t" lIns="0" rIns="0" tIns="0" bIns="0">
+            <a:spAutoFit/>
+          </a:bodyPr>
+          <a:lstStyle/>
+          <a:p>
+            <a:pPr algn="l">
+              <a:lnSpc>
+                <a:spcPct val="100000"/>
+              </a:lnSpc>
+            </a:pPr>
+            <a:r>
+              <a:rPr sz="2000" b="1" i="0">
+                <a:solidFill>
+                  <a:srgbClr val="F2834B"/>
+                </a:solidFill>
+                <a:latin typeface="Calibri"/>
+              </a:rPr>
+              <a:t>02</a:t>
+            </a:r>
+          </a:p>
+        </p:txBody>
+      </p:sp>
+      <p:sp>
+        <p:nvSpPr>
+          <p:cNvPr id="13" name="TextBox 12"/>
+          <p:cNvSpPr txBox="1"/>
+          <p:nvPr/>
+        </p:nvSpPr>
+        <p:spPr>
+          <a:xfrm>
+            <a:off x="6368796" y="2798064"/>
+            <a:ext cx="5271516" cy="365760"/>
+          </a:xfrm>
+          <a:prstGeom prst="rect">
+            <a:avLst/>
+          </a:prstGeom>
+          <a:noFill/>
+        </p:spPr>
+        <p:txBody>
+          <a:bodyPr wrap="square" anchor="t" lIns="0" rIns="0" tIns="0" bIns="0">
+            <a:spAutoFit/>
+          </a:bodyPr>
+          <a:lstStyle/>
+          <a:p>
+            <a:pPr algn="l">
+              <a:lnSpc>
+                <a:spcPct val="100000"/>
+              </a:lnSpc>
+            </a:pPr>
+            <a:r>
+              <a:rPr sz="1400" b="1" i="0">
+                <a:solidFill>
+                  <a:srgbClr val="2C2849"/>
+                </a:solidFill>
+                <a:latin typeface="Calibri"/>
+              </a:rPr>
+              <a:t>Incremento de Reservas</a:t>
+            </a:r>
+          </a:p>
+        </p:txBody>
+      </p:sp>
+      <p:sp>
+        <p:nvSpPr>
+          <p:cNvPr id="14" name="TextBox 13"/>
+          <p:cNvSpPr txBox="1"/>
+          <p:nvPr/>
+        </p:nvSpPr>
+        <p:spPr>
+          <a:xfrm>
+            <a:off x="6368796" y="3127248"/>
+            <a:ext cx="5271516" cy="868679"/>
+          </a:xfrm>
+          <a:prstGeom prst="rect">
+            <a:avLst/>
+          </a:prstGeom>
+          <a:noFill/>
+        </p:spPr>
+        <p:txBody>
+          <a:bodyPr wrap="square" anchor="t" lIns="0" rIns="0" tIns="0" bIns="0">
+            <a:spAutoFit/>
+          </a:bodyPr>
+          <a:lstStyle/>
+          <a:p>
+            <a:pPr algn="l">
+              <a:lnSpc>
+                <a:spcPct val="120000"/>
+              </a:lnSpc>
+            </a:pPr>
+            <a:r>
+              <a:rPr sz="1050" b="0" i="0">
+                <a:solidFill>
+                  <a:srgbClr val="6B6682"/>
+                </a:solidFill>
+                <a:latin typeface="Calibri"/>
+              </a:rPr>
+              <a:t>Expandir as reservas reduzindo o custo de incorporação, priorizando soluções de maior retorno e ampliando o horizonte produtivo dos ativos.</a:t>
+            </a:r>
+          </a:p>
+        </p:txBody>
+      </p:sp>
+      <p:sp>
+        <p:nvSpPr>
+          <p:cNvPr id="15" name="Rounded Rectangle 14"/>
+          <p:cNvSpPr/>
+          <p:nvPr/>
+        </p:nvSpPr>
+        <p:spPr>
+          <a:xfrm>
+            <a:off x="365760" y="4343400"/>
+            <a:ext cx="5637276" cy="1874519"/>
+          </a:xfrm>
+          <a:prstGeom prst="roundRect">
+            <a:avLst>
+              <a:gd name="adj" fmla="val 4000"/>
+            </a:avLst>
+          </a:prstGeom>
+          <a:solidFill>
+            <a:srgbClr val="FFFFFF"/>
+          </a:solidFill>
+          <a:ln w="12700">
+            <a:solidFill>
+              <a:srgbClr val="E1DDEC"/>
+            </a:solidFill>
+          </a:ln>
+          <a:effectLst/>
+        </p:spPr>
+        <p:style>
+          <a:lnRef idx="1">
+            <a:schemeClr val="accent1"/>
+          </a:lnRef>
+          <a:fillRef idx="3">
+            <a:schemeClr val="accent1"/>
+          </a:fillRef>
+          <a:effectRef idx="2">
+            <a:schemeClr val="accent1"/>
+          </a:effectRef>
+          <a:fontRef idx="minor">
+            <a:schemeClr val="lt1"/>
+          </a:fontRef>
+        </p:style>
+        <p:txBody>
+          <a:bodyPr rtlCol="0" anchor="ctr"/>
+          <a:lstStyle/>
+          <a:p>
+            <a:pPr algn="ctr"/>
+          </a:p>
+        </p:txBody>
+      </p:sp>
+      <p:sp>
+        <p:nvSpPr>
+          <p:cNvPr id="16" name="TextBox 15"/>
+          <p:cNvSpPr txBox="1"/>
+          <p:nvPr/>
+        </p:nvSpPr>
+        <p:spPr>
+          <a:xfrm>
+            <a:off x="548640" y="4489704"/>
+            <a:ext cx="731520" cy="365760"/>
+          </a:xfrm>
+          <a:prstGeom prst="rect">
+            <a:avLst/>
+          </a:prstGeom>
+          <a:noFill/>
+        </p:spPr>
+        <p:txBody>
+          <a:bodyPr wrap="square" anchor="t" lIns="0" rIns="0" tIns="0" bIns="0">
+            <a:spAutoFit/>
+          </a:bodyPr>
+          <a:lstStyle/>
+          <a:p>
+            <a:pPr algn="l">
+              <a:lnSpc>
+                <a:spcPct val="100000"/>
+              </a:lnSpc>
+            </a:pPr>
+            <a:r>
+              <a:rPr sz="2000" b="1" i="0">
+                <a:solidFill>
+                  <a:srgbClr val="F2834B"/>
+                </a:solidFill>
+                <a:latin typeface="Calibri"/>
+              </a:rPr>
+              <a:t>03</a:t>
+            </a:r>
+          </a:p>
+        </p:txBody>
+      </p:sp>
+      <p:sp>
+        <p:nvSpPr>
+          <p:cNvPr id="17" name="TextBox 16"/>
+          <p:cNvSpPr txBox="1"/>
+          <p:nvPr/>
+        </p:nvSpPr>
+        <p:spPr>
+          <a:xfrm>
+            <a:off x="548640" y="4855464"/>
+            <a:ext cx="5271516" cy="365760"/>
+          </a:xfrm>
+          <a:prstGeom prst="rect">
+            <a:avLst/>
+          </a:prstGeom>
+          <a:noFill/>
+        </p:spPr>
+        <p:txBody>
+          <a:bodyPr wrap="square" anchor="t" lIns="0" rIns="0" tIns="0" bIns="0">
+            <a:spAutoFit/>
+          </a:bodyPr>
+          <a:lstStyle/>
+          <a:p>
+            <a:pPr algn="l">
+              <a:lnSpc>
+                <a:spcPct val="100000"/>
+              </a:lnSpc>
+            </a:pPr>
+            <a:r>
+              <a:rPr sz="1400" b="1" i="0">
+                <a:solidFill>
+                  <a:srgbClr val="2C2849"/>
+                </a:solidFill>
+                <a:latin typeface="Calibri"/>
+              </a:rPr>
+              <a:t>Extensão da Vida Útil</a:t>
+            </a:r>
+          </a:p>
+        </p:txBody>
+      </p:sp>
+      <p:sp>
+        <p:nvSpPr>
+          <p:cNvPr id="18" name="TextBox 17"/>
+          <p:cNvSpPr txBox="1"/>
+          <p:nvPr/>
+        </p:nvSpPr>
+        <p:spPr>
+          <a:xfrm>
+            <a:off x="548640" y="5184648"/>
+            <a:ext cx="5271516" cy="868679"/>
+          </a:xfrm>
+          <a:prstGeom prst="rect">
+            <a:avLst/>
+          </a:prstGeom>
+          <a:noFill/>
+        </p:spPr>
+        <p:txBody>
+          <a:bodyPr wrap="square" anchor="t" lIns="0" rIns="0" tIns="0" bIns="0">
+            <a:spAutoFit/>
+          </a:bodyPr>
+          <a:lstStyle/>
+          <a:p>
+            <a:pPr algn="l">
+              <a:lnSpc>
+                <a:spcPct val="120000"/>
+              </a:lnSpc>
+            </a:pPr>
+            <a:r>
+              <a:rPr sz="1050" b="0" i="0">
+                <a:solidFill>
+                  <a:srgbClr val="6B6682"/>
+                </a:solidFill>
+                <a:latin typeface="Calibri"/>
+              </a:rPr>
+              <a:t>Direcionar investimentos, estratégias de manutenção e intervenções com base no ciclo de vida dos ativos, priorizando soluções que ampliem sua vida útil sempre que economicamente justificável.</a:t>
+            </a:r>
+          </a:p>
+        </p:txBody>
+      </p:sp>
+      <p:sp>
+        <p:nvSpPr>
+          <p:cNvPr id="19" name="Rounded Rectangle 18"/>
+          <p:cNvSpPr/>
+          <p:nvPr/>
+        </p:nvSpPr>
+        <p:spPr>
+          <a:xfrm>
+            <a:off x="6185916" y="4343400"/>
+            <a:ext cx="5637276" cy="1874519"/>
+          </a:xfrm>
+          <a:prstGeom prst="roundRect">
+            <a:avLst>
+              <a:gd name="adj" fmla="val 4000"/>
+            </a:avLst>
+          </a:prstGeom>
+          <a:solidFill>
+            <a:srgbClr val="FFFFFF"/>
+          </a:solidFill>
+          <a:ln w="12700">
+            <a:solidFill>
+              <a:srgbClr val="E1DDEC"/>
+            </a:solidFill>
+          </a:ln>
+          <a:effectLst/>
+        </p:spPr>
+        <p:style>
+          <a:lnRef idx="1">
+            <a:schemeClr val="accent1"/>
+          </a:lnRef>
+          <a:fillRef idx="3">
+            <a:schemeClr val="accent1"/>
+          </a:fillRef>
+          <a:effectRef idx="2">
+            <a:schemeClr val="accent1"/>
+          </a:effectRef>
+          <a:fontRef idx="minor">
+            <a:schemeClr val="lt1"/>
+          </a:fontRef>
+        </p:style>
+        <p:txBody>
+          <a:bodyPr rtlCol="0" anchor="ctr"/>
+          <a:lstStyle/>
+          <a:p>
+            <a:pPr algn="ctr"/>
+          </a:p>
+        </p:txBody>
+      </p:sp>
+      <p:sp>
+        <p:nvSpPr>
+          <p:cNvPr id="20" name="TextBox 19"/>
+          <p:cNvSpPr txBox="1"/>
+          <p:nvPr/>
+        </p:nvSpPr>
+        <p:spPr>
+          <a:xfrm>
+            <a:off x="6368796" y="4489704"/>
+            <a:ext cx="731520" cy="365760"/>
+          </a:xfrm>
+          <a:prstGeom prst="rect">
+            <a:avLst/>
+          </a:prstGeom>
+          <a:noFill/>
+        </p:spPr>
+        <p:txBody>
+          <a:bodyPr wrap="square" anchor="t" lIns="0" rIns="0" tIns="0" bIns="0">
+            <a:spAutoFit/>
+          </a:bodyPr>
+          <a:lstStyle/>
+          <a:p>
+            <a:pPr algn="l">
+              <a:lnSpc>
+                <a:spcPct val="100000"/>
+              </a:lnSpc>
+            </a:pPr>
+            <a:r>
+              <a:rPr sz="2000" b="1" i="0">
+                <a:solidFill>
+                  <a:srgbClr val="F2834B"/>
+                </a:solidFill>
+                <a:latin typeface="Calibri"/>
+              </a:rPr>
+              <a:t>04</a:t>
+            </a:r>
+          </a:p>
+        </p:txBody>
+      </p:sp>
+      <p:sp>
+        <p:nvSpPr>
+          <p:cNvPr id="21" name="TextBox 20"/>
+          <p:cNvSpPr txBox="1"/>
+          <p:nvPr/>
+        </p:nvSpPr>
+        <p:spPr>
+          <a:xfrm>
+            <a:off x="6368796" y="4855464"/>
+            <a:ext cx="5271516" cy="365760"/>
+          </a:xfrm>
+          <a:prstGeom prst="rect">
+            <a:avLst/>
+          </a:prstGeom>
+          <a:noFill/>
+        </p:spPr>
+        <p:txBody>
+          <a:bodyPr wrap="square" anchor="t" lIns="0" rIns="0" tIns="0" bIns="0">
+            <a:spAutoFit/>
+          </a:bodyPr>
+          <a:lstStyle/>
+          <a:p>
+            <a:pPr algn="l">
+              <a:lnSpc>
+                <a:spcPct val="100000"/>
+              </a:lnSpc>
+            </a:pPr>
+            <a:r>
+              <a:rPr sz="1400" b="1" i="0">
+                <a:solidFill>
+                  <a:srgbClr val="2C2849"/>
+                </a:solidFill>
+                <a:latin typeface="Calibri"/>
+              </a:rPr>
+              <a:t>Controle dos Riscos Operacionais</a:t>
+            </a:r>
+          </a:p>
+        </p:txBody>
+      </p:sp>
+      <p:sp>
+        <p:nvSpPr>
+          <p:cNvPr id="22" name="TextBox 21"/>
+          <p:cNvSpPr txBox="1"/>
+          <p:nvPr/>
+        </p:nvSpPr>
+        <p:spPr>
+          <a:xfrm>
+            <a:off x="6368796" y="5184648"/>
+            <a:ext cx="5271516" cy="868679"/>
+          </a:xfrm>
+          <a:prstGeom prst="rect">
+            <a:avLst/>
+          </a:prstGeom>
+          <a:noFill/>
+        </p:spPr>
+        <p:txBody>
+          <a:bodyPr wrap="square" anchor="t" lIns="0" rIns="0" tIns="0" bIns="0">
+            <a:spAutoFit/>
+          </a:bodyPr>
+          <a:lstStyle/>
+          <a:p>
+            <a:pPr algn="l">
+              <a:lnSpc>
+                <a:spcPct val="120000"/>
+              </a:lnSpc>
+            </a:pPr>
+            <a:r>
+              <a:rPr sz="1050" b="0" i="0">
+                <a:solidFill>
+                  <a:srgbClr val="6B6682"/>
+                </a:solidFill>
+                <a:latin typeface="Calibri"/>
+              </a:rPr>
+              <a:t>Manter a operação dentro de níveis aceitáveis de risco, preservando pessoas, meio ambiente, integridade dos ativos e conformidade regulatória.</a:t>
+            </a:r>
+          </a:p>
+        </p:txBody>
+      </p:sp>
+      <p:sp>
+        <p:nvSpPr>
+          <p:cNvPr id="23" name="TextBox 22"/>
+          <p:cNvSpPr txBox="1"/>
+          <p:nvPr/>
+        </p:nvSpPr>
+        <p:spPr>
+          <a:xfrm>
+            <a:off x="11338560" y="6547104"/>
+            <a:ext cx="457200" cy="256032"/>
+          </a:xfrm>
+          <a:prstGeom prst="rect">
+            <a:avLst/>
+          </a:prstGeom>
+          <a:noFill/>
+        </p:spPr>
+        <p:txBody>
+          <a:bodyPr wrap="square" anchor="ctr" lIns="0" rIns="0" tIns="0" bIns="0">
+            <a:spAutoFit/>
+          </a:bodyPr>
+          <a:lstStyle/>
+          <a:p>
+            <a:pPr algn="r">
+              <a:lnSpc>
+                <a:spcPct val="100000"/>
+              </a:lnSpc>
+            </a:pPr>
+            <a:r>
+              <a:rPr sz="850" b="0" i="0">
+                <a:solidFill>
+                  <a:srgbClr val="6B6682"/>
+                </a:solidFill>
+                <a:latin typeface="Calibri"/>
+              </a:rPr>
+              <a:t>9</a:t>
+            </a:r>
+          </a:p>
+        </p:txBody>
+      </p:sp>
+    </p:spTree>
+  </p:cSld>
+  <p:clrMapOvr>
+    <a:masterClrMapping/>
+  </p:clrMapOvr>
+</p:sld>
+</file>
+
+<file path=ppt/slides/slide11.xml><?xml version="1.0" encoding="utf-8"?>
+<p:sld xmlns:a="http://schemas.openxmlformats.org/drawingml/2006/main" xmlns:p="http://schemas.openxmlformats.org/presentationml/2006/main" xmlns:r="http://schemas.openxmlformats.org/officeDocument/2006/relationships">
+  <p:cSld>
+    <p:bg>
+      <p:bgPr>
+        <a:solidFill>
+          <a:srgbClr val="FFFFFF"/>
+        </a:solidFill>
+        <a:effectLst/>
+      </p:bgPr>
+    </p:bg>
+    <p:spTree>
+      <p:nvGrpSpPr>
+        <p:cNvPr id="1" name=""/>
+        <p:cNvGrpSpPr/>
+        <p:nvPr/>
+      </p:nvGrpSpPr>
+      <p:grpSpPr/>
+      <p:sp>
+        <p:nvSpPr>
+          <p:cNvPr id="2" name="Rounded Rectangle 1"/>
+          <p:cNvSpPr/>
+          <p:nvPr/>
+        </p:nvSpPr>
+        <p:spPr>
+          <a:xfrm>
+            <a:off x="365760" y="292608"/>
+            <a:ext cx="1371600" cy="384048"/>
+          </a:xfrm>
+          <a:prstGeom prst="roundRect">
+            <a:avLst>
+              <a:gd name="adj" fmla="val 20000"/>
+            </a:avLst>
+          </a:prstGeom>
+          <a:solidFill>
+            <a:srgbClr val="2C2849"/>
+          </a:solidFill>
+          <a:ln>
+            <a:noFill/>
+          </a:ln>
+          <a:effectLst/>
+        </p:spPr>
+        <p:style>
+          <a:lnRef idx="1">
+            <a:schemeClr val="accent1"/>
+          </a:lnRef>
+          <a:fillRef idx="3">
+            <a:schemeClr val="accent1"/>
+          </a:fillRef>
+          <a:effectRef idx="2">
+            <a:schemeClr val="accent1"/>
+          </a:effectRef>
+          <a:fontRef idx="minor">
+            <a:schemeClr val="lt1"/>
+          </a:fontRef>
+        </p:style>
+        <p:txBody>
+          <a:bodyPr rtlCol="0" anchor="ctr"/>
+          <a:lstStyle/>
+          <a:p>
+            <a:pPr algn="ctr"/>
+          </a:p>
+        </p:txBody>
+      </p:sp>
+      <p:pic>
+        <p:nvPicPr>
+          <p:cNvPr id="3" name="Picture 2" descr="image.png"/>
+          <p:cNvPicPr>
+            <a:picLocks noChangeAspect="1"/>
+          </p:cNvPicPr>
+          <p:nvPr/>
+        </p:nvPicPr>
+        <p:blipFill>
+          <a:blip r:embed="rId2"/>
+          <a:stretch>
+            <a:fillRect/>
+          </a:stretch>
+        </p:blipFill>
+        <p:spPr>
+          <a:xfrm>
+            <a:off x="530352" y="402336"/>
+            <a:ext cx="1042415" cy="198424"/>
+          </a:xfrm>
+          <a:prstGeom prst="rect">
+            <a:avLst/>
+          </a:prstGeom>
+        </p:spPr>
+      </p:pic>
+      <p:sp>
+        <p:nvSpPr>
+          <p:cNvPr id="4" name="TextBox 3"/>
+          <p:cNvSpPr txBox="1"/>
+          <p:nvPr/>
+        </p:nvSpPr>
+        <p:spPr>
+          <a:xfrm>
+            <a:off x="365760" y="841248"/>
+            <a:ext cx="10058400" cy="274320"/>
+          </a:xfrm>
+          <a:prstGeom prst="rect">
+            <a:avLst/>
+          </a:prstGeom>
+          <a:noFill/>
+        </p:spPr>
+        <p:txBody>
+          <a:bodyPr wrap="square" anchor="t" lIns="0" rIns="0" tIns="0" bIns="0">
+            <a:spAutoFit/>
+          </a:bodyPr>
+          <a:lstStyle/>
+          <a:p>
+            <a:pPr algn="l">
+              <a:lnSpc>
+                <a:spcPct val="100000"/>
+              </a:lnSpc>
+            </a:pPr>
+            <a:r>
+              <a:rPr sz="1200" b="1" i="0">
+                <a:solidFill>
+                  <a:srgbClr val="F2834B"/>
+                </a:solidFill>
+                <a:latin typeface="Calibri"/>
+              </a:rPr>
+              <a:t>GUIA · PASSO 1 DA PRIORIZAÇÃO</a:t>
+            </a:r>
+          </a:p>
+        </p:txBody>
+      </p:sp>
+      <p:sp>
+        <p:nvSpPr>
+          <p:cNvPr id="5" name="TextBox 4"/>
+          <p:cNvSpPr txBox="1"/>
+          <p:nvPr/>
+        </p:nvSpPr>
+        <p:spPr>
+          <a:xfrm>
+            <a:off x="365760" y="1115568"/>
+            <a:ext cx="11457432" cy="566928"/>
+          </a:xfrm>
+          <a:prstGeom prst="rect">
+            <a:avLst/>
+          </a:prstGeom>
+          <a:noFill/>
+        </p:spPr>
+        <p:txBody>
+          <a:bodyPr wrap="square" anchor="t" lIns="0" rIns="0" tIns="0" bIns="0">
+            <a:spAutoFit/>
+          </a:bodyPr>
+          <a:lstStyle/>
+          <a:p>
+            <a:pPr algn="l">
+              <a:lnSpc>
+                <a:spcPct val="100000"/>
+              </a:lnSpc>
+            </a:pPr>
+            <a:r>
+              <a:rPr sz="2700" b="1" i="0">
+                <a:solidFill>
+                  <a:srgbClr val="2C2849"/>
+                </a:solidFill>
+                <a:latin typeface="Calibri"/>
+              </a:rPr>
+              <a:t>5 frentes estratégicas (FB1–FB5)</a:t>
+            </a:r>
+          </a:p>
+        </p:txBody>
+      </p:sp>
+      <p:sp>
+        <p:nvSpPr>
+          <p:cNvPr id="6" name="TextBox 5"/>
+          <p:cNvSpPr txBox="1"/>
+          <p:nvPr/>
+        </p:nvSpPr>
+        <p:spPr>
+          <a:xfrm>
+            <a:off x="365760" y="1700784"/>
+            <a:ext cx="11457432" cy="457200"/>
+          </a:xfrm>
+          <a:prstGeom prst="rect">
+            <a:avLst/>
+          </a:prstGeom>
+          <a:noFill/>
+        </p:spPr>
+        <p:txBody>
+          <a:bodyPr wrap="square" anchor="t" lIns="0" rIns="0" tIns="0" bIns="0">
+            <a:spAutoFit/>
+          </a:bodyPr>
+          <a:lstStyle/>
+          <a:p>
+            <a:pPr algn="l">
+              <a:lnSpc>
+                <a:spcPct val="115000"/>
+              </a:lnSpc>
+            </a:pPr>
+            <a:r>
+              <a:rPr sz="1250" b="0" i="0">
+                <a:solidFill>
+                  <a:srgbClr val="6B6682"/>
+                </a:solidFill>
+                <a:latin typeface="Calibri"/>
+              </a:rPr>
+              <a:t>Cada frente vinculada a uma diretriz, com indicadores de evolução da condição do ativo assumidos no workshop de Performance.</a:t>
+            </a:r>
+          </a:p>
+        </p:txBody>
+      </p:sp>
+      <p:sp>
+        <p:nvSpPr>
+          <p:cNvPr id="7" name="Rounded Rectangle 6"/>
+          <p:cNvSpPr/>
+          <p:nvPr/>
+        </p:nvSpPr>
+        <p:spPr>
+          <a:xfrm>
+            <a:off x="365760" y="2286000"/>
+            <a:ext cx="548640" cy="237744"/>
+          </a:xfrm>
+          <a:prstGeom prst="roundRect">
+            <a:avLst>
+              <a:gd name="adj" fmla="val 50000"/>
+            </a:avLst>
+          </a:prstGeom>
+          <a:solidFill>
+            <a:srgbClr val="85E34D"/>
+          </a:solidFill>
+          <a:ln>
+            <a:noFill/>
+          </a:ln>
+          <a:effectLst/>
+        </p:spPr>
+        <p:style>
+          <a:lnRef idx="1">
+            <a:schemeClr val="accent1"/>
+          </a:lnRef>
+          <a:fillRef idx="3">
+            <a:schemeClr val="accent1"/>
+          </a:fillRef>
+          <a:effectRef idx="2">
+            <a:schemeClr val="accent1"/>
+          </a:effectRef>
+          <a:fontRef idx="minor">
+            <a:schemeClr val="lt1"/>
+          </a:fontRef>
+        </p:style>
+        <p:txBody>
+          <a:bodyPr rtlCol="0" anchor="ctr" lIns="50800" rIns="50800" tIns="0" bIns="0"/>
+          <a:lstStyle/>
+          <a:p>
+            <a:pPr algn="ctr"/>
+            <a:r>
+              <a:rPr sz="850" b="1">
+                <a:solidFill>
+                  <a:srgbClr val="2C2849"/>
+                </a:solidFill>
+                <a:latin typeface="Calibri"/>
+              </a:rPr>
+              <a:t>FB1</a:t>
+            </a:r>
+          </a:p>
+        </p:txBody>
+      </p:sp>
+      <p:sp>
+        <p:nvSpPr>
+          <p:cNvPr id="8" name="TextBox 7"/>
+          <p:cNvSpPr txBox="1"/>
+          <p:nvPr/>
+        </p:nvSpPr>
+        <p:spPr>
+          <a:xfrm>
+            <a:off x="1005840" y="2286000"/>
+            <a:ext cx="5486400" cy="274320"/>
+          </a:xfrm>
+          <a:prstGeom prst="rect">
+            <a:avLst/>
+          </a:prstGeom>
+          <a:noFill/>
+        </p:spPr>
+        <p:txBody>
+          <a:bodyPr wrap="square" anchor="ctr" lIns="0" rIns="0" tIns="0" bIns="0">
+            <a:spAutoFit/>
+          </a:bodyPr>
+          <a:lstStyle/>
+          <a:p>
+            <a:pPr algn="l">
+              <a:lnSpc>
+                <a:spcPct val="100000"/>
+              </a:lnSpc>
+            </a:pPr>
+            <a:r>
+              <a:rPr sz="1500" b="1" i="0">
+                <a:solidFill>
+                  <a:srgbClr val="2C2849"/>
+                </a:solidFill>
+                <a:latin typeface="Calibri"/>
+              </a:rPr>
+              <a:t>Segurança e Conformidade Regulatória</a:t>
+            </a:r>
+          </a:p>
+        </p:txBody>
+      </p:sp>
+      <p:sp>
+        <p:nvSpPr>
+          <p:cNvPr id="9" name="Rounded Rectangle 8"/>
+          <p:cNvSpPr/>
+          <p:nvPr/>
+        </p:nvSpPr>
+        <p:spPr>
+          <a:xfrm>
+            <a:off x="6949440" y="2295144"/>
+            <a:ext cx="4206240" cy="237744"/>
+          </a:xfrm>
+          <a:prstGeom prst="roundRect">
+            <a:avLst>
+              <a:gd name="adj" fmla="val 50000"/>
+            </a:avLst>
+          </a:prstGeom>
+          <a:solidFill>
+            <a:srgbClr val="9787D4"/>
+          </a:solidFill>
+          <a:ln>
+            <a:noFill/>
+          </a:ln>
+          <a:effectLst/>
+        </p:spPr>
+        <p:style>
+          <a:lnRef idx="1">
+            <a:schemeClr val="accent1"/>
+          </a:lnRef>
+          <a:fillRef idx="3">
+            <a:schemeClr val="accent1"/>
+          </a:fillRef>
+          <a:effectRef idx="2">
+            <a:schemeClr val="accent1"/>
+          </a:effectRef>
+          <a:fontRef idx="minor">
+            <a:schemeClr val="lt1"/>
+          </a:fontRef>
+        </p:style>
+        <p:txBody>
+          <a:bodyPr rtlCol="0" anchor="ctr" lIns="50800" rIns="50800" tIns="0" bIns="0"/>
+          <a:lstStyle/>
+          <a:p>
+            <a:pPr algn="ctr"/>
+            <a:r>
+              <a:rPr sz="850" b="1">
+                <a:solidFill>
+                  <a:srgbClr val="2C2849"/>
+                </a:solidFill>
+                <a:latin typeface="Calibri"/>
+              </a:rPr>
+              <a:t>Diretriz 04 · Controle dos Riscos Operacionais</a:t>
+            </a:r>
+          </a:p>
+        </p:txBody>
+      </p:sp>
+      <p:sp>
+        <p:nvSpPr>
+          <p:cNvPr id="10" name="TextBox 9"/>
+          <p:cNvSpPr txBox="1"/>
+          <p:nvPr/>
+        </p:nvSpPr>
+        <p:spPr>
+          <a:xfrm>
+            <a:off x="365760" y="2670048"/>
+            <a:ext cx="11457432" cy="1005840"/>
+          </a:xfrm>
+          <a:prstGeom prst="rect">
+            <a:avLst/>
+          </a:prstGeom>
+          <a:noFill/>
+        </p:spPr>
+        <p:txBody>
+          <a:bodyPr wrap="square" anchor="t" lIns="0" rIns="0" tIns="0" bIns="0">
+            <a:spAutoFit/>
+          </a:bodyPr>
+          <a:lstStyle/>
+          <a:p>
+            <a:pPr algn="l">
+              <a:lnSpc>
+                <a:spcPct val="125000"/>
+              </a:lnSpc>
+            </a:pPr>
+            <a:r>
+              <a:rPr sz="1100" b="0" i="0">
+                <a:solidFill>
+                  <a:srgbClr val="6B6682"/>
+                </a:solidFill>
+                <a:latin typeface="Calibri"/>
+              </a:rPr>
+              <a:t>Reduzir de forma material os principais riscos de segurança, integridade e áreas classificadas, mantendo estudos de risco atualizados, barreiras críticas eficazes e planos de recuperação para todas as exposições relevantes. Assegurar conformidade contínua com ANP, classe e demais autoridades, tratando desvios por severidade, antecipando certificações e eliminando recorrências.</a:t>
+            </a:r>
+          </a:p>
+        </p:txBody>
+      </p:sp>
+      <p:graphicFrame>
+        <p:nvGraphicFramePr>
+          <p:cNvPr id="11" name="Table 10"/>
+          <p:cNvGraphicFramePr>
+            <a:graphicFrameLocks noGrp="1"/>
+          </p:cNvGraphicFramePr>
+          <p:nvPr/>
+        </p:nvGraphicFramePr>
+        <p:xfrm>
+          <a:off x="365760" y="3794760"/>
+          <a:ext cx="11457429" cy="2011680"/>
+        </p:xfrm>
+        <a:graphic>
+          <a:graphicData uri="http://schemas.openxmlformats.org/drawingml/2006/table">
+            <a:tbl>
+              <a:tblPr firstRow="1" bandRow="1">
+                <a:tableStyleId>{5C22544A-7EE6-4342-B048-85BDC9FD1C3A}</a:tableStyleId>
+              </a:tblPr>
+              <a:tblGrid>
+                <a:gridCol w="4764476"/>
+                <a:gridCol w="2949437"/>
+                <a:gridCol w="1474718"/>
+                <a:gridCol w="2268798"/>
+              </a:tblGrid>
+              <a:tr h="402336">
+                <a:tc>
+                  <a:txBody>
+                    <a:bodyPr/>
+                    <a:lstStyle/>
+                    <a:p>
+                      <a:r>
+                        <a:rPr b="1" sz="900">
+                          <a:solidFill>
+                            <a:srgbClr val="FFFFFF"/>
+                          </a:solidFill>
+                          <a:latin typeface="Calibri"/>
+                        </a:rPr>
+                        <a:t>Indicador</a:t>
+                      </a:r>
+                    </a:p>
+                  </a:txBody>
+                  <a:tcPr marL="76200" marR="76200" marT="25400" marB="25400" anchor="ctr">
+                    <a:solidFill>
+                      <a:srgbClr val="9787D4"/>
+                    </a:solidFill>
+                  </a:tcPr>
+                </a:tc>
+                <a:tc>
+                  <a:txBody>
+                    <a:bodyPr/>
+                    <a:lstStyle/>
+                    <a:p>
+                      <a:r>
+                        <a:rPr b="1" sz="900">
+                          <a:solidFill>
+                            <a:srgbClr val="FFFFFF"/>
+                          </a:solidFill>
+                          <a:latin typeface="Calibri"/>
+                        </a:rPr>
+                        <a:t>Fonte</a:t>
+                      </a:r>
+                    </a:p>
+                  </a:txBody>
+                  <a:tcPr marL="76200" marR="76200" marT="25400" marB="25400" anchor="ctr">
+                    <a:solidFill>
+                      <a:srgbClr val="9787D4"/>
+                    </a:solidFill>
+                  </a:tcPr>
+                </a:tc>
+                <a:tc>
+                  <a:txBody>
+                    <a:bodyPr/>
+                    <a:lstStyle/>
+                    <a:p>
+                      <a:r>
+                        <a:rPr b="1" sz="900">
+                          <a:solidFill>
+                            <a:srgbClr val="FFFFFF"/>
+                          </a:solidFill>
+                          <a:latin typeface="Calibri"/>
+                        </a:rPr>
+                        <a:t>Hoje</a:t>
+                      </a:r>
+                    </a:p>
+                  </a:txBody>
+                  <a:tcPr marL="76200" marR="76200" marT="25400" marB="25400" anchor="ctr">
+                    <a:solidFill>
+                      <a:srgbClr val="9787D4"/>
+                    </a:solidFill>
+                  </a:tcPr>
+                </a:tc>
+                <a:tc>
+                  <a:txBody>
+                    <a:bodyPr/>
+                    <a:lstStyle/>
+                    <a:p>
+                      <a:r>
+                        <a:rPr b="1" sz="900">
+                          <a:solidFill>
+                            <a:srgbClr val="FFFFFF"/>
+                          </a:solidFill>
+                          <a:latin typeface="Calibri"/>
+                        </a:rPr>
+                        <a:t>Meta 2027</a:t>
+                      </a:r>
+                    </a:p>
+                  </a:txBody>
+                  <a:tcPr marL="76200" marR="76200" marT="25400" marB="25400" anchor="ctr">
+                    <a:solidFill>
+                      <a:srgbClr val="9787D4"/>
+                    </a:solidFill>
+                  </a:tcPr>
+                </a:tc>
+              </a:tr>
+              <a:tr h="402336">
+                <a:tc>
+                  <a:txBody>
+                    <a:bodyPr/>
+                    <a:lstStyle/>
+                    <a:p>
+                      <a:r>
+                        <a:rPr sz="900">
+                          <a:solidFill>
+                            <a:srgbClr val="6B6682"/>
+                          </a:solidFill>
+                          <a:latin typeface="Calibri"/>
+                        </a:rPr>
+                        <a:t>Ranking GRIS da frota</a:t>
+                      </a:r>
+                    </a:p>
+                  </a:txBody>
+                  <a:tcPr marL="76200" marR="76200" marT="25400" marB="25400" anchor="ctr">
+                    <a:solidFill>
+                      <a:srgbClr val="FFFFFF"/>
+                    </a:solidFill>
+                  </a:tcPr>
+                </a:tc>
+                <a:tc>
+                  <a:txBody>
+                    <a:bodyPr/>
+                    <a:lstStyle/>
+                    <a:p>
+                      <a:r>
+                        <a:rPr sz="900">
+                          <a:solidFill>
+                            <a:srgbClr val="6B6682"/>
+                          </a:solidFill>
+                          <a:latin typeface="Calibri"/>
+                        </a:rPr>
+                        <a:t>GRIS</a:t>
+                      </a:r>
+                    </a:p>
+                  </a:txBody>
+                  <a:tcPr marL="76200" marR="76200" marT="25400" marB="25400" anchor="ctr">
+                    <a:solidFill>
+                      <a:srgbClr val="FFFFFF"/>
+                    </a:solidFill>
+                  </a:tcPr>
+                </a:tc>
+                <a:tc>
+                  <a:txBody>
+                    <a:bodyPr/>
+                    <a:lstStyle/>
+                    <a:p>
+                      <a:r>
+                        <a:rPr sz="900">
+                          <a:solidFill>
+                            <a:srgbClr val="6B6682"/>
+                          </a:solidFill>
+                          <a:latin typeface="Calibri"/>
+                        </a:rPr>
+                        <a:t>—</a:t>
+                      </a:r>
+                    </a:p>
+                  </a:txBody>
+                  <a:tcPr marL="76200" marR="76200" marT="25400" marB="25400" anchor="ctr">
+                    <a:solidFill>
+                      <a:srgbClr val="FFFFFF"/>
+                    </a:solidFill>
+                  </a:tcPr>
+                </a:tc>
+                <a:tc>
+                  <a:txBody>
+                    <a:bodyPr/>
+                    <a:lstStyle/>
+                    <a:p>
+                      <a:r>
+                        <a:rPr sz="900">
+                          <a:solidFill>
+                            <a:srgbClr val="6B6682"/>
+                          </a:solidFill>
+                          <a:latin typeface="Calibri"/>
+                        </a:rPr>
+                        <a:t>sem meta numérica</a:t>
+                      </a:r>
+                    </a:p>
+                  </a:txBody>
+                  <a:tcPr marL="76200" marR="76200" marT="25400" marB="25400" anchor="ctr">
+                    <a:solidFill>
+                      <a:srgbClr val="FFFFFF"/>
+                    </a:solidFill>
+                  </a:tcPr>
+                </a:tc>
+              </a:tr>
+              <a:tr h="402336">
+                <a:tc>
+                  <a:txBody>
+                    <a:bodyPr/>
+                    <a:lstStyle/>
+                    <a:p>
+                      <a:r>
+                        <a:rPr sz="900">
+                          <a:solidFill>
+                            <a:srgbClr val="6B6682"/>
+                          </a:solidFill>
+                          <a:latin typeface="Calibri"/>
+                        </a:rPr>
+                        <a:t>IARI Integridade Mecânica M5</a:t>
+                      </a:r>
+                    </a:p>
+                  </a:txBody>
+                  <a:tcPr marL="76200" marR="76200" marT="25400" marB="25400" anchor="ctr">
+                    <a:solidFill>
+                      <a:srgbClr val="F8F7F6"/>
+                    </a:solidFill>
+                  </a:tcPr>
+                </a:tc>
+                <a:tc>
+                  <a:txBody>
+                    <a:bodyPr/>
+                    <a:lstStyle/>
+                    <a:p>
+                      <a:r>
+                        <a:rPr sz="900">
+                          <a:solidFill>
+                            <a:srgbClr val="6B6682"/>
+                          </a:solidFill>
+                          <a:latin typeface="Calibri"/>
+                        </a:rPr>
+                        <a:t>SGI</a:t>
+                      </a:r>
+                    </a:p>
+                  </a:txBody>
+                  <a:tcPr marL="76200" marR="76200" marT="25400" marB="25400" anchor="ctr">
+                    <a:solidFill>
+                      <a:srgbClr val="F8F7F6"/>
+                    </a:solidFill>
+                  </a:tcPr>
+                </a:tc>
+                <a:tc>
+                  <a:txBody>
+                    <a:bodyPr/>
+                    <a:lstStyle/>
+                    <a:p>
+                      <a:r>
+                        <a:rPr sz="900">
+                          <a:solidFill>
+                            <a:srgbClr val="6B6682"/>
+                          </a:solidFill>
+                          <a:latin typeface="Calibri"/>
+                        </a:rPr>
+                        <a:t>—</a:t>
+                      </a:r>
+                    </a:p>
+                  </a:txBody>
+                  <a:tcPr marL="76200" marR="76200" marT="25400" marB="25400" anchor="ctr">
+                    <a:solidFill>
+                      <a:srgbClr val="F8F7F6"/>
+                    </a:solidFill>
+                  </a:tcPr>
+                </a:tc>
+                <a:tc>
+                  <a:txBody>
+                    <a:bodyPr/>
+                    <a:lstStyle/>
+                    <a:p>
+                      <a:r>
+                        <a:rPr sz="900">
+                          <a:solidFill>
+                            <a:srgbClr val="6B6682"/>
+                          </a:solidFill>
+                          <a:latin typeface="Calibri"/>
+                        </a:rPr>
+                        <a:t>sem meta numérica</a:t>
+                      </a:r>
+                    </a:p>
+                  </a:txBody>
+                  <a:tcPr marL="76200" marR="76200" marT="25400" marB="25400" anchor="ctr">
+                    <a:solidFill>
+                      <a:srgbClr val="F8F7F6"/>
+                    </a:solidFill>
+                  </a:tcPr>
+                </a:tc>
+              </a:tr>
+              <a:tr h="402336">
+                <a:tc>
+                  <a:txBody>
+                    <a:bodyPr/>
+                    <a:lstStyle/>
+                    <a:p>
+                      <a:r>
+                        <a:rPr sz="900">
+                          <a:solidFill>
+                            <a:srgbClr val="6B6682"/>
+                          </a:solidFill>
+                          <a:latin typeface="Calibri"/>
+                        </a:rPr>
+                        <a:t>IARI Regulatório M3</a:t>
+                      </a:r>
+                    </a:p>
+                  </a:txBody>
+                  <a:tcPr marL="76200" marR="76200" marT="25400" marB="25400" anchor="ctr">
+                    <a:solidFill>
+                      <a:srgbClr val="FFFFFF"/>
+                    </a:solidFill>
+                  </a:tcPr>
+                </a:tc>
+                <a:tc>
+                  <a:txBody>
+                    <a:bodyPr/>
+                    <a:lstStyle/>
+                    <a:p>
+                      <a:r>
+                        <a:rPr sz="900">
+                          <a:solidFill>
+                            <a:srgbClr val="6B6682"/>
+                          </a:solidFill>
+                          <a:latin typeface="Calibri"/>
+                        </a:rPr>
+                        <a:t>SAP PM</a:t>
+                      </a:r>
+                    </a:p>
+                  </a:txBody>
+                  <a:tcPr marL="76200" marR="76200" marT="25400" marB="25400" anchor="ctr">
+                    <a:solidFill>
+                      <a:srgbClr val="FFFFFF"/>
+                    </a:solidFill>
+                  </a:tcPr>
+                </a:tc>
+                <a:tc>
+                  <a:txBody>
+                    <a:bodyPr/>
+                    <a:lstStyle/>
+                    <a:p>
+                      <a:r>
+                        <a:rPr sz="900">
+                          <a:solidFill>
+                            <a:srgbClr val="6B6682"/>
+                          </a:solidFill>
+                          <a:latin typeface="Calibri"/>
+                        </a:rPr>
+                        <a:t>—</a:t>
+                      </a:r>
+                    </a:p>
+                  </a:txBody>
+                  <a:tcPr marL="76200" marR="76200" marT="25400" marB="25400" anchor="ctr">
+                    <a:solidFill>
+                      <a:srgbClr val="FFFFFF"/>
+                    </a:solidFill>
+                  </a:tcPr>
+                </a:tc>
+                <a:tc>
+                  <a:txBody>
+                    <a:bodyPr/>
+                    <a:lstStyle/>
+                    <a:p>
+                      <a:r>
+                        <a:rPr sz="900">
+                          <a:solidFill>
+                            <a:srgbClr val="6B6682"/>
+                          </a:solidFill>
+                          <a:latin typeface="Calibri"/>
+                        </a:rPr>
+                        <a:t>sem meta numérica</a:t>
+                      </a:r>
+                    </a:p>
+                  </a:txBody>
+                  <a:tcPr marL="76200" marR="76200" marT="25400" marB="25400" anchor="ctr">
+                    <a:solidFill>
+                      <a:srgbClr val="FFFFFF"/>
+                    </a:solidFill>
+                  </a:tcPr>
+                </a:tc>
+              </a:tr>
+              <a:tr h="402336">
+                <a:tc>
+                  <a:txBody>
+                    <a:bodyPr/>
+                    <a:lstStyle/>
+                    <a:p>
+                      <a:r>
+                        <a:rPr sz="900">
+                          <a:solidFill>
+                            <a:srgbClr val="6B6682"/>
+                          </a:solidFill>
+                          <a:latin typeface="Calibri"/>
+                        </a:rPr>
+                        <a:t>Índice de Atendimento de Recomendação de Incidentes</a:t>
+                      </a:r>
+                    </a:p>
+                  </a:txBody>
+                  <a:tcPr marL="76200" marR="76200" marT="25400" marB="25400" anchor="ctr">
+                    <a:solidFill>
+                      <a:srgbClr val="F8F7F6"/>
+                    </a:solidFill>
+                  </a:tcPr>
+                </a:tc>
+                <a:tc>
+                  <a:txBody>
+                    <a:bodyPr/>
+                    <a:lstStyle/>
+                    <a:p>
+                      <a:r>
+                        <a:rPr sz="900">
+                          <a:solidFill>
+                            <a:srgbClr val="6B6682"/>
+                          </a:solidFill>
+                          <a:latin typeface="Calibri"/>
+                        </a:rPr>
+                        <a:t>Sem sistema</a:t>
+                      </a:r>
+                    </a:p>
+                  </a:txBody>
+                  <a:tcPr marL="76200" marR="76200" marT="25400" marB="25400" anchor="ctr">
+                    <a:solidFill>
+                      <a:srgbClr val="F8F7F6"/>
+                    </a:solidFill>
+                  </a:tcPr>
+                </a:tc>
+                <a:tc>
+                  <a:txBody>
+                    <a:bodyPr/>
+                    <a:lstStyle/>
+                    <a:p>
+                      <a:r>
+                        <a:rPr sz="900">
+                          <a:solidFill>
+                            <a:srgbClr val="6B6682"/>
+                          </a:solidFill>
+                          <a:latin typeface="Calibri"/>
+                        </a:rPr>
+                        <a:t>—</a:t>
+                      </a:r>
+                    </a:p>
+                  </a:txBody>
+                  <a:tcPr marL="76200" marR="76200" marT="25400" marB="25400" anchor="ctr">
+                    <a:solidFill>
+                      <a:srgbClr val="F8F7F6"/>
+                    </a:solidFill>
+                  </a:tcPr>
+                </a:tc>
+                <a:tc>
+                  <a:txBody>
+                    <a:bodyPr/>
+                    <a:lstStyle/>
+                    <a:p>
+                      <a:r>
+                        <a:rPr sz="900">
+                          <a:solidFill>
+                            <a:srgbClr val="6B6682"/>
+                          </a:solidFill>
+                          <a:latin typeface="Calibri"/>
+                        </a:rPr>
+                        <a:t>sem meta numérica</a:t>
+                      </a:r>
+                    </a:p>
+                  </a:txBody>
+                  <a:tcPr marL="76200" marR="76200" marT="25400" marB="25400" anchor="ctr">
+                    <a:solidFill>
+                      <a:srgbClr val="F8F7F6"/>
+                    </a:solidFill>
+                  </a:tcPr>
+                </a:tc>
+              </a:tr>
+            </a:tbl>
+          </a:graphicData>
+        </a:graphic>
+      </p:graphicFrame>
+      <p:sp>
+        <p:nvSpPr>
+          <p:cNvPr id="12" name="TextBox 11"/>
+          <p:cNvSpPr txBox="1"/>
+          <p:nvPr/>
+        </p:nvSpPr>
+        <p:spPr>
+          <a:xfrm>
+            <a:off x="11338560" y="6547104"/>
+            <a:ext cx="457200" cy="256032"/>
+          </a:xfrm>
+          <a:prstGeom prst="rect">
+            <a:avLst/>
+          </a:prstGeom>
+          <a:noFill/>
+        </p:spPr>
+        <p:txBody>
+          <a:bodyPr wrap="square" anchor="ctr" lIns="0" rIns="0" tIns="0" bIns="0">
+            <a:spAutoFit/>
+          </a:bodyPr>
+          <a:lstStyle/>
+          <a:p>
+            <a:pPr algn="r">
+              <a:lnSpc>
+                <a:spcPct val="100000"/>
+              </a:lnSpc>
+            </a:pPr>
+            <a:r>
+              <a:rPr sz="850" b="0" i="0">
+                <a:solidFill>
+                  <a:srgbClr val="6B6682"/>
+                </a:solidFill>
+                <a:latin typeface="Calibri"/>
+              </a:rPr>
+              <a:t>10</a:t>
+            </a:r>
+          </a:p>
+        </p:txBody>
+      </p:sp>
+    </p:spTree>
+  </p:cSld>
+  <p:clrMapOvr>
+    <a:masterClrMapping/>
+  </p:clrMapOvr>
+</p:sld>
+</file>
+
+<file path=ppt/slides/slide12.xml><?xml version="1.0" encoding="utf-8"?>
+<p:sld xmlns:a="http://schemas.openxmlformats.org/drawingml/2006/main" xmlns:p="http://schemas.openxmlformats.org/presentationml/2006/main" xmlns:r="http://schemas.openxmlformats.org/officeDocument/2006/relationships">
+  <p:cSld>
+    <p:bg>
+      <p:bgPr>
+        <a:solidFill>
+          <a:srgbClr val="FFFFFF"/>
+        </a:solidFill>
+        <a:effectLst/>
+      </p:bgPr>
+    </p:bg>
+    <p:spTree>
+      <p:nvGrpSpPr>
+        <p:cNvPr id="1" name=""/>
+        <p:cNvGrpSpPr/>
+        <p:nvPr/>
+      </p:nvGrpSpPr>
+      <p:grpSpPr/>
+      <p:sp>
+        <p:nvSpPr>
+          <p:cNvPr id="2" name="Rounded Rectangle 1"/>
+          <p:cNvSpPr/>
+          <p:nvPr/>
+        </p:nvSpPr>
+        <p:spPr>
+          <a:xfrm>
+            <a:off x="365760" y="292608"/>
+            <a:ext cx="1371600" cy="384048"/>
+          </a:xfrm>
+          <a:prstGeom prst="roundRect">
+            <a:avLst>
+              <a:gd name="adj" fmla="val 20000"/>
+            </a:avLst>
+          </a:prstGeom>
+          <a:solidFill>
+            <a:srgbClr val="2C2849"/>
+          </a:solidFill>
+          <a:ln>
+            <a:noFill/>
+          </a:ln>
+          <a:effectLst/>
+        </p:spPr>
+        <p:style>
+          <a:lnRef idx="1">
+            <a:schemeClr val="accent1"/>
+          </a:lnRef>
+          <a:fillRef idx="3">
+            <a:schemeClr val="accent1"/>
+          </a:fillRef>
+          <a:effectRef idx="2">
+            <a:schemeClr val="accent1"/>
+          </a:effectRef>
+          <a:fontRef idx="minor">
+            <a:schemeClr val="lt1"/>
+          </a:fontRef>
+        </p:style>
+        <p:txBody>
+          <a:bodyPr rtlCol="0" anchor="ctr"/>
+          <a:lstStyle/>
+          <a:p>
+            <a:pPr algn="ctr"/>
+          </a:p>
+        </p:txBody>
+      </p:sp>
+      <p:pic>
+        <p:nvPicPr>
+          <p:cNvPr id="3" name="Picture 2" descr="image.png"/>
+          <p:cNvPicPr>
+            <a:picLocks noChangeAspect="1"/>
+          </p:cNvPicPr>
+          <p:nvPr/>
+        </p:nvPicPr>
+        <p:blipFill>
+          <a:blip r:embed="rId2"/>
+          <a:stretch>
+            <a:fillRect/>
+          </a:stretch>
+        </p:blipFill>
+        <p:spPr>
+          <a:xfrm>
+            <a:off x="530352" y="402336"/>
+            <a:ext cx="1042415" cy="198424"/>
+          </a:xfrm>
+          <a:prstGeom prst="rect">
+            <a:avLst/>
+          </a:prstGeom>
+        </p:spPr>
+      </p:pic>
+      <p:sp>
+        <p:nvSpPr>
+          <p:cNvPr id="4" name="TextBox 3"/>
+          <p:cNvSpPr txBox="1"/>
+          <p:nvPr/>
+        </p:nvSpPr>
+        <p:spPr>
+          <a:xfrm>
+            <a:off x="365760" y="841248"/>
+            <a:ext cx="10058400" cy="274320"/>
+          </a:xfrm>
+          <a:prstGeom prst="rect">
+            <a:avLst/>
+          </a:prstGeom>
+          <a:noFill/>
+        </p:spPr>
+        <p:txBody>
+          <a:bodyPr wrap="square" anchor="t" lIns="0" rIns="0" tIns="0" bIns="0">
+            <a:spAutoFit/>
+          </a:bodyPr>
+          <a:lstStyle/>
+          <a:p>
+            <a:pPr algn="l">
+              <a:lnSpc>
+                <a:spcPct val="100000"/>
+              </a:lnSpc>
+            </a:pPr>
+            <a:r>
+              <a:rPr sz="1200" b="1" i="0">
+                <a:solidFill>
+                  <a:srgbClr val="F2834B"/>
+                </a:solidFill>
+                <a:latin typeface="Calibri"/>
+              </a:rPr>
+              <a:t>GUIA · PASSO 1 DA PRIORIZAÇÃO</a:t>
+            </a:r>
+          </a:p>
+        </p:txBody>
+      </p:sp>
+      <p:sp>
+        <p:nvSpPr>
+          <p:cNvPr id="5" name="TextBox 4"/>
+          <p:cNvSpPr txBox="1"/>
+          <p:nvPr/>
+        </p:nvSpPr>
+        <p:spPr>
+          <a:xfrm>
+            <a:off x="365760" y="1115568"/>
+            <a:ext cx="11457432" cy="566928"/>
+          </a:xfrm>
+          <a:prstGeom prst="rect">
+            <a:avLst/>
+          </a:prstGeom>
+          <a:noFill/>
+        </p:spPr>
+        <p:txBody>
+          <a:bodyPr wrap="square" anchor="t" lIns="0" rIns="0" tIns="0" bIns="0">
+            <a:spAutoFit/>
+          </a:bodyPr>
+          <a:lstStyle/>
+          <a:p>
+            <a:pPr algn="l">
+              <a:lnSpc>
+                <a:spcPct val="100000"/>
+              </a:lnSpc>
+            </a:pPr>
+            <a:r>
+              <a:rPr sz="2700" b="1" i="0">
+                <a:solidFill>
+                  <a:srgbClr val="2C2849"/>
+                </a:solidFill>
+                <a:latin typeface="Calibri"/>
+              </a:rPr>
+              <a:t>5 frentes estratégicas (FB1–FB5)</a:t>
+            </a:r>
+          </a:p>
+        </p:txBody>
+      </p:sp>
+      <p:sp>
+        <p:nvSpPr>
+          <p:cNvPr id="6" name="TextBox 5"/>
+          <p:cNvSpPr txBox="1"/>
+          <p:nvPr/>
+        </p:nvSpPr>
+        <p:spPr>
+          <a:xfrm>
+            <a:off x="365760" y="1700784"/>
+            <a:ext cx="11457432" cy="457200"/>
+          </a:xfrm>
+          <a:prstGeom prst="rect">
+            <a:avLst/>
+          </a:prstGeom>
+          <a:noFill/>
+        </p:spPr>
+        <p:txBody>
+          <a:bodyPr wrap="square" anchor="t" lIns="0" rIns="0" tIns="0" bIns="0">
+            <a:spAutoFit/>
+          </a:bodyPr>
+          <a:lstStyle/>
+          <a:p>
+            <a:pPr algn="l">
+              <a:lnSpc>
+                <a:spcPct val="115000"/>
+              </a:lnSpc>
+            </a:pPr>
+            <a:r>
+              <a:rPr sz="1250" b="0" i="0">
+                <a:solidFill>
+                  <a:srgbClr val="6B6682"/>
+                </a:solidFill>
+                <a:latin typeface="Calibri"/>
+              </a:rPr>
+              <a:t>Cada frente vinculada a uma diretriz, com indicadores de evolução da condição do ativo assumidos no workshop de Performance.</a:t>
+            </a:r>
+          </a:p>
+        </p:txBody>
+      </p:sp>
+      <p:sp>
+        <p:nvSpPr>
+          <p:cNvPr id="7" name="Rounded Rectangle 6"/>
+          <p:cNvSpPr/>
+          <p:nvPr/>
+        </p:nvSpPr>
+        <p:spPr>
+          <a:xfrm>
+            <a:off x="365760" y="2286000"/>
+            <a:ext cx="548640" cy="237744"/>
+          </a:xfrm>
+          <a:prstGeom prst="roundRect">
+            <a:avLst>
+              <a:gd name="adj" fmla="val 50000"/>
+            </a:avLst>
+          </a:prstGeom>
+          <a:solidFill>
+            <a:srgbClr val="85E34D"/>
+          </a:solidFill>
+          <a:ln>
+            <a:noFill/>
+          </a:ln>
+          <a:effectLst/>
+        </p:spPr>
+        <p:style>
+          <a:lnRef idx="1">
+            <a:schemeClr val="accent1"/>
+          </a:lnRef>
+          <a:fillRef idx="3">
+            <a:schemeClr val="accent1"/>
+          </a:fillRef>
+          <a:effectRef idx="2">
+            <a:schemeClr val="accent1"/>
+          </a:effectRef>
+          <a:fontRef idx="minor">
+            <a:schemeClr val="lt1"/>
+          </a:fontRef>
+        </p:style>
+        <p:txBody>
+          <a:bodyPr rtlCol="0" anchor="ctr" lIns="50800" rIns="50800" tIns="0" bIns="0"/>
+          <a:lstStyle/>
+          <a:p>
+            <a:pPr algn="ctr"/>
+            <a:r>
+              <a:rPr sz="850" b="1">
+                <a:solidFill>
+                  <a:srgbClr val="2C2849"/>
+                </a:solidFill>
+                <a:latin typeface="Calibri"/>
+              </a:rPr>
+              <a:t>FB2</a:t>
+            </a:r>
+          </a:p>
+        </p:txBody>
+      </p:sp>
+      <p:sp>
+        <p:nvSpPr>
+          <p:cNvPr id="8" name="TextBox 7"/>
+          <p:cNvSpPr txBox="1"/>
+          <p:nvPr/>
+        </p:nvSpPr>
+        <p:spPr>
+          <a:xfrm>
+            <a:off x="1005840" y="2286000"/>
+            <a:ext cx="5486400" cy="274320"/>
+          </a:xfrm>
+          <a:prstGeom prst="rect">
+            <a:avLst/>
+          </a:prstGeom>
+          <a:noFill/>
+        </p:spPr>
+        <p:txBody>
+          <a:bodyPr wrap="square" anchor="ctr" lIns="0" rIns="0" tIns="0" bIns="0">
+            <a:spAutoFit/>
+          </a:bodyPr>
+          <a:lstStyle/>
+          <a:p>
+            <a:pPr algn="l">
+              <a:lnSpc>
+                <a:spcPct val="100000"/>
+              </a:lnSpc>
+            </a:pPr>
+            <a:r>
+              <a:rPr sz="1500" b="1" i="0">
+                <a:solidFill>
+                  <a:srgbClr val="2C2849"/>
+                </a:solidFill>
+                <a:latin typeface="Calibri"/>
+              </a:rPr>
+              <a:t>Confiabilidade e Excelência Operacional</a:t>
+            </a:r>
+          </a:p>
+        </p:txBody>
+      </p:sp>
+      <p:sp>
+        <p:nvSpPr>
+          <p:cNvPr id="9" name="Rounded Rectangle 8"/>
+          <p:cNvSpPr/>
+          <p:nvPr/>
+        </p:nvSpPr>
+        <p:spPr>
+          <a:xfrm>
+            <a:off x="6949440" y="2295144"/>
+            <a:ext cx="3840480" cy="237744"/>
+          </a:xfrm>
+          <a:prstGeom prst="roundRect">
+            <a:avLst>
+              <a:gd name="adj" fmla="val 50000"/>
+            </a:avLst>
+          </a:prstGeom>
+          <a:solidFill>
+            <a:srgbClr val="9787D4"/>
+          </a:solidFill>
+          <a:ln>
+            <a:noFill/>
+          </a:ln>
+          <a:effectLst/>
+        </p:spPr>
+        <p:style>
+          <a:lnRef idx="1">
+            <a:schemeClr val="accent1"/>
+          </a:lnRef>
+          <a:fillRef idx="3">
+            <a:schemeClr val="accent1"/>
+          </a:fillRef>
+          <a:effectRef idx="2">
+            <a:schemeClr val="accent1"/>
+          </a:effectRef>
+          <a:fontRef idx="minor">
+            <a:schemeClr val="lt1"/>
+          </a:fontRef>
+        </p:style>
+        <p:txBody>
+          <a:bodyPr rtlCol="0" anchor="ctr" lIns="50800" rIns="50800" tIns="0" bIns="0"/>
+          <a:lstStyle/>
+          <a:p>
+            <a:pPr algn="ctr"/>
+            <a:r>
+              <a:rPr sz="850" b="1">
+                <a:solidFill>
+                  <a:srgbClr val="2C2849"/>
+                </a:solidFill>
+                <a:latin typeface="Calibri"/>
+              </a:rPr>
+              <a:t>Diretriz 01 · Eficiência na Produção de Óleo</a:t>
+            </a:r>
+          </a:p>
+        </p:txBody>
+      </p:sp>
+      <p:sp>
+        <p:nvSpPr>
+          <p:cNvPr id="10" name="TextBox 9"/>
+          <p:cNvSpPr txBox="1"/>
+          <p:nvPr/>
+        </p:nvSpPr>
+        <p:spPr>
+          <a:xfrm>
+            <a:off x="365760" y="2651760"/>
+            <a:ext cx="11457432" cy="1051560"/>
+          </a:xfrm>
+          <a:prstGeom prst="rect">
+            <a:avLst/>
+          </a:prstGeom>
+          <a:noFill/>
+        </p:spPr>
+        <p:txBody>
+          <a:bodyPr wrap="square" anchor="t" lIns="0" rIns="0" tIns="0" bIns="0">
+            <a:spAutoFit/>
+          </a:bodyPr>
+          <a:lstStyle/>
+          <a:p>
+            <a:pPr algn="l">
+              <a:lnSpc>
+                <a:spcPct val="115000"/>
+              </a:lnSpc>
+            </a:pPr>
+            <a:r>
+              <a:rPr sz="960" b="0" i="0">
+                <a:solidFill>
+                  <a:srgbClr val="6B6682"/>
+                </a:solidFill>
+                <a:latin typeface="Calibri"/>
+              </a:rPr>
+              <a:t>Recuperar e sustentar a confiabilidade dos sistemas críticos de geração, compressão, bombeio e processamento, eliminando vulnerabilidades que ameacem produção, segurança ou continuidade operacional. Executar os planos de manutenção com disciplina — preventivas e corretivas — reduzindo o backlog e o volume de ordens vencidas, destravando o detalhamento que hoje impede a execução, tratando as notas sem ordem e as manutenções acima de 180 dias, e formalizando a avaliação de cada postergação. Sustentar a meta de produção elevando a eficiência operacional e a acuracidade do potencial: atacar as perdas por downtime e o desvio operacional em cada ativo, e reduzir a parcela de desvio ainda não identificada para que toda perda tenha mecanismo de falha conhecido e tratamento definido.</a:t>
+            </a:r>
+          </a:p>
+        </p:txBody>
+      </p:sp>
+      <p:graphicFrame>
+        <p:nvGraphicFramePr>
+          <p:cNvPr id="11" name="Table 10"/>
+          <p:cNvGraphicFramePr>
+            <a:graphicFrameLocks noGrp="1"/>
+          </p:cNvGraphicFramePr>
+          <p:nvPr/>
+        </p:nvGraphicFramePr>
+        <p:xfrm>
+          <a:off x="365760" y="3794760"/>
+          <a:ext cx="11457431" cy="2514600"/>
+        </p:xfrm>
+        <a:graphic>
+          <a:graphicData uri="http://schemas.openxmlformats.org/drawingml/2006/table">
+            <a:tbl>
+              <a:tblPr firstRow="1" bandRow="1">
+                <a:tableStyleId>{5C22544A-7EE6-4342-B048-85BDC9FD1C3A}</a:tableStyleId>
+              </a:tblPr>
+              <a:tblGrid>
+                <a:gridCol w="5671996"/>
+                <a:gridCol w="2155358"/>
+                <a:gridCol w="1361279"/>
+                <a:gridCol w="2268798"/>
+              </a:tblGrid>
+              <a:tr h="419100">
+                <a:tc>
+                  <a:txBody>
+                    <a:bodyPr/>
+                    <a:lstStyle/>
+                    <a:p>
+                      <a:r>
+                        <a:rPr b="1" sz="900">
+                          <a:solidFill>
+                            <a:srgbClr val="FFFFFF"/>
+                          </a:solidFill>
+                          <a:latin typeface="Calibri"/>
+                        </a:rPr>
+                        <a:t>Indicador</a:t>
+                      </a:r>
+                    </a:p>
+                  </a:txBody>
+                  <a:tcPr marL="76200" marR="76200" marT="25400" marB="25400" anchor="ctr">
+                    <a:solidFill>
+                      <a:srgbClr val="9787D4"/>
+                    </a:solidFill>
+                  </a:tcPr>
+                </a:tc>
+                <a:tc>
+                  <a:txBody>
+                    <a:bodyPr/>
+                    <a:lstStyle/>
+                    <a:p>
+                      <a:r>
+                        <a:rPr b="1" sz="900">
+                          <a:solidFill>
+                            <a:srgbClr val="FFFFFF"/>
+                          </a:solidFill>
+                          <a:latin typeface="Calibri"/>
+                        </a:rPr>
+                        <a:t>Fonte</a:t>
+                      </a:r>
+                    </a:p>
+                  </a:txBody>
+                  <a:tcPr marL="76200" marR="76200" marT="25400" marB="25400" anchor="ctr">
+                    <a:solidFill>
+                      <a:srgbClr val="9787D4"/>
+                    </a:solidFill>
+                  </a:tcPr>
+                </a:tc>
+                <a:tc>
+                  <a:txBody>
+                    <a:bodyPr/>
+                    <a:lstStyle/>
+                    <a:p>
+                      <a:r>
+                        <a:rPr b="1" sz="900">
+                          <a:solidFill>
+                            <a:srgbClr val="FFFFFF"/>
+                          </a:solidFill>
+                          <a:latin typeface="Calibri"/>
+                        </a:rPr>
+                        <a:t>Hoje</a:t>
+                      </a:r>
+                    </a:p>
+                  </a:txBody>
+                  <a:tcPr marL="76200" marR="76200" marT="25400" marB="25400" anchor="ctr">
+                    <a:solidFill>
+                      <a:srgbClr val="9787D4"/>
+                    </a:solidFill>
+                  </a:tcPr>
+                </a:tc>
+                <a:tc>
+                  <a:txBody>
+                    <a:bodyPr/>
+                    <a:lstStyle/>
+                    <a:p>
+                      <a:r>
+                        <a:rPr b="1" sz="900">
+                          <a:solidFill>
+                            <a:srgbClr val="FFFFFF"/>
+                          </a:solidFill>
+                          <a:latin typeface="Calibri"/>
+                        </a:rPr>
+                        <a:t>Meta 2027</a:t>
+                      </a:r>
+                    </a:p>
+                  </a:txBody>
+                  <a:tcPr marL="76200" marR="76200" marT="25400" marB="25400" anchor="ctr">
+                    <a:solidFill>
+                      <a:srgbClr val="9787D4"/>
+                    </a:solidFill>
+                  </a:tcPr>
+                </a:tc>
+              </a:tr>
+              <a:tr h="419100">
+                <a:tc>
+                  <a:txBody>
+                    <a:bodyPr/>
+                    <a:lstStyle/>
+                    <a:p>
+                      <a:r>
+                        <a:rPr sz="900">
+                          <a:solidFill>
+                            <a:srgbClr val="6B6682"/>
+                          </a:solidFill>
+                          <a:latin typeface="Calibri"/>
+                        </a:rPr>
+                        <a:t>Score médio de saúde da frota CONFIA</a:t>
+                      </a:r>
+                    </a:p>
+                  </a:txBody>
+                  <a:tcPr marL="76200" marR="76200" marT="25400" marB="25400" anchor="ctr">
+                    <a:solidFill>
+                      <a:srgbClr val="FFFFFF"/>
+                    </a:solidFill>
+                  </a:tcPr>
+                </a:tc>
+                <a:tc>
+                  <a:txBody>
+                    <a:bodyPr/>
+                    <a:lstStyle/>
+                    <a:p>
+                      <a:r>
+                        <a:rPr sz="900">
+                          <a:solidFill>
+                            <a:srgbClr val="6B6682"/>
+                          </a:solidFill>
+                          <a:latin typeface="Calibri"/>
+                        </a:rPr>
+                        <a:t>Confia</a:t>
+                      </a:r>
+                    </a:p>
+                  </a:txBody>
+                  <a:tcPr marL="76200" marR="76200" marT="25400" marB="25400" anchor="ctr">
+                    <a:solidFill>
+                      <a:srgbClr val="FFFFFF"/>
+                    </a:solidFill>
+                  </a:tcPr>
+                </a:tc>
+                <a:tc>
+                  <a:txBody>
+                    <a:bodyPr/>
+                    <a:lstStyle/>
+                    <a:p>
+                      <a:r>
+                        <a:rPr sz="900">
+                          <a:solidFill>
+                            <a:srgbClr val="6B6682"/>
+                          </a:solidFill>
+                          <a:latin typeface="Calibri"/>
+                        </a:rPr>
+                        <a:t>—</a:t>
+                      </a:r>
+                    </a:p>
+                  </a:txBody>
+                  <a:tcPr marL="76200" marR="76200" marT="25400" marB="25400" anchor="ctr">
+                    <a:solidFill>
+                      <a:srgbClr val="FFFFFF"/>
+                    </a:solidFill>
+                  </a:tcPr>
+                </a:tc>
+                <a:tc>
+                  <a:txBody>
+                    <a:bodyPr/>
+                    <a:lstStyle/>
+                    <a:p>
+                      <a:r>
+                        <a:rPr sz="900">
+                          <a:solidFill>
+                            <a:srgbClr val="6B6682"/>
+                          </a:solidFill>
+                          <a:latin typeface="Calibri"/>
+                        </a:rPr>
+                        <a:t>sem meta numérica</a:t>
+                      </a:r>
+                    </a:p>
+                  </a:txBody>
+                  <a:tcPr marL="76200" marR="76200" marT="25400" marB="25400" anchor="ctr">
+                    <a:solidFill>
+                      <a:srgbClr val="FFFFFF"/>
+                    </a:solidFill>
+                  </a:tcPr>
+                </a:tc>
+              </a:tr>
+              <a:tr h="419100">
+                <a:tc>
+                  <a:txBody>
+                    <a:bodyPr/>
+                    <a:lstStyle/>
+                    <a:p>
+                      <a:r>
+                        <a:rPr sz="900">
+                          <a:solidFill>
+                            <a:srgbClr val="6B6682"/>
+                          </a:solidFill>
+                          <a:latin typeface="Calibri"/>
+                        </a:rPr>
+                        <a:t>% de Disponibilidade de Equipamentos Críticos C2</a:t>
+                      </a:r>
+                    </a:p>
+                  </a:txBody>
+                  <a:tcPr marL="76200" marR="76200" marT="25400" marB="25400" anchor="ctr">
+                    <a:solidFill>
+                      <a:srgbClr val="F8F7F6"/>
+                    </a:solidFill>
+                  </a:tcPr>
+                </a:tc>
+                <a:tc>
+                  <a:txBody>
+                    <a:bodyPr/>
+                    <a:lstStyle/>
+                    <a:p>
+                      <a:r>
+                        <a:rPr sz="900">
+                          <a:solidFill>
+                            <a:srgbClr val="6B6682"/>
+                          </a:solidFill>
+                          <a:latin typeface="Calibri"/>
+                        </a:rPr>
+                        <a:t>Confia · Painel de Redundâncias</a:t>
+                      </a:r>
+                    </a:p>
+                  </a:txBody>
+                  <a:tcPr marL="76200" marR="76200" marT="25400" marB="25400" anchor="ctr">
+                    <a:solidFill>
+                      <a:srgbClr val="F8F7F6"/>
+                    </a:solidFill>
+                  </a:tcPr>
+                </a:tc>
+                <a:tc>
+                  <a:txBody>
+                    <a:bodyPr/>
+                    <a:lstStyle/>
+                    <a:p>
+                      <a:r>
+                        <a:rPr sz="900">
+                          <a:solidFill>
+                            <a:srgbClr val="6B6682"/>
+                          </a:solidFill>
+                          <a:latin typeface="Calibri"/>
+                        </a:rPr>
+                        <a:t>—</a:t>
+                      </a:r>
+                    </a:p>
+                  </a:txBody>
+                  <a:tcPr marL="76200" marR="76200" marT="25400" marB="25400" anchor="ctr">
+                    <a:solidFill>
+                      <a:srgbClr val="F8F7F6"/>
+                    </a:solidFill>
+                  </a:tcPr>
+                </a:tc>
+                <a:tc>
+                  <a:txBody>
+                    <a:bodyPr/>
+                    <a:lstStyle/>
+                    <a:p>
+                      <a:r>
+                        <a:rPr sz="900">
+                          <a:solidFill>
+                            <a:srgbClr val="6B6682"/>
+                          </a:solidFill>
+                          <a:latin typeface="Calibri"/>
+                        </a:rPr>
+                        <a:t>sem meta numérica</a:t>
+                      </a:r>
+                    </a:p>
+                  </a:txBody>
+                  <a:tcPr marL="76200" marR="76200" marT="25400" marB="25400" anchor="ctr">
+                    <a:solidFill>
+                      <a:srgbClr val="F8F7F6"/>
+                    </a:solidFill>
+                  </a:tcPr>
+                </a:tc>
+              </a:tr>
+              <a:tr h="419100">
+                <a:tc>
+                  <a:txBody>
+                    <a:bodyPr/>
+                    <a:lstStyle/>
+                    <a:p>
+                      <a:r>
+                        <a:rPr sz="900">
+                          <a:solidFill>
+                            <a:srgbClr val="6B6682"/>
+                          </a:solidFill>
+                          <a:latin typeface="Calibri"/>
+                        </a:rPr>
+                        <a:t>MTBF C2</a:t>
+                      </a:r>
+                    </a:p>
+                  </a:txBody>
+                  <a:tcPr marL="76200" marR="76200" marT="25400" marB="25400" anchor="ctr">
+                    <a:solidFill>
+                      <a:srgbClr val="FFFFFF"/>
+                    </a:solidFill>
+                  </a:tcPr>
+                </a:tc>
+                <a:tc>
+                  <a:txBody>
+                    <a:bodyPr/>
+                    <a:lstStyle/>
+                    <a:p>
+                      <a:r>
+                        <a:rPr sz="900">
+                          <a:solidFill>
+                            <a:srgbClr val="6B6682"/>
+                          </a:solidFill>
+                          <a:latin typeface="Calibri"/>
+                        </a:rPr>
+                        <a:t>SAP</a:t>
+                      </a:r>
+                    </a:p>
+                  </a:txBody>
+                  <a:tcPr marL="76200" marR="76200" marT="25400" marB="25400" anchor="ctr">
+                    <a:solidFill>
+                      <a:srgbClr val="FFFFFF"/>
+                    </a:solidFill>
+                  </a:tcPr>
+                </a:tc>
+                <a:tc>
+                  <a:txBody>
+                    <a:bodyPr/>
+                    <a:lstStyle/>
+                    <a:p>
+                      <a:r>
+                        <a:rPr sz="900">
+                          <a:solidFill>
+                            <a:srgbClr val="6B6682"/>
+                          </a:solidFill>
+                          <a:latin typeface="Calibri"/>
+                        </a:rPr>
+                        <a:t>—</a:t>
+                      </a:r>
+                    </a:p>
+                  </a:txBody>
+                  <a:tcPr marL="76200" marR="76200" marT="25400" marB="25400" anchor="ctr">
+                    <a:solidFill>
+                      <a:srgbClr val="FFFFFF"/>
+                    </a:solidFill>
+                  </a:tcPr>
+                </a:tc>
+                <a:tc>
+                  <a:txBody>
+                    <a:bodyPr/>
+                    <a:lstStyle/>
+                    <a:p>
+                      <a:r>
+                        <a:rPr sz="900">
+                          <a:solidFill>
+                            <a:srgbClr val="6B6682"/>
+                          </a:solidFill>
+                          <a:latin typeface="Calibri"/>
+                        </a:rPr>
+                        <a:t>sem meta numérica</a:t>
+                      </a:r>
+                    </a:p>
+                  </a:txBody>
+                  <a:tcPr marL="76200" marR="76200" marT="25400" marB="25400" anchor="ctr">
+                    <a:solidFill>
+                      <a:srgbClr val="FFFFFF"/>
+                    </a:solidFill>
+                  </a:tcPr>
+                </a:tc>
+              </a:tr>
+              <a:tr h="419100">
+                <a:tc>
+                  <a:txBody>
+                    <a:bodyPr/>
+                    <a:lstStyle/>
+                    <a:p>
+                      <a:r>
+                        <a:rPr sz="900">
+                          <a:solidFill>
+                            <a:srgbClr val="6B6682"/>
+                          </a:solidFill>
+                          <a:latin typeface="Calibri"/>
+                        </a:rPr>
+                        <a:t>% de Atendimento das Recomendações de Perdas de Produção</a:t>
+                      </a:r>
+                    </a:p>
+                  </a:txBody>
+                  <a:tcPr marL="76200" marR="76200" marT="25400" marB="25400" anchor="ctr">
+                    <a:solidFill>
+                      <a:srgbClr val="F8F7F6"/>
+                    </a:solidFill>
+                  </a:tcPr>
+                </a:tc>
+                <a:tc>
+                  <a:txBody>
+                    <a:bodyPr/>
+                    <a:lstStyle/>
+                    <a:p>
+                      <a:r>
+                        <a:rPr sz="900">
+                          <a:solidFill>
+                            <a:srgbClr val="6B6682"/>
+                          </a:solidFill>
+                          <a:latin typeface="Calibri"/>
+                        </a:rPr>
+                        <a:t>—</a:t>
+                      </a:r>
+                    </a:p>
+                  </a:txBody>
+                  <a:tcPr marL="76200" marR="76200" marT="25400" marB="25400" anchor="ctr">
+                    <a:solidFill>
+                      <a:srgbClr val="F8F7F6"/>
+                    </a:solidFill>
+                  </a:tcPr>
+                </a:tc>
+                <a:tc>
+                  <a:txBody>
+                    <a:bodyPr/>
+                    <a:lstStyle/>
+                    <a:p>
+                      <a:r>
+                        <a:rPr sz="900">
+                          <a:solidFill>
+                            <a:srgbClr val="6B6682"/>
+                          </a:solidFill>
+                          <a:latin typeface="Calibri"/>
+                        </a:rPr>
+                        <a:t>—</a:t>
+                      </a:r>
+                    </a:p>
+                  </a:txBody>
+                  <a:tcPr marL="76200" marR="76200" marT="25400" marB="25400" anchor="ctr">
+                    <a:solidFill>
+                      <a:srgbClr val="F8F7F6"/>
+                    </a:solidFill>
+                  </a:tcPr>
+                </a:tc>
+                <a:tc>
+                  <a:txBody>
+                    <a:bodyPr/>
+                    <a:lstStyle/>
+                    <a:p>
+                      <a:r>
+                        <a:rPr sz="900">
+                          <a:solidFill>
+                            <a:srgbClr val="6B6682"/>
+                          </a:solidFill>
+                          <a:latin typeface="Calibri"/>
+                        </a:rPr>
+                        <a:t>sem meta numérica</a:t>
+                      </a:r>
+                    </a:p>
+                  </a:txBody>
+                  <a:tcPr marL="76200" marR="76200" marT="25400" marB="25400" anchor="ctr">
+                    <a:solidFill>
+                      <a:srgbClr val="F8F7F6"/>
+                    </a:solidFill>
+                  </a:tcPr>
+                </a:tc>
+              </a:tr>
+              <a:tr h="419100">
+                <a:tc>
+                  <a:txBody>
+                    <a:bodyPr/>
+                    <a:lstStyle/>
+                    <a:p>
+                      <a:r>
+                        <a:rPr sz="900">
+                          <a:solidFill>
+                            <a:srgbClr val="6B6682"/>
+                          </a:solidFill>
+                          <a:latin typeface="Calibri"/>
+                        </a:rPr>
+                        <a:t>% de parâmetros fora do envelope LIGHTHOUSE</a:t>
+                      </a:r>
+                    </a:p>
+                  </a:txBody>
+                  <a:tcPr marL="76200" marR="76200" marT="25400" marB="25400" anchor="ctr">
+                    <a:solidFill>
+                      <a:srgbClr val="FFFFFF"/>
+                    </a:solidFill>
+                  </a:tcPr>
+                </a:tc>
+                <a:tc>
+                  <a:txBody>
+                    <a:bodyPr/>
+                    <a:lstStyle/>
+                    <a:p>
+                      <a:r>
+                        <a:rPr sz="900">
+                          <a:solidFill>
+                            <a:srgbClr val="6B6682"/>
+                          </a:solidFill>
+                          <a:latin typeface="Calibri"/>
+                        </a:rPr>
+                        <a:t>—</a:t>
+                      </a:r>
+                    </a:p>
+                  </a:txBody>
+                  <a:tcPr marL="76200" marR="76200" marT="25400" marB="25400" anchor="ctr">
+                    <a:solidFill>
+                      <a:srgbClr val="FFFFFF"/>
+                    </a:solidFill>
+                  </a:tcPr>
+                </a:tc>
+                <a:tc>
+                  <a:txBody>
+                    <a:bodyPr/>
+                    <a:lstStyle/>
+                    <a:p>
+                      <a:r>
+                        <a:rPr sz="900">
+                          <a:solidFill>
+                            <a:srgbClr val="6B6682"/>
+                          </a:solidFill>
+                          <a:latin typeface="Calibri"/>
+                        </a:rPr>
+                        <a:t>—</a:t>
+                      </a:r>
+                    </a:p>
+                  </a:txBody>
+                  <a:tcPr marL="76200" marR="76200" marT="25400" marB="25400" anchor="ctr">
+                    <a:solidFill>
+                      <a:srgbClr val="FFFFFF"/>
+                    </a:solidFill>
+                  </a:tcPr>
+                </a:tc>
+                <a:tc>
+                  <a:txBody>
+                    <a:bodyPr/>
+                    <a:lstStyle/>
+                    <a:p>
+                      <a:r>
+                        <a:rPr sz="900">
+                          <a:solidFill>
+                            <a:srgbClr val="6B6682"/>
+                          </a:solidFill>
+                          <a:latin typeface="Calibri"/>
+                        </a:rPr>
+                        <a:t>sem meta numérica</a:t>
+                      </a:r>
+                    </a:p>
+                  </a:txBody>
+                  <a:tcPr marL="76200" marR="76200" marT="25400" marB="25400" anchor="ctr">
+                    <a:solidFill>
+                      <a:srgbClr val="FFFFFF"/>
+                    </a:solidFill>
+                  </a:tcPr>
+                </a:tc>
+              </a:tr>
+            </a:tbl>
+          </a:graphicData>
+        </a:graphic>
+      </p:graphicFrame>
+      <p:sp>
+        <p:nvSpPr>
+          <p:cNvPr id="12" name="TextBox 11"/>
+          <p:cNvSpPr txBox="1"/>
+          <p:nvPr/>
+        </p:nvSpPr>
+        <p:spPr>
+          <a:xfrm>
+            <a:off x="11338560" y="6547104"/>
+            <a:ext cx="457200" cy="256032"/>
+          </a:xfrm>
+          <a:prstGeom prst="rect">
+            <a:avLst/>
+          </a:prstGeom>
+          <a:noFill/>
+        </p:spPr>
+        <p:txBody>
+          <a:bodyPr wrap="square" anchor="ctr" lIns="0" rIns="0" tIns="0" bIns="0">
+            <a:spAutoFit/>
+          </a:bodyPr>
+          <a:lstStyle/>
+          <a:p>
+            <a:pPr algn="r">
+              <a:lnSpc>
+                <a:spcPct val="100000"/>
+              </a:lnSpc>
+            </a:pPr>
+            <a:r>
+              <a:rPr sz="850" b="0" i="0">
+                <a:solidFill>
+                  <a:srgbClr val="6B6682"/>
+                </a:solidFill>
+                <a:latin typeface="Calibri"/>
+              </a:rPr>
+              <a:t>11</a:t>
+            </a:r>
+          </a:p>
+        </p:txBody>
+      </p:sp>
+    </p:spTree>
+  </p:cSld>
+  <p:clrMapOvr>
+    <a:masterClrMapping/>
+  </p:clrMapOvr>
+</p:sld>
+</file>
+
+<file path=ppt/slides/slide13.xml><?xml version="1.0" encoding="utf-8"?>
+<p:sld xmlns:a="http://schemas.openxmlformats.org/drawingml/2006/main" xmlns:p="http://schemas.openxmlformats.org/presentationml/2006/main" xmlns:r="http://schemas.openxmlformats.org/officeDocument/2006/relationships">
+  <p:cSld>
+    <p:bg>
+      <p:bgPr>
+        <a:solidFill>
+          <a:srgbClr val="FFFFFF"/>
+        </a:solidFill>
+        <a:effectLst/>
+      </p:bgPr>
+    </p:bg>
+    <p:spTree>
+      <p:nvGrpSpPr>
+        <p:cNvPr id="1" name=""/>
+        <p:cNvGrpSpPr/>
+        <p:nvPr/>
+      </p:nvGrpSpPr>
+      <p:grpSpPr/>
+      <p:sp>
+        <p:nvSpPr>
+          <p:cNvPr id="2" name="Rounded Rectangle 1"/>
+          <p:cNvSpPr/>
+          <p:nvPr/>
+        </p:nvSpPr>
+        <p:spPr>
+          <a:xfrm>
+            <a:off x="365760" y="292608"/>
+            <a:ext cx="1371600" cy="384048"/>
+          </a:xfrm>
+          <a:prstGeom prst="roundRect">
+            <a:avLst>
+              <a:gd name="adj" fmla="val 20000"/>
+            </a:avLst>
+          </a:prstGeom>
+          <a:solidFill>
+            <a:srgbClr val="2C2849"/>
+          </a:solidFill>
+          <a:ln>
+            <a:noFill/>
+          </a:ln>
+          <a:effectLst/>
+        </p:spPr>
+        <p:style>
+          <a:lnRef idx="1">
+            <a:schemeClr val="accent1"/>
+          </a:lnRef>
+          <a:fillRef idx="3">
+            <a:schemeClr val="accent1"/>
+          </a:fillRef>
+          <a:effectRef idx="2">
+            <a:schemeClr val="accent1"/>
+          </a:effectRef>
+          <a:fontRef idx="minor">
+            <a:schemeClr val="lt1"/>
+          </a:fontRef>
+        </p:style>
+        <p:txBody>
+          <a:bodyPr rtlCol="0" anchor="ctr"/>
+          <a:lstStyle/>
+          <a:p>
+            <a:pPr algn="ctr"/>
+          </a:p>
+        </p:txBody>
+      </p:sp>
+      <p:pic>
+        <p:nvPicPr>
+          <p:cNvPr id="3" name="Picture 2" descr="image.png"/>
+          <p:cNvPicPr>
+            <a:picLocks noChangeAspect="1"/>
+          </p:cNvPicPr>
+          <p:nvPr/>
+        </p:nvPicPr>
+        <p:blipFill>
+          <a:blip r:embed="rId2"/>
+          <a:stretch>
+            <a:fillRect/>
+          </a:stretch>
+        </p:blipFill>
+        <p:spPr>
+          <a:xfrm>
+            <a:off x="530352" y="402336"/>
+            <a:ext cx="1042415" cy="198424"/>
+          </a:xfrm>
+          <a:prstGeom prst="rect">
+            <a:avLst/>
+          </a:prstGeom>
+        </p:spPr>
+      </p:pic>
+      <p:sp>
+        <p:nvSpPr>
+          <p:cNvPr id="4" name="TextBox 3"/>
+          <p:cNvSpPr txBox="1"/>
+          <p:nvPr/>
+        </p:nvSpPr>
+        <p:spPr>
+          <a:xfrm>
+            <a:off x="365760" y="841248"/>
+            <a:ext cx="10058400" cy="274320"/>
+          </a:xfrm>
+          <a:prstGeom prst="rect">
+            <a:avLst/>
+          </a:prstGeom>
+          <a:noFill/>
+        </p:spPr>
+        <p:txBody>
+          <a:bodyPr wrap="square" anchor="t" lIns="0" rIns="0" tIns="0" bIns="0">
+            <a:spAutoFit/>
+          </a:bodyPr>
+          <a:lstStyle/>
+          <a:p>
+            <a:pPr algn="l">
+              <a:lnSpc>
+                <a:spcPct val="100000"/>
+              </a:lnSpc>
+            </a:pPr>
+            <a:r>
+              <a:rPr sz="1200" b="1" i="0">
+                <a:solidFill>
+                  <a:srgbClr val="F2834B"/>
+                </a:solidFill>
+                <a:latin typeface="Calibri"/>
+              </a:rPr>
+              <a:t>GUIA · PASSO 1 DA PRIORIZAÇÃO</a:t>
+            </a:r>
+          </a:p>
+        </p:txBody>
+      </p:sp>
+      <p:sp>
+        <p:nvSpPr>
+          <p:cNvPr id="5" name="TextBox 4"/>
+          <p:cNvSpPr txBox="1"/>
+          <p:nvPr/>
+        </p:nvSpPr>
+        <p:spPr>
+          <a:xfrm>
+            <a:off x="365760" y="1115568"/>
+            <a:ext cx="11457432" cy="566928"/>
+          </a:xfrm>
+          <a:prstGeom prst="rect">
+            <a:avLst/>
+          </a:prstGeom>
+          <a:noFill/>
+        </p:spPr>
+        <p:txBody>
+          <a:bodyPr wrap="square" anchor="t" lIns="0" rIns="0" tIns="0" bIns="0">
+            <a:spAutoFit/>
+          </a:bodyPr>
+          <a:lstStyle/>
+          <a:p>
+            <a:pPr algn="l">
+              <a:lnSpc>
+                <a:spcPct val="100000"/>
+              </a:lnSpc>
+            </a:pPr>
+            <a:r>
+              <a:rPr sz="2700" b="1" i="0">
+                <a:solidFill>
+                  <a:srgbClr val="2C2849"/>
+                </a:solidFill>
+                <a:latin typeface="Calibri"/>
+              </a:rPr>
+              <a:t>5 frentes estratégicas (FB1–FB5)</a:t>
+            </a:r>
+          </a:p>
+        </p:txBody>
+      </p:sp>
+      <p:sp>
+        <p:nvSpPr>
+          <p:cNvPr id="6" name="TextBox 5"/>
+          <p:cNvSpPr txBox="1"/>
+          <p:nvPr/>
+        </p:nvSpPr>
+        <p:spPr>
+          <a:xfrm>
+            <a:off x="365760" y="1700784"/>
+            <a:ext cx="11457432" cy="457200"/>
+          </a:xfrm>
+          <a:prstGeom prst="rect">
+            <a:avLst/>
+          </a:prstGeom>
+          <a:noFill/>
+        </p:spPr>
+        <p:txBody>
+          <a:bodyPr wrap="square" anchor="t" lIns="0" rIns="0" tIns="0" bIns="0">
+            <a:spAutoFit/>
+          </a:bodyPr>
+          <a:lstStyle/>
+          <a:p>
+            <a:pPr algn="l">
+              <a:lnSpc>
+                <a:spcPct val="115000"/>
+              </a:lnSpc>
+            </a:pPr>
+            <a:r>
+              <a:rPr sz="1250" b="0" i="0">
+                <a:solidFill>
+                  <a:srgbClr val="6B6682"/>
+                </a:solidFill>
+                <a:latin typeface="Calibri"/>
+              </a:rPr>
+              <a:t>Continuação — frentes com escopo e indicadores mais compactos.</a:t>
+            </a:r>
+          </a:p>
+        </p:txBody>
+      </p:sp>
+      <p:sp>
+        <p:nvSpPr>
+          <p:cNvPr id="7" name="Rounded Rectangle 6"/>
+          <p:cNvSpPr/>
+          <p:nvPr/>
+        </p:nvSpPr>
+        <p:spPr>
+          <a:xfrm>
+            <a:off x="365760" y="2240280"/>
+            <a:ext cx="548640" cy="237744"/>
+          </a:xfrm>
+          <a:prstGeom prst="roundRect">
+            <a:avLst>
+              <a:gd name="adj" fmla="val 50000"/>
+            </a:avLst>
+          </a:prstGeom>
+          <a:solidFill>
+            <a:srgbClr val="85E34D"/>
+          </a:solidFill>
+          <a:ln>
+            <a:noFill/>
+          </a:ln>
+          <a:effectLst/>
+        </p:spPr>
+        <p:style>
+          <a:lnRef idx="1">
+            <a:schemeClr val="accent1"/>
+          </a:lnRef>
+          <a:fillRef idx="3">
+            <a:schemeClr val="accent1"/>
+          </a:fillRef>
+          <a:effectRef idx="2">
+            <a:schemeClr val="accent1"/>
+          </a:effectRef>
+          <a:fontRef idx="minor">
+            <a:schemeClr val="lt1"/>
+          </a:fontRef>
+        </p:style>
+        <p:txBody>
+          <a:bodyPr rtlCol="0" anchor="ctr" lIns="50800" rIns="50800" tIns="0" bIns="0"/>
+          <a:lstStyle/>
+          <a:p>
+            <a:pPr algn="ctr"/>
+            <a:r>
+              <a:rPr sz="850" b="1">
+                <a:solidFill>
+                  <a:srgbClr val="2C2849"/>
+                </a:solidFill>
+                <a:latin typeface="Calibri"/>
+              </a:rPr>
+              <a:t>FB3</a:t>
+            </a:r>
+          </a:p>
+        </p:txBody>
+      </p:sp>
+      <p:sp>
+        <p:nvSpPr>
+          <p:cNvPr id="8" name="TextBox 7"/>
+          <p:cNvSpPr txBox="1"/>
+          <p:nvPr/>
+        </p:nvSpPr>
+        <p:spPr>
+          <a:xfrm>
+            <a:off x="1005840" y="2240280"/>
+            <a:ext cx="4937760" cy="256032"/>
+          </a:xfrm>
+          <a:prstGeom prst="rect">
+            <a:avLst/>
+          </a:prstGeom>
+          <a:noFill/>
+        </p:spPr>
+        <p:txBody>
+          <a:bodyPr wrap="square" anchor="ctr" lIns="0" rIns="0" tIns="0" bIns="0">
+            <a:spAutoFit/>
+          </a:bodyPr>
+          <a:lstStyle/>
+          <a:p>
+            <a:pPr algn="l">
+              <a:lnSpc>
+                <a:spcPct val="100000"/>
+              </a:lnSpc>
+            </a:pPr>
+            <a:r>
+              <a:rPr sz="1250" b="1" i="0">
+                <a:solidFill>
+                  <a:srgbClr val="2C2849"/>
+                </a:solidFill>
+                <a:latin typeface="Calibri"/>
+              </a:rPr>
+              <a:t>Disciplina de Custos da Operação</a:t>
+            </a:r>
+          </a:p>
+        </p:txBody>
+      </p:sp>
+      <p:sp>
+        <p:nvSpPr>
+          <p:cNvPr id="9" name="Rounded Rectangle 8"/>
+          <p:cNvSpPr/>
+          <p:nvPr/>
+        </p:nvSpPr>
+        <p:spPr>
+          <a:xfrm>
+            <a:off x="6949440" y="2244852"/>
+            <a:ext cx="4206240" cy="237744"/>
+          </a:xfrm>
+          <a:prstGeom prst="roundRect">
+            <a:avLst>
+              <a:gd name="adj" fmla="val 50000"/>
+            </a:avLst>
+          </a:prstGeom>
+          <a:solidFill>
+            <a:srgbClr val="9787D4"/>
+          </a:solidFill>
+          <a:ln>
+            <a:noFill/>
+          </a:ln>
+          <a:effectLst/>
+        </p:spPr>
+        <p:style>
+          <a:lnRef idx="1">
+            <a:schemeClr val="accent1"/>
+          </a:lnRef>
+          <a:fillRef idx="3">
+            <a:schemeClr val="accent1"/>
+          </a:fillRef>
+          <a:effectRef idx="2">
+            <a:schemeClr val="accent1"/>
+          </a:effectRef>
+          <a:fontRef idx="minor">
+            <a:schemeClr val="lt1"/>
+          </a:fontRef>
+        </p:style>
+        <p:txBody>
+          <a:bodyPr rtlCol="0" anchor="ctr" lIns="50800" rIns="50800" tIns="0" bIns="0"/>
+          <a:lstStyle/>
+          <a:p>
+            <a:pPr algn="ctr"/>
+            <a:r>
+              <a:rPr sz="800" b="1">
+                <a:solidFill>
+                  <a:srgbClr val="2C2849"/>
+                </a:solidFill>
+                <a:latin typeface="Calibri"/>
+              </a:rPr>
+              <a:t>Diretriz 01 · Eficiência na Produção de Óleo</a:t>
+            </a:r>
+          </a:p>
+        </p:txBody>
+      </p:sp>
+      <p:sp>
+        <p:nvSpPr>
+          <p:cNvPr id="10" name="TextBox 9"/>
+          <p:cNvSpPr txBox="1"/>
+          <p:nvPr/>
+        </p:nvSpPr>
+        <p:spPr>
+          <a:xfrm>
+            <a:off x="365760" y="2532888"/>
+            <a:ext cx="11457432" cy="292608"/>
+          </a:xfrm>
+          <a:prstGeom prst="rect">
+            <a:avLst/>
+          </a:prstGeom>
+          <a:noFill/>
+        </p:spPr>
+        <p:txBody>
+          <a:bodyPr wrap="square" anchor="t" lIns="0" rIns="0" tIns="0" bIns="0">
+            <a:spAutoFit/>
+          </a:bodyPr>
+          <a:lstStyle/>
+          <a:p>
+            <a:pPr algn="l">
+              <a:lnSpc>
+                <a:spcPct val="115000"/>
+              </a:lnSpc>
+            </a:pPr>
+            <a:r>
+              <a:rPr sz="930" b="0" i="0">
+                <a:solidFill>
+                  <a:srgbClr val="6B6682"/>
+                </a:solidFill>
+                <a:latin typeface="Calibri"/>
+              </a:rPr>
+              <a:t>Manter CAPEX e OPEX dos projetos dentro da curva orçamentária, com desvios identificados, tratados e acompanhados por ativo.</a:t>
+            </a:r>
+          </a:p>
+        </p:txBody>
+      </p:sp>
+      <p:graphicFrame>
+        <p:nvGraphicFramePr>
+          <p:cNvPr id="11" name="Table 10"/>
+          <p:cNvGraphicFramePr>
+            <a:graphicFrameLocks noGrp="1"/>
+          </p:cNvGraphicFramePr>
+          <p:nvPr/>
+        </p:nvGraphicFramePr>
+        <p:xfrm>
+          <a:off x="365760" y="2852927"/>
+          <a:ext cx="11457430" cy="512064"/>
+        </p:xfrm>
+        <a:graphic>
+          <a:graphicData uri="http://schemas.openxmlformats.org/drawingml/2006/table">
+            <a:tbl>
+              <a:tblPr firstRow="1" bandRow="1">
+                <a:tableStyleId>{5C22544A-7EE6-4342-B048-85BDC9FD1C3A}</a:tableStyleId>
+              </a:tblPr>
+              <a:tblGrid>
+                <a:gridCol w="3840479"/>
+                <a:gridCol w="4142231"/>
+                <a:gridCol w="1005840"/>
+                <a:gridCol w="2468880"/>
+              </a:tblGrid>
+              <a:tr h="256032">
+                <a:tc>
+                  <a:txBody>
+                    <a:bodyPr/>
+                    <a:lstStyle/>
+                    <a:p>
+                      <a:r>
+                        <a:rPr b="1" sz="900">
+                          <a:solidFill>
+                            <a:srgbClr val="FFFFFF"/>
+                          </a:solidFill>
+                          <a:latin typeface="Calibri"/>
+                        </a:rPr>
+                        <a:t>Indicador</a:t>
+                      </a:r>
+                    </a:p>
+                  </a:txBody>
+                  <a:tcPr marL="76200" marR="76200" marT="25400" marB="25400" anchor="ctr">
+                    <a:solidFill>
+                      <a:srgbClr val="9787D4"/>
+                    </a:solidFill>
+                  </a:tcPr>
+                </a:tc>
+                <a:tc>
+                  <a:txBody>
+                    <a:bodyPr/>
+                    <a:lstStyle/>
+                    <a:p>
+                      <a:r>
+                        <a:rPr b="1" sz="900">
+                          <a:solidFill>
+                            <a:srgbClr val="FFFFFF"/>
+                          </a:solidFill>
+                          <a:latin typeface="Calibri"/>
+                        </a:rPr>
+                        <a:t>Fonte</a:t>
+                      </a:r>
+                    </a:p>
+                  </a:txBody>
+                  <a:tcPr marL="76200" marR="76200" marT="25400" marB="25400" anchor="ctr">
+                    <a:solidFill>
+                      <a:srgbClr val="9787D4"/>
+                    </a:solidFill>
+                  </a:tcPr>
+                </a:tc>
+                <a:tc>
+                  <a:txBody>
+                    <a:bodyPr/>
+                    <a:lstStyle/>
+                    <a:p>
+                      <a:r>
+                        <a:rPr b="1" sz="900">
+                          <a:solidFill>
+                            <a:srgbClr val="FFFFFF"/>
+                          </a:solidFill>
+                          <a:latin typeface="Calibri"/>
+                        </a:rPr>
+                        <a:t>Hoje</a:t>
+                      </a:r>
+                    </a:p>
+                  </a:txBody>
+                  <a:tcPr marL="76200" marR="76200" marT="25400" marB="25400" anchor="ctr">
+                    <a:solidFill>
+                      <a:srgbClr val="9787D4"/>
+                    </a:solidFill>
+                  </a:tcPr>
+                </a:tc>
+                <a:tc>
+                  <a:txBody>
+                    <a:bodyPr/>
+                    <a:lstStyle/>
+                    <a:p>
+                      <a:r>
+                        <a:rPr b="1" sz="900">
+                          <a:solidFill>
+                            <a:srgbClr val="FFFFFF"/>
+                          </a:solidFill>
+                          <a:latin typeface="Calibri"/>
+                        </a:rPr>
+                        <a:t>Meta 2027</a:t>
+                      </a:r>
+                    </a:p>
+                  </a:txBody>
+                  <a:tcPr marL="76200" marR="76200" marT="25400" marB="25400" anchor="ctr">
+                    <a:solidFill>
+                      <a:srgbClr val="9787D4"/>
+                    </a:solidFill>
+                  </a:tcPr>
+                </a:tc>
+              </a:tr>
+              <a:tr h="256032">
+                <a:tc>
+                  <a:txBody>
+                    <a:bodyPr/>
+                    <a:lstStyle/>
+                    <a:p>
+                      <a:r>
+                        <a:rPr sz="900">
+                          <a:solidFill>
+                            <a:srgbClr val="6B6682"/>
+                          </a:solidFill>
+                          <a:latin typeface="Calibri"/>
+                        </a:rPr>
+                        <a:t>Projetos acima da curva orçamentária de CAPEX</a:t>
+                      </a:r>
+                    </a:p>
+                  </a:txBody>
+                  <a:tcPr marL="76200" marR="76200" marT="25400" marB="25400" anchor="ctr">
+                    <a:solidFill>
+                      <a:srgbClr val="FFFFFF"/>
+                    </a:solidFill>
+                  </a:tcPr>
+                </a:tc>
+                <a:tc>
+                  <a:txBody>
+                    <a:bodyPr/>
+                    <a:lstStyle/>
+                    <a:p>
+                      <a:r>
+                        <a:rPr sz="900">
+                          <a:solidFill>
+                            <a:srgbClr val="6B6682"/>
+                          </a:solidFill>
+                          <a:latin typeface="Calibri"/>
+                        </a:rPr>
+                        <a:t>Fluxo de Caixa — 83 projetos com CAPEX em 2026, 42 mapeados em ativos</a:t>
+                      </a:r>
+                    </a:p>
+                  </a:txBody>
+                  <a:tcPr marL="76200" marR="76200" marT="25400" marB="25400" anchor="ctr">
+                    <a:solidFill>
+                      <a:srgbClr val="FFFFFF"/>
+                    </a:solidFill>
+                  </a:tcPr>
+                </a:tc>
+                <a:tc>
+                  <a:txBody>
+                    <a:bodyPr/>
+                    <a:lstStyle/>
+                    <a:p>
+                      <a:r>
+                        <a:rPr sz="900">
+                          <a:solidFill>
+                            <a:srgbClr val="6B6682"/>
+                          </a:solidFill>
+                          <a:latin typeface="Calibri"/>
+                        </a:rPr>
+                        <a:t>42</a:t>
+                      </a:r>
+                    </a:p>
+                  </a:txBody>
+                  <a:tcPr marL="76200" marR="76200" marT="25400" marB="25400" anchor="ctr">
+                    <a:solidFill>
+                      <a:srgbClr val="FFFFFF"/>
+                    </a:solidFill>
+                  </a:tcPr>
+                </a:tc>
+                <a:tc>
+                  <a:txBody>
+                    <a:bodyPr/>
+                    <a:lstStyle/>
+                    <a:p>
+                      <a:r>
+                        <a:rPr sz="900">
+                          <a:solidFill>
+                            <a:srgbClr val="6B6682"/>
+                          </a:solidFill>
+                          <a:latin typeface="Calibri"/>
+                        </a:rPr>
+                        <a:t>0 (reduzir até 0)</a:t>
+                      </a:r>
+                    </a:p>
+                  </a:txBody>
+                  <a:tcPr marL="76200" marR="76200" marT="25400" marB="25400" anchor="ctr">
+                    <a:solidFill>
+                      <a:srgbClr val="FFFFFF"/>
+                    </a:solidFill>
+                  </a:tcPr>
+                </a:tc>
+              </a:tr>
+            </a:tbl>
+          </a:graphicData>
+        </a:graphic>
+      </p:graphicFrame>
+      <p:sp>
+        <p:nvSpPr>
+          <p:cNvPr id="12" name="Rounded Rectangle 11"/>
+          <p:cNvSpPr/>
+          <p:nvPr/>
+        </p:nvSpPr>
+        <p:spPr>
+          <a:xfrm>
+            <a:off x="365760" y="3511296"/>
+            <a:ext cx="548640" cy="237744"/>
+          </a:xfrm>
+          <a:prstGeom prst="roundRect">
+            <a:avLst>
+              <a:gd name="adj" fmla="val 50000"/>
+            </a:avLst>
+          </a:prstGeom>
+          <a:solidFill>
+            <a:srgbClr val="85E34D"/>
+          </a:solidFill>
+          <a:ln>
+            <a:noFill/>
+          </a:ln>
+          <a:effectLst/>
+        </p:spPr>
+        <p:style>
+          <a:lnRef idx="1">
+            <a:schemeClr val="accent1"/>
+          </a:lnRef>
+          <a:fillRef idx="3">
+            <a:schemeClr val="accent1"/>
+          </a:fillRef>
+          <a:effectRef idx="2">
+            <a:schemeClr val="accent1"/>
+          </a:effectRef>
+          <a:fontRef idx="minor">
+            <a:schemeClr val="lt1"/>
+          </a:fontRef>
+        </p:style>
+        <p:txBody>
+          <a:bodyPr rtlCol="0" anchor="ctr" lIns="50800" rIns="50800" tIns="0" bIns="0"/>
+          <a:lstStyle/>
+          <a:p>
+            <a:pPr algn="ctr"/>
+            <a:r>
+              <a:rPr sz="850" b="1">
+                <a:solidFill>
+                  <a:srgbClr val="2C2849"/>
+                </a:solidFill>
+                <a:latin typeface="Calibri"/>
+              </a:rPr>
+              <a:t>FB4</a:t>
+            </a:r>
+          </a:p>
+        </p:txBody>
+      </p:sp>
+      <p:sp>
+        <p:nvSpPr>
+          <p:cNvPr id="13" name="TextBox 12"/>
+          <p:cNvSpPr txBox="1"/>
+          <p:nvPr/>
+        </p:nvSpPr>
+        <p:spPr>
+          <a:xfrm>
+            <a:off x="1005840" y="3511296"/>
+            <a:ext cx="4937760" cy="256032"/>
+          </a:xfrm>
+          <a:prstGeom prst="rect">
+            <a:avLst/>
+          </a:prstGeom>
+          <a:noFill/>
+        </p:spPr>
+        <p:txBody>
+          <a:bodyPr wrap="square" anchor="ctr" lIns="0" rIns="0" tIns="0" bIns="0">
+            <a:spAutoFit/>
+          </a:bodyPr>
+          <a:lstStyle/>
+          <a:p>
+            <a:pPr algn="l">
+              <a:lnSpc>
+                <a:spcPct val="100000"/>
+              </a:lnSpc>
+            </a:pPr>
+            <a:r>
+              <a:rPr sz="1250" b="1" i="0">
+                <a:solidFill>
+                  <a:srgbClr val="2C2849"/>
+                </a:solidFill>
+                <a:latin typeface="Calibri"/>
+              </a:rPr>
+              <a:t>Sustentação e Incremento da Produção</a:t>
+            </a:r>
+          </a:p>
+        </p:txBody>
+      </p:sp>
+      <p:sp>
+        <p:nvSpPr>
+          <p:cNvPr id="14" name="Rounded Rectangle 13"/>
+          <p:cNvSpPr/>
+          <p:nvPr/>
+        </p:nvSpPr>
+        <p:spPr>
+          <a:xfrm>
+            <a:off x="6949440" y="3515868"/>
+            <a:ext cx="4206240" cy="237744"/>
+          </a:xfrm>
+          <a:prstGeom prst="roundRect">
+            <a:avLst>
+              <a:gd name="adj" fmla="val 50000"/>
+            </a:avLst>
+          </a:prstGeom>
+          <a:solidFill>
+            <a:srgbClr val="9787D4"/>
+          </a:solidFill>
+          <a:ln>
+            <a:noFill/>
+          </a:ln>
+          <a:effectLst/>
+        </p:spPr>
+        <p:style>
+          <a:lnRef idx="1">
+            <a:schemeClr val="accent1"/>
+          </a:lnRef>
+          <a:fillRef idx="3">
+            <a:schemeClr val="accent1"/>
+          </a:fillRef>
+          <a:effectRef idx="2">
+            <a:schemeClr val="accent1"/>
+          </a:effectRef>
+          <a:fontRef idx="minor">
+            <a:schemeClr val="lt1"/>
+          </a:fontRef>
+        </p:style>
+        <p:txBody>
+          <a:bodyPr rtlCol="0" anchor="ctr" lIns="50800" rIns="50800" tIns="0" bIns="0"/>
+          <a:lstStyle/>
+          <a:p>
+            <a:pPr algn="ctr"/>
+            <a:r>
+              <a:rPr sz="800" b="1">
+                <a:solidFill>
+                  <a:srgbClr val="2C2849"/>
+                </a:solidFill>
+                <a:latin typeface="Calibri"/>
+              </a:rPr>
+              <a:t>Diretriz 02 · Incremento de Reservas</a:t>
+            </a:r>
+          </a:p>
+        </p:txBody>
+      </p:sp>
+      <p:sp>
+        <p:nvSpPr>
+          <p:cNvPr id="15" name="TextBox 14"/>
+          <p:cNvSpPr txBox="1"/>
+          <p:nvPr/>
+        </p:nvSpPr>
+        <p:spPr>
+          <a:xfrm>
+            <a:off x="365760" y="3803904"/>
+            <a:ext cx="11457432" cy="292608"/>
+          </a:xfrm>
+          <a:prstGeom prst="rect">
+            <a:avLst/>
+          </a:prstGeom>
+          <a:noFill/>
+        </p:spPr>
+        <p:txBody>
+          <a:bodyPr wrap="square" anchor="t" lIns="0" rIns="0" tIns="0" bIns="0">
+            <a:spAutoFit/>
+          </a:bodyPr>
+          <a:lstStyle/>
+          <a:p>
+            <a:pPr algn="l">
+              <a:lnSpc>
+                <a:spcPct val="115000"/>
+              </a:lnSpc>
+            </a:pPr>
+            <a:r>
+              <a:rPr sz="930" b="0" i="0">
+                <a:solidFill>
+                  <a:srgbClr val="6B6682"/>
+                </a:solidFill>
+                <a:latin typeface="Calibri"/>
+              </a:rPr>
+              <a:t>Entregar o portfólio no prazo e dentro da curva, priorizando projetos de sustentação e incremento da produção por valor econômico, risco, prazo de captura e prontidão de execução.</a:t>
+            </a:r>
+          </a:p>
+        </p:txBody>
+      </p:sp>
+      <p:graphicFrame>
+        <p:nvGraphicFramePr>
+          <p:cNvPr id="16" name="Table 15"/>
+          <p:cNvGraphicFramePr>
+            <a:graphicFrameLocks noGrp="1"/>
+          </p:cNvGraphicFramePr>
+          <p:nvPr/>
+        </p:nvGraphicFramePr>
+        <p:xfrm>
+          <a:off x="365760" y="4123944"/>
+          <a:ext cx="11457430" cy="512064"/>
+        </p:xfrm>
+        <a:graphic>
+          <a:graphicData uri="http://schemas.openxmlformats.org/drawingml/2006/table">
+            <a:tbl>
+              <a:tblPr firstRow="1" bandRow="1">
+                <a:tableStyleId>{5C22544A-7EE6-4342-B048-85BDC9FD1C3A}</a:tableStyleId>
+              </a:tblPr>
+              <a:tblGrid>
+                <a:gridCol w="3840479"/>
+                <a:gridCol w="4142231"/>
+                <a:gridCol w="1005840"/>
+                <a:gridCol w="2468880"/>
+              </a:tblGrid>
+              <a:tr h="256032">
+                <a:tc>
+                  <a:txBody>
+                    <a:bodyPr/>
+                    <a:lstStyle/>
+                    <a:p>
+                      <a:r>
+                        <a:rPr b="1" sz="900">
+                          <a:solidFill>
+                            <a:srgbClr val="FFFFFF"/>
+                          </a:solidFill>
+                          <a:latin typeface="Calibri"/>
+                        </a:rPr>
+                        <a:t>Indicador</a:t>
+                      </a:r>
+                    </a:p>
+                  </a:txBody>
+                  <a:tcPr marL="76200" marR="76200" marT="25400" marB="25400" anchor="ctr">
+                    <a:solidFill>
+                      <a:srgbClr val="9787D4"/>
+                    </a:solidFill>
+                  </a:tcPr>
+                </a:tc>
+                <a:tc>
+                  <a:txBody>
+                    <a:bodyPr/>
+                    <a:lstStyle/>
+                    <a:p>
+                      <a:r>
+                        <a:rPr b="1" sz="900">
+                          <a:solidFill>
+                            <a:srgbClr val="FFFFFF"/>
+                          </a:solidFill>
+                          <a:latin typeface="Calibri"/>
+                        </a:rPr>
+                        <a:t>Fonte</a:t>
+                      </a:r>
+                    </a:p>
+                  </a:txBody>
+                  <a:tcPr marL="76200" marR="76200" marT="25400" marB="25400" anchor="ctr">
+                    <a:solidFill>
+                      <a:srgbClr val="9787D4"/>
+                    </a:solidFill>
+                  </a:tcPr>
+                </a:tc>
+                <a:tc>
+                  <a:txBody>
+                    <a:bodyPr/>
+                    <a:lstStyle/>
+                    <a:p>
+                      <a:r>
+                        <a:rPr b="1" sz="900">
+                          <a:solidFill>
+                            <a:srgbClr val="FFFFFF"/>
+                          </a:solidFill>
+                          <a:latin typeface="Calibri"/>
+                        </a:rPr>
+                        <a:t>Hoje</a:t>
+                      </a:r>
+                    </a:p>
+                  </a:txBody>
+                  <a:tcPr marL="76200" marR="76200" marT="25400" marB="25400" anchor="ctr">
+                    <a:solidFill>
+                      <a:srgbClr val="9787D4"/>
+                    </a:solidFill>
+                  </a:tcPr>
+                </a:tc>
+                <a:tc>
+                  <a:txBody>
+                    <a:bodyPr/>
+                    <a:lstStyle/>
+                    <a:p>
+                      <a:r>
+                        <a:rPr b="1" sz="900">
+                          <a:solidFill>
+                            <a:srgbClr val="FFFFFF"/>
+                          </a:solidFill>
+                          <a:latin typeface="Calibri"/>
+                        </a:rPr>
+                        <a:t>Meta 2027</a:t>
+                      </a:r>
+                    </a:p>
+                  </a:txBody>
+                  <a:tcPr marL="76200" marR="76200" marT="25400" marB="25400" anchor="ctr">
+                    <a:solidFill>
+                      <a:srgbClr val="9787D4"/>
+                    </a:solidFill>
+                  </a:tcPr>
+                </a:tc>
+              </a:tr>
+              <a:tr h="256032">
+                <a:tc>
+                  <a:txBody>
+                    <a:bodyPr/>
+                    <a:lstStyle/>
+                    <a:p>
+                      <a:r>
+                        <a:rPr sz="900">
+                          <a:solidFill>
+                            <a:srgbClr val="6B6682"/>
+                          </a:solidFill>
+                          <a:latin typeface="Calibri"/>
+                        </a:rPr>
+                        <a:t>Aderência da Curva S do Portfólio de DMP</a:t>
+                      </a:r>
+                    </a:p>
+                  </a:txBody>
+                  <a:tcPr marL="76200" marR="76200" marT="25400" marB="25400" anchor="ctr">
+                    <a:solidFill>
+                      <a:srgbClr val="FFFFFF"/>
+                    </a:solidFill>
+                  </a:tcPr>
+                </a:tc>
+                <a:tc>
+                  <a:txBody>
+                    <a:bodyPr/>
+                    <a:lstStyle/>
+                    <a:p>
+                      <a:r>
+                        <a:rPr sz="900">
+                          <a:solidFill>
+                            <a:srgbClr val="6B6682"/>
+                          </a:solidFill>
+                          <a:latin typeface="Calibri"/>
+                        </a:rPr>
+                        <a:t>Projetos em Planejamento — nota Actio média (16/08/2026)</a:t>
+                      </a:r>
+                    </a:p>
+                  </a:txBody>
+                  <a:tcPr marL="76200" marR="76200" marT="25400" marB="25400" anchor="ctr">
+                    <a:solidFill>
+                      <a:srgbClr val="FFFFFF"/>
+                    </a:solidFill>
+                  </a:tcPr>
+                </a:tc>
+                <a:tc>
+                  <a:txBody>
+                    <a:bodyPr/>
+                    <a:lstStyle/>
+                    <a:p>
+                      <a:r>
+                        <a:rPr sz="900">
+                          <a:solidFill>
+                            <a:srgbClr val="6B6682"/>
+                          </a:solidFill>
+                          <a:latin typeface="Calibri"/>
+                        </a:rPr>
+                        <a:t>71%</a:t>
+                      </a:r>
+                    </a:p>
+                  </a:txBody>
+                  <a:tcPr marL="76200" marR="76200" marT="25400" marB="25400" anchor="ctr">
+                    <a:solidFill>
+                      <a:srgbClr val="FFFFFF"/>
+                    </a:solidFill>
+                  </a:tcPr>
+                </a:tc>
+                <a:tc>
+                  <a:txBody>
+                    <a:bodyPr/>
+                    <a:lstStyle/>
+                    <a:p>
+                      <a:r>
+                        <a:rPr sz="900">
+                          <a:solidFill>
+                            <a:srgbClr val="6B6682"/>
+                          </a:solidFill>
+                          <a:latin typeface="Calibri"/>
+                        </a:rPr>
+                        <a:t>≥ 90%</a:t>
+                      </a:r>
+                    </a:p>
+                  </a:txBody>
+                  <a:tcPr marL="76200" marR="76200" marT="25400" marB="25400" anchor="ctr">
+                    <a:solidFill>
+                      <a:srgbClr val="FFFFFF"/>
+                    </a:solidFill>
+                  </a:tcPr>
+                </a:tc>
+              </a:tr>
+            </a:tbl>
+          </a:graphicData>
+        </a:graphic>
+      </p:graphicFrame>
+      <p:sp>
+        <p:nvSpPr>
+          <p:cNvPr id="17" name="Rounded Rectangle 16"/>
+          <p:cNvSpPr/>
+          <p:nvPr/>
+        </p:nvSpPr>
+        <p:spPr>
+          <a:xfrm>
+            <a:off x="365760" y="4782312"/>
+            <a:ext cx="548640" cy="237744"/>
+          </a:xfrm>
+          <a:prstGeom prst="roundRect">
+            <a:avLst>
+              <a:gd name="adj" fmla="val 50000"/>
+            </a:avLst>
+          </a:prstGeom>
+          <a:solidFill>
+            <a:srgbClr val="85E34D"/>
+          </a:solidFill>
+          <a:ln>
+            <a:noFill/>
+          </a:ln>
+          <a:effectLst/>
+        </p:spPr>
+        <p:style>
+          <a:lnRef idx="1">
+            <a:schemeClr val="accent1"/>
+          </a:lnRef>
+          <a:fillRef idx="3">
+            <a:schemeClr val="accent1"/>
+          </a:fillRef>
+          <a:effectRef idx="2">
+            <a:schemeClr val="accent1"/>
+          </a:effectRef>
+          <a:fontRef idx="minor">
+            <a:schemeClr val="lt1"/>
+          </a:fontRef>
+        </p:style>
+        <p:txBody>
+          <a:bodyPr rtlCol="0" anchor="ctr" lIns="50800" rIns="50800" tIns="0" bIns="0"/>
+          <a:lstStyle/>
+          <a:p>
+            <a:pPr algn="ctr"/>
+            <a:r>
+              <a:rPr sz="850" b="1">
+                <a:solidFill>
+                  <a:srgbClr val="2C2849"/>
+                </a:solidFill>
+                <a:latin typeface="Calibri"/>
+              </a:rPr>
+              <a:t>FB5</a:t>
+            </a:r>
+          </a:p>
+        </p:txBody>
+      </p:sp>
+      <p:sp>
+        <p:nvSpPr>
+          <p:cNvPr id="18" name="TextBox 17"/>
+          <p:cNvSpPr txBox="1"/>
+          <p:nvPr/>
+        </p:nvSpPr>
+        <p:spPr>
+          <a:xfrm>
+            <a:off x="1005840" y="4782312"/>
+            <a:ext cx="4937760" cy="256032"/>
+          </a:xfrm>
+          <a:prstGeom prst="rect">
+            <a:avLst/>
+          </a:prstGeom>
+          <a:noFill/>
+        </p:spPr>
+        <p:txBody>
+          <a:bodyPr wrap="square" anchor="ctr" lIns="0" rIns="0" tIns="0" bIns="0">
+            <a:spAutoFit/>
+          </a:bodyPr>
+          <a:lstStyle/>
+          <a:p>
+            <a:pPr algn="l">
+              <a:lnSpc>
+                <a:spcPct val="100000"/>
+              </a:lnSpc>
+            </a:pPr>
+            <a:r>
+              <a:rPr sz="1250" b="1" i="0">
+                <a:solidFill>
+                  <a:srgbClr val="2C2849"/>
+                </a:solidFill>
+                <a:latin typeface="Calibri"/>
+              </a:rPr>
+              <a:t>Gestão do Ciclo de Vida dos Ativos</a:t>
+            </a:r>
+          </a:p>
+        </p:txBody>
+      </p:sp>
+      <p:sp>
+        <p:nvSpPr>
+          <p:cNvPr id="19" name="Rounded Rectangle 18"/>
+          <p:cNvSpPr/>
+          <p:nvPr/>
+        </p:nvSpPr>
+        <p:spPr>
+          <a:xfrm>
+            <a:off x="6949440" y="4786884"/>
+            <a:ext cx="4206240" cy="237744"/>
+          </a:xfrm>
+          <a:prstGeom prst="roundRect">
+            <a:avLst>
+              <a:gd name="adj" fmla="val 50000"/>
+            </a:avLst>
+          </a:prstGeom>
+          <a:solidFill>
+            <a:srgbClr val="9787D4"/>
+          </a:solidFill>
+          <a:ln>
+            <a:noFill/>
+          </a:ln>
+          <a:effectLst/>
+        </p:spPr>
+        <p:style>
+          <a:lnRef idx="1">
+            <a:schemeClr val="accent1"/>
+          </a:lnRef>
+          <a:fillRef idx="3">
+            <a:schemeClr val="accent1"/>
+          </a:fillRef>
+          <a:effectRef idx="2">
+            <a:schemeClr val="accent1"/>
+          </a:effectRef>
+          <a:fontRef idx="minor">
+            <a:schemeClr val="lt1"/>
+          </a:fontRef>
+        </p:style>
+        <p:txBody>
+          <a:bodyPr rtlCol="0" anchor="ctr" lIns="50800" rIns="50800" tIns="0" bIns="0"/>
+          <a:lstStyle/>
+          <a:p>
+            <a:pPr algn="ctr"/>
+            <a:r>
+              <a:rPr sz="800" b="1">
+                <a:solidFill>
+                  <a:srgbClr val="2C2849"/>
+                </a:solidFill>
+                <a:latin typeface="Calibri"/>
+              </a:rPr>
+              <a:t>Diretriz 03 · Extensão da Vida Útil</a:t>
+            </a:r>
+          </a:p>
+        </p:txBody>
+      </p:sp>
+      <p:sp>
+        <p:nvSpPr>
+          <p:cNvPr id="20" name="TextBox 19"/>
+          <p:cNvSpPr txBox="1"/>
+          <p:nvPr/>
+        </p:nvSpPr>
+        <p:spPr>
+          <a:xfrm>
+            <a:off x="365760" y="5074920"/>
+            <a:ext cx="11457432" cy="457200"/>
+          </a:xfrm>
+          <a:prstGeom prst="rect">
+            <a:avLst/>
+          </a:prstGeom>
+          <a:noFill/>
+        </p:spPr>
+        <p:txBody>
+          <a:bodyPr wrap="square" anchor="t" lIns="0" rIns="0" tIns="0" bIns="0">
+            <a:spAutoFit/>
+          </a:bodyPr>
+          <a:lstStyle/>
+          <a:p>
+            <a:pPr algn="l">
+              <a:lnSpc>
+                <a:spcPct val="115000"/>
+              </a:lnSpc>
+            </a:pPr>
+            <a:r>
+              <a:rPr sz="930" b="0" i="0">
+                <a:solidFill>
+                  <a:srgbClr val="6B6682"/>
+                </a:solidFill>
+                <a:latin typeface="Calibri"/>
+              </a:rPr>
+              <a:t>Gerir degradação, obsolescência e vida remanescente dos ativos com base em criticidade e horizonte econômico.</a:t>
+            </a:r>
+          </a:p>
+        </p:txBody>
+      </p:sp>
+      <p:graphicFrame>
+        <p:nvGraphicFramePr>
+          <p:cNvPr id="21" name="Table 20"/>
+          <p:cNvGraphicFramePr>
+            <a:graphicFrameLocks noGrp="1"/>
+          </p:cNvGraphicFramePr>
+          <p:nvPr/>
+        </p:nvGraphicFramePr>
+        <p:xfrm>
+          <a:off x="365760" y="5559552"/>
+          <a:ext cx="11457429" cy="768096"/>
+        </p:xfrm>
+        <a:graphic>
+          <a:graphicData uri="http://schemas.openxmlformats.org/drawingml/2006/table">
+            <a:tbl>
+              <a:tblPr firstRow="1" bandRow="1">
+                <a:tableStyleId>{5C22544A-7EE6-4342-B048-85BDC9FD1C3A}</a:tableStyleId>
+              </a:tblPr>
+              <a:tblGrid>
+                <a:gridCol w="3840479"/>
+                <a:gridCol w="3044951"/>
+                <a:gridCol w="2103119"/>
+                <a:gridCol w="2468880"/>
+              </a:tblGrid>
+              <a:tr h="256032">
+                <a:tc>
+                  <a:txBody>
+                    <a:bodyPr/>
+                    <a:lstStyle/>
+                    <a:p>
+                      <a:r>
+                        <a:rPr b="1" sz="900">
+                          <a:solidFill>
+                            <a:srgbClr val="FFFFFF"/>
+                          </a:solidFill>
+                          <a:latin typeface="Calibri"/>
+                        </a:rPr>
+                        <a:t>Indicador</a:t>
+                      </a:r>
+                    </a:p>
+                  </a:txBody>
+                  <a:tcPr marL="76200" marR="76200" marT="25400" marB="25400" anchor="ctr">
+                    <a:solidFill>
+                      <a:srgbClr val="9787D4"/>
+                    </a:solidFill>
+                  </a:tcPr>
+                </a:tc>
+                <a:tc>
+                  <a:txBody>
+                    <a:bodyPr/>
+                    <a:lstStyle/>
+                    <a:p>
+                      <a:r>
+                        <a:rPr b="1" sz="900">
+                          <a:solidFill>
+                            <a:srgbClr val="FFFFFF"/>
+                          </a:solidFill>
+                          <a:latin typeface="Calibri"/>
+                        </a:rPr>
+                        <a:t>Fonte</a:t>
+                      </a:r>
+                    </a:p>
+                  </a:txBody>
+                  <a:tcPr marL="76200" marR="76200" marT="25400" marB="25400" anchor="ctr">
+                    <a:solidFill>
+                      <a:srgbClr val="9787D4"/>
+                    </a:solidFill>
+                  </a:tcPr>
+                </a:tc>
+                <a:tc>
+                  <a:txBody>
+                    <a:bodyPr/>
+                    <a:lstStyle/>
+                    <a:p>
+                      <a:r>
+                        <a:rPr b="1" sz="900">
+                          <a:solidFill>
+                            <a:srgbClr val="FFFFFF"/>
+                          </a:solidFill>
+                          <a:latin typeface="Calibri"/>
+                        </a:rPr>
+                        <a:t>Hoje</a:t>
+                      </a:r>
+                    </a:p>
+                  </a:txBody>
+                  <a:tcPr marL="76200" marR="76200" marT="25400" marB="25400" anchor="ctr">
+                    <a:solidFill>
+                      <a:srgbClr val="9787D4"/>
+                    </a:solidFill>
+                  </a:tcPr>
+                </a:tc>
+                <a:tc>
+                  <a:txBody>
+                    <a:bodyPr/>
+                    <a:lstStyle/>
+                    <a:p>
+                      <a:r>
+                        <a:rPr b="1" sz="900">
+                          <a:solidFill>
+                            <a:srgbClr val="FFFFFF"/>
+                          </a:solidFill>
+                          <a:latin typeface="Calibri"/>
+                        </a:rPr>
+                        <a:t>Meta 2027</a:t>
+                      </a:r>
+                    </a:p>
+                  </a:txBody>
+                  <a:tcPr marL="76200" marR="76200" marT="25400" marB="25400" anchor="ctr">
+                    <a:solidFill>
+                      <a:srgbClr val="9787D4"/>
+                    </a:solidFill>
+                  </a:tcPr>
+                </a:tc>
+              </a:tr>
+              <a:tr h="256032">
+                <a:tc>
+                  <a:txBody>
+                    <a:bodyPr/>
+                    <a:lstStyle/>
+                    <a:p>
+                      <a:r>
+                        <a:rPr sz="900">
+                          <a:solidFill>
+                            <a:srgbClr val="6B6682"/>
+                          </a:solidFill>
+                          <a:latin typeface="Calibri"/>
+                        </a:rPr>
+                        <a:t>Plano de Recuperação de Equipamentos Obsolescentes</a:t>
+                      </a:r>
+                    </a:p>
+                  </a:txBody>
+                  <a:tcPr marL="76200" marR="76200" marT="25400" marB="25400" anchor="ctr">
+                    <a:solidFill>
+                      <a:srgbClr val="FFFFFF"/>
+                    </a:solidFill>
+                  </a:tcPr>
+                </a:tc>
+                <a:tc>
+                  <a:txBody>
+                    <a:bodyPr/>
+                    <a:lstStyle/>
+                    <a:p>
+                      <a:r>
+                        <a:rPr sz="900">
+                          <a:solidFill>
+                            <a:srgbClr val="6B6682"/>
+                          </a:solidFill>
+                          <a:latin typeface="Calibri"/>
+                        </a:rPr>
+                        <a:t>Portfólio — a instrumentar</a:t>
+                      </a:r>
+                    </a:p>
+                  </a:txBody>
+                  <a:tcPr marL="76200" marR="76200" marT="25400" marB="25400" anchor="ctr">
+                    <a:solidFill>
+                      <a:srgbClr val="FFFFFF"/>
+                    </a:solidFill>
+                  </a:tcPr>
+                </a:tc>
+                <a:tc>
+                  <a:txBody>
+                    <a:bodyPr/>
+                    <a:lstStyle/>
+                    <a:p>
+                      <a:r>
+                        <a:rPr sz="900">
+                          <a:solidFill>
+                            <a:srgbClr val="6B6682"/>
+                          </a:solidFill>
+                          <a:latin typeface="Calibri"/>
+                        </a:rPr>
+                        <a:t>100% do crítico mapeado</a:t>
+                      </a:r>
+                    </a:p>
+                  </a:txBody>
+                  <a:tcPr marL="76200" marR="76200" marT="25400" marB="25400" anchor="ctr">
+                    <a:solidFill>
+                      <a:srgbClr val="FFFFFF"/>
+                    </a:solidFill>
+                  </a:tcPr>
+                </a:tc>
+                <a:tc>
+                  <a:txBody>
+                    <a:bodyPr/>
+                    <a:lstStyle/>
+                    <a:p>
+                      <a:r>
+                        <a:rPr sz="900">
+                          <a:solidFill>
+                            <a:srgbClr val="6B6682"/>
+                          </a:solidFill>
+                          <a:latin typeface="Calibri"/>
+                        </a:rPr>
+                        <a:t>sem meta numérica</a:t>
+                      </a:r>
+                    </a:p>
+                  </a:txBody>
+                  <a:tcPr marL="76200" marR="76200" marT="25400" marB="25400" anchor="ctr">
+                    <a:solidFill>
+                      <a:srgbClr val="FFFFFF"/>
+                    </a:solidFill>
+                  </a:tcPr>
+                </a:tc>
+              </a:tr>
+              <a:tr h="256032">
+                <a:tc>
+                  <a:txBody>
+                    <a:bodyPr/>
+                    <a:lstStyle/>
+                    <a:p>
+                      <a:r>
+                        <a:rPr sz="900">
+                          <a:solidFill>
+                            <a:srgbClr val="6B6682"/>
+                          </a:solidFill>
+                          <a:latin typeface="Calibri"/>
+                        </a:rPr>
+                        <a:t>Cumprimento de inspeções de amarras, risers, casco e mangotes</a:t>
+                      </a:r>
+                    </a:p>
+                  </a:txBody>
+                  <a:tcPr marL="76200" marR="76200" marT="25400" marB="25400" anchor="ctr">
+                    <a:solidFill>
+                      <a:srgbClr val="F8F7F6"/>
+                    </a:solidFill>
+                  </a:tcPr>
+                </a:tc>
+                <a:tc>
+                  <a:txBody>
+                    <a:bodyPr/>
+                    <a:lstStyle/>
+                    <a:p>
+                      <a:r>
+                        <a:rPr sz="900">
+                          <a:solidFill>
+                            <a:srgbClr val="6B6682"/>
+                          </a:solidFill>
+                          <a:latin typeface="Calibri"/>
+                        </a:rPr>
+                        <a:t>—</a:t>
+                      </a:r>
+                    </a:p>
+                  </a:txBody>
+                  <a:tcPr marL="76200" marR="76200" marT="25400" marB="25400" anchor="ctr">
+                    <a:solidFill>
+                      <a:srgbClr val="F8F7F6"/>
+                    </a:solidFill>
+                  </a:tcPr>
+                </a:tc>
+                <a:tc>
+                  <a:txBody>
+                    <a:bodyPr/>
+                    <a:lstStyle/>
+                    <a:p>
+                      <a:r>
+                        <a:rPr sz="900">
+                          <a:solidFill>
+                            <a:srgbClr val="6B6682"/>
+                          </a:solidFill>
+                          <a:latin typeface="Calibri"/>
+                        </a:rPr>
+                        <a:t>—</a:t>
+                      </a:r>
+                    </a:p>
+                  </a:txBody>
+                  <a:tcPr marL="76200" marR="76200" marT="25400" marB="25400" anchor="ctr">
+                    <a:solidFill>
+                      <a:srgbClr val="F8F7F6"/>
+                    </a:solidFill>
+                  </a:tcPr>
+                </a:tc>
+                <a:tc>
+                  <a:txBody>
+                    <a:bodyPr/>
+                    <a:lstStyle/>
+                    <a:p>
+                      <a:r>
+                        <a:rPr sz="900">
+                          <a:solidFill>
+                            <a:srgbClr val="6B6682"/>
+                          </a:solidFill>
+                          <a:latin typeface="Calibri"/>
+                        </a:rPr>
+                        <a:t>sem meta numérica</a:t>
+                      </a:r>
+                    </a:p>
+                  </a:txBody>
+                  <a:tcPr marL="76200" marR="76200" marT="25400" marB="25400" anchor="ctr">
+                    <a:solidFill>
+                      <a:srgbClr val="F8F7F6"/>
+                    </a:solidFill>
+                  </a:tcPr>
+                </a:tc>
+              </a:tr>
+            </a:tbl>
+          </a:graphicData>
+        </a:graphic>
+      </p:graphicFrame>
+      <p:sp>
+        <p:nvSpPr>
+          <p:cNvPr id="22" name="TextBox 21"/>
+          <p:cNvSpPr txBox="1"/>
+          <p:nvPr/>
+        </p:nvSpPr>
+        <p:spPr>
+          <a:xfrm>
+            <a:off x="11338560" y="6547104"/>
+            <a:ext cx="457200" cy="256032"/>
+          </a:xfrm>
+          <a:prstGeom prst="rect">
+            <a:avLst/>
+          </a:prstGeom>
+          <a:noFill/>
+        </p:spPr>
+        <p:txBody>
+          <a:bodyPr wrap="square" anchor="ctr" lIns="0" rIns="0" tIns="0" bIns="0">
+            <a:spAutoFit/>
+          </a:bodyPr>
+          <a:lstStyle/>
+          <a:p>
+            <a:pPr algn="r">
+              <a:lnSpc>
+                <a:spcPct val="100000"/>
+              </a:lnSpc>
+            </a:pPr>
+            <a:r>
+              <a:rPr sz="850" b="0" i="0">
+                <a:solidFill>
+                  <a:srgbClr val="6B6682"/>
+                </a:solidFill>
+                <a:latin typeface="Calibri"/>
+              </a:rPr>
+              <a:t>12</a:t>
+            </a:r>
+          </a:p>
+        </p:txBody>
+      </p:sp>
+    </p:spTree>
+  </p:cSld>
+  <p:clrMapOvr>
+    <a:masterClrMapping/>
+  </p:clrMapOvr>
+</p:sld>
+</file>
+
+<file path=ppt/slides/slide14.xml><?xml version="1.0" encoding="utf-8"?>
 <p:sld xmlns:a="http://schemas.openxmlformats.org/drawingml/2006/main" xmlns:r="http://schemas.openxmlformats.org/officeDocument/2006/relationships" xmlns:p="http://schemas.openxmlformats.org/presentationml/2006/main">
   <p:cSld name="Slide 14">
     <p:bg>
@@ -3487,7 +7859,7 @@
                 <a:ea typeface="Calibri" pitchFamily="34" charset="-122"/>
                 <a:cs typeface="Calibri" pitchFamily="34" charset="-120"/>
               </a:rPr>
-              <a:t>SEÇÃO 06 · GOVERNANÇA</a:t>
+              <a:t>SEÇÃO 04 · GOVERNANÇA</a:t>
             </a:r>
             <a:endParaRPr lang="en-US" sz="1200" dirty="0"/>
           </a:p>
@@ -4572,7 +8944,7 @@
                 <a:ea typeface="Calibri" pitchFamily="34" charset="-122"/>
                 <a:cs typeface="Calibri" pitchFamily="34" charset="-120"/>
               </a:rPr>
-              <a:t>9</a:t>
+              <a:t>13</a:t>
             </a:r>
             <a:endParaRPr lang="en-US" sz="850" dirty="0"/>
           </a:p>
@@ -4586,7 +8958,7 @@
 </p:sld>
 </file>
 
-<file path=ppt/slides/slide11.xml><?xml version="1.0" encoding="utf-8"?>
+<file path=ppt/slides/slide15.xml><?xml version="1.0" encoding="utf-8"?>
 <p:sld xmlns:a="http://schemas.openxmlformats.org/drawingml/2006/main" xmlns:r="http://schemas.openxmlformats.org/officeDocument/2006/relationships" xmlns:p="http://schemas.openxmlformats.org/presentationml/2006/main">
   <p:cSld name="Slide 15">
     <p:bg>
@@ -4697,7 +9069,7 @@
                 <a:ea typeface="Calibri" pitchFamily="34" charset="-122"/>
                 <a:cs typeface="Calibri" pitchFamily="34" charset="-120"/>
               </a:rPr>
-              <a:t>SEÇÃO 07 · QUEM ALIMENTA O PLANO (1/3)</a:t>
+              <a:t>SEÇÃO 05 · QUEM ALIMENTA O PLANO (1/3)</a:t>
             </a:r>
             <a:endParaRPr lang="en-US" sz="1200" dirty="0"/>
           </a:p>
@@ -6637,7 +11009,7 @@
                 <a:ea typeface="Calibri" pitchFamily="34" charset="-122"/>
                 <a:cs typeface="Calibri" pitchFamily="34" charset="-120"/>
               </a:rPr>
-              <a:t>10</a:t>
+              <a:t>14</a:t>
             </a:r>
             <a:endParaRPr lang="en-US" sz="850" dirty="0"/>
           </a:p>
@@ -6651,7 +11023,7 @@
 </p:sld>
 </file>
 
-<file path=ppt/slides/slide12.xml><?xml version="1.0" encoding="utf-8"?>
+<file path=ppt/slides/slide16.xml><?xml version="1.0" encoding="utf-8"?>
 <p:sld xmlns:a="http://schemas.openxmlformats.org/drawingml/2006/main" xmlns:r="http://schemas.openxmlformats.org/officeDocument/2006/relationships" xmlns:p="http://schemas.openxmlformats.org/presentationml/2006/main">
   <p:cSld name="Slide 16">
     <p:bg>
@@ -6762,7 +11134,7 @@
                 <a:ea typeface="Calibri" pitchFamily="34" charset="-122"/>
                 <a:cs typeface="Calibri" pitchFamily="34" charset="-120"/>
               </a:rPr>
-              <a:t>SEÇÃO 07 · QUEM ALIMENTA O PLANO (2/3)</a:t>
+              <a:t>SEÇÃO 05 · QUEM ALIMENTA O PLANO (2/3)</a:t>
             </a:r>
             <a:endParaRPr lang="en-US" sz="1200" dirty="0"/>
           </a:p>
@@ -8680,7 +13052,7 @@
                 <a:ea typeface="Calibri" pitchFamily="34" charset="-122"/>
                 <a:cs typeface="Calibri" pitchFamily="34" charset="-120"/>
               </a:rPr>
-              <a:t>11</a:t>
+              <a:t>15</a:t>
             </a:r>
             <a:endParaRPr lang="en-US" sz="850" dirty="0"/>
           </a:p>
@@ -8694,7 +13066,7 @@
 </p:sld>
 </file>
 
-<file path=ppt/slides/slide13.xml><?xml version="1.0" encoding="utf-8"?>
+<file path=ppt/slides/slide17.xml><?xml version="1.0" encoding="utf-8"?>
 <p:sld xmlns:a="http://schemas.openxmlformats.org/drawingml/2006/main" xmlns:r="http://schemas.openxmlformats.org/officeDocument/2006/relationships" xmlns:p="http://schemas.openxmlformats.org/presentationml/2006/main">
   <p:cSld name="Slide 17">
     <p:bg>
@@ -8805,7 +13177,7 @@
                 <a:ea typeface="Calibri" pitchFamily="34" charset="-122"/>
                 <a:cs typeface="Calibri" pitchFamily="34" charset="-120"/>
               </a:rPr>
-              <a:t>SEÇÃO 07 · QUEM ALIMENTA O PLANO (3/3)</a:t>
+              <a:t>SEÇÃO 05 · QUEM ALIMENTA O PLANO (3/3)</a:t>
             </a:r>
             <a:endParaRPr lang="en-US" sz="1200" dirty="0"/>
           </a:p>
@@ -10778,7 +15150,7 @@
                 <a:ea typeface="Calibri" pitchFamily="34" charset="-122"/>
                 <a:cs typeface="Calibri" pitchFamily="34" charset="-120"/>
               </a:rPr>
-              <a:t>12</a:t>
+              <a:t>16</a:t>
             </a:r>
             <a:endParaRPr lang="en-US" sz="850" dirty="0"/>
           </a:p>
@@ -10792,7 +15164,7 @@
 </p:sld>
 </file>
 
-<file path=ppt/slides/slide14.xml><?xml version="1.0" encoding="utf-8"?>
+<file path=ppt/slides/slide18.xml><?xml version="1.0" encoding="utf-8"?>
 <p:sld xmlns:a="http://schemas.openxmlformats.org/drawingml/2006/main" xmlns:r="http://schemas.openxmlformats.org/officeDocument/2006/relationships" xmlns:p="http://schemas.openxmlformats.org/presentationml/2006/main">
   <p:cSld name="Slide 18">
     <p:bg>
@@ -10903,7 +15275,7 @@
                 <a:ea typeface="Calibri" pitchFamily="34" charset="-122"/>
                 <a:cs typeface="Calibri" pitchFamily="34" charset="-120"/>
               </a:rPr>
-              <a:t>SEÇÃO 08 · REGRAS TRANSVERSAIS</a:t>
+              <a:t>SEÇÃO 06 · REGRAS TRANSVERSAIS</a:t>
             </a:r>
             <a:endParaRPr lang="en-US" sz="1200" dirty="0"/>
           </a:p>
@@ -11843,7 +16215,7 @@
                 <a:ea typeface="Calibri" pitchFamily="34" charset="-122"/>
                 <a:cs typeface="Calibri" pitchFamily="34" charset="-120"/>
               </a:rPr>
-              <a:t>13</a:t>
+              <a:t>17</a:t>
             </a:r>
             <a:endParaRPr lang="en-US" sz="850" dirty="0"/>
           </a:p>
@@ -11857,7 +16229,7 @@
 </p:sld>
 </file>
 
-<file path=ppt/slides/slide15.xml><?xml version="1.0" encoding="utf-8"?>
+<file path=ppt/slides/slide19.xml><?xml version="1.0" encoding="utf-8"?>
 <p:sld xmlns:a="http://schemas.openxmlformats.org/drawingml/2006/main" xmlns:r="http://schemas.openxmlformats.org/officeDocument/2006/relationships" xmlns:p="http://schemas.openxmlformats.org/presentationml/2006/main">
   <p:cSld name="Slide 19">
     <p:bg>
@@ -11968,7 +16340,7 @@
                 <a:ea typeface="Calibri" pitchFamily="34" charset="-122"/>
                 <a:cs typeface="Calibri" pitchFamily="34" charset="-120"/>
               </a:rPr>
-              <a:t>SEÇÃO 09 · LEVANTAMENTO</a:t>
+              <a:t>SEÇÃO 07 · LEVANTAMENTO</a:t>
             </a:r>
             <a:endParaRPr lang="en-US" sz="1200" dirty="0"/>
           </a:p>
@@ -12763,7 +17135,7 @@
                           <a:ea typeface="Calibri" pitchFamily="34" charset="-122"/>
                           <a:cs typeface="Calibri" pitchFamily="34" charset="-120"/>
                         </a:rPr>
-                        <a:t>Respostas aos critérios de Segurança, Regulatório, Financeiro/Patrimônio e Produção — ver seção 05</a:t>
+                        <a:t>Respostas aos critérios de Segurança, Regulatório, Financeiro/Patrimônio e Produção</a:t>
                       </a:r>
                       <a:endParaRPr lang="en-US" sz="1050" dirty="0">
                         <a:latin typeface="Calibri" charset="0"/>
@@ -12857,7 +17229,7 @@
                 <a:ea typeface="Calibri" pitchFamily="34" charset="-122"/>
                 <a:cs typeface="Calibri" pitchFamily="34" charset="-120"/>
               </a:rPr>
-              <a:t>14</a:t>
+              <a:t>18</a:t>
             </a:r>
             <a:endParaRPr lang="en-US" sz="850" dirty="0"/>
           </a:p>
@@ -12871,7 +17243,1611 @@
 </p:sld>
 </file>
 
-<file path=ppt/slides/slide16.xml><?xml version="1.0" encoding="utf-8"?>
+<file path=ppt/slides/slide2.xml><?xml version="1.0" encoding="utf-8"?>
+<p:sld xmlns:a="http://schemas.openxmlformats.org/drawingml/2006/main" xmlns:r="http://schemas.openxmlformats.org/officeDocument/2006/relationships" xmlns:p="http://schemas.openxmlformats.org/presentationml/2006/main">
+  <p:cSld name="Slide 2">
+    <p:bg>
+      <p:bgPr>
+        <a:solidFill>
+          <a:srgbClr val="FFFFFF"/>
+        </a:solidFill>
+        <a:effectLst/>
+      </p:bgPr>
+    </p:bg>
+    <p:spTree>
+      <p:nvGrpSpPr>
+        <p:cNvPr id="1" name=""/>
+        <p:cNvGrpSpPr/>
+        <p:nvPr/>
+      </p:nvGrpSpPr>
+      <p:grpSpPr>
+        <a:xfrm>
+          <a:off x="0" y="0"/>
+          <a:ext cx="0" cy="0"/>
+          <a:chOff x="0" y="0"/>
+          <a:chExt cx="0" cy="0"/>
+        </a:xfrm>
+      </p:grpSpPr>
+      <p:sp>
+        <p:nvSpPr>
+          <p:cNvPr id="2" name="Shape 0"/>
+          <p:cNvSpPr/>
+          <p:nvPr/>
+        </p:nvSpPr>
+        <p:spPr>
+          <a:xfrm>
+            <a:off x="365760" y="292608"/>
+            <a:ext cx="1371600" cy="384048"/>
+          </a:xfrm>
+          <a:prstGeom prst="roundRect">
+            <a:avLst>
+              <a:gd name="adj" fmla="val 19048"/>
+            </a:avLst>
+          </a:prstGeom>
+          <a:solidFill>
+            <a:srgbClr val="2C2849"/>
+          </a:solidFill>
+          <a:ln/>
+        </p:spPr>
+        <p:txBody>
+          <a:bodyPr/>
+          <a:lstStyle/>
+          <a:p>
+            <a:endParaRPr lang="pt-BR"/>
+          </a:p>
+        </p:txBody>
+      </p:sp>
+      <p:pic>
+        <p:nvPicPr>
+          <p:cNvPr id="3" name="Image 0" descr="/tmp/claude-0/-workspace-Planejamento/79ba2b6d-20da-5e48-9126-441c472dc123/scratchpad/prio_logo_white.png"/>
+          <p:cNvPicPr>
+            <a:picLocks noChangeAspect="1"/>
+          </p:cNvPicPr>
+          <p:nvPr/>
+        </p:nvPicPr>
+        <p:blipFill>
+          <a:blip r:embed="rId3"/>
+          <a:stretch>
+            <a:fillRect/>
+          </a:stretch>
+        </p:blipFill>
+        <p:spPr>
+          <a:xfrm>
+            <a:off x="530352" y="402336"/>
+            <a:ext cx="1042416" cy="198425"/>
+          </a:xfrm>
+          <a:prstGeom prst="rect">
+            <a:avLst/>
+          </a:prstGeom>
+        </p:spPr>
+      </p:pic>
+      <p:sp>
+        <p:nvSpPr>
+          <p:cNvPr id="4" name="Text 1"/>
+          <p:cNvSpPr/>
+          <p:nvPr/>
+        </p:nvSpPr>
+        <p:spPr>
+          <a:xfrm>
+            <a:off x="365760" y="841248"/>
+            <a:ext cx="8229600" cy="274320"/>
+          </a:xfrm>
+          <a:prstGeom prst="rect">
+            <a:avLst/>
+          </a:prstGeom>
+          <a:noFill/>
+          <a:ln/>
+        </p:spPr>
+        <p:txBody>
+          <a:bodyPr wrap="square" lIns="0" tIns="0" rIns="0" bIns="0" rtlCol="0" anchor="ctr"/>
+          <a:lstStyle/>
+          <a:p>
+            <a:pPr marL="0" indent="0">
+              <a:buNone/>
+            </a:pPr>
+            <a:r>
+              <a:rPr lang="en-US" sz="1200" b="1" kern="0" spc="100" dirty="0">
+                <a:solidFill>
+                  <a:srgbClr val="F2834B"/>
+                </a:solidFill>
+                <a:latin typeface="Calibri" pitchFamily="34" charset="0"/>
+                <a:ea typeface="Calibri" pitchFamily="34" charset="-122"/>
+                <a:cs typeface="Calibri" pitchFamily="34" charset="-120"/>
+              </a:rPr>
+              <a:t>SUMÁRIO</a:t>
+            </a:r>
+            <a:endParaRPr lang="en-US" sz="1200" dirty="0"/>
+          </a:p>
+        </p:txBody>
+      </p:sp>
+      <p:sp>
+        <p:nvSpPr>
+          <p:cNvPr id="5" name="Text 2"/>
+          <p:cNvSpPr/>
+          <p:nvPr/>
+        </p:nvSpPr>
+        <p:spPr>
+          <a:xfrm>
+            <a:off x="365760" y="1115568"/>
+            <a:ext cx="11457432" cy="566928"/>
+          </a:xfrm>
+          <a:prstGeom prst="rect">
+            <a:avLst/>
+          </a:prstGeom>
+          <a:noFill/>
+          <a:ln/>
+        </p:spPr>
+        <p:txBody>
+          <a:bodyPr wrap="square" lIns="0" tIns="0" rIns="0" bIns="0" rtlCol="0" anchor="ctr"/>
+          <a:lstStyle/>
+          <a:p>
+            <a:pPr marL="0" indent="0">
+              <a:buNone/>
+            </a:pPr>
+            <a:r>
+              <a:rPr lang="en-US" sz="2900" b="1" dirty="0">
+                <a:solidFill>
+                  <a:srgbClr val="2C2849"/>
+                </a:solidFill>
+                <a:latin typeface="Calibri" pitchFamily="34" charset="0"/>
+                <a:ea typeface="Calibri" pitchFamily="34" charset="-122"/>
+                <a:cs typeface="Calibri" pitchFamily="34" charset="-120"/>
+              </a:rPr>
+              <a:t>Nove etapas, uma linha de raciocínio única</a:t>
+            </a:r>
+            <a:endParaRPr lang="en-US" sz="2900" dirty="0"/>
+          </a:p>
+        </p:txBody>
+      </p:sp>
+      <p:sp>
+        <p:nvSpPr>
+          <p:cNvPr id="6" name="Text 3"/>
+          <p:cNvSpPr/>
+          <p:nvPr/>
+        </p:nvSpPr>
+        <p:spPr>
+          <a:xfrm>
+            <a:off x="365760" y="1700784"/>
+            <a:ext cx="11457432" cy="457200"/>
+          </a:xfrm>
+          <a:prstGeom prst="rect">
+            <a:avLst/>
+          </a:prstGeom>
+          <a:noFill/>
+          <a:ln/>
+        </p:spPr>
+        <p:txBody>
+          <a:bodyPr wrap="square" lIns="0" tIns="0" rIns="0" bIns="0" rtlCol="0" anchor="ctr"/>
+          <a:lstStyle/>
+          <a:p>
+            <a:pPr marL="0" indent="0">
+              <a:lnSpc>
+                <a:spcPct val="115000"/>
+              </a:lnSpc>
+              <a:buNone/>
+            </a:pPr>
+            <a:r>
+              <a:rPr lang="en-US" sz="1250" dirty="0">
+                <a:solidFill>
+                  <a:srgbClr val="6B6682"/>
+                </a:solidFill>
+                <a:latin typeface="Calibri" pitchFamily="34" charset="0"/>
+                <a:ea typeface="Calibri" pitchFamily="34" charset="-122"/>
+                <a:cs typeface="Calibri" pitchFamily="34" charset="-120"/>
+              </a:rPr>
+              <a:t>Do fluxo do processo até as pendências que ainda precisam de validação do Diretor.</a:t>
+            </a:r>
+            <a:endParaRPr lang="en-US" sz="1250" dirty="0"/>
+          </a:p>
+        </p:txBody>
+      </p:sp>
+      <p:sp>
+        <p:nvSpPr>
+          <p:cNvPr id="7" name="Shape 4"/>
+          <p:cNvSpPr/>
+          <p:nvPr/>
+        </p:nvSpPr>
+        <p:spPr>
+          <a:xfrm>
+            <a:off x="365760" y="2331720"/>
+            <a:ext cx="457200" cy="457200"/>
+          </a:xfrm>
+          <a:prstGeom prst="roundRect">
+            <a:avLst>
+              <a:gd name="adj" fmla="val 50000"/>
+            </a:avLst>
+          </a:prstGeom>
+          <a:solidFill>
+            <a:srgbClr val="F8F7F6"/>
+          </a:solidFill>
+          <a:ln w="12700">
+            <a:solidFill>
+              <a:srgbClr val="E1DDEC"/>
+            </a:solidFill>
+            <a:prstDash val="solid"/>
+          </a:ln>
+        </p:spPr>
+        <p:txBody>
+          <a:bodyPr/>
+          <a:lstStyle/>
+          <a:p>
+            <a:endParaRPr lang="pt-BR"/>
+          </a:p>
+        </p:txBody>
+      </p:sp>
+      <p:sp>
+        <p:nvSpPr>
+          <p:cNvPr id="8" name="Text 5"/>
+          <p:cNvSpPr/>
+          <p:nvPr/>
+        </p:nvSpPr>
+        <p:spPr>
+          <a:xfrm>
+            <a:off x="365760" y="2331720"/>
+            <a:ext cx="457200" cy="457200"/>
+          </a:xfrm>
+          <a:prstGeom prst="rect">
+            <a:avLst/>
+          </a:prstGeom>
+          <a:noFill/>
+          <a:ln/>
+        </p:spPr>
+        <p:txBody>
+          <a:bodyPr wrap="square" lIns="0" tIns="0" rIns="0" bIns="0" rtlCol="0" anchor="ctr"/>
+          <a:lstStyle/>
+          <a:p>
+            <a:pPr marL="0" indent="0" algn="ctr">
+              <a:buNone/>
+            </a:pPr>
+            <a:r>
+              <a:rPr lang="en-US" sz="1400" b="1" dirty="0">
+                <a:solidFill>
+                  <a:srgbClr val="F2834B"/>
+                </a:solidFill>
+                <a:latin typeface="Calibri" pitchFamily="34" charset="0"/>
+                <a:ea typeface="Calibri" pitchFamily="34" charset="-122"/>
+                <a:cs typeface="Calibri" pitchFamily="34" charset="-120"/>
+              </a:rPr>
+              <a:t>01</a:t>
+            </a:r>
+            <a:endParaRPr lang="en-US" sz="1400" dirty="0"/>
+          </a:p>
+        </p:txBody>
+      </p:sp>
+      <p:sp>
+        <p:nvSpPr>
+          <p:cNvPr id="9" name="Text 6"/>
+          <p:cNvSpPr/>
+          <p:nvPr/>
+        </p:nvSpPr>
+        <p:spPr>
+          <a:xfrm>
+            <a:off x="950976" y="2276856"/>
+            <a:ext cx="4901184" cy="310896"/>
+          </a:xfrm>
+          <a:prstGeom prst="rect">
+            <a:avLst/>
+          </a:prstGeom>
+          <a:noFill/>
+          <a:ln/>
+        </p:spPr>
+        <p:txBody>
+          <a:bodyPr wrap="square" lIns="0" tIns="0" rIns="0" bIns="0" rtlCol="0" anchor="ctr"/>
+          <a:lstStyle/>
+          <a:p>
+            <a:pPr marL="0" indent="0">
+              <a:buNone/>
+            </a:pPr>
+            <a:r>
+              <a:rPr lang="en-US" sz="1350" b="1" dirty="0">
+                <a:solidFill>
+                  <a:srgbClr val="2C2849"/>
+                </a:solidFill>
+                <a:latin typeface="Calibri" pitchFamily="34" charset="0"/>
+                <a:ea typeface="Calibri" pitchFamily="34" charset="-122"/>
+                <a:cs typeface="Calibri" pitchFamily="34" charset="-120"/>
+              </a:rPr>
+              <a:t>Visão geral</a:t>
+            </a:r>
+            <a:endParaRPr lang="en-US" sz="1350" dirty="0"/>
+          </a:p>
+        </p:txBody>
+      </p:sp>
+      <p:sp>
+        <p:nvSpPr>
+          <p:cNvPr id="10" name="Text 7"/>
+          <p:cNvSpPr/>
+          <p:nvPr/>
+        </p:nvSpPr>
+        <p:spPr>
+          <a:xfrm>
+            <a:off x="950976" y="2560320"/>
+            <a:ext cx="4901184" cy="310896"/>
+          </a:xfrm>
+          <a:prstGeom prst="rect">
+            <a:avLst/>
+          </a:prstGeom>
+          <a:noFill/>
+          <a:ln/>
+        </p:spPr>
+        <p:txBody>
+          <a:bodyPr wrap="square" lIns="0" tIns="0" rIns="0" bIns="0" rtlCol="0" anchor="ctr"/>
+          <a:lstStyle/>
+          <a:p>
+            <a:pPr marL="0" indent="0">
+              <a:buNone/>
+            </a:pPr>
+            <a:r>
+              <a:rPr lang="en-US" sz="1050" dirty="0">
+                <a:solidFill>
+                  <a:srgbClr val="6B6682"/>
+                </a:solidFill>
+                <a:latin typeface="Calibri" pitchFamily="34" charset="0"/>
+                <a:ea typeface="Calibri" pitchFamily="34" charset="-122"/>
+                <a:cs typeface="Calibri" pitchFamily="34" charset="-120"/>
+              </a:rPr>
+              <a:t>As 7 etapas do rito, ponta a ponta</a:t>
+            </a:r>
+            <a:endParaRPr lang="en-US" sz="1050" dirty="0"/>
+          </a:p>
+        </p:txBody>
+      </p:sp>
+      <p:sp>
+        <p:nvSpPr>
+          <p:cNvPr id="11" name="Shape 8"/>
+          <p:cNvSpPr/>
+          <p:nvPr/>
+        </p:nvSpPr>
+        <p:spPr>
+          <a:xfrm>
+            <a:off x="365760" y="2912364"/>
+            <a:ext cx="457200" cy="457200"/>
+          </a:xfrm>
+          <a:prstGeom prst="roundRect">
+            <a:avLst>
+              <a:gd name="adj" fmla="val 50000"/>
+            </a:avLst>
+          </a:prstGeom>
+          <a:solidFill>
+            <a:srgbClr val="F8F7F6"/>
+          </a:solidFill>
+          <a:ln w="12700">
+            <a:solidFill>
+              <a:srgbClr val="E1DDEC"/>
+            </a:solidFill>
+            <a:prstDash val="solid"/>
+          </a:ln>
+        </p:spPr>
+        <p:txBody>
+          <a:bodyPr/>
+          <a:lstStyle/>
+          <a:p>
+            <a:endParaRPr lang="pt-BR"/>
+          </a:p>
+        </p:txBody>
+      </p:sp>
+      <p:sp>
+        <p:nvSpPr>
+          <p:cNvPr id="12" name="Text 9"/>
+          <p:cNvSpPr/>
+          <p:nvPr/>
+        </p:nvSpPr>
+        <p:spPr>
+          <a:xfrm>
+            <a:off x="365760" y="2912364"/>
+            <a:ext cx="457200" cy="457200"/>
+          </a:xfrm>
+          <a:prstGeom prst="rect">
+            <a:avLst/>
+          </a:prstGeom>
+          <a:noFill/>
+          <a:ln/>
+        </p:spPr>
+        <p:txBody>
+          <a:bodyPr wrap="square" lIns="0" tIns="0" rIns="0" bIns="0" rtlCol="0" anchor="ctr"/>
+          <a:lstStyle/>
+          <a:p>
+            <a:pPr marL="0" indent="0" algn="ctr">
+              <a:buNone/>
+            </a:pPr>
+            <a:r>
+              <a:rPr lang="en-US" sz="1400" b="1" dirty="0">
+                <a:solidFill>
+                  <a:srgbClr val="F2834B"/>
+                </a:solidFill>
+                <a:latin typeface="Calibri" pitchFamily="34" charset="0"/>
+                <a:ea typeface="Calibri" pitchFamily="34" charset="-122"/>
+                <a:cs typeface="Calibri" pitchFamily="34" charset="-120"/>
+              </a:rPr>
+              <a:t>02</a:t>
+            </a:r>
+            <a:endParaRPr lang="en-US" sz="1400" dirty="0"/>
+          </a:p>
+        </p:txBody>
+      </p:sp>
+      <p:sp>
+        <p:nvSpPr>
+          <p:cNvPr id="13" name="Text 10"/>
+          <p:cNvSpPr/>
+          <p:nvPr/>
+        </p:nvSpPr>
+        <p:spPr>
+          <a:xfrm>
+            <a:off x="950976" y="2857500"/>
+            <a:ext cx="4901184" cy="310896"/>
+          </a:xfrm>
+          <a:prstGeom prst="rect">
+            <a:avLst/>
+          </a:prstGeom>
+          <a:noFill/>
+          <a:ln/>
+        </p:spPr>
+        <p:txBody>
+          <a:bodyPr wrap="square" lIns="0" tIns="0" rIns="0" bIns="0" rtlCol="0" anchor="ctr"/>
+          <a:lstStyle/>
+          <a:p>
+            <a:pPr marL="0" indent="0">
+              <a:buNone/>
+            </a:pPr>
+            <a:r>
+              <a:rPr lang="en-US" sz="1350" b="1" dirty="0">
+                <a:solidFill>
+                  <a:srgbClr val="2C2849"/>
+                </a:solidFill>
+                <a:latin typeface="Calibri" pitchFamily="34" charset="0"/>
+                <a:ea typeface="Calibri" pitchFamily="34" charset="-122"/>
+                <a:cs typeface="Calibri" pitchFamily="34" charset="-120"/>
+              </a:rPr>
+              <a:t>Quadro de equipes</a:t>
+            </a:r>
+            <a:endParaRPr lang="en-US" sz="1350" dirty="0"/>
+          </a:p>
+        </p:txBody>
+      </p:sp>
+      <p:sp>
+        <p:nvSpPr>
+          <p:cNvPr id="14" name="Text 11"/>
+          <p:cNvSpPr/>
+          <p:nvPr/>
+        </p:nvSpPr>
+        <p:spPr>
+          <a:xfrm>
+            <a:off x="950976" y="3140964"/>
+            <a:ext cx="4901184" cy="310896"/>
+          </a:xfrm>
+          <a:prstGeom prst="rect">
+            <a:avLst/>
+          </a:prstGeom>
+          <a:noFill/>
+          <a:ln/>
+        </p:spPr>
+        <p:txBody>
+          <a:bodyPr wrap="square" lIns="0" tIns="0" rIns="0" bIns="0" rtlCol="0" anchor="ctr"/>
+          <a:lstStyle/>
+          <a:p>
+            <a:pPr marL="0" indent="0">
+              <a:buNone/>
+            </a:pPr>
+            <a:r>
+              <a:rPr lang="en-US" sz="1050" dirty="0">
+                <a:solidFill>
+                  <a:srgbClr val="6B6682"/>
+                </a:solidFill>
+                <a:latin typeface="Calibri" pitchFamily="34" charset="0"/>
+                <a:ea typeface="Calibri" pitchFamily="34" charset="-122"/>
+                <a:cs typeface="Calibri" pitchFamily="34" charset="-120"/>
+              </a:rPr>
+              <a:t>Responsáveis por área e por unidade</a:t>
+            </a:r>
+            <a:endParaRPr lang="en-US" sz="1050" dirty="0"/>
+          </a:p>
+        </p:txBody>
+      </p:sp>
+      <p:sp>
+        <p:nvSpPr>
+          <p:cNvPr id="15" name="Shape 12"/>
+          <p:cNvSpPr/>
+          <p:nvPr/>
+        </p:nvSpPr>
+        <p:spPr>
+          <a:xfrm>
+            <a:off x="365760" y="3493008"/>
+            <a:ext cx="457200" cy="457200"/>
+          </a:xfrm>
+          <a:prstGeom prst="roundRect">
+            <a:avLst>
+              <a:gd name="adj" fmla="val 50000"/>
+            </a:avLst>
+          </a:prstGeom>
+          <a:solidFill>
+            <a:srgbClr val="F8F7F6"/>
+          </a:solidFill>
+          <a:ln w="12700">
+            <a:solidFill>
+              <a:srgbClr val="E1DDEC"/>
+            </a:solidFill>
+            <a:prstDash val="solid"/>
+          </a:ln>
+        </p:spPr>
+        <p:txBody>
+          <a:bodyPr/>
+          <a:lstStyle/>
+          <a:p>
+            <a:endParaRPr lang="pt-BR"/>
+          </a:p>
+        </p:txBody>
+      </p:sp>
+      <p:sp>
+        <p:nvSpPr>
+          <p:cNvPr id="16" name="Text 13"/>
+          <p:cNvSpPr/>
+          <p:nvPr/>
+        </p:nvSpPr>
+        <p:spPr>
+          <a:xfrm>
+            <a:off x="365760" y="3493008"/>
+            <a:ext cx="457200" cy="457200"/>
+          </a:xfrm>
+          <a:prstGeom prst="rect">
+            <a:avLst/>
+          </a:prstGeom>
+          <a:noFill/>
+          <a:ln/>
+        </p:spPr>
+        <p:txBody>
+          <a:bodyPr wrap="square" lIns="0" tIns="0" rIns="0" bIns="0" rtlCol="0" anchor="ctr"/>
+          <a:lstStyle/>
+          <a:p>
+            <a:pPr marL="0" indent="0" algn="ctr">
+              <a:buNone/>
+            </a:pPr>
+            <a:r>
+              <a:rPr lang="en-US" sz="1400" b="1" dirty="0">
+                <a:solidFill>
+                  <a:srgbClr val="F2834B"/>
+                </a:solidFill>
+                <a:latin typeface="Calibri" pitchFamily="34" charset="0"/>
+                <a:ea typeface="Calibri" pitchFamily="34" charset="-122"/>
+                <a:cs typeface="Calibri" pitchFamily="34" charset="-120"/>
+              </a:rPr>
+              <a:t>03</a:t>
+            </a:r>
+            <a:endParaRPr lang="en-US" sz="1400" dirty="0"/>
+          </a:p>
+        </p:txBody>
+      </p:sp>
+      <p:sp>
+        <p:nvSpPr>
+          <p:cNvPr id="17" name="Text 14"/>
+          <p:cNvSpPr/>
+          <p:nvPr/>
+        </p:nvSpPr>
+        <p:spPr>
+          <a:xfrm>
+            <a:off x="950976" y="3438144"/>
+            <a:ext cx="4901184" cy="310896"/>
+          </a:xfrm>
+          <a:prstGeom prst="rect">
+            <a:avLst/>
+          </a:prstGeom>
+          <a:noFill/>
+          <a:ln/>
+        </p:spPr>
+        <p:txBody>
+          <a:bodyPr wrap="square" lIns="0" tIns="0" rIns="0" bIns="0" rtlCol="0" anchor="ctr"/>
+          <a:lstStyle/>
+          <a:p>
+            <a:pPr marL="0" indent="0">
+              <a:buNone/>
+            </a:pPr>
+            <a:r>
+              <a:rPr lang="en-US" sz="1350" b="1" dirty="0">
+                <a:solidFill>
+                  <a:srgbClr val="2C2849"/>
+                </a:solidFill>
+                <a:latin typeface="Calibri" pitchFamily="34" charset="0"/>
+                <a:ea typeface="Calibri" pitchFamily="34" charset="-122"/>
+                <a:cs typeface="Calibri" pitchFamily="34" charset="-120"/>
+              </a:rPr>
+              <a:t>Calendário</a:t>
+            </a:r>
+            <a:endParaRPr lang="en-US" sz="1350" dirty="0"/>
+          </a:p>
+        </p:txBody>
+      </p:sp>
+      <p:sp>
+        <p:nvSpPr>
+          <p:cNvPr id="18" name="Text 15"/>
+          <p:cNvSpPr/>
+          <p:nvPr/>
+        </p:nvSpPr>
+        <p:spPr>
+          <a:xfrm>
+            <a:off x="950976" y="3721608"/>
+            <a:ext cx="4901184" cy="310896"/>
+          </a:xfrm>
+          <a:prstGeom prst="rect">
+            <a:avLst/>
+          </a:prstGeom>
+          <a:noFill/>
+          <a:ln/>
+        </p:spPr>
+        <p:txBody>
+          <a:bodyPr wrap="square" lIns="0" tIns="0" rIns="0" bIns="0" rtlCol="0" anchor="ctr"/>
+          <a:lstStyle/>
+          <a:p>
+            <a:pPr marL="0" indent="0">
+              <a:buNone/>
+            </a:pPr>
+            <a:r>
+              <a:rPr lang="en-US" sz="1050" dirty="0">
+                <a:solidFill>
+                  <a:srgbClr val="6B6682"/>
+                </a:solidFill>
+                <a:latin typeface="Calibri" pitchFamily="34" charset="0"/>
+                <a:ea typeface="Calibri" pitchFamily="34" charset="-122"/>
+                <a:cs typeface="Calibri" pitchFamily="34" charset="-120"/>
+              </a:rPr>
+              <a:t>Datas reais do cronograma 2027</a:t>
+            </a:r>
+            <a:endParaRPr lang="en-US" sz="1050" dirty="0"/>
+          </a:p>
+        </p:txBody>
+      </p:sp>
+      <p:sp>
+        <p:nvSpPr>
+          <p:cNvPr id="31" name="Shape 28"/>
+          <p:cNvSpPr/>
+          <p:nvPr/>
+        </p:nvSpPr>
+        <p:spPr>
+          <a:xfrm>
+            <a:off x="365760" y="4073652"/>
+            <a:ext cx="457200" cy="457200"/>
+          </a:xfrm>
+          <a:prstGeom prst="roundRect">
+            <a:avLst>
+              <a:gd name="adj" fmla="val 50000"/>
+            </a:avLst>
+          </a:prstGeom>
+          <a:solidFill>
+            <a:srgbClr val="F8F7F6"/>
+          </a:solidFill>
+          <a:ln w="12700">
+            <a:solidFill>
+              <a:srgbClr val="E1DDEC"/>
+            </a:solidFill>
+            <a:prstDash val="solid"/>
+          </a:ln>
+        </p:spPr>
+        <p:txBody>
+          <a:bodyPr/>
+          <a:lstStyle/>
+          <a:p>
+            <a:endParaRPr lang="pt-BR"/>
+          </a:p>
+        </p:txBody>
+      </p:sp>
+      <p:sp>
+        <p:nvSpPr>
+          <p:cNvPr id="32" name="Text 29"/>
+          <p:cNvSpPr/>
+          <p:nvPr/>
+        </p:nvSpPr>
+        <p:spPr>
+          <a:xfrm>
+            <a:off x="365760" y="4073652"/>
+            <a:ext cx="457200" cy="457200"/>
+          </a:xfrm>
+          <a:prstGeom prst="rect">
+            <a:avLst/>
+          </a:prstGeom>
+          <a:noFill/>
+          <a:ln/>
+        </p:spPr>
+        <p:txBody>
+          <a:bodyPr wrap="square" lIns="0" tIns="0" rIns="0" bIns="0" rtlCol="0" anchor="ctr"/>
+          <a:lstStyle/>
+          <a:p>
+            <a:pPr marL="0" indent="0" algn="ctr">
+              <a:buNone/>
+            </a:pPr>
+            <a:r>
+              <a:rPr lang="en-US" sz="1400" b="1" dirty="0">
+                <a:solidFill>
+                  <a:srgbClr val="F2834B"/>
+                </a:solidFill>
+                <a:latin typeface="Calibri" pitchFamily="34" charset="0"/>
+                <a:ea typeface="Calibri" pitchFamily="34" charset="-122"/>
+                <a:cs typeface="Calibri" pitchFamily="34" charset="-120"/>
+              </a:rPr>
+              <a:t>04</a:t>
+            </a:r>
+            <a:endParaRPr lang="en-US" sz="1400" dirty="0"/>
+          </a:p>
+        </p:txBody>
+      </p:sp>
+      <p:sp>
+        <p:nvSpPr>
+          <p:cNvPr id="33" name="Text 30"/>
+          <p:cNvSpPr/>
+          <p:nvPr/>
+        </p:nvSpPr>
+        <p:spPr>
+          <a:xfrm>
+            <a:off x="950976" y="4018788"/>
+            <a:ext cx="4901184" cy="310896"/>
+          </a:xfrm>
+          <a:prstGeom prst="rect">
+            <a:avLst/>
+          </a:prstGeom>
+          <a:noFill/>
+          <a:ln/>
+        </p:spPr>
+        <p:txBody>
+          <a:bodyPr wrap="square" lIns="0" tIns="0" rIns="0" bIns="0" rtlCol="0" anchor="ctr"/>
+          <a:lstStyle/>
+          <a:p>
+            <a:pPr marL="0" indent="0">
+              <a:buNone/>
+            </a:pPr>
+            <a:r>
+              <a:rPr lang="en-US" sz="1350" b="1" dirty="0">
+                <a:solidFill>
+                  <a:srgbClr val="2C2849"/>
+                </a:solidFill>
+                <a:latin typeface="Calibri" pitchFamily="34" charset="0"/>
+                <a:ea typeface="Calibri" pitchFamily="34" charset="-122"/>
+                <a:cs typeface="Calibri" pitchFamily="34" charset="-120"/>
+              </a:rPr>
+              <a:t>Papéis</a:t>
+            </a:r>
+            <a:endParaRPr lang="en-US" sz="1350" dirty="0"/>
+          </a:p>
+        </p:txBody>
+      </p:sp>
+      <p:sp>
+        <p:nvSpPr>
+          <p:cNvPr id="34" name="Text 31"/>
+          <p:cNvSpPr/>
+          <p:nvPr/>
+        </p:nvSpPr>
+        <p:spPr>
+          <a:xfrm>
+            <a:off x="950976" y="4302252"/>
+            <a:ext cx="4901184" cy="310896"/>
+          </a:xfrm>
+          <a:prstGeom prst="rect">
+            <a:avLst/>
+          </a:prstGeom>
+          <a:noFill/>
+          <a:ln/>
+        </p:spPr>
+        <p:txBody>
+          <a:bodyPr wrap="square" lIns="0" tIns="0" rIns="0" bIns="0" rtlCol="0" anchor="ctr"/>
+          <a:lstStyle/>
+          <a:p>
+            <a:pPr marL="0" indent="0">
+              <a:buNone/>
+            </a:pPr>
+            <a:r>
+              <a:rPr lang="en-US" sz="1050" dirty="0">
+                <a:solidFill>
+                  <a:srgbClr val="6B6682"/>
+                </a:solidFill>
+                <a:latin typeface="Calibri" pitchFamily="34" charset="0"/>
+                <a:ea typeface="Calibri" pitchFamily="34" charset="-122"/>
+                <a:cs typeface="Calibri" pitchFamily="34" charset="-120"/>
+              </a:rPr>
+              <a:t>Quem solicita, nivela, aprova</a:t>
+            </a:r>
+            <a:endParaRPr lang="en-US" sz="1050" dirty="0"/>
+          </a:p>
+        </p:txBody>
+      </p:sp>
+      <p:sp>
+        <p:nvSpPr>
+          <p:cNvPr id="35" name="Shape 32"/>
+          <p:cNvSpPr/>
+          <p:nvPr/>
+        </p:nvSpPr>
+        <p:spPr>
+          <a:xfrm>
+            <a:off x="6355080" y="2331720"/>
+            <a:ext cx="457200" cy="457200"/>
+          </a:xfrm>
+          <a:prstGeom prst="roundRect">
+            <a:avLst>
+              <a:gd name="adj" fmla="val 50000"/>
+            </a:avLst>
+          </a:prstGeom>
+          <a:solidFill>
+            <a:srgbClr val="F8F7F6"/>
+          </a:solidFill>
+          <a:ln w="12700">
+            <a:solidFill>
+              <a:srgbClr val="E1DDEC"/>
+            </a:solidFill>
+            <a:prstDash val="solid"/>
+          </a:ln>
+        </p:spPr>
+        <p:txBody>
+          <a:bodyPr/>
+          <a:lstStyle/>
+          <a:p>
+            <a:endParaRPr lang="pt-BR"/>
+          </a:p>
+        </p:txBody>
+      </p:sp>
+      <p:sp>
+        <p:nvSpPr>
+          <p:cNvPr id="36" name="Text 33"/>
+          <p:cNvSpPr/>
+          <p:nvPr/>
+        </p:nvSpPr>
+        <p:spPr>
+          <a:xfrm>
+            <a:off x="6355080" y="2331720"/>
+            <a:ext cx="457200" cy="457200"/>
+          </a:xfrm>
+          <a:prstGeom prst="rect">
+            <a:avLst/>
+          </a:prstGeom>
+          <a:noFill/>
+          <a:ln/>
+        </p:spPr>
+        <p:txBody>
+          <a:bodyPr wrap="square" lIns="0" tIns="0" rIns="0" bIns="0" rtlCol="0" anchor="ctr"/>
+          <a:lstStyle/>
+          <a:p>
+            <a:pPr marL="0" indent="0" algn="ctr">
+              <a:buNone/>
+            </a:pPr>
+            <a:r>
+              <a:rPr lang="en-US" sz="1400" b="1" dirty="0">
+                <a:solidFill>
+                  <a:srgbClr val="F2834B"/>
+                </a:solidFill>
+                <a:latin typeface="Calibri" pitchFamily="34" charset="0"/>
+                <a:ea typeface="Calibri" pitchFamily="34" charset="-122"/>
+                <a:cs typeface="Calibri" pitchFamily="34" charset="-120"/>
+              </a:rPr>
+              <a:t>05</a:t>
+            </a:r>
+            <a:endParaRPr lang="en-US" sz="1400" dirty="0"/>
+          </a:p>
+        </p:txBody>
+      </p:sp>
+      <p:sp>
+        <p:nvSpPr>
+          <p:cNvPr id="37" name="Text 34"/>
+          <p:cNvSpPr/>
+          <p:nvPr/>
+        </p:nvSpPr>
+        <p:spPr>
+          <a:xfrm>
+            <a:off x="6940296" y="2276856"/>
+            <a:ext cx="4901184" cy="310896"/>
+          </a:xfrm>
+          <a:prstGeom prst="rect">
+            <a:avLst/>
+          </a:prstGeom>
+          <a:noFill/>
+          <a:ln/>
+        </p:spPr>
+        <p:txBody>
+          <a:bodyPr wrap="square" lIns="0" tIns="0" rIns="0" bIns="0" rtlCol="0" anchor="ctr"/>
+          <a:lstStyle/>
+          <a:p>
+            <a:pPr marL="0" indent="0">
+              <a:buNone/>
+            </a:pPr>
+            <a:r>
+              <a:rPr lang="en-US" sz="1350" b="1" dirty="0">
+                <a:solidFill>
+                  <a:srgbClr val="2C2849"/>
+                </a:solidFill>
+                <a:latin typeface="Calibri" pitchFamily="34" charset="0"/>
+                <a:ea typeface="Calibri" pitchFamily="34" charset="-122"/>
+                <a:cs typeface="Calibri" pitchFamily="34" charset="-120"/>
+              </a:rPr>
+              <a:t>Quem alimenta o plano</a:t>
+            </a:r>
+            <a:endParaRPr lang="en-US" sz="1350" dirty="0"/>
+          </a:p>
+        </p:txBody>
+      </p:sp>
+      <p:sp>
+        <p:nvSpPr>
+          <p:cNvPr id="38" name="Text 35"/>
+          <p:cNvSpPr/>
+          <p:nvPr/>
+        </p:nvSpPr>
+        <p:spPr>
+          <a:xfrm>
+            <a:off x="6940296" y="2560320"/>
+            <a:ext cx="4901184" cy="310896"/>
+          </a:xfrm>
+          <a:prstGeom prst="rect">
+            <a:avLst/>
+          </a:prstGeom>
+          <a:noFill/>
+          <a:ln/>
+        </p:spPr>
+        <p:txBody>
+          <a:bodyPr wrap="square" lIns="0" tIns="0" rIns="0" bIns="0" rtlCol="0" anchor="ctr"/>
+          <a:lstStyle/>
+          <a:p>
+            <a:pPr marL="0" indent="0">
+              <a:buNone/>
+            </a:pPr>
+            <a:r>
+              <a:rPr lang="en-US" sz="1050" dirty="0">
+                <a:solidFill>
+                  <a:srgbClr val="6B6682"/>
+                </a:solidFill>
+                <a:latin typeface="Calibri" pitchFamily="34" charset="0"/>
+                <a:ea typeface="Calibri" pitchFamily="34" charset="-122"/>
+                <a:cs typeface="Calibri" pitchFamily="34" charset="-120"/>
+              </a:rPr>
+              <a:t>12 áreas e seus critérios de entrada</a:t>
+            </a:r>
+            <a:endParaRPr lang="en-US" sz="1050" dirty="0"/>
+          </a:p>
+        </p:txBody>
+      </p:sp>
+      <p:sp>
+        <p:nvSpPr>
+          <p:cNvPr id="39" name="Shape 36"/>
+          <p:cNvSpPr/>
+          <p:nvPr/>
+        </p:nvSpPr>
+        <p:spPr>
+          <a:xfrm>
+            <a:off x="6355080" y="2912364"/>
+            <a:ext cx="457200" cy="457200"/>
+          </a:xfrm>
+          <a:prstGeom prst="roundRect">
+            <a:avLst>
+              <a:gd name="adj" fmla="val 50000"/>
+            </a:avLst>
+          </a:prstGeom>
+          <a:solidFill>
+            <a:srgbClr val="F8F7F6"/>
+          </a:solidFill>
+          <a:ln w="12700">
+            <a:solidFill>
+              <a:srgbClr val="E1DDEC"/>
+            </a:solidFill>
+            <a:prstDash val="solid"/>
+          </a:ln>
+        </p:spPr>
+        <p:txBody>
+          <a:bodyPr/>
+          <a:lstStyle/>
+          <a:p>
+            <a:endParaRPr lang="pt-BR"/>
+          </a:p>
+        </p:txBody>
+      </p:sp>
+      <p:sp>
+        <p:nvSpPr>
+          <p:cNvPr id="40" name="Text 37"/>
+          <p:cNvSpPr/>
+          <p:nvPr/>
+        </p:nvSpPr>
+        <p:spPr>
+          <a:xfrm>
+            <a:off x="6355080" y="2912364"/>
+            <a:ext cx="457200" cy="457200"/>
+          </a:xfrm>
+          <a:prstGeom prst="rect">
+            <a:avLst/>
+          </a:prstGeom>
+          <a:noFill/>
+          <a:ln/>
+        </p:spPr>
+        <p:txBody>
+          <a:bodyPr wrap="square" lIns="0" tIns="0" rIns="0" bIns="0" rtlCol="0" anchor="ctr"/>
+          <a:lstStyle/>
+          <a:p>
+            <a:pPr marL="0" indent="0" algn="ctr">
+              <a:buNone/>
+            </a:pPr>
+            <a:r>
+              <a:rPr lang="en-US" sz="1400" b="1" dirty="0">
+                <a:solidFill>
+                  <a:srgbClr val="F2834B"/>
+                </a:solidFill>
+                <a:latin typeface="Calibri" pitchFamily="34" charset="0"/>
+                <a:ea typeface="Calibri" pitchFamily="34" charset="-122"/>
+                <a:cs typeface="Calibri" pitchFamily="34" charset="-120"/>
+              </a:rPr>
+              <a:t>06</a:t>
+            </a:r>
+            <a:endParaRPr lang="en-US" sz="1400" dirty="0"/>
+          </a:p>
+        </p:txBody>
+      </p:sp>
+      <p:sp>
+        <p:nvSpPr>
+          <p:cNvPr id="41" name="Text 38"/>
+          <p:cNvSpPr/>
+          <p:nvPr/>
+        </p:nvSpPr>
+        <p:spPr>
+          <a:xfrm>
+            <a:off x="6940296" y="2857500"/>
+            <a:ext cx="4901184" cy="310896"/>
+          </a:xfrm>
+          <a:prstGeom prst="rect">
+            <a:avLst/>
+          </a:prstGeom>
+          <a:noFill/>
+          <a:ln/>
+        </p:spPr>
+        <p:txBody>
+          <a:bodyPr wrap="square" lIns="0" tIns="0" rIns="0" bIns="0" rtlCol="0" anchor="ctr"/>
+          <a:lstStyle/>
+          <a:p>
+            <a:pPr marL="0" indent="0">
+              <a:buNone/>
+            </a:pPr>
+            <a:r>
+              <a:rPr lang="en-US" sz="1350" b="1" dirty="0">
+                <a:solidFill>
+                  <a:srgbClr val="2C2849"/>
+                </a:solidFill>
+                <a:latin typeface="Calibri" pitchFamily="34" charset="0"/>
+                <a:ea typeface="Calibri" pitchFamily="34" charset="-122"/>
+                <a:cs typeface="Calibri" pitchFamily="34" charset="-120"/>
+              </a:rPr>
+              <a:t>Regras transversais</a:t>
+            </a:r>
+            <a:endParaRPr lang="en-US" sz="1350" dirty="0"/>
+          </a:p>
+        </p:txBody>
+      </p:sp>
+      <p:sp>
+        <p:nvSpPr>
+          <p:cNvPr id="42" name="Text 39"/>
+          <p:cNvSpPr/>
+          <p:nvPr/>
+        </p:nvSpPr>
+        <p:spPr>
+          <a:xfrm>
+            <a:off x="6940296" y="3140964"/>
+            <a:ext cx="4901184" cy="310896"/>
+          </a:xfrm>
+          <a:prstGeom prst="rect">
+            <a:avLst/>
+          </a:prstGeom>
+          <a:noFill/>
+          <a:ln/>
+        </p:spPr>
+        <p:txBody>
+          <a:bodyPr wrap="square" lIns="0" tIns="0" rIns="0" bIns="0" rtlCol="0" anchor="ctr"/>
+          <a:lstStyle/>
+          <a:p>
+            <a:pPr marL="0" indent="0">
+              <a:buNone/>
+            </a:pPr>
+            <a:r>
+              <a:rPr lang="en-US" sz="1050" dirty="0">
+                <a:solidFill>
+                  <a:srgbClr val="6B6682"/>
+                </a:solidFill>
+                <a:latin typeface="Calibri" pitchFamily="34" charset="0"/>
+                <a:ea typeface="Calibri" pitchFamily="34" charset="-122"/>
+                <a:cs typeface="Calibri" pitchFamily="34" charset="-120"/>
+              </a:rPr>
+              <a:t>Critérios válidos para qualquer área</a:t>
+            </a:r>
+            <a:endParaRPr lang="en-US" sz="1050" dirty="0"/>
+          </a:p>
+        </p:txBody>
+      </p:sp>
+      <p:sp>
+        <p:nvSpPr>
+          <p:cNvPr id="43" name="Shape 40"/>
+          <p:cNvSpPr/>
+          <p:nvPr/>
+        </p:nvSpPr>
+        <p:spPr>
+          <a:xfrm>
+            <a:off x="6355080" y="3493008"/>
+            <a:ext cx="457200" cy="457200"/>
+          </a:xfrm>
+          <a:prstGeom prst="roundRect">
+            <a:avLst>
+              <a:gd name="adj" fmla="val 50000"/>
+            </a:avLst>
+          </a:prstGeom>
+          <a:solidFill>
+            <a:srgbClr val="F8F7F6"/>
+          </a:solidFill>
+          <a:ln w="12700">
+            <a:solidFill>
+              <a:srgbClr val="E1DDEC"/>
+            </a:solidFill>
+            <a:prstDash val="solid"/>
+          </a:ln>
+        </p:spPr>
+        <p:txBody>
+          <a:bodyPr/>
+          <a:lstStyle/>
+          <a:p>
+            <a:endParaRPr lang="pt-BR"/>
+          </a:p>
+        </p:txBody>
+      </p:sp>
+      <p:sp>
+        <p:nvSpPr>
+          <p:cNvPr id="44" name="Text 41"/>
+          <p:cNvSpPr/>
+          <p:nvPr/>
+        </p:nvSpPr>
+        <p:spPr>
+          <a:xfrm>
+            <a:off x="6355080" y="3493008"/>
+            <a:ext cx="457200" cy="457200"/>
+          </a:xfrm>
+          <a:prstGeom prst="rect">
+            <a:avLst/>
+          </a:prstGeom>
+          <a:noFill/>
+          <a:ln/>
+        </p:spPr>
+        <p:txBody>
+          <a:bodyPr wrap="square" lIns="0" tIns="0" rIns="0" bIns="0" rtlCol="0" anchor="ctr"/>
+          <a:lstStyle/>
+          <a:p>
+            <a:pPr marL="0" indent="0" algn="ctr">
+              <a:buNone/>
+            </a:pPr>
+            <a:r>
+              <a:rPr lang="en-US" sz="1400" b="1" dirty="0">
+                <a:solidFill>
+                  <a:srgbClr val="F2834B"/>
+                </a:solidFill>
+                <a:latin typeface="Calibri" pitchFamily="34" charset="0"/>
+                <a:ea typeface="Calibri" pitchFamily="34" charset="-122"/>
+                <a:cs typeface="Calibri" pitchFamily="34" charset="-120"/>
+              </a:rPr>
+              <a:t>07</a:t>
+            </a:r>
+            <a:endParaRPr lang="en-US" sz="1400" dirty="0"/>
+          </a:p>
+        </p:txBody>
+      </p:sp>
+      <p:sp>
+        <p:nvSpPr>
+          <p:cNvPr id="45" name="Text 42"/>
+          <p:cNvSpPr/>
+          <p:nvPr/>
+        </p:nvSpPr>
+        <p:spPr>
+          <a:xfrm>
+            <a:off x="6940296" y="3438144"/>
+            <a:ext cx="4901184" cy="310896"/>
+          </a:xfrm>
+          <a:prstGeom prst="rect">
+            <a:avLst/>
+          </a:prstGeom>
+          <a:noFill/>
+          <a:ln/>
+        </p:spPr>
+        <p:txBody>
+          <a:bodyPr wrap="square" lIns="0" tIns="0" rIns="0" bIns="0" rtlCol="0" anchor="ctr"/>
+          <a:lstStyle/>
+          <a:p>
+            <a:pPr marL="0" indent="0">
+              <a:buNone/>
+            </a:pPr>
+            <a:r>
+              <a:rPr lang="en-US" sz="1350" b="1" dirty="0">
+                <a:solidFill>
+                  <a:srgbClr val="2C2849"/>
+                </a:solidFill>
+                <a:latin typeface="Calibri" pitchFamily="34" charset="0"/>
+                <a:ea typeface="Calibri" pitchFamily="34" charset="-122"/>
+                <a:cs typeface="Calibri" pitchFamily="34" charset="-120"/>
+              </a:rPr>
+              <a:t>Levantamento</a:t>
+            </a:r>
+            <a:endParaRPr lang="en-US" sz="1350" dirty="0"/>
+          </a:p>
+        </p:txBody>
+      </p:sp>
+      <p:sp>
+        <p:nvSpPr>
+          <p:cNvPr id="46" name="Text 43"/>
+          <p:cNvSpPr/>
+          <p:nvPr/>
+        </p:nvSpPr>
+        <p:spPr>
+          <a:xfrm>
+            <a:off x="6940296" y="3721608"/>
+            <a:ext cx="4901184" cy="310896"/>
+          </a:xfrm>
+          <a:prstGeom prst="rect">
+            <a:avLst/>
+          </a:prstGeom>
+          <a:noFill/>
+          <a:ln/>
+        </p:spPr>
+        <p:txBody>
+          <a:bodyPr wrap="square" lIns="0" tIns="0" rIns="0" bIns="0" rtlCol="0" anchor="ctr"/>
+          <a:lstStyle/>
+          <a:p>
+            <a:pPr marL="0" indent="0">
+              <a:buNone/>
+            </a:pPr>
+            <a:r>
+              <a:rPr lang="en-US" sz="1050" dirty="0">
+                <a:solidFill>
+                  <a:srgbClr val="6B6682"/>
+                </a:solidFill>
+                <a:latin typeface="Calibri" pitchFamily="34" charset="0"/>
+                <a:ea typeface="Calibri" pitchFamily="34" charset="-122"/>
+                <a:cs typeface="Calibri" pitchFamily="34" charset="-120"/>
+              </a:rPr>
+              <a:t>Dados básicos exigidos por escopo</a:t>
+            </a:r>
+            <a:endParaRPr lang="en-US" sz="1050" dirty="0"/>
+          </a:p>
+        </p:txBody>
+      </p:sp>
+      <p:sp>
+        <p:nvSpPr>
+          <p:cNvPr id="47" name="Shape 44"/>
+          <p:cNvSpPr/>
+          <p:nvPr/>
+        </p:nvSpPr>
+        <p:spPr>
+          <a:xfrm>
+            <a:off x="6355080" y="4073652"/>
+            <a:ext cx="457200" cy="457200"/>
+          </a:xfrm>
+          <a:prstGeom prst="roundRect">
+            <a:avLst>
+              <a:gd name="adj" fmla="val 50000"/>
+            </a:avLst>
+          </a:prstGeom>
+          <a:solidFill>
+            <a:srgbClr val="F8F7F6"/>
+          </a:solidFill>
+          <a:ln w="12700">
+            <a:solidFill>
+              <a:srgbClr val="E1DDEC"/>
+            </a:solidFill>
+            <a:prstDash val="solid"/>
+          </a:ln>
+        </p:spPr>
+        <p:txBody>
+          <a:bodyPr/>
+          <a:lstStyle/>
+          <a:p>
+            <a:endParaRPr lang="pt-BR"/>
+          </a:p>
+        </p:txBody>
+      </p:sp>
+      <p:sp>
+        <p:nvSpPr>
+          <p:cNvPr id="48" name="Text 45"/>
+          <p:cNvSpPr/>
+          <p:nvPr/>
+        </p:nvSpPr>
+        <p:spPr>
+          <a:xfrm>
+            <a:off x="6355080" y="4073652"/>
+            <a:ext cx="457200" cy="457200"/>
+          </a:xfrm>
+          <a:prstGeom prst="rect">
+            <a:avLst/>
+          </a:prstGeom>
+          <a:noFill/>
+          <a:ln/>
+        </p:spPr>
+        <p:txBody>
+          <a:bodyPr wrap="square" lIns="0" tIns="0" rIns="0" bIns="0" rtlCol="0" anchor="ctr"/>
+          <a:lstStyle/>
+          <a:p>
+            <a:pPr marL="0" indent="0" algn="ctr">
+              <a:buNone/>
+            </a:pPr>
+            <a:r>
+              <a:rPr lang="en-US" sz="1400" b="1" dirty="0">
+                <a:solidFill>
+                  <a:srgbClr val="F2834B"/>
+                </a:solidFill>
+                <a:latin typeface="Calibri" pitchFamily="34" charset="0"/>
+                <a:ea typeface="Calibri" pitchFamily="34" charset="-122"/>
+                <a:cs typeface="Calibri" pitchFamily="34" charset="-120"/>
+              </a:rPr>
+              <a:t>08</a:t>
+            </a:r>
+            <a:endParaRPr lang="en-US" sz="1400" dirty="0"/>
+          </a:p>
+        </p:txBody>
+      </p:sp>
+      <p:sp>
+        <p:nvSpPr>
+          <p:cNvPr id="49" name="Text 46"/>
+          <p:cNvSpPr/>
+          <p:nvPr/>
+        </p:nvSpPr>
+        <p:spPr>
+          <a:xfrm>
+            <a:off x="6940296" y="4018788"/>
+            <a:ext cx="4901184" cy="310896"/>
+          </a:xfrm>
+          <a:prstGeom prst="rect">
+            <a:avLst/>
+          </a:prstGeom>
+          <a:noFill/>
+          <a:ln/>
+        </p:spPr>
+        <p:txBody>
+          <a:bodyPr wrap="square" lIns="0" tIns="0" rIns="0" bIns="0" rtlCol="0" anchor="ctr"/>
+          <a:lstStyle/>
+          <a:p>
+            <a:pPr marL="0" indent="0">
+              <a:buNone/>
+            </a:pPr>
+            <a:r>
+              <a:rPr lang="en-US" sz="1350" b="1" dirty="0">
+                <a:solidFill>
+                  <a:srgbClr val="2C2849"/>
+                </a:solidFill>
+                <a:latin typeface="Calibri" pitchFamily="34" charset="0"/>
+                <a:ea typeface="Calibri" pitchFamily="34" charset="-122"/>
+                <a:cs typeface="Calibri" pitchFamily="34" charset="-120"/>
+              </a:rPr>
+              <a:t>Consolidação</a:t>
+            </a:r>
+            <a:endParaRPr lang="en-US" sz="1350" dirty="0"/>
+          </a:p>
+        </p:txBody>
+      </p:sp>
+      <p:sp>
+        <p:nvSpPr>
+          <p:cNvPr id="50" name="Text 47"/>
+          <p:cNvSpPr/>
+          <p:nvPr/>
+        </p:nvSpPr>
+        <p:spPr>
+          <a:xfrm>
+            <a:off x="6940296" y="4302252"/>
+            <a:ext cx="4901184" cy="310896"/>
+          </a:xfrm>
+          <a:prstGeom prst="rect">
+            <a:avLst/>
+          </a:prstGeom>
+          <a:noFill/>
+          <a:ln/>
+        </p:spPr>
+        <p:txBody>
+          <a:bodyPr wrap="square" lIns="0" tIns="0" rIns="0" bIns="0" rtlCol="0" anchor="ctr"/>
+          <a:lstStyle/>
+          <a:p>
+            <a:pPr marL="0" indent="0">
+              <a:buNone/>
+            </a:pPr>
+            <a:r>
+              <a:rPr lang="en-US" sz="1050" dirty="0">
+                <a:solidFill>
+                  <a:srgbClr val="6B6682"/>
+                </a:solidFill>
+                <a:latin typeface="Calibri" pitchFamily="34" charset="0"/>
+                <a:ea typeface="Calibri" pitchFamily="34" charset="-122"/>
+                <a:cs typeface="Calibri" pitchFamily="34" charset="-120"/>
+              </a:rPr>
+              <a:t>Do escopo priorizado ao plano aprovado</a:t>
+            </a:r>
+            <a:endParaRPr lang="en-US" sz="1050" dirty="0"/>
+          </a:p>
+        </p:txBody>
+      </p:sp>
+      <p:sp>
+        <p:nvSpPr>
+          <p:cNvPr id="55" name="Shape 52"/>
+          <p:cNvSpPr/>
+          <p:nvPr/>
+        </p:nvSpPr>
+        <p:spPr>
+          <a:xfrm>
+            <a:off x="6355080" y="4654296"/>
+            <a:ext cx="457200" cy="457200"/>
+          </a:xfrm>
+          <a:prstGeom prst="roundRect">
+            <a:avLst>
+              <a:gd name="adj" fmla="val 50000"/>
+            </a:avLst>
+          </a:prstGeom>
+          <a:solidFill>
+            <a:srgbClr val="F8F7F6"/>
+          </a:solidFill>
+          <a:ln w="12700">
+            <a:solidFill>
+              <a:srgbClr val="E1DDEC"/>
+            </a:solidFill>
+            <a:prstDash val="solid"/>
+          </a:ln>
+        </p:spPr>
+        <p:txBody>
+          <a:bodyPr/>
+          <a:lstStyle/>
+          <a:p>
+            <a:endParaRPr lang="pt-BR"/>
+          </a:p>
+        </p:txBody>
+      </p:sp>
+      <p:sp>
+        <p:nvSpPr>
+          <p:cNvPr id="56" name="Text 53"/>
+          <p:cNvSpPr/>
+          <p:nvPr/>
+        </p:nvSpPr>
+        <p:spPr>
+          <a:xfrm>
+            <a:off x="6355080" y="4654296"/>
+            <a:ext cx="457200" cy="457200"/>
+          </a:xfrm>
+          <a:prstGeom prst="rect">
+            <a:avLst/>
+          </a:prstGeom>
+          <a:noFill/>
+          <a:ln/>
+        </p:spPr>
+        <p:txBody>
+          <a:bodyPr wrap="square" lIns="0" tIns="0" rIns="0" bIns="0" rtlCol="0" anchor="ctr"/>
+          <a:lstStyle/>
+          <a:p>
+            <a:pPr marL="0" indent="0" algn="ctr">
+              <a:buNone/>
+            </a:pPr>
+            <a:r>
+              <a:rPr lang="en-US" sz="1400" b="1" dirty="0">
+                <a:solidFill>
+                  <a:srgbClr val="F2834B"/>
+                </a:solidFill>
+                <a:latin typeface="Calibri" pitchFamily="34" charset="0"/>
+                <a:ea typeface="Calibri" pitchFamily="34" charset="-122"/>
+                <a:cs typeface="Calibri" pitchFamily="34" charset="-120"/>
+              </a:rPr>
+              <a:t>09</a:t>
+            </a:r>
+            <a:endParaRPr lang="en-US" sz="1400" dirty="0"/>
+          </a:p>
+        </p:txBody>
+      </p:sp>
+      <p:sp>
+        <p:nvSpPr>
+          <p:cNvPr id="57" name="Text 54"/>
+          <p:cNvSpPr/>
+          <p:nvPr/>
+        </p:nvSpPr>
+        <p:spPr>
+          <a:xfrm>
+            <a:off x="6940296" y="4599432"/>
+            <a:ext cx="4901184" cy="310896"/>
+          </a:xfrm>
+          <a:prstGeom prst="rect">
+            <a:avLst/>
+          </a:prstGeom>
+          <a:noFill/>
+          <a:ln/>
+        </p:spPr>
+        <p:txBody>
+          <a:bodyPr wrap="square" lIns="0" tIns="0" rIns="0" bIns="0" rtlCol="0" anchor="ctr"/>
+          <a:lstStyle/>
+          <a:p>
+            <a:pPr marL="0" indent="0">
+              <a:buNone/>
+            </a:pPr>
+            <a:r>
+              <a:rPr lang="en-US" sz="1350" b="1" dirty="0">
+                <a:solidFill>
+                  <a:srgbClr val="2C2849"/>
+                </a:solidFill>
+                <a:latin typeface="Calibri" pitchFamily="34" charset="0"/>
+                <a:ea typeface="Calibri" pitchFamily="34" charset="-122"/>
+                <a:cs typeface="Calibri" pitchFamily="34" charset="-120"/>
+              </a:rPr>
+              <a:t>Treinamentos</a:t>
+            </a:r>
+            <a:endParaRPr lang="en-US" sz="1350" dirty="0"/>
+          </a:p>
+        </p:txBody>
+      </p:sp>
+      <p:sp>
+        <p:nvSpPr>
+          <p:cNvPr id="58" name="Text 55"/>
+          <p:cNvSpPr/>
+          <p:nvPr/>
+        </p:nvSpPr>
+        <p:spPr>
+          <a:xfrm>
+            <a:off x="6940296" y="4882896"/>
+            <a:ext cx="4901184" cy="310896"/>
+          </a:xfrm>
+          <a:prstGeom prst="rect">
+            <a:avLst/>
+          </a:prstGeom>
+          <a:noFill/>
+          <a:ln/>
+        </p:spPr>
+        <p:txBody>
+          <a:bodyPr wrap="square" lIns="0" tIns="0" rIns="0" bIns="0" rtlCol="0" anchor="ctr"/>
+          <a:lstStyle/>
+          <a:p>
+            <a:pPr marL="0" indent="0">
+              <a:buNone/>
+            </a:pPr>
+            <a:r>
+              <a:rPr lang="en-US" sz="1050" dirty="0">
+                <a:solidFill>
+                  <a:srgbClr val="6B6682"/>
+                </a:solidFill>
+                <a:latin typeface="Calibri" pitchFamily="34" charset="0"/>
+                <a:ea typeface="Calibri" pitchFamily="34" charset="-122"/>
+                <a:cs typeface="Calibri" pitchFamily="34" charset="-120"/>
+              </a:rPr>
+              <a:t>Agenda de capacitação por área</a:t>
+            </a:r>
+            <a:endParaRPr lang="en-US" sz="1050" dirty="0"/>
+          </a:p>
+        </p:txBody>
+      </p:sp>
+      <p:sp>
+        <p:nvSpPr>
+          <p:cNvPr id="60" name="Text 57"/>
+          <p:cNvSpPr/>
+          <p:nvPr/>
+        </p:nvSpPr>
+        <p:spPr>
+          <a:xfrm>
+            <a:off x="11338560" y="6547104"/>
+            <a:ext cx="457200" cy="256032"/>
+          </a:xfrm>
+          <a:prstGeom prst="rect">
+            <a:avLst/>
+          </a:prstGeom>
+          <a:noFill/>
+          <a:ln/>
+        </p:spPr>
+        <p:txBody>
+          <a:bodyPr wrap="square" lIns="0" tIns="0" rIns="0" bIns="0" rtlCol="0" anchor="ctr"/>
+          <a:lstStyle/>
+          <a:p>
+            <a:pPr marL="0" indent="0" algn="r">
+              <a:buNone/>
+            </a:pPr>
+            <a:r>
+              <a:rPr lang="en-US" sz="850" dirty="0">
+                <a:solidFill>
+                  <a:srgbClr val="6B6682"/>
+                </a:solidFill>
+                <a:latin typeface="Calibri" pitchFamily="34" charset="0"/>
+                <a:ea typeface="Calibri" pitchFamily="34" charset="-122"/>
+                <a:cs typeface="Calibri" pitchFamily="34" charset="-120"/>
+              </a:rPr>
+              <a:t>1</a:t>
+            </a:r>
+            <a:endParaRPr lang="en-US" sz="850" dirty="0"/>
+          </a:p>
+        </p:txBody>
+      </p:sp>
+    </p:spTree>
+  </p:cSld>
+  <p:clrMapOvr>
+    <a:masterClrMapping/>
+  </p:clrMapOvr>
+</p:sld>
+</file>
+
+<file path=ppt/slides/slide20.xml><?xml version="1.0" encoding="utf-8"?>
 <p:sld xmlns:a="http://schemas.openxmlformats.org/drawingml/2006/main" xmlns:r="http://schemas.openxmlformats.org/officeDocument/2006/relationships" xmlns:p="http://schemas.openxmlformats.org/presentationml/2006/main">
   <p:cSld>
     <p:bg>
@@ -13006,7 +18982,7 @@
                 <a:ea typeface="Calibri" pitchFamily="34" charset="-122"/>
                 <a:cs typeface="Calibri" pitchFamily="34" charset="-120"/>
               </a:rPr>
-              <a:t>SEÇÃO 09 · LEVANTAMENTO</a:t>
+              <a:t>SEÇÃO 07 · LEVANTAMENTO</a:t>
             </a:r>
             <a:endParaRPr lang="en-US" sz="1200" dirty="0"/>
           </a:p>
@@ -13051,7 +19027,7 @@
                 <a:ea typeface="Calibri" pitchFamily="34" charset="-122"/>
                 <a:cs typeface="Calibri" pitchFamily="34" charset="-120"/>
               </a:rPr>
-              <a:t>15</a:t>
+              <a:t>19</a:t>
             </a:r>
             <a:endParaRPr lang="en-US" sz="850" dirty="0"/>
           </a:p>
@@ -13177,7 +19153,7 @@
 </p:sld>
 </file>
 
-<file path=ppt/slides/slide17.xml><?xml version="1.0" encoding="utf-8"?>
+<file path=ppt/slides/slide21.xml><?xml version="1.0" encoding="utf-8"?>
 <p:sld xmlns:a="http://schemas.openxmlformats.org/drawingml/2006/main" xmlns:r="http://schemas.openxmlformats.org/officeDocument/2006/relationships" xmlns:p="http://schemas.openxmlformats.org/presentationml/2006/main">
   <p:cSld>
     <p:bg>
@@ -13312,7 +19288,7 @@
                 <a:ea typeface="Calibri" pitchFamily="34" charset="-122"/>
                 <a:cs typeface="Calibri" pitchFamily="34" charset="-120"/>
               </a:rPr>
-              <a:t>SEÇÃO 09 · LEVANTAMENTO</a:t>
+              <a:t>SEÇÃO 07 · LEVANTAMENTO</a:t>
             </a:r>
             <a:endParaRPr lang="en-US" sz="1200" dirty="0"/>
           </a:p>
@@ -13357,7 +19333,7 @@
                 <a:ea typeface="Calibri" pitchFamily="34" charset="-122"/>
                 <a:cs typeface="Calibri" pitchFamily="34" charset="-120"/>
               </a:rPr>
-              <a:t>16</a:t>
+              <a:t>20</a:t>
             </a:r>
             <a:endParaRPr lang="en-US" sz="850" dirty="0"/>
           </a:p>
@@ -13501,7 +19477,7 @@
 </p:sld>
 </file>
 
-<file path=ppt/slides/slide18.xml><?xml version="1.0" encoding="utf-8"?>
+<file path=ppt/slides/slide22.xml><?xml version="1.0" encoding="utf-8"?>
 <p:sld xmlns:a="http://schemas.openxmlformats.org/drawingml/2006/main" xmlns:r="http://schemas.openxmlformats.org/officeDocument/2006/relationships" xmlns:p="http://schemas.openxmlformats.org/presentationml/2006/main">
   <p:cSld>
     <p:bg>
@@ -13636,7 +19612,7 @@
                 <a:ea typeface="Calibri" pitchFamily="34" charset="-122"/>
                 <a:cs typeface="Calibri" pitchFamily="34" charset="-120"/>
               </a:rPr>
-              <a:t>SEÇÃO 09 · LEVANTAMENTO</a:t>
+              <a:t>SEÇÃO 07 · LEVANTAMENTO</a:t>
             </a:r>
             <a:endParaRPr lang="en-US" sz="1200" dirty="0"/>
           </a:p>
@@ -13681,7 +19657,7 @@
                 <a:ea typeface="Calibri" pitchFamily="34" charset="-122"/>
                 <a:cs typeface="Calibri" pitchFamily="34" charset="-120"/>
               </a:rPr>
-              <a:t>17</a:t>
+              <a:t>21</a:t>
             </a:r>
             <a:endParaRPr lang="en-US" sz="850" dirty="0"/>
           </a:p>
@@ -13896,7 +19872,7 @@
 </p:sld>
 </file>
 
-<file path=ppt/slides/slide19.xml><?xml version="1.0" encoding="utf-8"?>
+<file path=ppt/slides/slide23.xml><?xml version="1.0" encoding="utf-8"?>
 <p:sld xmlns:a="http://schemas.openxmlformats.org/drawingml/2006/main" xmlns:r="http://schemas.openxmlformats.org/officeDocument/2006/relationships" xmlns:p="http://schemas.openxmlformats.org/presentationml/2006/main">
   <p:cSld>
     <p:bg>
@@ -14031,7 +20007,7 @@
                 <a:ea typeface="Calibri" pitchFamily="34" charset="-122"/>
                 <a:cs typeface="Calibri" pitchFamily="34" charset="-120"/>
               </a:rPr>
-              <a:t>SEÇÃO 09 · LEVANTAMENTO</a:t>
+              <a:t>SEÇÃO 07 · LEVANTAMENTO</a:t>
             </a:r>
             <a:endParaRPr lang="en-US" sz="1200" dirty="0"/>
           </a:p>
@@ -14076,7 +20052,7 @@
                 <a:ea typeface="Calibri" pitchFamily="34" charset="-122"/>
                 <a:cs typeface="Calibri" pitchFamily="34" charset="-120"/>
               </a:rPr>
-              <a:t>18</a:t>
+              <a:t>22</a:t>
             </a:r>
             <a:endParaRPr lang="en-US" sz="850" dirty="0"/>
           </a:p>
@@ -14281,1913 +20257,7 @@
 </p:sld>
 </file>
 
-<file path=ppt/slides/slide2.xml><?xml version="1.0" encoding="utf-8"?>
-<p:sld xmlns:a="http://schemas.openxmlformats.org/drawingml/2006/main" xmlns:r="http://schemas.openxmlformats.org/officeDocument/2006/relationships" xmlns:p="http://schemas.openxmlformats.org/presentationml/2006/main">
-  <p:cSld name="Slide 2">
-    <p:bg>
-      <p:bgPr>
-        <a:solidFill>
-          <a:srgbClr val="FFFFFF"/>
-        </a:solidFill>
-        <a:effectLst/>
-      </p:bgPr>
-    </p:bg>
-    <p:spTree>
-      <p:nvGrpSpPr>
-        <p:cNvPr id="1" name=""/>
-        <p:cNvGrpSpPr/>
-        <p:nvPr/>
-      </p:nvGrpSpPr>
-      <p:grpSpPr>
-        <a:xfrm>
-          <a:off x="0" y="0"/>
-          <a:ext cx="0" cy="0"/>
-          <a:chOff x="0" y="0"/>
-          <a:chExt cx="0" cy="0"/>
-        </a:xfrm>
-      </p:grpSpPr>
-      <p:sp>
-        <p:nvSpPr>
-          <p:cNvPr id="2" name="Shape 0"/>
-          <p:cNvSpPr/>
-          <p:nvPr/>
-        </p:nvSpPr>
-        <p:spPr>
-          <a:xfrm>
-            <a:off x="365760" y="292608"/>
-            <a:ext cx="1371600" cy="384048"/>
-          </a:xfrm>
-          <a:prstGeom prst="roundRect">
-            <a:avLst>
-              <a:gd name="adj" fmla="val 19048"/>
-            </a:avLst>
-          </a:prstGeom>
-          <a:solidFill>
-            <a:srgbClr val="2C2849"/>
-          </a:solidFill>
-          <a:ln/>
-        </p:spPr>
-        <p:txBody>
-          <a:bodyPr/>
-          <a:lstStyle/>
-          <a:p>
-            <a:endParaRPr lang="pt-BR"/>
-          </a:p>
-        </p:txBody>
-      </p:sp>
-      <p:pic>
-        <p:nvPicPr>
-          <p:cNvPr id="3" name="Image 0" descr="/tmp/claude-0/-workspace-Planejamento/79ba2b6d-20da-5e48-9126-441c472dc123/scratchpad/prio_logo_white.png"/>
-          <p:cNvPicPr>
-            <a:picLocks noChangeAspect="1"/>
-          </p:cNvPicPr>
-          <p:nvPr/>
-        </p:nvPicPr>
-        <p:blipFill>
-          <a:blip r:embed="rId3"/>
-          <a:stretch>
-            <a:fillRect/>
-          </a:stretch>
-        </p:blipFill>
-        <p:spPr>
-          <a:xfrm>
-            <a:off x="530352" y="402336"/>
-            <a:ext cx="1042416" cy="198425"/>
-          </a:xfrm>
-          <a:prstGeom prst="rect">
-            <a:avLst/>
-          </a:prstGeom>
-        </p:spPr>
-      </p:pic>
-      <p:sp>
-        <p:nvSpPr>
-          <p:cNvPr id="4" name="Text 1"/>
-          <p:cNvSpPr/>
-          <p:nvPr/>
-        </p:nvSpPr>
-        <p:spPr>
-          <a:xfrm>
-            <a:off x="365760" y="841248"/>
-            <a:ext cx="8229600" cy="274320"/>
-          </a:xfrm>
-          <a:prstGeom prst="rect">
-            <a:avLst/>
-          </a:prstGeom>
-          <a:noFill/>
-          <a:ln/>
-        </p:spPr>
-        <p:txBody>
-          <a:bodyPr wrap="square" lIns="0" tIns="0" rIns="0" bIns="0" rtlCol="0" anchor="ctr"/>
-          <a:lstStyle/>
-          <a:p>
-            <a:pPr marL="0" indent="0">
-              <a:buNone/>
-            </a:pPr>
-            <a:r>
-              <a:rPr lang="en-US" sz="1200" b="1" kern="0" spc="100" dirty="0">
-                <a:solidFill>
-                  <a:srgbClr val="F2834B"/>
-                </a:solidFill>
-                <a:latin typeface="Calibri" pitchFamily="34" charset="0"/>
-                <a:ea typeface="Calibri" pitchFamily="34" charset="-122"/>
-                <a:cs typeface="Calibri" pitchFamily="34" charset="-120"/>
-              </a:rPr>
-              <a:t>SUMÁRIO</a:t>
-            </a:r>
-            <a:endParaRPr lang="en-US" sz="1200" dirty="0"/>
-          </a:p>
-        </p:txBody>
-      </p:sp>
-      <p:sp>
-        <p:nvSpPr>
-          <p:cNvPr id="5" name="Text 2"/>
-          <p:cNvSpPr/>
-          <p:nvPr/>
-        </p:nvSpPr>
-        <p:spPr>
-          <a:xfrm>
-            <a:off x="365760" y="1115568"/>
-            <a:ext cx="11457432" cy="566928"/>
-          </a:xfrm>
-          <a:prstGeom prst="rect">
-            <a:avLst/>
-          </a:prstGeom>
-          <a:noFill/>
-          <a:ln/>
-        </p:spPr>
-        <p:txBody>
-          <a:bodyPr wrap="square" lIns="0" tIns="0" rIns="0" bIns="0" rtlCol="0" anchor="ctr"/>
-          <a:lstStyle/>
-          <a:p>
-            <a:pPr marL="0" indent="0">
-              <a:buNone/>
-            </a:pPr>
-            <a:r>
-              <a:rPr lang="en-US" sz="2900" b="1" dirty="0">
-                <a:solidFill>
-                  <a:srgbClr val="2C2849"/>
-                </a:solidFill>
-                <a:latin typeface="Calibri" pitchFamily="34" charset="0"/>
-                <a:ea typeface="Calibri" pitchFamily="34" charset="-122"/>
-                <a:cs typeface="Calibri" pitchFamily="34" charset="-120"/>
-              </a:rPr>
-              <a:t>Onze etapas, uma linha de raciocínio única</a:t>
-            </a:r>
-            <a:endParaRPr lang="en-US" sz="2900" dirty="0"/>
-          </a:p>
-        </p:txBody>
-      </p:sp>
-      <p:sp>
-        <p:nvSpPr>
-          <p:cNvPr id="6" name="Text 3"/>
-          <p:cNvSpPr/>
-          <p:nvPr/>
-        </p:nvSpPr>
-        <p:spPr>
-          <a:xfrm>
-            <a:off x="365760" y="1700784"/>
-            <a:ext cx="11457432" cy="457200"/>
-          </a:xfrm>
-          <a:prstGeom prst="rect">
-            <a:avLst/>
-          </a:prstGeom>
-          <a:noFill/>
-          <a:ln/>
-        </p:spPr>
-        <p:txBody>
-          <a:bodyPr wrap="square" lIns="0" tIns="0" rIns="0" bIns="0" rtlCol="0" anchor="ctr"/>
-          <a:lstStyle/>
-          <a:p>
-            <a:pPr marL="0" indent="0">
-              <a:lnSpc>
-                <a:spcPct val="115000"/>
-              </a:lnSpc>
-              <a:buNone/>
-            </a:pPr>
-            <a:r>
-              <a:rPr lang="en-US" sz="1250" dirty="0">
-                <a:solidFill>
-                  <a:srgbClr val="6B6682"/>
-                </a:solidFill>
-                <a:latin typeface="Calibri" pitchFamily="34" charset="0"/>
-                <a:ea typeface="Calibri" pitchFamily="34" charset="-122"/>
-                <a:cs typeface="Calibri" pitchFamily="34" charset="-120"/>
-              </a:rPr>
-              <a:t>Do fluxo do processo até as pendências que ainda precisam de validação do Diretor.</a:t>
-            </a:r>
-            <a:endParaRPr lang="en-US" sz="1250" dirty="0"/>
-          </a:p>
-        </p:txBody>
-      </p:sp>
-      <p:sp>
-        <p:nvSpPr>
-          <p:cNvPr id="7" name="Shape 4"/>
-          <p:cNvSpPr/>
-          <p:nvPr/>
-        </p:nvSpPr>
-        <p:spPr>
-          <a:xfrm>
-            <a:off x="365760" y="2331720"/>
-            <a:ext cx="457200" cy="457200"/>
-          </a:xfrm>
-          <a:prstGeom prst="roundRect">
-            <a:avLst>
-              <a:gd name="adj" fmla="val 50000"/>
-            </a:avLst>
-          </a:prstGeom>
-          <a:solidFill>
-            <a:srgbClr val="F8F7F6"/>
-          </a:solidFill>
-          <a:ln w="12700">
-            <a:solidFill>
-              <a:srgbClr val="E1DDEC"/>
-            </a:solidFill>
-            <a:prstDash val="solid"/>
-          </a:ln>
-        </p:spPr>
-        <p:txBody>
-          <a:bodyPr/>
-          <a:lstStyle/>
-          <a:p>
-            <a:endParaRPr lang="pt-BR"/>
-          </a:p>
-        </p:txBody>
-      </p:sp>
-      <p:sp>
-        <p:nvSpPr>
-          <p:cNvPr id="8" name="Text 5"/>
-          <p:cNvSpPr/>
-          <p:nvPr/>
-        </p:nvSpPr>
-        <p:spPr>
-          <a:xfrm>
-            <a:off x="365760" y="2331720"/>
-            <a:ext cx="457200" cy="457200"/>
-          </a:xfrm>
-          <a:prstGeom prst="rect">
-            <a:avLst/>
-          </a:prstGeom>
-          <a:noFill/>
-          <a:ln/>
-        </p:spPr>
-        <p:txBody>
-          <a:bodyPr wrap="square" lIns="0" tIns="0" rIns="0" bIns="0" rtlCol="0" anchor="ctr"/>
-          <a:lstStyle/>
-          <a:p>
-            <a:pPr marL="0" indent="0" algn="ctr">
-              <a:buNone/>
-            </a:pPr>
-            <a:r>
-              <a:rPr lang="en-US" sz="1400" b="1" dirty="0">
-                <a:solidFill>
-                  <a:srgbClr val="F2834B"/>
-                </a:solidFill>
-                <a:latin typeface="Calibri" pitchFamily="34" charset="0"/>
-                <a:ea typeface="Calibri" pitchFamily="34" charset="-122"/>
-                <a:cs typeface="Calibri" pitchFamily="34" charset="-120"/>
-              </a:rPr>
-              <a:t>01</a:t>
-            </a:r>
-            <a:endParaRPr lang="en-US" sz="1400" dirty="0"/>
-          </a:p>
-        </p:txBody>
-      </p:sp>
-      <p:sp>
-        <p:nvSpPr>
-          <p:cNvPr id="9" name="Text 6"/>
-          <p:cNvSpPr/>
-          <p:nvPr/>
-        </p:nvSpPr>
-        <p:spPr>
-          <a:xfrm>
-            <a:off x="950976" y="2276856"/>
-            <a:ext cx="4901184" cy="310896"/>
-          </a:xfrm>
-          <a:prstGeom prst="rect">
-            <a:avLst/>
-          </a:prstGeom>
-          <a:noFill/>
-          <a:ln/>
-        </p:spPr>
-        <p:txBody>
-          <a:bodyPr wrap="square" lIns="0" tIns="0" rIns="0" bIns="0" rtlCol="0" anchor="ctr"/>
-          <a:lstStyle/>
-          <a:p>
-            <a:pPr marL="0" indent="0">
-              <a:buNone/>
-            </a:pPr>
-            <a:r>
-              <a:rPr lang="en-US" sz="1350" b="1" dirty="0">
-                <a:solidFill>
-                  <a:srgbClr val="2C2849"/>
-                </a:solidFill>
-                <a:latin typeface="Calibri" pitchFamily="34" charset="0"/>
-                <a:ea typeface="Calibri" pitchFamily="34" charset="-122"/>
-                <a:cs typeface="Calibri" pitchFamily="34" charset="-120"/>
-              </a:rPr>
-              <a:t>Visão geral</a:t>
-            </a:r>
-            <a:endParaRPr lang="en-US" sz="1350" dirty="0"/>
-          </a:p>
-        </p:txBody>
-      </p:sp>
-      <p:sp>
-        <p:nvSpPr>
-          <p:cNvPr id="10" name="Text 7"/>
-          <p:cNvSpPr/>
-          <p:nvPr/>
-        </p:nvSpPr>
-        <p:spPr>
-          <a:xfrm>
-            <a:off x="950976" y="2560320"/>
-            <a:ext cx="4901184" cy="310896"/>
-          </a:xfrm>
-          <a:prstGeom prst="rect">
-            <a:avLst/>
-          </a:prstGeom>
-          <a:noFill/>
-          <a:ln/>
-        </p:spPr>
-        <p:txBody>
-          <a:bodyPr wrap="square" lIns="0" tIns="0" rIns="0" bIns="0" rtlCol="0" anchor="ctr"/>
-          <a:lstStyle/>
-          <a:p>
-            <a:pPr marL="0" indent="0">
-              <a:buNone/>
-            </a:pPr>
-            <a:r>
-              <a:rPr lang="en-US" sz="1050" dirty="0">
-                <a:solidFill>
-                  <a:srgbClr val="6B6682"/>
-                </a:solidFill>
-                <a:latin typeface="Calibri" pitchFamily="34" charset="0"/>
-                <a:ea typeface="Calibri" pitchFamily="34" charset="-122"/>
-                <a:cs typeface="Calibri" pitchFamily="34" charset="-120"/>
-              </a:rPr>
-              <a:t>As 7 etapas do rito, ponta a ponta</a:t>
-            </a:r>
-            <a:endParaRPr lang="en-US" sz="1050" dirty="0"/>
-          </a:p>
-        </p:txBody>
-      </p:sp>
-      <p:sp>
-        <p:nvSpPr>
-          <p:cNvPr id="11" name="Shape 8"/>
-          <p:cNvSpPr/>
-          <p:nvPr/>
-        </p:nvSpPr>
-        <p:spPr>
-          <a:xfrm>
-            <a:off x="365760" y="2912364"/>
-            <a:ext cx="457200" cy="457200"/>
-          </a:xfrm>
-          <a:prstGeom prst="roundRect">
-            <a:avLst>
-              <a:gd name="adj" fmla="val 50000"/>
-            </a:avLst>
-          </a:prstGeom>
-          <a:solidFill>
-            <a:srgbClr val="F8F7F6"/>
-          </a:solidFill>
-          <a:ln w="12700">
-            <a:solidFill>
-              <a:srgbClr val="E1DDEC"/>
-            </a:solidFill>
-            <a:prstDash val="solid"/>
-          </a:ln>
-        </p:spPr>
-        <p:txBody>
-          <a:bodyPr/>
-          <a:lstStyle/>
-          <a:p>
-            <a:endParaRPr lang="pt-BR"/>
-          </a:p>
-        </p:txBody>
-      </p:sp>
-      <p:sp>
-        <p:nvSpPr>
-          <p:cNvPr id="12" name="Text 9"/>
-          <p:cNvSpPr/>
-          <p:nvPr/>
-        </p:nvSpPr>
-        <p:spPr>
-          <a:xfrm>
-            <a:off x="365760" y="2912364"/>
-            <a:ext cx="457200" cy="457200"/>
-          </a:xfrm>
-          <a:prstGeom prst="rect">
-            <a:avLst/>
-          </a:prstGeom>
-          <a:noFill/>
-          <a:ln/>
-        </p:spPr>
-        <p:txBody>
-          <a:bodyPr wrap="square" lIns="0" tIns="0" rIns="0" bIns="0" rtlCol="0" anchor="ctr"/>
-          <a:lstStyle/>
-          <a:p>
-            <a:pPr marL="0" indent="0" algn="ctr">
-              <a:buNone/>
-            </a:pPr>
-            <a:r>
-              <a:rPr lang="en-US" sz="1400" b="1" dirty="0">
-                <a:solidFill>
-                  <a:srgbClr val="F2834B"/>
-                </a:solidFill>
-                <a:latin typeface="Calibri" pitchFamily="34" charset="0"/>
-                <a:ea typeface="Calibri" pitchFamily="34" charset="-122"/>
-                <a:cs typeface="Calibri" pitchFamily="34" charset="-120"/>
-              </a:rPr>
-              <a:t>02</a:t>
-            </a:r>
-            <a:endParaRPr lang="en-US" sz="1400" dirty="0"/>
-          </a:p>
-        </p:txBody>
-      </p:sp>
-      <p:sp>
-        <p:nvSpPr>
-          <p:cNvPr id="13" name="Text 10"/>
-          <p:cNvSpPr/>
-          <p:nvPr/>
-        </p:nvSpPr>
-        <p:spPr>
-          <a:xfrm>
-            <a:off x="950976" y="2857500"/>
-            <a:ext cx="4901184" cy="310896"/>
-          </a:xfrm>
-          <a:prstGeom prst="rect">
-            <a:avLst/>
-          </a:prstGeom>
-          <a:noFill/>
-          <a:ln/>
-        </p:spPr>
-        <p:txBody>
-          <a:bodyPr wrap="square" lIns="0" tIns="0" rIns="0" bIns="0" rtlCol="0" anchor="ctr"/>
-          <a:lstStyle/>
-          <a:p>
-            <a:pPr marL="0" indent="0">
-              <a:buNone/>
-            </a:pPr>
-            <a:r>
-              <a:rPr lang="en-US" sz="1350" b="1" dirty="0">
-                <a:solidFill>
-                  <a:srgbClr val="2C2849"/>
-                </a:solidFill>
-                <a:latin typeface="Calibri" pitchFamily="34" charset="0"/>
-                <a:ea typeface="Calibri" pitchFamily="34" charset="-122"/>
-                <a:cs typeface="Calibri" pitchFamily="34" charset="-120"/>
-              </a:rPr>
-              <a:t>Quadro de equipes</a:t>
-            </a:r>
-            <a:endParaRPr lang="en-US" sz="1350" dirty="0"/>
-          </a:p>
-        </p:txBody>
-      </p:sp>
-      <p:sp>
-        <p:nvSpPr>
-          <p:cNvPr id="14" name="Text 11"/>
-          <p:cNvSpPr/>
-          <p:nvPr/>
-        </p:nvSpPr>
-        <p:spPr>
-          <a:xfrm>
-            <a:off x="950976" y="3140964"/>
-            <a:ext cx="4901184" cy="310896"/>
-          </a:xfrm>
-          <a:prstGeom prst="rect">
-            <a:avLst/>
-          </a:prstGeom>
-          <a:noFill/>
-          <a:ln/>
-        </p:spPr>
-        <p:txBody>
-          <a:bodyPr wrap="square" lIns="0" tIns="0" rIns="0" bIns="0" rtlCol="0" anchor="ctr"/>
-          <a:lstStyle/>
-          <a:p>
-            <a:pPr marL="0" indent="0">
-              <a:buNone/>
-            </a:pPr>
-            <a:r>
-              <a:rPr lang="en-US" sz="1050" dirty="0">
-                <a:solidFill>
-                  <a:srgbClr val="6B6682"/>
-                </a:solidFill>
-                <a:latin typeface="Calibri" pitchFamily="34" charset="0"/>
-                <a:ea typeface="Calibri" pitchFamily="34" charset="-122"/>
-                <a:cs typeface="Calibri" pitchFamily="34" charset="-120"/>
-              </a:rPr>
-              <a:t>Responsáveis por área e por unidade</a:t>
-            </a:r>
-            <a:endParaRPr lang="en-US" sz="1050" dirty="0"/>
-          </a:p>
-        </p:txBody>
-      </p:sp>
-      <p:sp>
-        <p:nvSpPr>
-          <p:cNvPr id="15" name="Shape 12"/>
-          <p:cNvSpPr/>
-          <p:nvPr/>
-        </p:nvSpPr>
-        <p:spPr>
-          <a:xfrm>
-            <a:off x="365760" y="3493008"/>
-            <a:ext cx="457200" cy="457200"/>
-          </a:xfrm>
-          <a:prstGeom prst="roundRect">
-            <a:avLst>
-              <a:gd name="adj" fmla="val 50000"/>
-            </a:avLst>
-          </a:prstGeom>
-          <a:solidFill>
-            <a:srgbClr val="F8F7F6"/>
-          </a:solidFill>
-          <a:ln w="12700">
-            <a:solidFill>
-              <a:srgbClr val="E1DDEC"/>
-            </a:solidFill>
-            <a:prstDash val="solid"/>
-          </a:ln>
-        </p:spPr>
-        <p:txBody>
-          <a:bodyPr/>
-          <a:lstStyle/>
-          <a:p>
-            <a:endParaRPr lang="pt-BR"/>
-          </a:p>
-        </p:txBody>
-      </p:sp>
-      <p:sp>
-        <p:nvSpPr>
-          <p:cNvPr id="16" name="Text 13"/>
-          <p:cNvSpPr/>
-          <p:nvPr/>
-        </p:nvSpPr>
-        <p:spPr>
-          <a:xfrm>
-            <a:off x="365760" y="3493008"/>
-            <a:ext cx="457200" cy="457200"/>
-          </a:xfrm>
-          <a:prstGeom prst="rect">
-            <a:avLst/>
-          </a:prstGeom>
-          <a:noFill/>
-          <a:ln/>
-        </p:spPr>
-        <p:txBody>
-          <a:bodyPr wrap="square" lIns="0" tIns="0" rIns="0" bIns="0" rtlCol="0" anchor="ctr"/>
-          <a:lstStyle/>
-          <a:p>
-            <a:pPr marL="0" indent="0" algn="ctr">
-              <a:buNone/>
-            </a:pPr>
-            <a:r>
-              <a:rPr lang="en-US" sz="1400" b="1" dirty="0">
-                <a:solidFill>
-                  <a:srgbClr val="F2834B"/>
-                </a:solidFill>
-                <a:latin typeface="Calibri" pitchFamily="34" charset="0"/>
-                <a:ea typeface="Calibri" pitchFamily="34" charset="-122"/>
-                <a:cs typeface="Calibri" pitchFamily="34" charset="-120"/>
-              </a:rPr>
-              <a:t>03</a:t>
-            </a:r>
-            <a:endParaRPr lang="en-US" sz="1400" dirty="0"/>
-          </a:p>
-        </p:txBody>
-      </p:sp>
-      <p:sp>
-        <p:nvSpPr>
-          <p:cNvPr id="17" name="Text 14"/>
-          <p:cNvSpPr/>
-          <p:nvPr/>
-        </p:nvSpPr>
-        <p:spPr>
-          <a:xfrm>
-            <a:off x="950976" y="3438144"/>
-            <a:ext cx="4901184" cy="310896"/>
-          </a:xfrm>
-          <a:prstGeom prst="rect">
-            <a:avLst/>
-          </a:prstGeom>
-          <a:noFill/>
-          <a:ln/>
-        </p:spPr>
-        <p:txBody>
-          <a:bodyPr wrap="square" lIns="0" tIns="0" rIns="0" bIns="0" rtlCol="0" anchor="ctr"/>
-          <a:lstStyle/>
-          <a:p>
-            <a:pPr marL="0" indent="0">
-              <a:buNone/>
-            </a:pPr>
-            <a:r>
-              <a:rPr lang="en-US" sz="1350" b="1" dirty="0">
-                <a:solidFill>
-                  <a:srgbClr val="2C2849"/>
-                </a:solidFill>
-                <a:latin typeface="Calibri" pitchFamily="34" charset="0"/>
-                <a:ea typeface="Calibri" pitchFamily="34" charset="-122"/>
-                <a:cs typeface="Calibri" pitchFamily="34" charset="-120"/>
-              </a:rPr>
-              <a:t>Calendário</a:t>
-            </a:r>
-            <a:endParaRPr lang="en-US" sz="1350" dirty="0"/>
-          </a:p>
-        </p:txBody>
-      </p:sp>
-      <p:sp>
-        <p:nvSpPr>
-          <p:cNvPr id="18" name="Text 15"/>
-          <p:cNvSpPr/>
-          <p:nvPr/>
-        </p:nvSpPr>
-        <p:spPr>
-          <a:xfrm>
-            <a:off x="950976" y="3721608"/>
-            <a:ext cx="4901184" cy="310896"/>
-          </a:xfrm>
-          <a:prstGeom prst="rect">
-            <a:avLst/>
-          </a:prstGeom>
-          <a:noFill/>
-          <a:ln/>
-        </p:spPr>
-        <p:txBody>
-          <a:bodyPr wrap="square" lIns="0" tIns="0" rIns="0" bIns="0" rtlCol="0" anchor="ctr"/>
-          <a:lstStyle/>
-          <a:p>
-            <a:pPr marL="0" indent="0">
-              <a:buNone/>
-            </a:pPr>
-            <a:r>
-              <a:rPr lang="en-US" sz="1050" dirty="0">
-                <a:solidFill>
-                  <a:srgbClr val="6B6682"/>
-                </a:solidFill>
-                <a:latin typeface="Calibri" pitchFamily="34" charset="0"/>
-                <a:ea typeface="Calibri" pitchFamily="34" charset="-122"/>
-                <a:cs typeface="Calibri" pitchFamily="34" charset="-120"/>
-              </a:rPr>
-              <a:t>Datas reais do cronograma 2027</a:t>
-            </a:r>
-            <a:endParaRPr lang="en-US" sz="1050" dirty="0"/>
-          </a:p>
-        </p:txBody>
-      </p:sp>
-      <p:sp>
-        <p:nvSpPr>
-          <p:cNvPr id="19" name="Shape 16"/>
-          <p:cNvSpPr/>
-          <p:nvPr/>
-        </p:nvSpPr>
-        <p:spPr>
-          <a:xfrm>
-            <a:off x="365760" y="4073652"/>
-            <a:ext cx="457200" cy="457200"/>
-          </a:xfrm>
-          <a:prstGeom prst="roundRect">
-            <a:avLst>
-              <a:gd name="adj" fmla="val 50000"/>
-            </a:avLst>
-          </a:prstGeom>
-          <a:solidFill>
-            <a:srgbClr val="F8F7F6"/>
-          </a:solidFill>
-          <a:ln w="12700">
-            <a:solidFill>
-              <a:srgbClr val="E1DDEC"/>
-            </a:solidFill>
-            <a:prstDash val="solid"/>
-          </a:ln>
-        </p:spPr>
-        <p:txBody>
-          <a:bodyPr/>
-          <a:lstStyle/>
-          <a:p>
-            <a:endParaRPr lang="pt-BR"/>
-          </a:p>
-        </p:txBody>
-      </p:sp>
-      <p:sp>
-        <p:nvSpPr>
-          <p:cNvPr id="20" name="Text 17"/>
-          <p:cNvSpPr/>
-          <p:nvPr/>
-        </p:nvSpPr>
-        <p:spPr>
-          <a:xfrm>
-            <a:off x="365760" y="4073652"/>
-            <a:ext cx="457200" cy="457200"/>
-          </a:xfrm>
-          <a:prstGeom prst="rect">
-            <a:avLst/>
-          </a:prstGeom>
-          <a:noFill/>
-          <a:ln/>
-        </p:spPr>
-        <p:txBody>
-          <a:bodyPr wrap="square" lIns="0" tIns="0" rIns="0" bIns="0" rtlCol="0" anchor="ctr"/>
-          <a:lstStyle/>
-          <a:p>
-            <a:pPr marL="0" indent="0" algn="ctr">
-              <a:buNone/>
-            </a:pPr>
-            <a:r>
-              <a:rPr lang="en-US" sz="1400" b="1" dirty="0">
-                <a:solidFill>
-                  <a:srgbClr val="F2834B"/>
-                </a:solidFill>
-                <a:latin typeface="Calibri" pitchFamily="34" charset="0"/>
-                <a:ea typeface="Calibri" pitchFamily="34" charset="-122"/>
-                <a:cs typeface="Calibri" pitchFamily="34" charset="-120"/>
-              </a:rPr>
-              <a:t>04</a:t>
-            </a:r>
-            <a:endParaRPr lang="en-US" sz="1400" dirty="0"/>
-          </a:p>
-        </p:txBody>
-      </p:sp>
-      <p:sp>
-        <p:nvSpPr>
-          <p:cNvPr id="21" name="Text 18"/>
-          <p:cNvSpPr/>
-          <p:nvPr/>
-        </p:nvSpPr>
-        <p:spPr>
-          <a:xfrm>
-            <a:off x="950976" y="4018788"/>
-            <a:ext cx="4901184" cy="310896"/>
-          </a:xfrm>
-          <a:prstGeom prst="rect">
-            <a:avLst/>
-          </a:prstGeom>
-          <a:noFill/>
-          <a:ln/>
-        </p:spPr>
-        <p:txBody>
-          <a:bodyPr wrap="square" lIns="0" tIns="0" rIns="0" bIns="0" rtlCol="0" anchor="ctr"/>
-          <a:lstStyle/>
-          <a:p>
-            <a:pPr marL="0" indent="0">
-              <a:buNone/>
-            </a:pPr>
-            <a:r>
-              <a:rPr lang="en-US" sz="1350" b="1" dirty="0">
-                <a:solidFill>
-                  <a:srgbClr val="2C2849"/>
-                </a:solidFill>
-                <a:latin typeface="Calibri" pitchFamily="34" charset="0"/>
-                <a:ea typeface="Calibri" pitchFamily="34" charset="-122"/>
-                <a:cs typeface="Calibri" pitchFamily="34" charset="-120"/>
-              </a:rPr>
-              <a:t>Matriz Prioridade × Esforço</a:t>
-            </a:r>
-            <a:endParaRPr lang="en-US" sz="1350" dirty="0"/>
-          </a:p>
-        </p:txBody>
-      </p:sp>
-      <p:sp>
-        <p:nvSpPr>
-          <p:cNvPr id="22" name="Text 19"/>
-          <p:cNvSpPr/>
-          <p:nvPr/>
-        </p:nvSpPr>
-        <p:spPr>
-          <a:xfrm>
-            <a:off x="950976" y="4302252"/>
-            <a:ext cx="4901184" cy="310896"/>
-          </a:xfrm>
-          <a:prstGeom prst="rect">
-            <a:avLst/>
-          </a:prstGeom>
-          <a:noFill/>
-          <a:ln/>
-        </p:spPr>
-        <p:txBody>
-          <a:bodyPr wrap="square" lIns="0" tIns="0" rIns="0" bIns="0" rtlCol="0" anchor="ctr"/>
-          <a:lstStyle/>
-          <a:p>
-            <a:pPr marL="0" indent="0">
-              <a:buNone/>
-            </a:pPr>
-            <a:r>
-              <a:rPr lang="en-US" sz="1050" dirty="0">
-                <a:solidFill>
-                  <a:srgbClr val="6B6682"/>
-                </a:solidFill>
-                <a:latin typeface="Calibri" pitchFamily="34" charset="0"/>
-                <a:ea typeface="Calibri" pitchFamily="34" charset="-122"/>
-                <a:cs typeface="Calibri" pitchFamily="34" charset="-120"/>
-              </a:rPr>
-              <a:t>Onde investir esforço primeiro</a:t>
-            </a:r>
-            <a:endParaRPr lang="en-US" sz="1050" dirty="0"/>
-          </a:p>
-        </p:txBody>
-      </p:sp>
-      <p:sp>
-        <p:nvSpPr>
-          <p:cNvPr id="23" name="Shape 20"/>
-          <p:cNvSpPr/>
-          <p:nvPr/>
-        </p:nvSpPr>
-        <p:spPr>
-          <a:xfrm>
-            <a:off x="365760" y="4654296"/>
-            <a:ext cx="457200" cy="457200"/>
-          </a:xfrm>
-          <a:prstGeom prst="roundRect">
-            <a:avLst>
-              <a:gd name="adj" fmla="val 50000"/>
-            </a:avLst>
-          </a:prstGeom>
-          <a:solidFill>
-            <a:srgbClr val="F8F7F6"/>
-          </a:solidFill>
-          <a:ln w="12700">
-            <a:solidFill>
-              <a:srgbClr val="E1DDEC"/>
-            </a:solidFill>
-            <a:prstDash val="solid"/>
-          </a:ln>
-        </p:spPr>
-        <p:txBody>
-          <a:bodyPr/>
-          <a:lstStyle/>
-          <a:p>
-            <a:endParaRPr lang="pt-BR"/>
-          </a:p>
-        </p:txBody>
-      </p:sp>
-      <p:sp>
-        <p:nvSpPr>
-          <p:cNvPr id="24" name="Text 21"/>
-          <p:cNvSpPr/>
-          <p:nvPr/>
-        </p:nvSpPr>
-        <p:spPr>
-          <a:xfrm>
-            <a:off x="365760" y="4654296"/>
-            <a:ext cx="457200" cy="457200"/>
-          </a:xfrm>
-          <a:prstGeom prst="rect">
-            <a:avLst/>
-          </a:prstGeom>
-          <a:noFill/>
-          <a:ln/>
-        </p:spPr>
-        <p:txBody>
-          <a:bodyPr wrap="square" lIns="0" tIns="0" rIns="0" bIns="0" rtlCol="0" anchor="ctr"/>
-          <a:lstStyle/>
-          <a:p>
-            <a:pPr marL="0" indent="0" algn="ctr">
-              <a:buNone/>
-            </a:pPr>
-            <a:r>
-              <a:rPr lang="en-US" sz="1400" b="1" dirty="0">
-                <a:solidFill>
-                  <a:srgbClr val="F2834B"/>
-                </a:solidFill>
-                <a:latin typeface="Calibri" pitchFamily="34" charset="0"/>
-                <a:ea typeface="Calibri" pitchFamily="34" charset="-122"/>
-                <a:cs typeface="Calibri" pitchFamily="34" charset="-120"/>
-              </a:rPr>
-              <a:t>05</a:t>
-            </a:r>
-            <a:endParaRPr lang="en-US" sz="1400" dirty="0"/>
-          </a:p>
-        </p:txBody>
-      </p:sp>
-      <p:sp>
-        <p:nvSpPr>
-          <p:cNvPr id="25" name="Text 22"/>
-          <p:cNvSpPr/>
-          <p:nvPr/>
-        </p:nvSpPr>
-        <p:spPr>
-          <a:xfrm>
-            <a:off x="950976" y="4599432"/>
-            <a:ext cx="4901184" cy="310896"/>
-          </a:xfrm>
-          <a:prstGeom prst="rect">
-            <a:avLst/>
-          </a:prstGeom>
-          <a:noFill/>
-          <a:ln/>
-        </p:spPr>
-        <p:txBody>
-          <a:bodyPr wrap="square" lIns="0" tIns="0" rIns="0" bIns="0" rtlCol="0" anchor="ctr"/>
-          <a:lstStyle/>
-          <a:p>
-            <a:pPr marL="0" indent="0">
-              <a:buNone/>
-            </a:pPr>
-            <a:r>
-              <a:rPr lang="en-US" sz="1350" b="1" dirty="0">
-                <a:solidFill>
-                  <a:srgbClr val="2C2849"/>
-                </a:solidFill>
-                <a:latin typeface="Calibri" pitchFamily="34" charset="0"/>
-                <a:ea typeface="Calibri" pitchFamily="34" charset="-122"/>
-                <a:cs typeface="Calibri" pitchFamily="34" charset="-120"/>
-              </a:rPr>
-              <a:t>Priorização por frente de trabalho</a:t>
-            </a:r>
-            <a:endParaRPr lang="en-US" sz="1350" dirty="0"/>
-          </a:p>
-        </p:txBody>
-      </p:sp>
-      <p:sp>
-        <p:nvSpPr>
-          <p:cNvPr id="26" name="Text 23"/>
-          <p:cNvSpPr/>
-          <p:nvPr/>
-        </p:nvSpPr>
-        <p:spPr>
-          <a:xfrm>
-            <a:off x="950976" y="4882896"/>
-            <a:ext cx="4901184" cy="310896"/>
-          </a:xfrm>
-          <a:prstGeom prst="rect">
-            <a:avLst/>
-          </a:prstGeom>
-          <a:noFill/>
-          <a:ln/>
-        </p:spPr>
-        <p:txBody>
-          <a:bodyPr wrap="square" lIns="0" tIns="0" rIns="0" bIns="0" rtlCol="0" anchor="ctr"/>
-          <a:lstStyle/>
-          <a:p>
-            <a:pPr marL="0" indent="0">
-              <a:buNone/>
-            </a:pPr>
-            <a:r>
-              <a:rPr lang="en-US" sz="1050" dirty="0">
-                <a:solidFill>
-                  <a:srgbClr val="6B6682"/>
-                </a:solidFill>
-                <a:latin typeface="Calibri" pitchFamily="34" charset="0"/>
-                <a:ea typeface="Calibri" pitchFamily="34" charset="-122"/>
-                <a:cs typeface="Calibri" pitchFamily="34" charset="-120"/>
-              </a:rPr>
-              <a:t>Racional de 4 passos + a matriz candidata</a:t>
-            </a:r>
-            <a:endParaRPr lang="en-US" sz="1050" dirty="0"/>
-          </a:p>
-        </p:txBody>
-      </p:sp>
-      <p:sp>
-        <p:nvSpPr>
-          <p:cNvPr id="31" name="Shape 28"/>
-          <p:cNvSpPr/>
-          <p:nvPr/>
-        </p:nvSpPr>
-        <p:spPr>
-          <a:xfrm>
-            <a:off x="365760" y="5234940"/>
-            <a:ext cx="457200" cy="457200"/>
-          </a:xfrm>
-          <a:prstGeom prst="roundRect">
-            <a:avLst>
-              <a:gd name="adj" fmla="val 50000"/>
-            </a:avLst>
-          </a:prstGeom>
-          <a:solidFill>
-            <a:srgbClr val="F8F7F6"/>
-          </a:solidFill>
-          <a:ln w="12700">
-            <a:solidFill>
-              <a:srgbClr val="E1DDEC"/>
-            </a:solidFill>
-            <a:prstDash val="solid"/>
-          </a:ln>
-        </p:spPr>
-        <p:txBody>
-          <a:bodyPr/>
-          <a:lstStyle/>
-          <a:p>
-            <a:endParaRPr lang="pt-BR"/>
-          </a:p>
-        </p:txBody>
-      </p:sp>
-      <p:sp>
-        <p:nvSpPr>
-          <p:cNvPr id="32" name="Text 29"/>
-          <p:cNvSpPr/>
-          <p:nvPr/>
-        </p:nvSpPr>
-        <p:spPr>
-          <a:xfrm>
-            <a:off x="365760" y="5234940"/>
-            <a:ext cx="457200" cy="457200"/>
-          </a:xfrm>
-          <a:prstGeom prst="rect">
-            <a:avLst/>
-          </a:prstGeom>
-          <a:noFill/>
-          <a:ln/>
-        </p:spPr>
-        <p:txBody>
-          <a:bodyPr wrap="square" lIns="0" tIns="0" rIns="0" bIns="0" rtlCol="0" anchor="ctr"/>
-          <a:lstStyle/>
-          <a:p>
-            <a:pPr marL="0" indent="0" algn="ctr">
-              <a:buNone/>
-            </a:pPr>
-            <a:r>
-              <a:rPr lang="en-US" sz="1400" b="1" dirty="0">
-                <a:solidFill>
-                  <a:srgbClr val="F2834B"/>
-                </a:solidFill>
-                <a:latin typeface="Calibri" pitchFamily="34" charset="0"/>
-                <a:ea typeface="Calibri" pitchFamily="34" charset="-122"/>
-                <a:cs typeface="Calibri" pitchFamily="34" charset="-120"/>
-              </a:rPr>
-              <a:t>06</a:t>
-            </a:r>
-            <a:endParaRPr lang="en-US" sz="1400" dirty="0"/>
-          </a:p>
-        </p:txBody>
-      </p:sp>
-      <p:sp>
-        <p:nvSpPr>
-          <p:cNvPr id="33" name="Text 30"/>
-          <p:cNvSpPr/>
-          <p:nvPr/>
-        </p:nvSpPr>
-        <p:spPr>
-          <a:xfrm>
-            <a:off x="950976" y="5180076"/>
-            <a:ext cx="4901184" cy="310896"/>
-          </a:xfrm>
-          <a:prstGeom prst="rect">
-            <a:avLst/>
-          </a:prstGeom>
-          <a:noFill/>
-          <a:ln/>
-        </p:spPr>
-        <p:txBody>
-          <a:bodyPr wrap="square" lIns="0" tIns="0" rIns="0" bIns="0" rtlCol="0" anchor="ctr"/>
-          <a:lstStyle/>
-          <a:p>
-            <a:pPr marL="0" indent="0">
-              <a:buNone/>
-            </a:pPr>
-            <a:r>
-              <a:rPr lang="en-US" sz="1350" b="1" dirty="0">
-                <a:solidFill>
-                  <a:srgbClr val="2C2849"/>
-                </a:solidFill>
-                <a:latin typeface="Calibri" pitchFamily="34" charset="0"/>
-                <a:ea typeface="Calibri" pitchFamily="34" charset="-122"/>
-                <a:cs typeface="Calibri" pitchFamily="34" charset="-120"/>
-              </a:rPr>
-              <a:t>Papéis</a:t>
-            </a:r>
-            <a:endParaRPr lang="en-US" sz="1350" dirty="0"/>
-          </a:p>
-        </p:txBody>
-      </p:sp>
-      <p:sp>
-        <p:nvSpPr>
-          <p:cNvPr id="34" name="Text 31"/>
-          <p:cNvSpPr/>
-          <p:nvPr/>
-        </p:nvSpPr>
-        <p:spPr>
-          <a:xfrm>
-            <a:off x="950976" y="5463540"/>
-            <a:ext cx="4901184" cy="310896"/>
-          </a:xfrm>
-          <a:prstGeom prst="rect">
-            <a:avLst/>
-          </a:prstGeom>
-          <a:noFill/>
-          <a:ln/>
-        </p:spPr>
-        <p:txBody>
-          <a:bodyPr wrap="square" lIns="0" tIns="0" rIns="0" bIns="0" rtlCol="0" anchor="ctr"/>
-          <a:lstStyle/>
-          <a:p>
-            <a:pPr marL="0" indent="0">
-              <a:buNone/>
-            </a:pPr>
-            <a:r>
-              <a:rPr lang="en-US" sz="1050" dirty="0">
-                <a:solidFill>
-                  <a:srgbClr val="6B6682"/>
-                </a:solidFill>
-                <a:latin typeface="Calibri" pitchFamily="34" charset="0"/>
-                <a:ea typeface="Calibri" pitchFamily="34" charset="-122"/>
-                <a:cs typeface="Calibri" pitchFamily="34" charset="-120"/>
-              </a:rPr>
-              <a:t>Quem solicita, nivela, aprova</a:t>
-            </a:r>
-            <a:endParaRPr lang="en-US" sz="1050" dirty="0"/>
-          </a:p>
-        </p:txBody>
-      </p:sp>
-      <p:sp>
-        <p:nvSpPr>
-          <p:cNvPr id="35" name="Shape 32"/>
-          <p:cNvSpPr/>
-          <p:nvPr/>
-        </p:nvSpPr>
-        <p:spPr>
-          <a:xfrm>
-            <a:off x="6355080" y="2331720"/>
-            <a:ext cx="457200" cy="457200"/>
-          </a:xfrm>
-          <a:prstGeom prst="roundRect">
-            <a:avLst>
-              <a:gd name="adj" fmla="val 50000"/>
-            </a:avLst>
-          </a:prstGeom>
-          <a:solidFill>
-            <a:srgbClr val="F8F7F6"/>
-          </a:solidFill>
-          <a:ln w="12700">
-            <a:solidFill>
-              <a:srgbClr val="E1DDEC"/>
-            </a:solidFill>
-            <a:prstDash val="solid"/>
-          </a:ln>
-        </p:spPr>
-        <p:txBody>
-          <a:bodyPr/>
-          <a:lstStyle/>
-          <a:p>
-            <a:endParaRPr lang="pt-BR"/>
-          </a:p>
-        </p:txBody>
-      </p:sp>
-      <p:sp>
-        <p:nvSpPr>
-          <p:cNvPr id="36" name="Text 33"/>
-          <p:cNvSpPr/>
-          <p:nvPr/>
-        </p:nvSpPr>
-        <p:spPr>
-          <a:xfrm>
-            <a:off x="6355080" y="2331720"/>
-            <a:ext cx="457200" cy="457200"/>
-          </a:xfrm>
-          <a:prstGeom prst="rect">
-            <a:avLst/>
-          </a:prstGeom>
-          <a:noFill/>
-          <a:ln/>
-        </p:spPr>
-        <p:txBody>
-          <a:bodyPr wrap="square" lIns="0" tIns="0" rIns="0" bIns="0" rtlCol="0" anchor="ctr"/>
-          <a:lstStyle/>
-          <a:p>
-            <a:pPr marL="0" indent="0" algn="ctr">
-              <a:buNone/>
-            </a:pPr>
-            <a:r>
-              <a:rPr lang="en-US" sz="1400" b="1" dirty="0">
-                <a:solidFill>
-                  <a:srgbClr val="F2834B"/>
-                </a:solidFill>
-                <a:latin typeface="Calibri" pitchFamily="34" charset="0"/>
-                <a:ea typeface="Calibri" pitchFamily="34" charset="-122"/>
-                <a:cs typeface="Calibri" pitchFamily="34" charset="-120"/>
-              </a:rPr>
-              <a:t>07</a:t>
-            </a:r>
-            <a:endParaRPr lang="en-US" sz="1400" dirty="0"/>
-          </a:p>
-        </p:txBody>
-      </p:sp>
-      <p:sp>
-        <p:nvSpPr>
-          <p:cNvPr id="37" name="Text 34"/>
-          <p:cNvSpPr/>
-          <p:nvPr/>
-        </p:nvSpPr>
-        <p:spPr>
-          <a:xfrm>
-            <a:off x="6940296" y="2276856"/>
-            <a:ext cx="4901184" cy="310896"/>
-          </a:xfrm>
-          <a:prstGeom prst="rect">
-            <a:avLst/>
-          </a:prstGeom>
-          <a:noFill/>
-          <a:ln/>
-        </p:spPr>
-        <p:txBody>
-          <a:bodyPr wrap="square" lIns="0" tIns="0" rIns="0" bIns="0" rtlCol="0" anchor="ctr"/>
-          <a:lstStyle/>
-          <a:p>
-            <a:pPr marL="0" indent="0">
-              <a:buNone/>
-            </a:pPr>
-            <a:r>
-              <a:rPr lang="en-US" sz="1350" b="1" dirty="0">
-                <a:solidFill>
-                  <a:srgbClr val="2C2849"/>
-                </a:solidFill>
-                <a:latin typeface="Calibri" pitchFamily="34" charset="0"/>
-                <a:ea typeface="Calibri" pitchFamily="34" charset="-122"/>
-                <a:cs typeface="Calibri" pitchFamily="34" charset="-120"/>
-              </a:rPr>
-              <a:t>Quem alimenta o plano</a:t>
-            </a:r>
-            <a:endParaRPr lang="en-US" sz="1350" dirty="0"/>
-          </a:p>
-        </p:txBody>
-      </p:sp>
-      <p:sp>
-        <p:nvSpPr>
-          <p:cNvPr id="38" name="Text 35"/>
-          <p:cNvSpPr/>
-          <p:nvPr/>
-        </p:nvSpPr>
-        <p:spPr>
-          <a:xfrm>
-            <a:off x="6940296" y="2560320"/>
-            <a:ext cx="4901184" cy="310896"/>
-          </a:xfrm>
-          <a:prstGeom prst="rect">
-            <a:avLst/>
-          </a:prstGeom>
-          <a:noFill/>
-          <a:ln/>
-        </p:spPr>
-        <p:txBody>
-          <a:bodyPr wrap="square" lIns="0" tIns="0" rIns="0" bIns="0" rtlCol="0" anchor="ctr"/>
-          <a:lstStyle/>
-          <a:p>
-            <a:pPr marL="0" indent="0">
-              <a:buNone/>
-            </a:pPr>
-            <a:r>
-              <a:rPr lang="en-US" sz="1050" dirty="0">
-                <a:solidFill>
-                  <a:srgbClr val="6B6682"/>
-                </a:solidFill>
-                <a:latin typeface="Calibri" pitchFamily="34" charset="0"/>
-                <a:ea typeface="Calibri" pitchFamily="34" charset="-122"/>
-                <a:cs typeface="Calibri" pitchFamily="34" charset="-120"/>
-              </a:rPr>
-              <a:t>12 áreas e seus critérios de entrada</a:t>
-            </a:r>
-            <a:endParaRPr lang="en-US" sz="1050" dirty="0"/>
-          </a:p>
-        </p:txBody>
-      </p:sp>
-      <p:sp>
-        <p:nvSpPr>
-          <p:cNvPr id="39" name="Shape 36"/>
-          <p:cNvSpPr/>
-          <p:nvPr/>
-        </p:nvSpPr>
-        <p:spPr>
-          <a:xfrm>
-            <a:off x="6355080" y="2912364"/>
-            <a:ext cx="457200" cy="457200"/>
-          </a:xfrm>
-          <a:prstGeom prst="roundRect">
-            <a:avLst>
-              <a:gd name="adj" fmla="val 50000"/>
-            </a:avLst>
-          </a:prstGeom>
-          <a:solidFill>
-            <a:srgbClr val="F8F7F6"/>
-          </a:solidFill>
-          <a:ln w="12700">
-            <a:solidFill>
-              <a:srgbClr val="E1DDEC"/>
-            </a:solidFill>
-            <a:prstDash val="solid"/>
-          </a:ln>
-        </p:spPr>
-        <p:txBody>
-          <a:bodyPr/>
-          <a:lstStyle/>
-          <a:p>
-            <a:endParaRPr lang="pt-BR"/>
-          </a:p>
-        </p:txBody>
-      </p:sp>
-      <p:sp>
-        <p:nvSpPr>
-          <p:cNvPr id="40" name="Text 37"/>
-          <p:cNvSpPr/>
-          <p:nvPr/>
-        </p:nvSpPr>
-        <p:spPr>
-          <a:xfrm>
-            <a:off x="6355080" y="2912364"/>
-            <a:ext cx="457200" cy="457200"/>
-          </a:xfrm>
-          <a:prstGeom prst="rect">
-            <a:avLst/>
-          </a:prstGeom>
-          <a:noFill/>
-          <a:ln/>
-        </p:spPr>
-        <p:txBody>
-          <a:bodyPr wrap="square" lIns="0" tIns="0" rIns="0" bIns="0" rtlCol="0" anchor="ctr"/>
-          <a:lstStyle/>
-          <a:p>
-            <a:pPr marL="0" indent="0" algn="ctr">
-              <a:buNone/>
-            </a:pPr>
-            <a:r>
-              <a:rPr lang="en-US" sz="1400" b="1" dirty="0">
-                <a:solidFill>
-                  <a:srgbClr val="F2834B"/>
-                </a:solidFill>
-                <a:latin typeface="Calibri" pitchFamily="34" charset="0"/>
-                <a:ea typeface="Calibri" pitchFamily="34" charset="-122"/>
-                <a:cs typeface="Calibri" pitchFamily="34" charset="-120"/>
-              </a:rPr>
-              <a:t>08</a:t>
-            </a:r>
-            <a:endParaRPr lang="en-US" sz="1400" dirty="0"/>
-          </a:p>
-        </p:txBody>
-      </p:sp>
-      <p:sp>
-        <p:nvSpPr>
-          <p:cNvPr id="41" name="Text 38"/>
-          <p:cNvSpPr/>
-          <p:nvPr/>
-        </p:nvSpPr>
-        <p:spPr>
-          <a:xfrm>
-            <a:off x="6940296" y="2857500"/>
-            <a:ext cx="4901184" cy="310896"/>
-          </a:xfrm>
-          <a:prstGeom prst="rect">
-            <a:avLst/>
-          </a:prstGeom>
-          <a:noFill/>
-          <a:ln/>
-        </p:spPr>
-        <p:txBody>
-          <a:bodyPr wrap="square" lIns="0" tIns="0" rIns="0" bIns="0" rtlCol="0" anchor="ctr"/>
-          <a:lstStyle/>
-          <a:p>
-            <a:pPr marL="0" indent="0">
-              <a:buNone/>
-            </a:pPr>
-            <a:r>
-              <a:rPr lang="en-US" sz="1350" b="1" dirty="0">
-                <a:solidFill>
-                  <a:srgbClr val="2C2849"/>
-                </a:solidFill>
-                <a:latin typeface="Calibri" pitchFamily="34" charset="0"/>
-                <a:ea typeface="Calibri" pitchFamily="34" charset="-122"/>
-                <a:cs typeface="Calibri" pitchFamily="34" charset="-120"/>
-              </a:rPr>
-              <a:t>Regras transversais</a:t>
-            </a:r>
-            <a:endParaRPr lang="en-US" sz="1350" dirty="0"/>
-          </a:p>
-        </p:txBody>
-      </p:sp>
-      <p:sp>
-        <p:nvSpPr>
-          <p:cNvPr id="42" name="Text 39"/>
-          <p:cNvSpPr/>
-          <p:nvPr/>
-        </p:nvSpPr>
-        <p:spPr>
-          <a:xfrm>
-            <a:off x="6940296" y="3140964"/>
-            <a:ext cx="4901184" cy="310896"/>
-          </a:xfrm>
-          <a:prstGeom prst="rect">
-            <a:avLst/>
-          </a:prstGeom>
-          <a:noFill/>
-          <a:ln/>
-        </p:spPr>
-        <p:txBody>
-          <a:bodyPr wrap="square" lIns="0" tIns="0" rIns="0" bIns="0" rtlCol="0" anchor="ctr"/>
-          <a:lstStyle/>
-          <a:p>
-            <a:pPr marL="0" indent="0">
-              <a:buNone/>
-            </a:pPr>
-            <a:r>
-              <a:rPr lang="en-US" sz="1050" dirty="0">
-                <a:solidFill>
-                  <a:srgbClr val="6B6682"/>
-                </a:solidFill>
-                <a:latin typeface="Calibri" pitchFamily="34" charset="0"/>
-                <a:ea typeface="Calibri" pitchFamily="34" charset="-122"/>
-                <a:cs typeface="Calibri" pitchFamily="34" charset="-120"/>
-              </a:rPr>
-              <a:t>Critérios válidos para qualquer área</a:t>
-            </a:r>
-            <a:endParaRPr lang="en-US" sz="1050" dirty="0"/>
-          </a:p>
-        </p:txBody>
-      </p:sp>
-      <p:sp>
-        <p:nvSpPr>
-          <p:cNvPr id="43" name="Shape 40"/>
-          <p:cNvSpPr/>
-          <p:nvPr/>
-        </p:nvSpPr>
-        <p:spPr>
-          <a:xfrm>
-            <a:off x="6355080" y="3493008"/>
-            <a:ext cx="457200" cy="457200"/>
-          </a:xfrm>
-          <a:prstGeom prst="roundRect">
-            <a:avLst>
-              <a:gd name="adj" fmla="val 50000"/>
-            </a:avLst>
-          </a:prstGeom>
-          <a:solidFill>
-            <a:srgbClr val="F8F7F6"/>
-          </a:solidFill>
-          <a:ln w="12700">
-            <a:solidFill>
-              <a:srgbClr val="E1DDEC"/>
-            </a:solidFill>
-            <a:prstDash val="solid"/>
-          </a:ln>
-        </p:spPr>
-        <p:txBody>
-          <a:bodyPr/>
-          <a:lstStyle/>
-          <a:p>
-            <a:endParaRPr lang="pt-BR"/>
-          </a:p>
-        </p:txBody>
-      </p:sp>
-      <p:sp>
-        <p:nvSpPr>
-          <p:cNvPr id="44" name="Text 41"/>
-          <p:cNvSpPr/>
-          <p:nvPr/>
-        </p:nvSpPr>
-        <p:spPr>
-          <a:xfrm>
-            <a:off x="6355080" y="3493008"/>
-            <a:ext cx="457200" cy="457200"/>
-          </a:xfrm>
-          <a:prstGeom prst="rect">
-            <a:avLst/>
-          </a:prstGeom>
-          <a:noFill/>
-          <a:ln/>
-        </p:spPr>
-        <p:txBody>
-          <a:bodyPr wrap="square" lIns="0" tIns="0" rIns="0" bIns="0" rtlCol="0" anchor="ctr"/>
-          <a:lstStyle/>
-          <a:p>
-            <a:pPr marL="0" indent="0" algn="ctr">
-              <a:buNone/>
-            </a:pPr>
-            <a:r>
-              <a:rPr lang="en-US" sz="1400" b="1" dirty="0">
-                <a:solidFill>
-                  <a:srgbClr val="F2834B"/>
-                </a:solidFill>
-                <a:latin typeface="Calibri" pitchFamily="34" charset="0"/>
-                <a:ea typeface="Calibri" pitchFamily="34" charset="-122"/>
-                <a:cs typeface="Calibri" pitchFamily="34" charset="-120"/>
-              </a:rPr>
-              <a:t>09</a:t>
-            </a:r>
-            <a:endParaRPr lang="en-US" sz="1400" dirty="0"/>
-          </a:p>
-        </p:txBody>
-      </p:sp>
-      <p:sp>
-        <p:nvSpPr>
-          <p:cNvPr id="45" name="Text 42"/>
-          <p:cNvSpPr/>
-          <p:nvPr/>
-        </p:nvSpPr>
-        <p:spPr>
-          <a:xfrm>
-            <a:off x="6940296" y="3438144"/>
-            <a:ext cx="4901184" cy="310896"/>
-          </a:xfrm>
-          <a:prstGeom prst="rect">
-            <a:avLst/>
-          </a:prstGeom>
-          <a:noFill/>
-          <a:ln/>
-        </p:spPr>
-        <p:txBody>
-          <a:bodyPr wrap="square" lIns="0" tIns="0" rIns="0" bIns="0" rtlCol="0" anchor="ctr"/>
-          <a:lstStyle/>
-          <a:p>
-            <a:pPr marL="0" indent="0">
-              <a:buNone/>
-            </a:pPr>
-            <a:r>
-              <a:rPr lang="en-US" sz="1350" b="1" dirty="0">
-                <a:solidFill>
-                  <a:srgbClr val="2C2849"/>
-                </a:solidFill>
-                <a:latin typeface="Calibri" pitchFamily="34" charset="0"/>
-                <a:ea typeface="Calibri" pitchFamily="34" charset="-122"/>
-                <a:cs typeface="Calibri" pitchFamily="34" charset="-120"/>
-              </a:rPr>
-              <a:t>Levantamento</a:t>
-            </a:r>
-            <a:endParaRPr lang="en-US" sz="1350" dirty="0"/>
-          </a:p>
-        </p:txBody>
-      </p:sp>
-      <p:sp>
-        <p:nvSpPr>
-          <p:cNvPr id="46" name="Text 43"/>
-          <p:cNvSpPr/>
-          <p:nvPr/>
-        </p:nvSpPr>
-        <p:spPr>
-          <a:xfrm>
-            <a:off x="6940296" y="3721608"/>
-            <a:ext cx="4901184" cy="310896"/>
-          </a:xfrm>
-          <a:prstGeom prst="rect">
-            <a:avLst/>
-          </a:prstGeom>
-          <a:noFill/>
-          <a:ln/>
-        </p:spPr>
-        <p:txBody>
-          <a:bodyPr wrap="square" lIns="0" tIns="0" rIns="0" bIns="0" rtlCol="0" anchor="ctr"/>
-          <a:lstStyle/>
-          <a:p>
-            <a:pPr marL="0" indent="0">
-              <a:buNone/>
-            </a:pPr>
-            <a:r>
-              <a:rPr lang="en-US" sz="1050" dirty="0">
-                <a:solidFill>
-                  <a:srgbClr val="6B6682"/>
-                </a:solidFill>
-                <a:latin typeface="Calibri" pitchFamily="34" charset="0"/>
-                <a:ea typeface="Calibri" pitchFamily="34" charset="-122"/>
-                <a:cs typeface="Calibri" pitchFamily="34" charset="-120"/>
-              </a:rPr>
-              <a:t>Dados básicos exigidos por escopo</a:t>
-            </a:r>
-            <a:endParaRPr lang="en-US" sz="1050" dirty="0"/>
-          </a:p>
-        </p:txBody>
-      </p:sp>
-      <p:sp>
-        <p:nvSpPr>
-          <p:cNvPr id="47" name="Shape 44"/>
-          <p:cNvSpPr/>
-          <p:nvPr/>
-        </p:nvSpPr>
-        <p:spPr>
-          <a:xfrm>
-            <a:off x="6355080" y="4073652"/>
-            <a:ext cx="457200" cy="457200"/>
-          </a:xfrm>
-          <a:prstGeom prst="roundRect">
-            <a:avLst>
-              <a:gd name="adj" fmla="val 50000"/>
-            </a:avLst>
-          </a:prstGeom>
-          <a:solidFill>
-            <a:srgbClr val="F8F7F6"/>
-          </a:solidFill>
-          <a:ln w="12700">
-            <a:solidFill>
-              <a:srgbClr val="E1DDEC"/>
-            </a:solidFill>
-            <a:prstDash val="solid"/>
-          </a:ln>
-        </p:spPr>
-        <p:txBody>
-          <a:bodyPr/>
-          <a:lstStyle/>
-          <a:p>
-            <a:endParaRPr lang="pt-BR"/>
-          </a:p>
-        </p:txBody>
-      </p:sp>
-      <p:sp>
-        <p:nvSpPr>
-          <p:cNvPr id="48" name="Text 45"/>
-          <p:cNvSpPr/>
-          <p:nvPr/>
-        </p:nvSpPr>
-        <p:spPr>
-          <a:xfrm>
-            <a:off x="6355080" y="4073652"/>
-            <a:ext cx="457200" cy="457200"/>
-          </a:xfrm>
-          <a:prstGeom prst="rect">
-            <a:avLst/>
-          </a:prstGeom>
-          <a:noFill/>
-          <a:ln/>
-        </p:spPr>
-        <p:txBody>
-          <a:bodyPr wrap="square" lIns="0" tIns="0" rIns="0" bIns="0" rtlCol="0" anchor="ctr"/>
-          <a:lstStyle/>
-          <a:p>
-            <a:pPr marL="0" indent="0" algn="ctr">
-              <a:buNone/>
-            </a:pPr>
-            <a:r>
-              <a:rPr lang="en-US" sz="1400" b="1" dirty="0">
-                <a:solidFill>
-                  <a:srgbClr val="F2834B"/>
-                </a:solidFill>
-                <a:latin typeface="Calibri" pitchFamily="34" charset="0"/>
-                <a:ea typeface="Calibri" pitchFamily="34" charset="-122"/>
-                <a:cs typeface="Calibri" pitchFamily="34" charset="-120"/>
-              </a:rPr>
-              <a:t>10</a:t>
-            </a:r>
-            <a:endParaRPr lang="en-US" sz="1400" dirty="0"/>
-          </a:p>
-        </p:txBody>
-      </p:sp>
-      <p:sp>
-        <p:nvSpPr>
-          <p:cNvPr id="49" name="Text 46"/>
-          <p:cNvSpPr/>
-          <p:nvPr/>
-        </p:nvSpPr>
-        <p:spPr>
-          <a:xfrm>
-            <a:off x="6940296" y="4018788"/>
-            <a:ext cx="4901184" cy="310896"/>
-          </a:xfrm>
-          <a:prstGeom prst="rect">
-            <a:avLst/>
-          </a:prstGeom>
-          <a:noFill/>
-          <a:ln/>
-        </p:spPr>
-        <p:txBody>
-          <a:bodyPr wrap="square" lIns="0" tIns="0" rIns="0" bIns="0" rtlCol="0" anchor="ctr"/>
-          <a:lstStyle/>
-          <a:p>
-            <a:pPr marL="0" indent="0">
-              <a:buNone/>
-            </a:pPr>
-            <a:r>
-              <a:rPr lang="en-US" sz="1350" b="1" dirty="0">
-                <a:solidFill>
-                  <a:srgbClr val="2C2849"/>
-                </a:solidFill>
-                <a:latin typeface="Calibri" pitchFamily="34" charset="0"/>
-                <a:ea typeface="Calibri" pitchFamily="34" charset="-122"/>
-                <a:cs typeface="Calibri" pitchFamily="34" charset="-120"/>
-              </a:rPr>
-              <a:t>Consolidação</a:t>
-            </a:r>
-            <a:endParaRPr lang="en-US" sz="1350" dirty="0"/>
-          </a:p>
-        </p:txBody>
-      </p:sp>
-      <p:sp>
-        <p:nvSpPr>
-          <p:cNvPr id="50" name="Text 47"/>
-          <p:cNvSpPr/>
-          <p:nvPr/>
-        </p:nvSpPr>
-        <p:spPr>
-          <a:xfrm>
-            <a:off x="6940296" y="4302252"/>
-            <a:ext cx="4901184" cy="310896"/>
-          </a:xfrm>
-          <a:prstGeom prst="rect">
-            <a:avLst/>
-          </a:prstGeom>
-          <a:noFill/>
-          <a:ln/>
-        </p:spPr>
-        <p:txBody>
-          <a:bodyPr wrap="square" lIns="0" tIns="0" rIns="0" bIns="0" rtlCol="0" anchor="ctr"/>
-          <a:lstStyle/>
-          <a:p>
-            <a:pPr marL="0" indent="0">
-              <a:buNone/>
-            </a:pPr>
-            <a:r>
-              <a:rPr lang="en-US" sz="1050" dirty="0">
-                <a:solidFill>
-                  <a:srgbClr val="6B6682"/>
-                </a:solidFill>
-                <a:latin typeface="Calibri" pitchFamily="34" charset="0"/>
-                <a:ea typeface="Calibri" pitchFamily="34" charset="-122"/>
-                <a:cs typeface="Calibri" pitchFamily="34" charset="-120"/>
-              </a:rPr>
-              <a:t>Do escopo priorizado ao plano aprovado</a:t>
-            </a:r>
-            <a:endParaRPr lang="en-US" sz="1050" dirty="0"/>
-          </a:p>
-        </p:txBody>
-      </p:sp>
-      <p:sp>
-        <p:nvSpPr>
-          <p:cNvPr id="55" name="Shape 52"/>
-          <p:cNvSpPr/>
-          <p:nvPr/>
-        </p:nvSpPr>
-        <p:spPr>
-          <a:xfrm>
-            <a:off x="6355080" y="4654296"/>
-            <a:ext cx="457200" cy="457200"/>
-          </a:xfrm>
-          <a:prstGeom prst="roundRect">
-            <a:avLst>
-              <a:gd name="adj" fmla="val 50000"/>
-            </a:avLst>
-          </a:prstGeom>
-          <a:solidFill>
-            <a:srgbClr val="F8F7F6"/>
-          </a:solidFill>
-          <a:ln w="12700">
-            <a:solidFill>
-              <a:srgbClr val="E1DDEC"/>
-            </a:solidFill>
-            <a:prstDash val="solid"/>
-          </a:ln>
-        </p:spPr>
-        <p:txBody>
-          <a:bodyPr/>
-          <a:lstStyle/>
-          <a:p>
-            <a:endParaRPr lang="pt-BR"/>
-          </a:p>
-        </p:txBody>
-      </p:sp>
-      <p:sp>
-        <p:nvSpPr>
-          <p:cNvPr id="56" name="Text 53"/>
-          <p:cNvSpPr/>
-          <p:nvPr/>
-        </p:nvSpPr>
-        <p:spPr>
-          <a:xfrm>
-            <a:off x="6355080" y="4654296"/>
-            <a:ext cx="457200" cy="457200"/>
-          </a:xfrm>
-          <a:prstGeom prst="rect">
-            <a:avLst/>
-          </a:prstGeom>
-          <a:noFill/>
-          <a:ln/>
-        </p:spPr>
-        <p:txBody>
-          <a:bodyPr wrap="square" lIns="0" tIns="0" rIns="0" bIns="0" rtlCol="0" anchor="ctr"/>
-          <a:lstStyle/>
-          <a:p>
-            <a:pPr marL="0" indent="0" algn="ctr">
-              <a:buNone/>
-            </a:pPr>
-            <a:r>
-              <a:rPr lang="en-US" sz="1400" b="1" dirty="0">
-                <a:solidFill>
-                  <a:srgbClr val="F2834B"/>
-                </a:solidFill>
-                <a:latin typeface="Calibri" pitchFamily="34" charset="0"/>
-                <a:ea typeface="Calibri" pitchFamily="34" charset="-122"/>
-                <a:cs typeface="Calibri" pitchFamily="34" charset="-120"/>
-              </a:rPr>
-              <a:t>11</a:t>
-            </a:r>
-            <a:endParaRPr lang="en-US" sz="1400" dirty="0"/>
-          </a:p>
-        </p:txBody>
-      </p:sp>
-      <p:sp>
-        <p:nvSpPr>
-          <p:cNvPr id="57" name="Text 54"/>
-          <p:cNvSpPr/>
-          <p:nvPr/>
-        </p:nvSpPr>
-        <p:spPr>
-          <a:xfrm>
-            <a:off x="6940296" y="4599432"/>
-            <a:ext cx="4901184" cy="310896"/>
-          </a:xfrm>
-          <a:prstGeom prst="rect">
-            <a:avLst/>
-          </a:prstGeom>
-          <a:noFill/>
-          <a:ln/>
-        </p:spPr>
-        <p:txBody>
-          <a:bodyPr wrap="square" lIns="0" tIns="0" rIns="0" bIns="0" rtlCol="0" anchor="ctr"/>
-          <a:lstStyle/>
-          <a:p>
-            <a:pPr marL="0" indent="0">
-              <a:buNone/>
-            </a:pPr>
-            <a:r>
-              <a:rPr lang="en-US" sz="1350" b="1" dirty="0">
-                <a:solidFill>
-                  <a:srgbClr val="2C2849"/>
-                </a:solidFill>
-                <a:latin typeface="Calibri" pitchFamily="34" charset="0"/>
-                <a:ea typeface="Calibri" pitchFamily="34" charset="-122"/>
-                <a:cs typeface="Calibri" pitchFamily="34" charset="-120"/>
-              </a:rPr>
-              <a:t>Treinamentos</a:t>
-            </a:r>
-            <a:endParaRPr lang="en-US" sz="1350" dirty="0"/>
-          </a:p>
-        </p:txBody>
-      </p:sp>
-      <p:sp>
-        <p:nvSpPr>
-          <p:cNvPr id="58" name="Text 55"/>
-          <p:cNvSpPr/>
-          <p:nvPr/>
-        </p:nvSpPr>
-        <p:spPr>
-          <a:xfrm>
-            <a:off x="6940296" y="4882896"/>
-            <a:ext cx="4901184" cy="310896"/>
-          </a:xfrm>
-          <a:prstGeom prst="rect">
-            <a:avLst/>
-          </a:prstGeom>
-          <a:noFill/>
-          <a:ln/>
-        </p:spPr>
-        <p:txBody>
-          <a:bodyPr wrap="square" lIns="0" tIns="0" rIns="0" bIns="0" rtlCol="0" anchor="ctr"/>
-          <a:lstStyle/>
-          <a:p>
-            <a:pPr marL="0" indent="0">
-              <a:buNone/>
-            </a:pPr>
-            <a:r>
-              <a:rPr lang="en-US" sz="1050" dirty="0">
-                <a:solidFill>
-                  <a:srgbClr val="6B6682"/>
-                </a:solidFill>
-                <a:latin typeface="Calibri" pitchFamily="34" charset="0"/>
-                <a:ea typeface="Calibri" pitchFamily="34" charset="-122"/>
-                <a:cs typeface="Calibri" pitchFamily="34" charset="-120"/>
-              </a:rPr>
-              <a:t>Agenda de capacitação por área</a:t>
-            </a:r>
-            <a:endParaRPr lang="en-US" sz="1050" dirty="0"/>
-          </a:p>
-        </p:txBody>
-      </p:sp>
-      <p:sp>
-        <p:nvSpPr>
-          <p:cNvPr id="60" name="Text 57"/>
-          <p:cNvSpPr/>
-          <p:nvPr/>
-        </p:nvSpPr>
-        <p:spPr>
-          <a:xfrm>
-            <a:off x="11338560" y="6547104"/>
-            <a:ext cx="457200" cy="256032"/>
-          </a:xfrm>
-          <a:prstGeom prst="rect">
-            <a:avLst/>
-          </a:prstGeom>
-          <a:noFill/>
-          <a:ln/>
-        </p:spPr>
-        <p:txBody>
-          <a:bodyPr wrap="square" lIns="0" tIns="0" rIns="0" bIns="0" rtlCol="0" anchor="ctr"/>
-          <a:lstStyle/>
-          <a:p>
-            <a:pPr marL="0" indent="0" algn="r">
-              <a:buNone/>
-            </a:pPr>
-            <a:r>
-              <a:rPr lang="en-US" sz="850" dirty="0">
-                <a:solidFill>
-                  <a:srgbClr val="6B6682"/>
-                </a:solidFill>
-                <a:latin typeface="Calibri" pitchFamily="34" charset="0"/>
-                <a:ea typeface="Calibri" pitchFamily="34" charset="-122"/>
-                <a:cs typeface="Calibri" pitchFamily="34" charset="-120"/>
-              </a:rPr>
-              <a:t>1</a:t>
-            </a:r>
-            <a:endParaRPr lang="en-US" sz="850" dirty="0"/>
-          </a:p>
-        </p:txBody>
-      </p:sp>
-    </p:spTree>
-  </p:cSld>
-  <p:clrMapOvr>
-    <a:masterClrMapping/>
-  </p:clrMapOvr>
-</p:sld>
-</file>
-
-<file path=ppt/slides/slide20.xml><?xml version="1.0" encoding="utf-8"?>
+<file path=ppt/slides/slide24.xml><?xml version="1.0" encoding="utf-8"?>
 <p:sld xmlns:a="http://schemas.openxmlformats.org/drawingml/2006/main" xmlns:r="http://schemas.openxmlformats.org/officeDocument/2006/relationships" xmlns:p="http://schemas.openxmlformats.org/presentationml/2006/main">
   <p:cSld>
     <p:bg>
@@ -16322,7 +20392,7 @@
                 <a:ea typeface="Calibri" pitchFamily="34" charset="-122"/>
                 <a:cs typeface="Calibri" pitchFamily="34" charset="-120"/>
               </a:rPr>
-              <a:t>SEÇÃO 09 · LEVANTAMENTO</a:t>
+              <a:t>SEÇÃO 07 · LEVANTAMENTO</a:t>
             </a:r>
             <a:endParaRPr lang="en-US" sz="1200" dirty="0"/>
           </a:p>
@@ -16367,7 +20437,7 @@
                 <a:ea typeface="Calibri" pitchFamily="34" charset="-122"/>
                 <a:cs typeface="Calibri" pitchFamily="34" charset="-120"/>
               </a:rPr>
-              <a:t>19</a:t>
+              <a:t>23</a:t>
             </a:r>
             <a:endParaRPr lang="en-US" sz="850" dirty="0"/>
           </a:p>
@@ -16519,7 +20589,7 @@
 </p:sld>
 </file>
 
-<file path=ppt/slides/slide21.xml><?xml version="1.0" encoding="utf-8"?>
+<file path=ppt/slides/slide25.xml><?xml version="1.0" encoding="utf-8"?>
 <p:sld xmlns:a="http://schemas.openxmlformats.org/drawingml/2006/main" xmlns:r="http://schemas.openxmlformats.org/officeDocument/2006/relationships" xmlns:p="http://schemas.openxmlformats.org/presentationml/2006/main">
   <p:cSld name="Slide 20">
     <p:bg>
@@ -16630,7 +20700,7 @@
                 <a:ea typeface="Calibri" pitchFamily="34" charset="-122"/>
                 <a:cs typeface="Calibri" pitchFamily="34" charset="-120"/>
               </a:rPr>
-              <a:t>SEÇÃO 10 · CONSOLIDAÇÃO</a:t>
+              <a:t>SEÇÃO 08 · CONSOLIDAÇÃO</a:t>
             </a:r>
             <a:endParaRPr lang="en-US" sz="1200" dirty="0"/>
           </a:p>
@@ -18201,7 +22271,7 @@
                 <a:ea typeface="Calibri" pitchFamily="34" charset="-122"/>
                 <a:cs typeface="Calibri" pitchFamily="34" charset="-120"/>
               </a:rPr>
-              <a:t>20</a:t>
+              <a:t>24</a:t>
             </a:r>
             <a:endParaRPr lang="en-US" sz="850" dirty="0"/>
           </a:p>
@@ -18215,7 +22285,7 @@
 </p:sld>
 </file>
 
-<file path=ppt/slides/slide22.xml><?xml version="1.0" encoding="utf-8"?>
+<file path=ppt/slides/slide26.xml><?xml version="1.0" encoding="utf-8"?>
 <p:sld xmlns:a="http://schemas.openxmlformats.org/drawingml/2006/main" xmlns:r="http://schemas.openxmlformats.org/officeDocument/2006/relationships" xmlns:p="http://schemas.openxmlformats.org/presentationml/2006/main">
   <p:cSld name="Slide 22">
     <p:bg>
@@ -18326,7 +22396,7 @@
                 <a:ea typeface="Calibri" pitchFamily="34" charset="-122"/>
                 <a:cs typeface="Calibri" pitchFamily="34" charset="-120"/>
               </a:rPr>
-              <a:t>SEÇÃO 11 · TREINAMENTOS POR ÁREA</a:t>
+              <a:t>SEÇÃO 09 · TREINAMENTOS POR ÁREA</a:t>
             </a:r>
             <a:endParaRPr lang="en-US" sz="1200" dirty="0"/>
           </a:p>
@@ -21134,7 +25204,7 @@
                 <a:ea typeface="Calibri" pitchFamily="34" charset="-122"/>
                 <a:cs typeface="Calibri" pitchFamily="34" charset="-120"/>
               </a:rPr>
-              <a:t>21</a:t>
+              <a:t>25</a:t>
             </a:r>
             <a:endParaRPr lang="en-US" sz="850" dirty="0"/>
           </a:p>
@@ -21148,7 +25218,7 @@
 </p:sld>
 </file>
 
-<file path=ppt/slides/slide23.xml><?xml version="1.0" encoding="utf-8"?>
+<file path=ppt/slides/slide27.xml><?xml version="1.0" encoding="utf-8"?>
 <p:sld xmlns:a="http://schemas.openxmlformats.org/drawingml/2006/main" xmlns:r="http://schemas.openxmlformats.org/officeDocument/2006/relationships" xmlns:p="http://schemas.openxmlformats.org/presentationml/2006/main">
   <p:cSld name="Slide 23">
     <p:bg>
@@ -21518,7 +25588,7 @@
                 <a:ea typeface="Calibri" pitchFamily="34" charset="-122"/>
                 <a:cs typeface="Calibri" pitchFamily="34" charset="-120"/>
               </a:rPr>
-              <a:t>4 passos para decidir onde investir a evolução da condição do ativo — a base da nova matriz de priorização (seção 05).</a:t>
+              <a:t>4 passos para decidir onde investir a evolução da condição do ativo — a base da nova matriz de priorização.</a:t>
             </a:r>
             <a:endParaRPr lang="en-US" sz="1250" dirty="0"/>
           </a:p>
@@ -21881,7 +25951,7 @@
                 <a:ea typeface="Calibri" pitchFamily="34" charset="-122"/>
                 <a:cs typeface="Calibri" pitchFamily="34" charset="-120"/>
               </a:rPr>
-              <a:t>Workshop 27/08</a:t>
+              <a:t>Definido</a:t>
             </a:r>
             <a:endParaRPr lang="en-US" sz="830" dirty="0"/>
           </a:p>
@@ -39185,7 +43255,7 @@
 </file>
 
 <file path=ppt/slides/slide8.xml><?xml version="1.0" encoding="utf-8"?>
-<p:sld xmlns:a="http://schemas.openxmlformats.org/drawingml/2006/main" xmlns:r="http://schemas.openxmlformats.org/officeDocument/2006/relationships" xmlns:p="http://schemas.openxmlformats.org/presentationml/2006/main">
+<p:sld xmlns:a="http://schemas.openxmlformats.org/drawingml/2006/main" xmlns:r="http://schemas.openxmlformats.org/officeDocument/2006/relationships" xmlns:p="http://schemas.openxmlformats.org/presentationml/2006/main" show="0">
   <p:cSld name="Slide 8">
     <p:bg>
       <p:bgPr>
@@ -41702,7 +45772,7 @@
 </file>
 
 <file path=ppt/slides/slide9.xml><?xml version="1.0" encoding="utf-8"?>
-<p:sld xmlns:a="http://schemas.openxmlformats.org/drawingml/2006/main" xmlns:r="http://schemas.openxmlformats.org/officeDocument/2006/relationships" xmlns:p="http://schemas.openxmlformats.org/presentationml/2006/main">
+<p:sld xmlns:a="http://schemas.openxmlformats.org/drawingml/2006/main" xmlns:r="http://schemas.openxmlformats.org/officeDocument/2006/relationships" xmlns:p="http://schemas.openxmlformats.org/presentationml/2006/main" show="0">
   <p:cSld name="Slide 10">
     <p:bg>
       <p:bgPr>

--- a/Planejamento_Integrado_Operacoes_Topside.pptx
+++ b/Planejamento_Integrado_Operacoes_Topside.pptx
@@ -6319,7 +6319,7 @@
                           </a:solidFill>
                           <a:latin typeface="Calibri"/>
                         </a:rPr>
-                        <a:t>Custo de não fazer / custo do projeto (até 7)</a:t>
+                        <a:t>Custo de não fazer / custo do projeto (até 5)</a:t>
                       </a:r>
                     </a:p>
                   </a:txBody>
@@ -6363,7 +6363,7 @@
                           </a:solidFill>
                           <a:latin typeface="Calibri"/>
                         </a:rPr>
-                        <a:t>7 · 5 · 4 · 2 · 1 · 0</a:t>
+                        <a:t>5 · 4 · 3 · 2 · 1 · 0</a:t>
                       </a:r>
                     </a:p>
                   </a:txBody>
@@ -6455,7 +6455,7 @@
                           </a:solidFill>
                           <a:latin typeface="Calibri"/>
                         </a:rPr>
-                        <a:t>Maturidade da estimativa (até 2)</a:t>
+                        <a:t>Maturidade da estimativa (até 4)</a:t>
                       </a:r>
                     </a:p>
                   </a:txBody>
@@ -6499,7 +6499,7 @@
                           </a:solidFill>
                           <a:latin typeface="Calibri"/>
                         </a:rPr>
-                        <a:t>0 · 1 · 2</a:t>
+                        <a:t>0 · 2 · 4</a:t>
                       </a:r>
                     </a:p>
                   </a:txBody>

--- a/Planejamento_Integrado_Operacoes_Topside.pptx
+++ b/Planejamento_Integrado_Operacoes_Topside.pptx
@@ -4928,7 +4928,7 @@
                           </a:solidFill>
                           <a:latin typeface="Calibri"/>
                         </a:rPr>
-                        <a:t>Não se aplica · barreira de suporte · barreira importante degradada · barreira crítica indisponível</a:t>
+                        <a:t>Não se aplica · barreira crítica degradada · barreira crítica indisponível</a:t>
                       </a:r>
                     </a:p>
                   </a:txBody>
@@ -4950,7 +4950,7 @@
                           </a:solidFill>
                           <a:latin typeface="Calibri"/>
                         </a:rPr>
-                        <a:t>0 · 3 · 5 · 8</a:t>
+                        <a:t>0 · 4 · 8</a:t>
                       </a:r>
                     </a:p>
                   </a:txBody>
@@ -4996,7 +4996,7 @@
                           </a:solidFill>
                           <a:latin typeface="Calibri"/>
                         </a:rPr>
-                        <a:t>Sem registro · desvio isolado · near miss/recorrência · incidente com ação aberta</a:t>
+                        <a:t>Sem registro · desvio isolado · ocorrência em outro equipamento do mesmo TAG · incidente com ação aberta</a:t>
                       </a:r>
                     </a:p>
                   </a:txBody>

--- a/Planejamento_Integrado_Operacoes_Topside.pptx
+++ b/Planejamento_Integrado_Operacoes_Topside.pptx
@@ -3696,7 +3696,7 @@
         <p:spPr>
           <a:xfrm>
             <a:off x="365760" y="2999232"/>
-            <a:ext cx="5637276" cy="1417320"/>
+            <a:ext cx="3697223" cy="1417320"/>
           </a:xfrm>
           <a:prstGeom prst="roundRect">
             <a:avLst>
@@ -3744,7 +3744,7 @@
         <p:spPr>
           <a:xfrm>
             <a:off x="548640" y="3145536"/>
-            <a:ext cx="5271516" cy="292608"/>
+            <a:ext cx="3331464" cy="292608"/>
           </a:xfrm>
           <a:prstGeom prst="rect">
             <a:avLst/>
@@ -3783,7 +3783,7 @@
         <p:spPr>
           <a:xfrm>
             <a:off x="548640" y="3474720"/>
-            <a:ext cx="5271516" cy="822960"/>
+            <a:ext cx="3331464" cy="822960"/>
           </a:xfrm>
           <a:prstGeom prst="rect">
             <a:avLst/>
@@ -3821,8 +3821,8 @@
         </p:nvSpPr>
         <p:spPr>
           <a:xfrm>
-            <a:off x="6185916" y="2999232"/>
-            <a:ext cx="5637276" cy="1417320"/>
+            <a:off x="4250437" y="2999232"/>
+            <a:ext cx="3697223" cy="1417320"/>
           </a:xfrm>
           <a:prstGeom prst="roundRect">
             <a:avLst>
@@ -3869,8 +3869,8 @@
         </p:nvSpPr>
         <p:spPr>
           <a:xfrm>
-            <a:off x="6368796" y="3145536"/>
-            <a:ext cx="5271516" cy="292608"/>
+            <a:off x="4433317" y="3145536"/>
+            <a:ext cx="3331464" cy="292608"/>
           </a:xfrm>
           <a:prstGeom prst="rect">
             <a:avLst/>
@@ -3908,8 +3908,8 @@
         </p:nvSpPr>
         <p:spPr>
           <a:xfrm>
-            <a:off x="6368796" y="3474720"/>
-            <a:ext cx="5271516" cy="822960"/>
+            <a:off x="4433317" y="3474720"/>
+            <a:ext cx="3331464" cy="822960"/>
           </a:xfrm>
           <a:prstGeom prst="rect">
             <a:avLst/>
@@ -4517,6 +4517,132 @@
                 <a:latin typeface="Calibri"/>
               </a:rPr>
               <a:t>9</a:t>
+            </a:r>
+          </a:p>
+        </p:txBody>
+      </p:sp>
+      <p:sp>
+        <p:nvSpPr>
+          <p:cNvPr id="12" name="Rounded Rectangle 11"/>
+          <p:cNvSpPr/>
+          <p:nvPr/>
+        </p:nvSpPr>
+        <p:spPr>
+          <a:xfrm>
+            <a:off x="8130541" y="2999232"/>
+            <a:ext cx="3697223" cy="1417320"/>
+          </a:xfrm>
+          <a:prstGeom prst="roundRect">
+            <a:avLst>
+              <a:gd name="adj" fmla="val 5000"/>
+            </a:avLst>
+          </a:prstGeom>
+          <a:solidFill>
+            <a:srgbClr val="FFFFFF"/>
+          </a:solidFill>
+          <a:ln w="12700">
+            <a:solidFill>
+              <a:srgbClr val="E1DDEC"/>
+            </a:solidFill>
+          </a:ln>
+          <a:effectLst/>
+        </p:spPr>
+        <p:style>
+          <a:lnRef idx="1">
+            <a:schemeClr val="accent1"/>
+          </a:lnRef>
+          <a:fillRef idx="3">
+            <a:schemeClr val="accent1"/>
+          </a:fillRef>
+          <a:effectRef idx="2">
+            <a:schemeClr val="accent1"/>
+          </a:effectRef>
+          <a:fontRef idx="minor">
+            <a:schemeClr val="lt1"/>
+          </a:fontRef>
+        </p:style>
+        <p:txBody>
+          <a:bodyPr rtlCol="0" anchor="ctr"/>
+          <a:lstStyle/>
+          <a:p>
+            <a:pPr algn="ctr"/>
+          </a:p>
+        </p:txBody>
+      </p:sp>
+      <p:sp>
+        <p:nvSpPr>
+          <p:cNvPr id="13" name="TextBox 12"/>
+          <p:cNvSpPr txBox="1"/>
+          <p:nvPr/>
+        </p:nvSpPr>
+        <p:spPr>
+          <a:xfrm>
+            <a:off x="8313421" y="3145536"/>
+            <a:ext cx="3331464" cy="292608"/>
+          </a:xfrm>
+          <a:prstGeom prst="rect">
+            <a:avLst/>
+          </a:prstGeom>
+          <a:noFill/>
+        </p:spPr>
+        <p:txBody>
+          <a:bodyPr wrap="square" anchor="t" lIns="0" rIns="0" tIns="0" bIns="0">
+            <a:spAutoFit/>
+          </a:bodyPr>
+          <a:lstStyle/>
+          <a:p>
+            <a:pPr algn="l">
+              <a:lnSpc>
+                <a:spcPct val="100000"/>
+              </a:lnSpc>
+            </a:pPr>
+            <a:r>
+              <a:rPr sz="1300" b="1" i="0">
+                <a:solidFill>
+                  <a:srgbClr val="2C2849"/>
+                </a:solidFill>
+                <a:latin typeface="Calibri"/>
+              </a:rPr>
+              <a:t>Trava de Produção</a:t>
+            </a:r>
+          </a:p>
+        </p:txBody>
+      </p:sp>
+      <p:sp>
+        <p:nvSpPr>
+          <p:cNvPr id="14" name="TextBox 13"/>
+          <p:cNvSpPr txBox="1"/>
+          <p:nvPr/>
+        </p:nvSpPr>
+        <p:spPr>
+          <a:xfrm>
+            <a:off x="8313421" y="3474720"/>
+            <a:ext cx="3331464" cy="822960"/>
+          </a:xfrm>
+          <a:prstGeom prst="rect">
+            <a:avLst/>
+          </a:prstGeom>
+          <a:noFill/>
+        </p:spPr>
+        <p:txBody>
+          <a:bodyPr wrap="square" anchor="t" lIns="0" rIns="0" tIns="0" bIns="0">
+            <a:spAutoFit/>
+          </a:bodyPr>
+          <a:lstStyle/>
+          <a:p>
+            <a:pPr algn="l">
+              <a:lnSpc>
+                <a:spcPct val="120000"/>
+              </a:lnSpc>
+            </a:pPr>
+            <a:r>
+              <a:rPr sz="1000" b="0" i="0">
+                <a:solidFill>
+                  <a:srgbClr val="6B6682"/>
+                </a:solidFill>
+                <a:latin typeface="Calibri"/>
+              </a:rPr>
+              <a:t>Escopo classificado como Incremento de Produção (ganho de óleo novo) — eleva direto a P1, independentemente da pontuação.</a:t>
             </a:r>
           </a:p>
         </p:txBody>

--- a/Planejamento_Integrado_Operacoes_Topside.pptx
+++ b/Planejamento_Integrado_Operacoes_Topside.pptx
@@ -10785,7 +10785,7 @@
                 </a:solidFill>
                 <a:latin typeface="Calibri"/>
               </a:rPr>
-              <a:t>5 frentes estratégicas (FB1–FB5)</a:t>
+              <a:t>5 frentes estratégicas (F01–F05)</a:t>
             </a:r>
           </a:p>
         </p:txBody>
@@ -10879,7 +10879,7 @@
                 </a:solidFill>
                 <a:latin typeface="Calibri"/>
               </a:rPr>
-              <a:t>FB1</a:t>
+              <a:t>F01</a:t>
             </a:r>
           </a:p>
         </p:txBody>
@@ -11703,7 +11703,7 @@
                 </a:solidFill>
                 <a:latin typeface="Calibri"/>
               </a:rPr>
-              <a:t>5 frentes estratégicas (FB1–FB5)</a:t>
+              <a:t>5 frentes estratégicas (F01–F05)</a:t>
             </a:r>
           </a:p>
         </p:txBody>
@@ -11797,7 +11797,7 @@
                 </a:solidFill>
                 <a:latin typeface="Calibri"/>
               </a:rPr>
-              <a:t>FB2</a:t>
+              <a:t>F02</a:t>
             </a:r>
           </a:p>
         </p:txBody>
@@ -12711,7 +12711,7 @@
                 </a:solidFill>
                 <a:latin typeface="Calibri"/>
               </a:rPr>
-              <a:t>5 frentes estratégicas (FB1–FB5)</a:t>
+              <a:t>5 frentes estratégicas (F01–F05)</a:t>
             </a:r>
           </a:p>
         </p:txBody>
@@ -12805,7 +12805,7 @@
                 </a:solidFill>
                 <a:latin typeface="Calibri"/>
               </a:rPr>
-              <a:t>FB3</a:t>
+              <a:t>F03</a:t>
             </a:r>
           </a:p>
         </p:txBody>
@@ -13201,7 +13201,7 @@
                 </a:solidFill>
                 <a:latin typeface="Calibri"/>
               </a:rPr>
-              <a:t>FB4</a:t>
+              <a:t>F04</a:t>
             </a:r>
           </a:p>
         </p:txBody>
@@ -13597,7 +13597,7 @@
                 </a:solidFill>
                 <a:latin typeface="Calibri"/>
               </a:rPr>
-              <a:t>FB5</a:t>
+              <a:t>F05</a:t>
             </a:r>
           </a:p>
         </p:txBody>

--- a/Planejamento_Integrado_Operacoes_Topside.pptx
+++ b/Planejamento_Integrado_Operacoes_Topside.pptx
@@ -26890,7 +26890,7 @@
                 <a:ea typeface="Calibri" pitchFamily="34" charset="-122"/>
                 <a:cs typeface="Calibri" pitchFamily="34" charset="-120"/>
               </a:rPr>
-              <a:t>Priorizamos frentes de trabalho, não atividades</a:t>
+              <a:t>Priorizamos Projetos e Grandes Manutenções, não atividades</a:t>
             </a:r>
             <a:endParaRPr lang="en-US" sz="2900" dirty="0"/>
           </a:p>
@@ -27227,7 +27227,7 @@
                 <a:ea typeface="Calibri" pitchFamily="34" charset="-122"/>
                 <a:cs typeface="Calibri" pitchFamily="34" charset="-120"/>
               </a:rPr>
-              <a:t>O que mostra a evolução da condição do ativo em cada frente — conectado às diretrizes estratégicas de cada Gerência Executiva.</a:t>
+              <a:t>O que mostra a evolução da condição do ativo em cada frente — conectado com as frentes de trabalho e indicadores da Gerência de Operações.</a:t>
             </a:r>
             <a:endParaRPr lang="en-US" sz="1000" dirty="0"/>
           </a:p>
@@ -27483,7 +27483,7 @@
                 <a:ea typeface="Calibri" pitchFamily="34" charset="-122"/>
                 <a:cs typeface="Calibri" pitchFamily="34" charset="-120"/>
               </a:rPr>
-              <a:t>Critério entre frentes</a:t>
+              <a:t>Critério entre projetos</a:t>
             </a:r>
             <a:endParaRPr lang="en-US" sz="1250" dirty="0"/>
           </a:p>
@@ -28143,7 +28143,7 @@
                 <a:ea typeface="Calibri" pitchFamily="34" charset="-122"/>
                 <a:cs typeface="Calibri" pitchFamily="34" charset="-120"/>
               </a:rPr>
-              <a:t>O que precisa ser feito para entregar o nível definido — ex.: 800 cama-dia para zerar um contingenciamento.</a:t>
+              <a:t>O que precisa ser feito para entregar o nível definido — ex.: 600 cama-dia para trocar uma TG.</a:t>
             </a:r>
             <a:endParaRPr lang="en-US" sz="1000" dirty="0"/>
           </a:p>

--- a/Planejamento_Integrado_Operacoes_Topside.pptx
+++ b/Planejamento_Integrado_Operacoes_Topside.pptx
@@ -49990,7 +49990,7 @@
                 <a:ea typeface="Calibri" pitchFamily="34" charset="-122"/>
                 <a:cs typeface="Calibri" pitchFamily="34" charset="-120"/>
               </a:rPr>
-              <a:t>Proposta ilustrativa — pontos de exemplo, não dados reais do ciclo atual.</a:t>
+              <a:t>Proposta ilustrativa, restrita a Projetos e Grandes Manutenções — pontos de exemplo, não dados reais do ciclo atual.</a:t>
             </a:r>
             <a:endParaRPr lang="en-US" sz="1000" dirty="0"/>
           </a:p>
@@ -50402,14 +50402,14 @@
       </p:sp>
       <p:sp>
         <p:nvSpPr>
-          <p:cNvPr id="20" name="Shape 17"/>
-          <p:cNvSpPr/>
-          <p:nvPr/>
-        </p:nvSpPr>
-        <p:spPr>
-          <a:xfrm>
-            <a:off x="821588" y="5208880"/>
-            <a:ext cx="158191" cy="158191"/>
+          <p:cNvPr id="28" name="Shape 25"/>
+          <p:cNvSpPr/>
+          <p:nvPr/>
+        </p:nvSpPr>
+        <p:spPr>
+          <a:xfrm>
+            <a:off x="777240" y="3749040"/>
+            <a:ext cx="386791" cy="386791"/>
           </a:xfrm>
           <a:prstGeom prst="ellipse">
             <a:avLst/>
@@ -50436,46 +50436,14 @@
       </p:sp>
       <p:sp>
         <p:nvSpPr>
-          <p:cNvPr id="21" name="Shape 18"/>
-          <p:cNvSpPr/>
-          <p:nvPr/>
-        </p:nvSpPr>
-        <p:spPr>
-          <a:xfrm>
-            <a:off x="952348" y="5090008"/>
-            <a:ext cx="173736" cy="173736"/>
-          </a:xfrm>
-          <a:prstGeom prst="ellipse">
-            <a:avLst/>
-          </a:prstGeom>
-          <a:solidFill>
-            <a:srgbClr val="2C2849"/>
-          </a:solidFill>
-          <a:ln w="12700">
-            <a:solidFill>
-              <a:srgbClr val="FFFFFF"/>
-            </a:solidFill>
-            <a:prstDash val="solid"/>
-          </a:ln>
-        </p:spPr>
-        <p:txBody>
-          <a:bodyPr/>
-          <a:lstStyle/>
-          <a:p>
-            <a:endParaRPr lang="pt-BR"/>
-          </a:p>
-        </p:txBody>
-      </p:sp>
-      <p:sp>
-        <p:nvSpPr>
-          <p:cNvPr id="22" name="Text 19"/>
-          <p:cNvSpPr/>
-          <p:nvPr/>
-        </p:nvSpPr>
-        <p:spPr>
-          <a:xfrm>
-            <a:off x="952348" y="5090008"/>
-            <a:ext cx="173736" cy="173736"/>
+          <p:cNvPr id="29" name="Text 26"/>
+          <p:cNvSpPr/>
+          <p:nvPr/>
+        </p:nvSpPr>
+        <p:spPr>
+          <a:xfrm>
+            <a:off x="777240" y="3749040"/>
+            <a:ext cx="386791" cy="386791"/>
           </a:xfrm>
           <a:prstGeom prst="rect">
             <a:avLst/>
@@ -50491,7 +50459,7 @@
               <a:buNone/>
             </a:pPr>
             <a:r>
-              <a:rPr lang="en-US" sz="750" b="1" dirty="0">
+              <a:rPr lang="en-US" sz="1000" b="1" dirty="0">
                 <a:solidFill>
                   <a:srgbClr val="FFFFFF"/>
                 </a:solidFill>
@@ -50501,20 +50469,20 @@
               </a:rPr>
               <a:t>1</a:t>
             </a:r>
-            <a:endParaRPr lang="en-US" sz="750" dirty="0"/>
-          </a:p>
-        </p:txBody>
-      </p:sp>
-      <p:sp>
-        <p:nvSpPr>
-          <p:cNvPr id="23" name="Shape 20"/>
-          <p:cNvSpPr/>
-          <p:nvPr/>
-        </p:nvSpPr>
-        <p:spPr>
-          <a:xfrm>
-            <a:off x="1243584" y="4043477"/>
-            <a:ext cx="193853" cy="193853"/>
+            <a:endParaRPr lang="en-US" sz="1000" dirty="0"/>
+          </a:p>
+        </p:txBody>
+      </p:sp>
+      <p:sp>
+        <p:nvSpPr>
+          <p:cNvPr id="30" name="Shape 27"/>
+          <p:cNvSpPr/>
+          <p:nvPr/>
+        </p:nvSpPr>
+        <p:spPr>
+          <a:xfrm>
+            <a:off x="4261104" y="2990088"/>
+            <a:ext cx="562356" cy="562356"/>
           </a:xfrm>
           <a:prstGeom prst="ellipse">
             <a:avLst/>
@@ -50541,119 +50509,14 @@
       </p:sp>
       <p:sp>
         <p:nvSpPr>
-          <p:cNvPr id="24" name="Shape 21"/>
-          <p:cNvSpPr/>
-          <p:nvPr/>
-        </p:nvSpPr>
-        <p:spPr>
-          <a:xfrm>
-            <a:off x="1410005" y="3924605"/>
-            <a:ext cx="173736" cy="173736"/>
-          </a:xfrm>
-          <a:prstGeom prst="ellipse">
-            <a:avLst/>
-          </a:prstGeom>
-          <a:solidFill>
-            <a:srgbClr val="2C2849"/>
-          </a:solidFill>
-          <a:ln w="12700">
-            <a:solidFill>
-              <a:srgbClr val="FFFFFF"/>
-            </a:solidFill>
-            <a:prstDash val="solid"/>
-          </a:ln>
-        </p:spPr>
-        <p:txBody>
-          <a:bodyPr/>
-          <a:lstStyle/>
-          <a:p>
-            <a:endParaRPr lang="pt-BR"/>
-          </a:p>
-        </p:txBody>
-      </p:sp>
-      <p:sp>
-        <p:nvSpPr>
-          <p:cNvPr id="25" name="Text 22"/>
-          <p:cNvSpPr/>
-          <p:nvPr/>
-        </p:nvSpPr>
-        <p:spPr>
-          <a:xfrm>
-            <a:off x="1410005" y="3924605"/>
-            <a:ext cx="173736" cy="173736"/>
-          </a:xfrm>
-          <a:prstGeom prst="rect">
-            <a:avLst/>
-          </a:prstGeom>
-          <a:noFill/>
-          <a:ln/>
-        </p:spPr>
-        <p:txBody>
-          <a:bodyPr wrap="square" lIns="0" tIns="0" rIns="0" bIns="0" rtlCol="0" anchor="ctr"/>
-          <a:lstStyle/>
-          <a:p>
-            <a:pPr marL="0" indent="0" algn="ctr">
-              <a:buNone/>
-            </a:pPr>
-            <a:r>
-              <a:rPr lang="en-US" sz="750" b="1" dirty="0">
-                <a:solidFill>
-                  <a:srgbClr val="FFFFFF"/>
-                </a:solidFill>
-                <a:latin typeface="Calibri" pitchFamily="34" charset="0"/>
-                <a:ea typeface="Calibri" pitchFamily="34" charset="-122"/>
-                <a:cs typeface="Calibri" pitchFamily="34" charset="-120"/>
-              </a:rPr>
-              <a:t>2</a:t>
-            </a:r>
-            <a:endParaRPr lang="en-US" sz="750" dirty="0"/>
-          </a:p>
-        </p:txBody>
-      </p:sp>
-      <p:sp>
-        <p:nvSpPr>
-          <p:cNvPr id="26" name="Shape 23"/>
-          <p:cNvSpPr/>
-          <p:nvPr/>
-        </p:nvSpPr>
-        <p:spPr>
-          <a:xfrm>
-            <a:off x="1639519" y="3093415"/>
-            <a:ext cx="281635" cy="281635"/>
-          </a:xfrm>
-          <a:prstGeom prst="ellipse">
-            <a:avLst/>
-          </a:prstGeom>
-          <a:solidFill>
-            <a:srgbClr val="10A9FF">
-              <a:alpha val="82000"/>
-            </a:srgbClr>
-          </a:solidFill>
-          <a:ln w="15240">
-            <a:solidFill>
-              <a:srgbClr val="FFFFFF"/>
-            </a:solidFill>
-            <a:prstDash val="solid"/>
-          </a:ln>
-        </p:spPr>
-        <p:txBody>
-          <a:bodyPr/>
-          <a:lstStyle/>
-          <a:p>
-            <a:endParaRPr lang="pt-BR"/>
-          </a:p>
-        </p:txBody>
-      </p:sp>
-      <p:sp>
-        <p:nvSpPr>
-          <p:cNvPr id="27" name="Text 24"/>
-          <p:cNvSpPr/>
-          <p:nvPr/>
-        </p:nvSpPr>
-        <p:spPr>
-          <a:xfrm>
-            <a:off x="1639519" y="3093415"/>
-            <a:ext cx="281635" cy="281635"/>
+          <p:cNvPr id="31" name="Text 28"/>
+          <p:cNvSpPr/>
+          <p:nvPr/>
+        </p:nvSpPr>
+        <p:spPr>
+          <a:xfrm>
+            <a:off x="4261104" y="2990088"/>
+            <a:ext cx="562356" cy="562356"/>
           </a:xfrm>
           <a:prstGeom prst="rect">
             <a:avLst/>
@@ -50685,14 +50548,14 @@
       </p:sp>
       <p:sp>
         <p:nvSpPr>
-          <p:cNvPr id="28" name="Shape 25"/>
-          <p:cNvSpPr/>
-          <p:nvPr/>
-        </p:nvSpPr>
-        <p:spPr>
-          <a:xfrm>
-            <a:off x="2818638" y="3364535"/>
-            <a:ext cx="386791" cy="386791"/>
+          <p:cNvPr id="32" name="Shape 29"/>
+          <p:cNvSpPr/>
+          <p:nvPr/>
+        </p:nvSpPr>
+        <p:spPr>
+          <a:xfrm>
+            <a:off x="4754880" y="3429000"/>
+            <a:ext cx="492862" cy="492862"/>
           </a:xfrm>
           <a:prstGeom prst="ellipse">
             <a:avLst/>
@@ -50719,14 +50582,14 @@
       </p:sp>
       <p:sp>
         <p:nvSpPr>
-          <p:cNvPr id="29" name="Text 26"/>
-          <p:cNvSpPr/>
-          <p:nvPr/>
-        </p:nvSpPr>
-        <p:spPr>
-          <a:xfrm>
-            <a:off x="2818638" y="3364535"/>
-            <a:ext cx="386791" cy="386791"/>
+          <p:cNvPr id="33" name="Text 30"/>
+          <p:cNvSpPr/>
+          <p:nvPr/>
+        </p:nvSpPr>
+        <p:spPr>
+          <a:xfrm>
+            <a:off x="4754880" y="3429000"/>
+            <a:ext cx="492862" cy="492862"/>
           </a:xfrm>
           <a:prstGeom prst="rect">
             <a:avLst/>
@@ -50758,14 +50621,14 @@
       </p:sp>
       <p:sp>
         <p:nvSpPr>
-          <p:cNvPr id="30" name="Shape 27"/>
-          <p:cNvSpPr/>
-          <p:nvPr/>
-        </p:nvSpPr>
-        <p:spPr>
-          <a:xfrm>
-            <a:off x="4408780" y="2435504"/>
-            <a:ext cx="562356" cy="562356"/>
+          <p:cNvPr id="34" name="Shape 31"/>
+          <p:cNvSpPr/>
+          <p:nvPr/>
+        </p:nvSpPr>
+        <p:spPr>
+          <a:xfrm>
+            <a:off x="5029200" y="4617720"/>
+            <a:ext cx="422453" cy="422453"/>
           </a:xfrm>
           <a:prstGeom prst="ellipse">
             <a:avLst/>
@@ -50792,14 +50655,14 @@
       </p:sp>
       <p:sp>
         <p:nvSpPr>
-          <p:cNvPr id="31" name="Text 28"/>
-          <p:cNvSpPr/>
-          <p:nvPr/>
-        </p:nvSpPr>
-        <p:spPr>
-          <a:xfrm>
-            <a:off x="4408780" y="2435504"/>
-            <a:ext cx="562356" cy="562356"/>
+          <p:cNvPr id="35" name="Text 32"/>
+          <p:cNvSpPr/>
+          <p:nvPr/>
+        </p:nvSpPr>
+        <p:spPr>
+          <a:xfrm>
+            <a:off x="5029200" y="4617720"/>
+            <a:ext cx="422453" cy="422453"/>
           </a:xfrm>
           <a:prstGeom prst="rect">
             <a:avLst/>
@@ -50831,14 +50694,14 @@
       </p:sp>
       <p:sp>
         <p:nvSpPr>
-          <p:cNvPr id="32" name="Shape 29"/>
-          <p:cNvSpPr/>
-          <p:nvPr/>
-        </p:nvSpPr>
-        <p:spPr>
-          <a:xfrm>
-            <a:off x="4876038" y="2802179"/>
-            <a:ext cx="492862" cy="492862"/>
+          <p:cNvPr id="36" name="Shape 33"/>
+          <p:cNvSpPr/>
+          <p:nvPr/>
+        </p:nvSpPr>
+        <p:spPr>
+          <a:xfrm>
+            <a:off x="6830568" y="2916936"/>
+            <a:ext cx="632765" cy="632765"/>
           </a:xfrm>
           <a:prstGeom prst="ellipse">
             <a:avLst/>
@@ -50865,14 +50728,14 @@
       </p:sp>
       <p:sp>
         <p:nvSpPr>
-          <p:cNvPr id="33" name="Text 30"/>
-          <p:cNvSpPr/>
-          <p:nvPr/>
-        </p:nvSpPr>
-        <p:spPr>
-          <a:xfrm>
-            <a:off x="4876038" y="2802179"/>
-            <a:ext cx="492862" cy="492862"/>
+          <p:cNvPr id="37" name="Text 34"/>
+          <p:cNvSpPr/>
+          <p:nvPr/>
+        </p:nvSpPr>
+        <p:spPr>
+          <a:xfrm>
+            <a:off x="6830568" y="2916936"/>
+            <a:ext cx="632765" cy="632765"/>
           </a:xfrm>
           <a:prstGeom prst="rect">
             <a:avLst/>
@@ -50904,153 +50767,7 @@
       </p:sp>
       <p:sp>
         <p:nvSpPr>
-          <p:cNvPr id="34" name="Shape 31"/>
-          <p:cNvSpPr/>
-          <p:nvPr/>
-        </p:nvSpPr>
-        <p:spPr>
-          <a:xfrm>
-            <a:off x="5879592" y="4191610"/>
-            <a:ext cx="422453" cy="422453"/>
-          </a:xfrm>
-          <a:prstGeom prst="ellipse">
-            <a:avLst/>
-          </a:prstGeom>
-          <a:solidFill>
-            <a:srgbClr val="10A9FF">
-              <a:alpha val="82000"/>
-            </a:srgbClr>
-          </a:solidFill>
-          <a:ln w="15240">
-            <a:solidFill>
-              <a:srgbClr val="FFFFFF"/>
-            </a:solidFill>
-            <a:prstDash val="solid"/>
-          </a:ln>
-        </p:spPr>
-        <p:txBody>
-          <a:bodyPr/>
-          <a:lstStyle/>
-          <a:p>
-            <a:endParaRPr lang="pt-BR"/>
-          </a:p>
-        </p:txBody>
-      </p:sp>
-      <p:sp>
-        <p:nvSpPr>
-          <p:cNvPr id="35" name="Text 32"/>
-          <p:cNvSpPr/>
-          <p:nvPr/>
-        </p:nvSpPr>
-        <p:spPr>
-          <a:xfrm>
-            <a:off x="5879592" y="4191610"/>
-            <a:ext cx="422453" cy="422453"/>
-          </a:xfrm>
-          <a:prstGeom prst="rect">
-            <a:avLst/>
-          </a:prstGeom>
-          <a:noFill/>
-          <a:ln/>
-        </p:spPr>
-        <p:txBody>
-          <a:bodyPr wrap="square" lIns="0" tIns="0" rIns="0" bIns="0" rtlCol="0" anchor="ctr"/>
-          <a:lstStyle/>
-          <a:p>
-            <a:pPr marL="0" indent="0" algn="ctr">
-              <a:buNone/>
-            </a:pPr>
-            <a:r>
-              <a:rPr lang="en-US" sz="1000" b="1" dirty="0">
-                <a:solidFill>
-                  <a:srgbClr val="FFFFFF"/>
-                </a:solidFill>
-                <a:latin typeface="Calibri" pitchFamily="34" charset="0"/>
-                <a:ea typeface="Calibri" pitchFamily="34" charset="-122"/>
-                <a:cs typeface="Calibri" pitchFamily="34" charset="-120"/>
-              </a:rPr>
-              <a:t>7</a:t>
-            </a:r>
-            <a:endParaRPr lang="en-US" sz="1000" dirty="0"/>
-          </a:p>
-        </p:txBody>
-      </p:sp>
-      <p:sp>
-        <p:nvSpPr>
-          <p:cNvPr id="36" name="Shape 33"/>
-          <p:cNvSpPr/>
-          <p:nvPr/>
-        </p:nvSpPr>
-        <p:spPr>
-          <a:xfrm>
-            <a:off x="6829654" y="2286000"/>
-            <a:ext cx="632765" cy="632765"/>
-          </a:xfrm>
-          <a:prstGeom prst="ellipse">
-            <a:avLst/>
-          </a:prstGeom>
-          <a:solidFill>
-            <a:srgbClr val="F2834B">
-              <a:alpha val="82000"/>
-            </a:srgbClr>
-          </a:solidFill>
-          <a:ln w="15240">
-            <a:solidFill>
-              <a:srgbClr val="FFFFFF"/>
-            </a:solidFill>
-            <a:prstDash val="solid"/>
-          </a:ln>
-        </p:spPr>
-        <p:txBody>
-          <a:bodyPr/>
-          <a:lstStyle/>
-          <a:p>
-            <a:endParaRPr lang="pt-BR"/>
-          </a:p>
-        </p:txBody>
-      </p:sp>
-      <p:sp>
-        <p:nvSpPr>
-          <p:cNvPr id="37" name="Text 34"/>
-          <p:cNvSpPr/>
-          <p:nvPr/>
-        </p:nvSpPr>
-        <p:spPr>
-          <a:xfrm>
-            <a:off x="6829654" y="2286000"/>
-            <a:ext cx="632765" cy="632765"/>
-          </a:xfrm>
-          <a:prstGeom prst="rect">
-            <a:avLst/>
-          </a:prstGeom>
-          <a:noFill/>
-          <a:ln/>
-        </p:spPr>
-        <p:txBody>
-          <a:bodyPr wrap="square" lIns="0" tIns="0" rIns="0" bIns="0" rtlCol="0" anchor="ctr"/>
-          <a:lstStyle/>
-          <a:p>
-            <a:pPr marL="0" indent="0" algn="ctr">
-              <a:buNone/>
-            </a:pPr>
-            <a:r>
-              <a:rPr lang="en-US" sz="1000" b="1" dirty="0">
-                <a:solidFill>
-                  <a:srgbClr val="FFFFFF"/>
-                </a:solidFill>
-                <a:latin typeface="Calibri" pitchFamily="34" charset="0"/>
-                <a:ea typeface="Calibri" pitchFamily="34" charset="-122"/>
-                <a:cs typeface="Calibri" pitchFamily="34" charset="-120"/>
-              </a:rPr>
-              <a:t>8</a:t>
-            </a:r>
-            <a:endParaRPr lang="en-US" sz="1000" dirty="0"/>
-          </a:p>
-        </p:txBody>
-      </p:sp>
-      <p:sp>
-        <p:nvSpPr>
-          <p:cNvPr id="38" name="Shape 35"/>
+          <p:cNvPr id="50" name="Shape 47"/>
           <p:cNvSpPr/>
           <p:nvPr/>
         </p:nvSpPr>
@@ -51077,7 +50794,7 @@
       </p:sp>
       <p:sp>
         <p:nvSpPr>
-          <p:cNvPr id="39" name="Text 36"/>
+          <p:cNvPr id="51" name="Text 48"/>
           <p:cNvSpPr/>
           <p:nvPr/>
         </p:nvSpPr>
@@ -51116,7 +50833,7 @@
       </p:sp>
       <p:sp>
         <p:nvSpPr>
-          <p:cNvPr id="40" name="Text 37"/>
+          <p:cNvPr id="52" name="Text 49"/>
           <p:cNvSpPr/>
           <p:nvPr/>
         </p:nvSpPr>
@@ -51147,7 +50864,7 @@
                 <a:ea typeface="Calibri" pitchFamily="34" charset="-122"/>
                 <a:cs typeface="Calibri" pitchFamily="34" charset="-120"/>
               </a:rPr>
-              <a:t>Estudo de Viabilidade (Backlog)  ·  CAPEX</a:t>
+              <a:t>Retrofit CO2 (Sustentabilidade)  ·  CAPEX</a:t>
             </a:r>
             <a:endParaRPr lang="en-US" sz="930" dirty="0"/>
           </a:p>
@@ -51155,7 +50872,7 @@
       </p:sp>
       <p:sp>
         <p:nvSpPr>
-          <p:cNvPr id="41" name="Text 38"/>
+          <p:cNvPr id="53" name="Text 50"/>
           <p:cNvSpPr/>
           <p:nvPr/>
         </p:nvSpPr>
@@ -51186,7 +50903,7 @@
                 <a:ea typeface="Calibri" pitchFamily="34" charset="-122"/>
                 <a:cs typeface="Calibri" pitchFamily="34" charset="-120"/>
               </a:rPr>
-              <a:t>25 pts · ~80 cama-dia · US$ 30k</a:t>
+              <a:t>68 pts · ~420 cama-dia · US$ 600k</a:t>
             </a:r>
             <a:endParaRPr lang="en-US" sz="820" dirty="0"/>
           </a:p>
@@ -51194,13 +50911,13 @@
       </p:sp>
       <p:sp>
         <p:nvSpPr>
-          <p:cNvPr id="42" name="Shape 39"/>
-          <p:cNvSpPr/>
-          <p:nvPr/>
-        </p:nvSpPr>
-        <p:spPr>
-          <a:xfrm>
-            <a:off x="7772400" y="3067812"/>
+          <p:cNvPr id="54" name="Shape 51"/>
+          <p:cNvSpPr/>
+          <p:nvPr/>
+        </p:nvSpPr>
+        <p:spPr>
+          <a:xfrm>
+            <a:off x="7772400" y="4005072"/>
             <a:ext cx="201168" cy="201168"/>
           </a:xfrm>
           <a:prstGeom prst="ellipse">
@@ -51221,13 +50938,708 @@
       </p:sp>
       <p:sp>
         <p:nvSpPr>
-          <p:cNvPr id="43" name="Text 40"/>
-          <p:cNvSpPr/>
-          <p:nvPr/>
-        </p:nvSpPr>
-        <p:spPr>
-          <a:xfrm>
-            <a:off x="7772400" y="3067812"/>
+          <p:cNvPr id="55" name="Text 52"/>
+          <p:cNvSpPr/>
+          <p:nvPr/>
+        </p:nvSpPr>
+        <p:spPr>
+          <a:xfrm>
+            <a:off x="7772400" y="3538728"/>
+            <a:ext cx="201168" cy="201168"/>
+          </a:xfrm>
+          <a:prstGeom prst="rect">
+            <a:avLst/>
+          </a:prstGeom>
+          <a:noFill/>
+          <a:ln/>
+        </p:spPr>
+        <p:txBody>
+          <a:bodyPr wrap="square" lIns="0" tIns="0" rIns="0" bIns="0" rtlCol="0" anchor="ctr"/>
+          <a:lstStyle/>
+          <a:p>
+            <a:pPr marL="0" indent="0" algn="ctr">
+              <a:buNone/>
+            </a:pPr>
+            <a:r>
+              <a:rPr lang="en-US" sz="800" b="1" dirty="0">
+                <a:solidFill>
+                  <a:srgbClr val="FFFFFF"/>
+                </a:solidFill>
+                <a:latin typeface="Calibri" pitchFamily="34" charset="0"/>
+                <a:ea typeface="Calibri" pitchFamily="34" charset="-122"/>
+                <a:cs typeface="Calibri" pitchFamily="34" charset="-120"/>
+              </a:rPr>
+              <a:t>3</a:t>
+            </a:r>
+            <a:endParaRPr lang="en-US" sz="800" dirty="0"/>
+          </a:p>
+        </p:txBody>
+      </p:sp>
+      <p:sp>
+        <p:nvSpPr>
+          <p:cNvPr id="56" name="Text 53"/>
+          <p:cNvSpPr/>
+          <p:nvPr/>
+        </p:nvSpPr>
+        <p:spPr>
+          <a:xfrm>
+            <a:off x="8065008" y="3483864"/>
+            <a:ext cx="3666744" cy="256032"/>
+          </a:xfrm>
+          <a:prstGeom prst="rect">
+            <a:avLst/>
+          </a:prstGeom>
+          <a:noFill/>
+          <a:ln/>
+        </p:spPr>
+        <p:txBody>
+          <a:bodyPr wrap="square" lIns="0" tIns="0" rIns="0" bIns="0" rtlCol="0" anchor="b"/>
+          <a:lstStyle/>
+          <a:p>
+            <a:pPr marL="0" indent="0">
+              <a:buNone/>
+            </a:pPr>
+            <a:r>
+              <a:rPr lang="en-US" sz="930" b="1" dirty="0">
+                <a:solidFill>
+                  <a:srgbClr val="2C2849"/>
+                </a:solidFill>
+                <a:latin typeface="Calibri" pitchFamily="34" charset="0"/>
+                <a:ea typeface="Calibri" pitchFamily="34" charset="-122"/>
+                <a:cs typeface="Calibri" pitchFamily="34" charset="-120"/>
+              </a:rPr>
+              <a:t>Campanha de Tanques (Naval)  ·  OPEX</a:t>
+            </a:r>
+            <a:endParaRPr lang="en-US" sz="930" dirty="0"/>
+          </a:p>
+        </p:txBody>
+      </p:sp>
+      <p:sp>
+        <p:nvSpPr>
+          <p:cNvPr id="57" name="Text 54"/>
+          <p:cNvSpPr/>
+          <p:nvPr/>
+        </p:nvSpPr>
+        <p:spPr>
+          <a:xfrm>
+            <a:off x="8065008" y="3721608"/>
+            <a:ext cx="3666744" cy="201168"/>
+          </a:xfrm>
+          <a:prstGeom prst="rect">
+            <a:avLst/>
+          </a:prstGeom>
+          <a:noFill/>
+          <a:ln/>
+        </p:spPr>
+        <p:txBody>
+          <a:bodyPr wrap="square" lIns="0" tIns="0" rIns="0" bIns="0" rtlCol="0" anchor="ctr"/>
+          <a:lstStyle/>
+          <a:p>
+            <a:pPr marL="0" indent="0">
+              <a:buNone/>
+            </a:pPr>
+            <a:r>
+              <a:rPr lang="en-US" sz="820" dirty="0">
+                <a:solidFill>
+                  <a:srgbClr val="6B6682"/>
+                </a:solidFill>
+                <a:latin typeface="Calibri" pitchFamily="34" charset="0"/>
+                <a:ea typeface="Calibri" pitchFamily="34" charset="-122"/>
+                <a:cs typeface="Calibri" pitchFamily="34" charset="-120"/>
+              </a:rPr>
+              <a:t>88 pts · ~830 cama-dia · US$ 5,9M</a:t>
+            </a:r>
+            <a:endParaRPr lang="en-US" sz="820" dirty="0"/>
+          </a:p>
+        </p:txBody>
+      </p:sp>
+      <p:sp>
+        <p:nvSpPr>
+          <p:cNvPr id="58" name="Shape 55"/>
+          <p:cNvSpPr/>
+          <p:nvPr/>
+        </p:nvSpPr>
+        <p:spPr>
+          <a:xfrm>
+            <a:off x="7772400" y="4951476"/>
+            <a:ext cx="201168" cy="201168"/>
+          </a:xfrm>
+          <a:prstGeom prst="ellipse">
+            <a:avLst/>
+          </a:prstGeom>
+          <a:solidFill>
+            <a:srgbClr val="F2834B"/>
+          </a:solidFill>
+          <a:ln/>
+        </p:spPr>
+        <p:txBody>
+          <a:bodyPr/>
+          <a:lstStyle/>
+          <a:p>
+            <a:endParaRPr lang="pt-BR"/>
+          </a:p>
+        </p:txBody>
+      </p:sp>
+      <p:sp>
+        <p:nvSpPr>
+          <p:cNvPr id="59" name="Text 56"/>
+          <p:cNvSpPr/>
+          <p:nvPr/>
+        </p:nvSpPr>
+        <p:spPr>
+          <a:xfrm>
+            <a:off x="7772400" y="4005072"/>
+            <a:ext cx="201168" cy="201168"/>
+          </a:xfrm>
+          <a:prstGeom prst="rect">
+            <a:avLst/>
+          </a:prstGeom>
+          <a:noFill/>
+          <a:ln/>
+        </p:spPr>
+        <p:txBody>
+          <a:bodyPr wrap="square" lIns="0" tIns="0" rIns="0" bIns="0" rtlCol="0" anchor="ctr"/>
+          <a:lstStyle/>
+          <a:p>
+            <a:pPr marL="0" indent="0" algn="ctr">
+              <a:buNone/>
+            </a:pPr>
+            <a:r>
+              <a:rPr lang="en-US" sz="800" b="1" dirty="0">
+                <a:solidFill>
+                  <a:srgbClr val="FFFFFF"/>
+                </a:solidFill>
+                <a:latin typeface="Calibri" pitchFamily="34" charset="0"/>
+                <a:ea typeface="Calibri" pitchFamily="34" charset="-122"/>
+                <a:cs typeface="Calibri" pitchFamily="34" charset="-120"/>
+              </a:rPr>
+              <a:t>4</a:t>
+            </a:r>
+            <a:endParaRPr lang="en-US" sz="800" dirty="0"/>
+          </a:p>
+        </p:txBody>
+      </p:sp>
+      <p:sp>
+        <p:nvSpPr>
+          <p:cNvPr id="60" name="Text 57"/>
+          <p:cNvSpPr/>
+          <p:nvPr/>
+        </p:nvSpPr>
+        <p:spPr>
+          <a:xfrm>
+            <a:off x="8065008" y="3959352"/>
+            <a:ext cx="3666744" cy="256032"/>
+          </a:xfrm>
+          <a:prstGeom prst="rect">
+            <a:avLst/>
+          </a:prstGeom>
+          <a:noFill/>
+          <a:ln/>
+        </p:spPr>
+        <p:txBody>
+          <a:bodyPr wrap="square" lIns="0" tIns="0" rIns="0" bIns="0" rtlCol="0" anchor="b"/>
+          <a:lstStyle/>
+          <a:p>
+            <a:pPr marL="0" indent="0">
+              <a:buNone/>
+            </a:pPr>
+            <a:r>
+              <a:rPr lang="en-US" sz="930" b="1" dirty="0">
+                <a:solidFill>
+                  <a:srgbClr val="2C2849"/>
+                </a:solidFill>
+                <a:latin typeface="Calibri" pitchFamily="34" charset="0"/>
+                <a:ea typeface="Calibri" pitchFamily="34" charset="-122"/>
+                <a:cs typeface="Calibri" pitchFamily="34" charset="-120"/>
+              </a:rPr>
+              <a:t>Adequação Topside — Novo Poço  ·  CAPEX</a:t>
+            </a:r>
+            <a:endParaRPr lang="en-US" sz="930" dirty="0"/>
+          </a:p>
+        </p:txBody>
+      </p:sp>
+      <p:sp>
+        <p:nvSpPr>
+          <p:cNvPr id="61" name="Text 58"/>
+          <p:cNvSpPr/>
+          <p:nvPr/>
+        </p:nvSpPr>
+        <p:spPr>
+          <a:xfrm>
+            <a:off x="8065008" y="4187952"/>
+            <a:ext cx="3666744" cy="201168"/>
+          </a:xfrm>
+          <a:prstGeom prst="rect">
+            <a:avLst/>
+          </a:prstGeom>
+          <a:noFill/>
+          <a:ln/>
+        </p:spPr>
+        <p:txBody>
+          <a:bodyPr wrap="square" lIns="0" tIns="0" rIns="0" bIns="0" rtlCol="0" anchor="ctr"/>
+          <a:lstStyle/>
+          <a:p>
+            <a:pPr marL="0" indent="0">
+              <a:buNone/>
+            </a:pPr>
+            <a:r>
+              <a:rPr lang="en-US" sz="820" dirty="0">
+                <a:solidFill>
+                  <a:srgbClr val="6B6682"/>
+                </a:solidFill>
+                <a:latin typeface="Calibri" pitchFamily="34" charset="0"/>
+                <a:ea typeface="Calibri" pitchFamily="34" charset="-122"/>
+                <a:cs typeface="Calibri" pitchFamily="34" charset="-120"/>
+              </a:rPr>
+              <a:t>80 pts · ~980 cama-dia · US$ 3,2M</a:t>
+            </a:r>
+            <a:endParaRPr lang="en-US" sz="820" dirty="0"/>
+          </a:p>
+        </p:txBody>
+      </p:sp>
+      <p:sp>
+        <p:nvSpPr>
+          <p:cNvPr id="62" name="Shape 59"/>
+          <p:cNvSpPr/>
+          <p:nvPr/>
+        </p:nvSpPr>
+        <p:spPr>
+          <a:xfrm>
+            <a:off x="7772400" y="4480560"/>
+            <a:ext cx="201168" cy="201168"/>
+          </a:xfrm>
+          <a:prstGeom prst="ellipse">
+            <a:avLst/>
+          </a:prstGeom>
+          <a:solidFill>
+            <a:srgbClr val="10A9FF"/>
+          </a:solidFill>
+          <a:ln/>
+        </p:spPr>
+        <p:txBody>
+          <a:bodyPr/>
+          <a:lstStyle/>
+          <a:p>
+            <a:endParaRPr lang="pt-BR"/>
+          </a:p>
+        </p:txBody>
+      </p:sp>
+      <p:sp>
+        <p:nvSpPr>
+          <p:cNvPr id="63" name="Text 60"/>
+          <p:cNvSpPr/>
+          <p:nvPr/>
+        </p:nvSpPr>
+        <p:spPr>
+          <a:xfrm>
+            <a:off x="7772400" y="4480560"/>
+            <a:ext cx="201168" cy="201168"/>
+          </a:xfrm>
+          <a:prstGeom prst="rect">
+            <a:avLst/>
+          </a:prstGeom>
+          <a:noFill/>
+          <a:ln/>
+        </p:spPr>
+        <p:txBody>
+          <a:bodyPr wrap="square" lIns="0" tIns="0" rIns="0" bIns="0" rtlCol="0" anchor="ctr"/>
+          <a:lstStyle/>
+          <a:p>
+            <a:pPr marL="0" indent="0" algn="ctr">
+              <a:buNone/>
+            </a:pPr>
+            <a:r>
+              <a:rPr lang="en-US" sz="800" b="1" dirty="0">
+                <a:solidFill>
+                  <a:srgbClr val="FFFFFF"/>
+                </a:solidFill>
+                <a:latin typeface="Calibri" pitchFamily="34" charset="0"/>
+                <a:ea typeface="Calibri" pitchFamily="34" charset="-122"/>
+                <a:cs typeface="Calibri" pitchFamily="34" charset="-120"/>
+              </a:rPr>
+              <a:t>5</a:t>
+            </a:r>
+            <a:endParaRPr lang="en-US" sz="800" dirty="0"/>
+          </a:p>
+        </p:txBody>
+      </p:sp>
+      <p:sp>
+        <p:nvSpPr>
+          <p:cNvPr id="64" name="Text 61"/>
+          <p:cNvSpPr/>
+          <p:nvPr/>
+        </p:nvSpPr>
+        <p:spPr>
+          <a:xfrm>
+            <a:off x="8065008" y="4425696"/>
+            <a:ext cx="3666744" cy="256032"/>
+          </a:xfrm>
+          <a:prstGeom prst="rect">
+            <a:avLst/>
+          </a:prstGeom>
+          <a:noFill/>
+          <a:ln/>
+        </p:spPr>
+        <p:txBody>
+          <a:bodyPr wrap="square" lIns="0" tIns="0" rIns="0" bIns="0" rtlCol="0" anchor="b"/>
+          <a:lstStyle/>
+          <a:p>
+            <a:pPr marL="0" indent="0">
+              <a:buNone/>
+            </a:pPr>
+            <a:r>
+              <a:rPr lang="en-US" sz="930" b="1" dirty="0">
+                <a:solidFill>
+                  <a:srgbClr val="2C2849"/>
+                </a:solidFill>
+                <a:latin typeface="Calibri" pitchFamily="34" charset="0"/>
+                <a:ea typeface="Calibri" pitchFamily="34" charset="-122"/>
+                <a:cs typeface="Calibri" pitchFamily="34" charset="-120"/>
+              </a:rPr>
+              <a:t>Pintura / Preservação (Integridade)  ·  OPEX</a:t>
+            </a:r>
+            <a:endParaRPr lang="en-US" sz="930" dirty="0"/>
+          </a:p>
+        </p:txBody>
+      </p:sp>
+      <p:sp>
+        <p:nvSpPr>
+          <p:cNvPr id="65" name="Text 62"/>
+          <p:cNvSpPr/>
+          <p:nvPr/>
+        </p:nvSpPr>
+        <p:spPr>
+          <a:xfrm>
+            <a:off x="8065008" y="4663440"/>
+            <a:ext cx="3666744" cy="201168"/>
+          </a:xfrm>
+          <a:prstGeom prst="rect">
+            <a:avLst/>
+          </a:prstGeom>
+          <a:noFill/>
+          <a:ln/>
+        </p:spPr>
+        <p:txBody>
+          <a:bodyPr wrap="square" lIns="0" tIns="0" rIns="0" bIns="0" rtlCol="0" anchor="ctr"/>
+          <a:lstStyle/>
+          <a:p>
+            <a:pPr marL="0" indent="0">
+              <a:buNone/>
+            </a:pPr>
+            <a:r>
+              <a:rPr lang="en-US" sz="820" dirty="0">
+                <a:solidFill>
+                  <a:srgbClr val="6B6682"/>
+                </a:solidFill>
+                <a:latin typeface="Calibri" pitchFamily="34" charset="0"/>
+                <a:ea typeface="Calibri" pitchFamily="34" charset="-122"/>
+                <a:cs typeface="Calibri" pitchFamily="34" charset="-120"/>
+              </a:rPr>
+              <a:t>45 pts · ~1.250 cama-dia · US$ 1,1M</a:t>
+            </a:r>
+            <a:endParaRPr lang="en-US" sz="820" dirty="0"/>
+          </a:p>
+        </p:txBody>
+      </p:sp>
+      <p:sp>
+        <p:nvSpPr>
+          <p:cNvPr id="66" name="Shape 63"/>
+          <p:cNvSpPr/>
+          <p:nvPr/>
+        </p:nvSpPr>
+        <p:spPr>
+          <a:xfrm>
+            <a:off x="7772400" y="3538728"/>
+            <a:ext cx="201168" cy="201168"/>
+          </a:xfrm>
+          <a:prstGeom prst="ellipse">
+            <a:avLst/>
+          </a:prstGeom>
+          <a:solidFill>
+            <a:srgbClr val="F2834B">
+              <a:alpha val="82000"/>
+            </a:srgbClr>
+          </a:solidFill>
+          <a:ln w="15240">
+            <a:solidFill>
+              <a:srgbClr val="FFFFFF"/>
+            </a:solidFill>
+            <a:prstDash val="solid"/>
+          </a:ln>
+        </p:spPr>
+        <p:txBody>
+          <a:bodyPr/>
+          <a:lstStyle/>
+          <a:p>
+            <a:endParaRPr lang="pt-BR"/>
+          </a:p>
+        </p:txBody>
+      </p:sp>
+      <p:sp>
+        <p:nvSpPr>
+          <p:cNvPr id="67" name="Text 64"/>
+          <p:cNvSpPr/>
+          <p:nvPr/>
+        </p:nvSpPr>
+        <p:spPr>
+          <a:xfrm>
+            <a:off x="7772400" y="4956048"/>
+            <a:ext cx="201168" cy="201168"/>
+          </a:xfrm>
+          <a:prstGeom prst="rect">
+            <a:avLst/>
+          </a:prstGeom>
+          <a:noFill/>
+          <a:ln/>
+        </p:spPr>
+        <p:txBody>
+          <a:bodyPr wrap="square" lIns="0" tIns="0" rIns="0" bIns="0" rtlCol="0" anchor="ctr"/>
+          <a:lstStyle/>
+          <a:p>
+            <a:pPr marL="0" indent="0" algn="ctr">
+              <a:buNone/>
+            </a:pPr>
+            <a:r>
+              <a:rPr lang="en-US" sz="800" b="1" dirty="0">
+                <a:solidFill>
+                  <a:srgbClr val="FFFFFF"/>
+                </a:solidFill>
+                <a:latin typeface="Calibri" pitchFamily="34" charset="0"/>
+                <a:ea typeface="Calibri" pitchFamily="34" charset="-122"/>
+                <a:cs typeface="Calibri" pitchFamily="34" charset="-120"/>
+              </a:rPr>
+              <a:t>6</a:t>
+            </a:r>
+            <a:endParaRPr lang="en-US" sz="800" dirty="0"/>
+          </a:p>
+        </p:txBody>
+      </p:sp>
+      <p:sp>
+        <p:nvSpPr>
+          <p:cNvPr id="68" name="Text 65"/>
+          <p:cNvSpPr/>
+          <p:nvPr/>
+        </p:nvSpPr>
+        <p:spPr>
+          <a:xfrm>
+            <a:off x="8065008" y="4901184"/>
+            <a:ext cx="3666744" cy="256032"/>
+          </a:xfrm>
+          <a:prstGeom prst="rect">
+            <a:avLst/>
+          </a:prstGeom>
+          <a:noFill/>
+          <a:ln/>
+        </p:spPr>
+        <p:txBody>
+          <a:bodyPr wrap="square" lIns="0" tIns="0" rIns="0" bIns="0" rtlCol="0" anchor="b"/>
+          <a:lstStyle/>
+          <a:p>
+            <a:pPr marL="0" indent="0">
+              <a:buNone/>
+            </a:pPr>
+            <a:r>
+              <a:rPr lang="en-US" sz="930" b="1" dirty="0">
+                <a:solidFill>
+                  <a:srgbClr val="2C2849"/>
+                </a:solidFill>
+                <a:latin typeface="Calibri" pitchFamily="34" charset="0"/>
+                <a:ea typeface="Calibri" pitchFamily="34" charset="-122"/>
+                <a:cs typeface="Calibri" pitchFamily="34" charset="-120"/>
+              </a:rPr>
+              <a:t>Parada Programada 2027  ·  OPEX</a:t>
+            </a:r>
+            <a:endParaRPr lang="en-US" sz="930" dirty="0"/>
+          </a:p>
+        </p:txBody>
+      </p:sp>
+      <p:sp>
+        <p:nvSpPr>
+          <p:cNvPr id="69" name="Text 66"/>
+          <p:cNvSpPr/>
+          <p:nvPr/>
+        </p:nvSpPr>
+        <p:spPr>
+          <a:xfrm>
+            <a:off x="8065008" y="5138928"/>
+            <a:ext cx="3666744" cy="201168"/>
+          </a:xfrm>
+          <a:prstGeom prst="rect">
+            <a:avLst/>
+          </a:prstGeom>
+          <a:noFill/>
+          <a:ln/>
+        </p:spPr>
+        <p:txBody>
+          <a:bodyPr wrap="square" lIns="0" tIns="0" rIns="0" bIns="0" rtlCol="0" anchor="ctr"/>
+          <a:lstStyle/>
+          <a:p>
+            <a:pPr marL="0" indent="0">
+              <a:buNone/>
+            </a:pPr>
+            <a:r>
+              <a:rPr lang="en-US" sz="820" dirty="0">
+                <a:solidFill>
+                  <a:srgbClr val="6B6682"/>
+                </a:solidFill>
+                <a:latin typeface="Calibri" pitchFamily="34" charset="0"/>
+                <a:ea typeface="Calibri" pitchFamily="34" charset="-122"/>
+                <a:cs typeface="Calibri" pitchFamily="34" charset="-120"/>
+              </a:rPr>
+              <a:t>90 pts · ~2.600 cama-dia · US$ 8,0M</a:t>
+            </a:r>
+            <a:endParaRPr lang="en-US" sz="820" dirty="0"/>
+          </a:p>
+        </p:txBody>
+      </p:sp>
+      <p:sp>
+        <p:nvSpPr>
+          <p:cNvPr id="71" name="Text 68"/>
+          <p:cNvSpPr/>
+          <p:nvPr/>
+        </p:nvSpPr>
+        <p:spPr>
+          <a:xfrm>
+            <a:off x="11338560" y="6547104"/>
+            <a:ext cx="457200" cy="256032"/>
+          </a:xfrm>
+          <a:prstGeom prst="rect">
+            <a:avLst/>
+          </a:prstGeom>
+          <a:noFill/>
+          <a:ln/>
+        </p:spPr>
+        <p:txBody>
+          <a:bodyPr wrap="square" lIns="0" tIns="0" rIns="0" bIns="0" rtlCol="0" anchor="ctr"/>
+          <a:lstStyle/>
+          <a:p>
+            <a:pPr marL="0" indent="0" algn="r">
+              <a:buNone/>
+            </a:pPr>
+            <a:r>
+              <a:rPr lang="en-US" sz="850" dirty="0">
+                <a:solidFill>
+                  <a:srgbClr val="6B6682"/>
+                </a:solidFill>
+                <a:latin typeface="Calibri" pitchFamily="34" charset="0"/>
+                <a:ea typeface="Calibri" pitchFamily="34" charset="-122"/>
+                <a:cs typeface="Calibri" pitchFamily="34" charset="-120"/>
+              </a:rPr>
+              <a:t>7</a:t>
+            </a:r>
+            <a:endParaRPr lang="en-US" sz="850" dirty="0"/>
+          </a:p>
+        </p:txBody>
+      </p:sp>
+      <p:sp>
+        <p:nvSpPr>
+          <p:cNvPr id="34" name="Shape 31"/>
+          <p:cNvSpPr/>
+          <p:nvPr/>
+        </p:nvSpPr>
+        <p:spPr>
+          <a:xfrm>
+            <a:off x="2862072" y="3483864"/>
+            <a:ext cx="420624" cy="420624"/>
+          </a:xfrm>
+          <a:prstGeom prst="ellipse">
+            <a:avLst/>
+          </a:prstGeom>
+          <a:solidFill>
+            <a:srgbClr val="10A9FF">
+              <a:alpha val="82000"/>
+            </a:srgbClr>
+          </a:solidFill>
+          <a:ln w="15240">
+            <a:solidFill>
+              <a:srgbClr val="FFFFFF"/>
+            </a:solidFill>
+            <a:prstDash val="solid"/>
+          </a:ln>
+        </p:spPr>
+        <p:txBody>
+          <a:bodyPr/>
+          <a:lstStyle/>
+          <a:p>
+            <a:endParaRPr lang="pt-BR"/>
+          </a:p>
+        </p:txBody>
+      </p:sp>
+      <p:sp>
+        <p:nvSpPr>
+          <p:cNvPr id="35" name="Text 32"/>
+          <p:cNvSpPr/>
+          <p:nvPr/>
+        </p:nvSpPr>
+        <p:spPr>
+          <a:xfrm>
+            <a:off x="2862072" y="3483864"/>
+            <a:ext cx="420624" cy="420624"/>
+          </a:xfrm>
+          <a:prstGeom prst="rect">
+            <a:avLst/>
+          </a:prstGeom>
+          <a:noFill/>
+          <a:ln/>
+        </p:spPr>
+        <p:txBody>
+          <a:bodyPr wrap="square" lIns="0" tIns="0" rIns="0" bIns="0" rtlCol="0" anchor="ctr"/>
+          <a:lstStyle/>
+          <a:p>
+            <a:pPr marL="0" indent="0" algn="ctr">
+              <a:buNone/>
+            </a:pPr>
+            <a:r>
+              <a:rPr lang="en-US" sz="1000" b="1" dirty="0">
+                <a:solidFill>
+                  <a:srgbClr val="FFFFFF"/>
+                </a:solidFill>
+                <a:latin typeface="Calibri" pitchFamily="34" charset="0"/>
+                <a:ea typeface="Calibri" pitchFamily="34" charset="-122"/>
+                <a:cs typeface="Calibri" pitchFamily="34" charset="-120"/>
+              </a:rPr>
+              <a:t>2</a:t>
+            </a:r>
+            <a:endParaRPr lang="en-US" sz="1000" dirty="0"/>
+          </a:p>
+        </p:txBody>
+      </p:sp>
+      <p:sp>
+        <p:nvSpPr>
+          <p:cNvPr id="62" name="Shape 59"/>
+          <p:cNvSpPr/>
+          <p:nvPr/>
+        </p:nvSpPr>
+        <p:spPr>
+          <a:xfrm>
+            <a:off x="7772400" y="3063240"/>
+            <a:ext cx="201168" cy="201168"/>
+          </a:xfrm>
+          <a:prstGeom prst="ellipse">
+            <a:avLst/>
+          </a:prstGeom>
+          <a:solidFill>
+            <a:srgbClr val="10A9FF"/>
+          </a:solidFill>
+          <a:ln/>
+        </p:spPr>
+        <p:txBody>
+          <a:bodyPr/>
+          <a:lstStyle/>
+          <a:p>
+            <a:endParaRPr lang="pt-BR"/>
+          </a:p>
+        </p:txBody>
+      </p:sp>
+      <p:sp>
+        <p:nvSpPr>
+          <p:cNvPr id="63" name="Text 60"/>
+          <p:cNvSpPr/>
+          <p:nvPr/>
+        </p:nvSpPr>
+        <p:spPr>
+          <a:xfrm>
+            <a:off x="7772400" y="3063240"/>
             <a:ext cx="201168" cy="201168"/>
           </a:xfrm>
           <a:prstGeom prst="rect">
@@ -51260,13 +51672,13 @@
       </p:sp>
       <p:sp>
         <p:nvSpPr>
-          <p:cNvPr id="44" name="Text 41"/>
-          <p:cNvSpPr/>
-          <p:nvPr/>
-        </p:nvSpPr>
-        <p:spPr>
-          <a:xfrm>
-            <a:off x="8065008" y="3012948"/>
+          <p:cNvPr id="64" name="Text 61"/>
+          <p:cNvSpPr/>
+          <p:nvPr/>
+        </p:nvSpPr>
+        <p:spPr>
+          <a:xfrm>
+            <a:off x="8065008" y="3008376"/>
             <a:ext cx="3666744" cy="256032"/>
           </a:xfrm>
           <a:prstGeom prst="rect">
@@ -51291,7 +51703,7 @@
                 <a:ea typeface="Calibri" pitchFamily="34" charset="-122"/>
                 <a:cs typeface="Calibri" pitchFamily="34" charset="-120"/>
               </a:rPr>
-              <a:t>Calibração de Medidores Fiscais  ·  OPEX</a:t>
+              <a:t>Troca de Turbogerador (TG)  ·  OPEX</a:t>
             </a:r>
             <a:endParaRPr lang="en-US" sz="930" dirty="0"/>
           </a:p>
@@ -51299,13 +51711,13 @@
       </p:sp>
       <p:sp>
         <p:nvSpPr>
-          <p:cNvPr id="45" name="Text 42"/>
-          <p:cNvSpPr/>
-          <p:nvPr/>
-        </p:nvSpPr>
-        <p:spPr>
-          <a:xfrm>
-            <a:off x="8065008" y="3250692"/>
+          <p:cNvPr id="65" name="Text 62"/>
+          <p:cNvSpPr/>
+          <p:nvPr/>
+        </p:nvSpPr>
+        <p:spPr>
+          <a:xfrm>
+            <a:off x="8065008" y="3246120"/>
             <a:ext cx="3666744" cy="201168"/>
           </a:xfrm>
           <a:prstGeom prst="rect">
@@ -51330,919 +51742,9 @@
                 <a:ea typeface="Calibri" pitchFamily="34" charset="-122"/>
                 <a:cs typeface="Calibri" pitchFamily="34" charset="-120"/>
               </a:rPr>
-              <a:t>55 pts · ~150 cama-dia · US$ 50k</a:t>
+              <a:t>75 pts · ~600 cama-dia · US$ 800k</a:t>
             </a:r>
             <a:endParaRPr lang="en-US" sz="820" dirty="0"/>
-          </a:p>
-        </p:txBody>
-      </p:sp>
-      <p:sp>
-        <p:nvSpPr>
-          <p:cNvPr id="46" name="Shape 43"/>
-          <p:cNvSpPr/>
-          <p:nvPr/>
-        </p:nvSpPr>
-        <p:spPr>
-          <a:xfrm>
-            <a:off x="7772400" y="3538728"/>
-            <a:ext cx="201168" cy="201168"/>
-          </a:xfrm>
-          <a:prstGeom prst="ellipse">
-            <a:avLst/>
-          </a:prstGeom>
-          <a:solidFill>
-            <a:srgbClr val="10A9FF"/>
-          </a:solidFill>
-          <a:ln/>
-        </p:spPr>
-        <p:txBody>
-          <a:bodyPr/>
-          <a:lstStyle/>
-          <a:p>
-            <a:endParaRPr lang="pt-BR"/>
-          </a:p>
-        </p:txBody>
-      </p:sp>
-      <p:sp>
-        <p:nvSpPr>
-          <p:cNvPr id="47" name="Text 44"/>
-          <p:cNvSpPr/>
-          <p:nvPr/>
-        </p:nvSpPr>
-        <p:spPr>
-          <a:xfrm>
-            <a:off x="7772400" y="3538728"/>
-            <a:ext cx="201168" cy="201168"/>
-          </a:xfrm>
-          <a:prstGeom prst="rect">
-            <a:avLst/>
-          </a:prstGeom>
-          <a:noFill/>
-          <a:ln/>
-        </p:spPr>
-        <p:txBody>
-          <a:bodyPr wrap="square" lIns="0" tIns="0" rIns="0" bIns="0" rtlCol="0" anchor="ctr"/>
-          <a:lstStyle/>
-          <a:p>
-            <a:pPr marL="0" indent="0" algn="ctr">
-              <a:buNone/>
-            </a:pPr>
-            <a:r>
-              <a:rPr lang="en-US" sz="800" b="1" dirty="0">
-                <a:solidFill>
-                  <a:srgbClr val="FFFFFF"/>
-                </a:solidFill>
-                <a:latin typeface="Calibri" pitchFamily="34" charset="0"/>
-                <a:ea typeface="Calibri" pitchFamily="34" charset="-122"/>
-                <a:cs typeface="Calibri" pitchFamily="34" charset="-120"/>
-              </a:rPr>
-              <a:t>3</a:t>
-            </a:r>
-            <a:endParaRPr lang="en-US" sz="800" dirty="0"/>
-          </a:p>
-        </p:txBody>
-      </p:sp>
-      <p:sp>
-        <p:nvSpPr>
-          <p:cNvPr id="48" name="Text 45"/>
-          <p:cNvSpPr/>
-          <p:nvPr/>
-        </p:nvSpPr>
-        <p:spPr>
-          <a:xfrm>
-            <a:off x="8065008" y="3483864"/>
-            <a:ext cx="3666744" cy="256032"/>
-          </a:xfrm>
-          <a:prstGeom prst="rect">
-            <a:avLst/>
-          </a:prstGeom>
-          <a:noFill/>
-          <a:ln/>
-        </p:spPr>
-        <p:txBody>
-          <a:bodyPr wrap="square" lIns="0" tIns="0" rIns="0" bIns="0" rtlCol="0" anchor="b"/>
-          <a:lstStyle/>
-          <a:p>
-            <a:pPr marL="0" indent="0">
-              <a:buNone/>
-            </a:pPr>
-            <a:r>
-              <a:rPr lang="en-US" sz="930" b="1" dirty="0">
-                <a:solidFill>
-                  <a:srgbClr val="2C2849"/>
-                </a:solidFill>
-                <a:latin typeface="Calibri" pitchFamily="34" charset="0"/>
-                <a:ea typeface="Calibri" pitchFamily="34" charset="-122"/>
-                <a:cs typeface="Calibri" pitchFamily="34" charset="-120"/>
-              </a:rPr>
-              <a:t>Troca de Selo Mecânico  ·  OPEX</a:t>
-            </a:r>
-            <a:endParaRPr lang="en-US" sz="930" dirty="0"/>
-          </a:p>
-        </p:txBody>
-      </p:sp>
-      <p:sp>
-        <p:nvSpPr>
-          <p:cNvPr id="49" name="Text 46"/>
-          <p:cNvSpPr/>
-          <p:nvPr/>
-        </p:nvSpPr>
-        <p:spPr>
-          <a:xfrm>
-            <a:off x="8065008" y="3721608"/>
-            <a:ext cx="3666744" cy="201168"/>
-          </a:xfrm>
-          <a:prstGeom prst="rect">
-            <a:avLst/>
-          </a:prstGeom>
-          <a:noFill/>
-          <a:ln/>
-        </p:spPr>
-        <p:txBody>
-          <a:bodyPr wrap="square" lIns="0" tIns="0" rIns="0" bIns="0" rtlCol="0" anchor="ctr"/>
-          <a:lstStyle/>
-          <a:p>
-            <a:pPr marL="0" indent="0">
-              <a:buNone/>
-            </a:pPr>
-            <a:r>
-              <a:rPr lang="en-US" sz="820" dirty="0">
-                <a:solidFill>
-                  <a:srgbClr val="6B6682"/>
-                </a:solidFill>
-                <a:latin typeface="Calibri" pitchFamily="34" charset="0"/>
-                <a:ea typeface="Calibri" pitchFamily="34" charset="-122"/>
-                <a:cs typeface="Calibri" pitchFamily="34" charset="-120"/>
-              </a:rPr>
-              <a:t>78 pts · ~230 cama-dia · US$ 175k</a:t>
-            </a:r>
-            <a:endParaRPr lang="en-US" sz="820" dirty="0"/>
-          </a:p>
-        </p:txBody>
-      </p:sp>
-      <p:sp>
-        <p:nvSpPr>
-          <p:cNvPr id="50" name="Shape 47"/>
-          <p:cNvSpPr/>
-          <p:nvPr/>
-        </p:nvSpPr>
-        <p:spPr>
-          <a:xfrm>
-            <a:off x="7772400" y="4009644"/>
-            <a:ext cx="201168" cy="201168"/>
-          </a:xfrm>
-          <a:prstGeom prst="ellipse">
-            <a:avLst/>
-          </a:prstGeom>
-          <a:solidFill>
-            <a:srgbClr val="F2834B"/>
-          </a:solidFill>
-          <a:ln/>
-        </p:spPr>
-        <p:txBody>
-          <a:bodyPr/>
-          <a:lstStyle/>
-          <a:p>
-            <a:endParaRPr lang="pt-BR"/>
-          </a:p>
-        </p:txBody>
-      </p:sp>
-      <p:sp>
-        <p:nvSpPr>
-          <p:cNvPr id="51" name="Text 48"/>
-          <p:cNvSpPr/>
-          <p:nvPr/>
-        </p:nvSpPr>
-        <p:spPr>
-          <a:xfrm>
-            <a:off x="7772400" y="4009644"/>
-            <a:ext cx="201168" cy="201168"/>
-          </a:xfrm>
-          <a:prstGeom prst="rect">
-            <a:avLst/>
-          </a:prstGeom>
-          <a:noFill/>
-          <a:ln/>
-        </p:spPr>
-        <p:txBody>
-          <a:bodyPr wrap="square" lIns="0" tIns="0" rIns="0" bIns="0" rtlCol="0" anchor="ctr"/>
-          <a:lstStyle/>
-          <a:p>
-            <a:pPr marL="0" indent="0" algn="ctr">
-              <a:buNone/>
-            </a:pPr>
-            <a:r>
-              <a:rPr lang="en-US" sz="800" b="1" dirty="0">
-                <a:solidFill>
-                  <a:srgbClr val="FFFFFF"/>
-                </a:solidFill>
-                <a:latin typeface="Calibri" pitchFamily="34" charset="0"/>
-                <a:ea typeface="Calibri" pitchFamily="34" charset="-122"/>
-                <a:cs typeface="Calibri" pitchFamily="34" charset="-120"/>
-              </a:rPr>
-              <a:t>4</a:t>
-            </a:r>
-            <a:endParaRPr lang="en-US" sz="800" dirty="0"/>
-          </a:p>
-        </p:txBody>
-      </p:sp>
-      <p:sp>
-        <p:nvSpPr>
-          <p:cNvPr id="52" name="Text 49"/>
-          <p:cNvSpPr/>
-          <p:nvPr/>
-        </p:nvSpPr>
-        <p:spPr>
-          <a:xfrm>
-            <a:off x="8065008" y="3954780"/>
-            <a:ext cx="3666744" cy="256032"/>
-          </a:xfrm>
-          <a:prstGeom prst="rect">
-            <a:avLst/>
-          </a:prstGeom>
-          <a:noFill/>
-          <a:ln/>
-        </p:spPr>
-        <p:txBody>
-          <a:bodyPr wrap="square" lIns="0" tIns="0" rIns="0" bIns="0" rtlCol="0" anchor="b"/>
-          <a:lstStyle/>
-          <a:p>
-            <a:pPr marL="0" indent="0">
-              <a:buNone/>
-            </a:pPr>
-            <a:r>
-              <a:rPr lang="en-US" sz="930" b="1" dirty="0">
-                <a:solidFill>
-                  <a:srgbClr val="2C2849"/>
-                </a:solidFill>
-                <a:latin typeface="Calibri" pitchFamily="34" charset="0"/>
-                <a:ea typeface="Calibri" pitchFamily="34" charset="-122"/>
-                <a:cs typeface="Calibri" pitchFamily="34" charset="-120"/>
-              </a:rPr>
-              <a:t>Retrofit CO2 (Sustentabilidade)  ·  CAPEX</a:t>
-            </a:r>
-            <a:endParaRPr lang="en-US" sz="930" dirty="0"/>
-          </a:p>
-        </p:txBody>
-      </p:sp>
-      <p:sp>
-        <p:nvSpPr>
-          <p:cNvPr id="53" name="Text 50"/>
-          <p:cNvSpPr/>
-          <p:nvPr/>
-        </p:nvSpPr>
-        <p:spPr>
-          <a:xfrm>
-            <a:off x="8065008" y="4192524"/>
-            <a:ext cx="3666744" cy="201168"/>
-          </a:xfrm>
-          <a:prstGeom prst="rect">
-            <a:avLst/>
-          </a:prstGeom>
-          <a:noFill/>
-          <a:ln/>
-        </p:spPr>
-        <p:txBody>
-          <a:bodyPr wrap="square" lIns="0" tIns="0" rIns="0" bIns="0" rtlCol="0" anchor="ctr"/>
-          <a:lstStyle/>
-          <a:p>
-            <a:pPr marL="0" indent="0">
-              <a:buNone/>
-            </a:pPr>
-            <a:r>
-              <a:rPr lang="en-US" sz="820" dirty="0">
-                <a:solidFill>
-                  <a:srgbClr val="6B6682"/>
-                </a:solidFill>
-                <a:latin typeface="Calibri" pitchFamily="34" charset="0"/>
-                <a:ea typeface="Calibri" pitchFamily="34" charset="-122"/>
-                <a:cs typeface="Calibri" pitchFamily="34" charset="-120"/>
-              </a:rPr>
-              <a:t>68 pts · ~420 cama-dia · US$ 600k</a:t>
-            </a:r>
-            <a:endParaRPr lang="en-US" sz="820" dirty="0"/>
-          </a:p>
-        </p:txBody>
-      </p:sp>
-      <p:sp>
-        <p:nvSpPr>
-          <p:cNvPr id="54" name="Shape 51"/>
-          <p:cNvSpPr/>
-          <p:nvPr/>
-        </p:nvSpPr>
-        <p:spPr>
-          <a:xfrm>
-            <a:off x="7772400" y="4480560"/>
-            <a:ext cx="201168" cy="201168"/>
-          </a:xfrm>
-          <a:prstGeom prst="ellipse">
-            <a:avLst/>
-          </a:prstGeom>
-          <a:solidFill>
-            <a:srgbClr val="10A9FF"/>
-          </a:solidFill>
-          <a:ln/>
-        </p:spPr>
-        <p:txBody>
-          <a:bodyPr/>
-          <a:lstStyle/>
-          <a:p>
-            <a:endParaRPr lang="pt-BR"/>
-          </a:p>
-        </p:txBody>
-      </p:sp>
-      <p:sp>
-        <p:nvSpPr>
-          <p:cNvPr id="55" name="Text 52"/>
-          <p:cNvSpPr/>
-          <p:nvPr/>
-        </p:nvSpPr>
-        <p:spPr>
-          <a:xfrm>
-            <a:off x="7772400" y="4480560"/>
-            <a:ext cx="201168" cy="201168"/>
-          </a:xfrm>
-          <a:prstGeom prst="rect">
-            <a:avLst/>
-          </a:prstGeom>
-          <a:noFill/>
-          <a:ln/>
-        </p:spPr>
-        <p:txBody>
-          <a:bodyPr wrap="square" lIns="0" tIns="0" rIns="0" bIns="0" rtlCol="0" anchor="ctr"/>
-          <a:lstStyle/>
-          <a:p>
-            <a:pPr marL="0" indent="0" algn="ctr">
-              <a:buNone/>
-            </a:pPr>
-            <a:r>
-              <a:rPr lang="en-US" sz="800" b="1" dirty="0">
-                <a:solidFill>
-                  <a:srgbClr val="FFFFFF"/>
-                </a:solidFill>
-                <a:latin typeface="Calibri" pitchFamily="34" charset="0"/>
-                <a:ea typeface="Calibri" pitchFamily="34" charset="-122"/>
-                <a:cs typeface="Calibri" pitchFamily="34" charset="-120"/>
-              </a:rPr>
-              <a:t>5</a:t>
-            </a:r>
-            <a:endParaRPr lang="en-US" sz="800" dirty="0"/>
-          </a:p>
-        </p:txBody>
-      </p:sp>
-      <p:sp>
-        <p:nvSpPr>
-          <p:cNvPr id="56" name="Text 53"/>
-          <p:cNvSpPr/>
-          <p:nvPr/>
-        </p:nvSpPr>
-        <p:spPr>
-          <a:xfrm>
-            <a:off x="8065008" y="4425696"/>
-            <a:ext cx="3666744" cy="256032"/>
-          </a:xfrm>
-          <a:prstGeom prst="rect">
-            <a:avLst/>
-          </a:prstGeom>
-          <a:noFill/>
-          <a:ln/>
-        </p:spPr>
-        <p:txBody>
-          <a:bodyPr wrap="square" lIns="0" tIns="0" rIns="0" bIns="0" rtlCol="0" anchor="b"/>
-          <a:lstStyle/>
-          <a:p>
-            <a:pPr marL="0" indent="0">
-              <a:buNone/>
-            </a:pPr>
-            <a:r>
-              <a:rPr lang="en-US" sz="930" b="1" dirty="0">
-                <a:solidFill>
-                  <a:srgbClr val="2C2849"/>
-                </a:solidFill>
-                <a:latin typeface="Calibri" pitchFamily="34" charset="0"/>
-                <a:ea typeface="Calibri" pitchFamily="34" charset="-122"/>
-                <a:cs typeface="Calibri" pitchFamily="34" charset="-120"/>
-              </a:rPr>
-              <a:t>Campanha de Tanques (Naval)  ·  OPEX</a:t>
-            </a:r>
-            <a:endParaRPr lang="en-US" sz="930" dirty="0"/>
-          </a:p>
-        </p:txBody>
-      </p:sp>
-      <p:sp>
-        <p:nvSpPr>
-          <p:cNvPr id="57" name="Text 54"/>
-          <p:cNvSpPr/>
-          <p:nvPr/>
-        </p:nvSpPr>
-        <p:spPr>
-          <a:xfrm>
-            <a:off x="8065008" y="4663440"/>
-            <a:ext cx="3666744" cy="201168"/>
-          </a:xfrm>
-          <a:prstGeom prst="rect">
-            <a:avLst/>
-          </a:prstGeom>
-          <a:noFill/>
-          <a:ln/>
-        </p:spPr>
-        <p:txBody>
-          <a:bodyPr wrap="square" lIns="0" tIns="0" rIns="0" bIns="0" rtlCol="0" anchor="ctr"/>
-          <a:lstStyle/>
-          <a:p>
-            <a:pPr marL="0" indent="0">
-              <a:buNone/>
-            </a:pPr>
-            <a:r>
-              <a:rPr lang="en-US" sz="820" dirty="0">
-                <a:solidFill>
-                  <a:srgbClr val="6B6682"/>
-                </a:solidFill>
-                <a:latin typeface="Calibri" pitchFamily="34" charset="0"/>
-                <a:ea typeface="Calibri" pitchFamily="34" charset="-122"/>
-                <a:cs typeface="Calibri" pitchFamily="34" charset="-120"/>
-              </a:rPr>
-              <a:t>88 pts · ~830 cama-dia · US$ 5,9M</a:t>
-            </a:r>
-            <a:endParaRPr lang="en-US" sz="820" dirty="0"/>
-          </a:p>
-        </p:txBody>
-      </p:sp>
-      <p:sp>
-        <p:nvSpPr>
-          <p:cNvPr id="58" name="Shape 55"/>
-          <p:cNvSpPr/>
-          <p:nvPr/>
-        </p:nvSpPr>
-        <p:spPr>
-          <a:xfrm>
-            <a:off x="7772400" y="4951476"/>
-            <a:ext cx="201168" cy="201168"/>
-          </a:xfrm>
-          <a:prstGeom prst="ellipse">
-            <a:avLst/>
-          </a:prstGeom>
-          <a:solidFill>
-            <a:srgbClr val="F2834B"/>
-          </a:solidFill>
-          <a:ln/>
-        </p:spPr>
-        <p:txBody>
-          <a:bodyPr/>
-          <a:lstStyle/>
-          <a:p>
-            <a:endParaRPr lang="pt-BR"/>
-          </a:p>
-        </p:txBody>
-      </p:sp>
-      <p:sp>
-        <p:nvSpPr>
-          <p:cNvPr id="59" name="Text 56"/>
-          <p:cNvSpPr/>
-          <p:nvPr/>
-        </p:nvSpPr>
-        <p:spPr>
-          <a:xfrm>
-            <a:off x="7772400" y="4951476"/>
-            <a:ext cx="201168" cy="201168"/>
-          </a:xfrm>
-          <a:prstGeom prst="rect">
-            <a:avLst/>
-          </a:prstGeom>
-          <a:noFill/>
-          <a:ln/>
-        </p:spPr>
-        <p:txBody>
-          <a:bodyPr wrap="square" lIns="0" tIns="0" rIns="0" bIns="0" rtlCol="0" anchor="ctr"/>
-          <a:lstStyle/>
-          <a:p>
-            <a:pPr marL="0" indent="0" algn="ctr">
-              <a:buNone/>
-            </a:pPr>
-            <a:r>
-              <a:rPr lang="en-US" sz="800" b="1" dirty="0">
-                <a:solidFill>
-                  <a:srgbClr val="FFFFFF"/>
-                </a:solidFill>
-                <a:latin typeface="Calibri" pitchFamily="34" charset="0"/>
-                <a:ea typeface="Calibri" pitchFamily="34" charset="-122"/>
-                <a:cs typeface="Calibri" pitchFamily="34" charset="-120"/>
-              </a:rPr>
-              <a:t>6</a:t>
-            </a:r>
-            <a:endParaRPr lang="en-US" sz="800" dirty="0"/>
-          </a:p>
-        </p:txBody>
-      </p:sp>
-      <p:sp>
-        <p:nvSpPr>
-          <p:cNvPr id="60" name="Text 57"/>
-          <p:cNvSpPr/>
-          <p:nvPr/>
-        </p:nvSpPr>
-        <p:spPr>
-          <a:xfrm>
-            <a:off x="8065008" y="4896612"/>
-            <a:ext cx="3666744" cy="256032"/>
-          </a:xfrm>
-          <a:prstGeom prst="rect">
-            <a:avLst/>
-          </a:prstGeom>
-          <a:noFill/>
-          <a:ln/>
-        </p:spPr>
-        <p:txBody>
-          <a:bodyPr wrap="square" lIns="0" tIns="0" rIns="0" bIns="0" rtlCol="0" anchor="b"/>
-          <a:lstStyle/>
-          <a:p>
-            <a:pPr marL="0" indent="0">
-              <a:buNone/>
-            </a:pPr>
-            <a:r>
-              <a:rPr lang="en-US" sz="930" b="1" dirty="0">
-                <a:solidFill>
-                  <a:srgbClr val="2C2849"/>
-                </a:solidFill>
-                <a:latin typeface="Calibri" pitchFamily="34" charset="0"/>
-                <a:ea typeface="Calibri" pitchFamily="34" charset="-122"/>
-                <a:cs typeface="Calibri" pitchFamily="34" charset="-120"/>
-              </a:rPr>
-              <a:t>Adequação Topside — Novo Poço  ·  CAPEX</a:t>
-            </a:r>
-            <a:endParaRPr lang="en-US" sz="930" dirty="0"/>
-          </a:p>
-        </p:txBody>
-      </p:sp>
-      <p:sp>
-        <p:nvSpPr>
-          <p:cNvPr id="61" name="Text 58"/>
-          <p:cNvSpPr/>
-          <p:nvPr/>
-        </p:nvSpPr>
-        <p:spPr>
-          <a:xfrm>
-            <a:off x="8065008" y="5134356"/>
-            <a:ext cx="3666744" cy="201168"/>
-          </a:xfrm>
-          <a:prstGeom prst="rect">
-            <a:avLst/>
-          </a:prstGeom>
-          <a:noFill/>
-          <a:ln/>
-        </p:spPr>
-        <p:txBody>
-          <a:bodyPr wrap="square" lIns="0" tIns="0" rIns="0" bIns="0" rtlCol="0" anchor="ctr"/>
-          <a:lstStyle/>
-          <a:p>
-            <a:pPr marL="0" indent="0">
-              <a:buNone/>
-            </a:pPr>
-            <a:r>
-              <a:rPr lang="en-US" sz="820" dirty="0">
-                <a:solidFill>
-                  <a:srgbClr val="6B6682"/>
-                </a:solidFill>
-                <a:latin typeface="Calibri" pitchFamily="34" charset="0"/>
-                <a:ea typeface="Calibri" pitchFamily="34" charset="-122"/>
-                <a:cs typeface="Calibri" pitchFamily="34" charset="-120"/>
-              </a:rPr>
-              <a:t>80 pts · ~980 cama-dia · US$ 3,2M</a:t>
-            </a:r>
-            <a:endParaRPr lang="en-US" sz="820" dirty="0"/>
-          </a:p>
-        </p:txBody>
-      </p:sp>
-      <p:sp>
-        <p:nvSpPr>
-          <p:cNvPr id="62" name="Shape 59"/>
-          <p:cNvSpPr/>
-          <p:nvPr/>
-        </p:nvSpPr>
-        <p:spPr>
-          <a:xfrm>
-            <a:off x="7772400" y="5422392"/>
-            <a:ext cx="201168" cy="201168"/>
-          </a:xfrm>
-          <a:prstGeom prst="ellipse">
-            <a:avLst/>
-          </a:prstGeom>
-          <a:solidFill>
-            <a:srgbClr val="10A9FF"/>
-          </a:solidFill>
-          <a:ln/>
-        </p:spPr>
-        <p:txBody>
-          <a:bodyPr/>
-          <a:lstStyle/>
-          <a:p>
-            <a:endParaRPr lang="pt-BR"/>
-          </a:p>
-        </p:txBody>
-      </p:sp>
-      <p:sp>
-        <p:nvSpPr>
-          <p:cNvPr id="63" name="Text 60"/>
-          <p:cNvSpPr/>
-          <p:nvPr/>
-        </p:nvSpPr>
-        <p:spPr>
-          <a:xfrm>
-            <a:off x="7772400" y="5422392"/>
-            <a:ext cx="201168" cy="201168"/>
-          </a:xfrm>
-          <a:prstGeom prst="rect">
-            <a:avLst/>
-          </a:prstGeom>
-          <a:noFill/>
-          <a:ln/>
-        </p:spPr>
-        <p:txBody>
-          <a:bodyPr wrap="square" lIns="0" tIns="0" rIns="0" bIns="0" rtlCol="0" anchor="ctr"/>
-          <a:lstStyle/>
-          <a:p>
-            <a:pPr marL="0" indent="0" algn="ctr">
-              <a:buNone/>
-            </a:pPr>
-            <a:r>
-              <a:rPr lang="en-US" sz="800" b="1" dirty="0">
-                <a:solidFill>
-                  <a:srgbClr val="FFFFFF"/>
-                </a:solidFill>
-                <a:latin typeface="Calibri" pitchFamily="34" charset="0"/>
-                <a:ea typeface="Calibri" pitchFamily="34" charset="-122"/>
-                <a:cs typeface="Calibri" pitchFamily="34" charset="-120"/>
-              </a:rPr>
-              <a:t>7</a:t>
-            </a:r>
-            <a:endParaRPr lang="en-US" sz="800" dirty="0"/>
-          </a:p>
-        </p:txBody>
-      </p:sp>
-      <p:sp>
-        <p:nvSpPr>
-          <p:cNvPr id="64" name="Text 61"/>
-          <p:cNvSpPr/>
-          <p:nvPr/>
-        </p:nvSpPr>
-        <p:spPr>
-          <a:xfrm>
-            <a:off x="8065008" y="5367528"/>
-            <a:ext cx="3666744" cy="256032"/>
-          </a:xfrm>
-          <a:prstGeom prst="rect">
-            <a:avLst/>
-          </a:prstGeom>
-          <a:noFill/>
-          <a:ln/>
-        </p:spPr>
-        <p:txBody>
-          <a:bodyPr wrap="square" lIns="0" tIns="0" rIns="0" bIns="0" rtlCol="0" anchor="b"/>
-          <a:lstStyle/>
-          <a:p>
-            <a:pPr marL="0" indent="0">
-              <a:buNone/>
-            </a:pPr>
-            <a:r>
-              <a:rPr lang="en-US" sz="930" b="1" dirty="0">
-                <a:solidFill>
-                  <a:srgbClr val="2C2849"/>
-                </a:solidFill>
-                <a:latin typeface="Calibri" pitchFamily="34" charset="0"/>
-                <a:ea typeface="Calibri" pitchFamily="34" charset="-122"/>
-                <a:cs typeface="Calibri" pitchFamily="34" charset="-120"/>
-              </a:rPr>
-              <a:t>Pintura / Preservação (Integridade)  ·  OPEX</a:t>
-            </a:r>
-            <a:endParaRPr lang="en-US" sz="930" dirty="0"/>
-          </a:p>
-        </p:txBody>
-      </p:sp>
-      <p:sp>
-        <p:nvSpPr>
-          <p:cNvPr id="65" name="Text 62"/>
-          <p:cNvSpPr/>
-          <p:nvPr/>
-        </p:nvSpPr>
-        <p:spPr>
-          <a:xfrm>
-            <a:off x="8065008" y="5605272"/>
-            <a:ext cx="3666744" cy="201168"/>
-          </a:xfrm>
-          <a:prstGeom prst="rect">
-            <a:avLst/>
-          </a:prstGeom>
-          <a:noFill/>
-          <a:ln/>
-        </p:spPr>
-        <p:txBody>
-          <a:bodyPr wrap="square" lIns="0" tIns="0" rIns="0" bIns="0" rtlCol="0" anchor="ctr"/>
-          <a:lstStyle/>
-          <a:p>
-            <a:pPr marL="0" indent="0">
-              <a:buNone/>
-            </a:pPr>
-            <a:r>
-              <a:rPr lang="en-US" sz="820" dirty="0">
-                <a:solidFill>
-                  <a:srgbClr val="6B6682"/>
-                </a:solidFill>
-                <a:latin typeface="Calibri" pitchFamily="34" charset="0"/>
-                <a:ea typeface="Calibri" pitchFamily="34" charset="-122"/>
-                <a:cs typeface="Calibri" pitchFamily="34" charset="-120"/>
-              </a:rPr>
-              <a:t>45 pts · ~1.250 cama-dia · US$ 1,1M</a:t>
-            </a:r>
-            <a:endParaRPr lang="en-US" sz="820" dirty="0"/>
-          </a:p>
-        </p:txBody>
-      </p:sp>
-      <p:sp>
-        <p:nvSpPr>
-          <p:cNvPr id="66" name="Shape 63"/>
-          <p:cNvSpPr/>
-          <p:nvPr/>
-        </p:nvSpPr>
-        <p:spPr>
-          <a:xfrm>
-            <a:off x="7772400" y="5893308"/>
-            <a:ext cx="201168" cy="201168"/>
-          </a:xfrm>
-          <a:prstGeom prst="ellipse">
-            <a:avLst/>
-          </a:prstGeom>
-          <a:solidFill>
-            <a:srgbClr val="F2834B">
-              <a:alpha val="82000"/>
-            </a:srgbClr>
-          </a:solidFill>
-          <a:ln w="15240">
-            <a:solidFill>
-              <a:srgbClr val="FFFFFF"/>
-            </a:solidFill>
-            <a:prstDash val="solid"/>
-          </a:ln>
-        </p:spPr>
-        <p:txBody>
-          <a:bodyPr/>
-          <a:lstStyle/>
-          <a:p>
-            <a:endParaRPr lang="pt-BR"/>
-          </a:p>
-        </p:txBody>
-      </p:sp>
-      <p:sp>
-        <p:nvSpPr>
-          <p:cNvPr id="67" name="Text 64"/>
-          <p:cNvSpPr/>
-          <p:nvPr/>
-        </p:nvSpPr>
-        <p:spPr>
-          <a:xfrm>
-            <a:off x="7772400" y="5893308"/>
-            <a:ext cx="201168" cy="201168"/>
-          </a:xfrm>
-          <a:prstGeom prst="rect">
-            <a:avLst/>
-          </a:prstGeom>
-          <a:noFill/>
-          <a:ln/>
-        </p:spPr>
-        <p:txBody>
-          <a:bodyPr wrap="square" lIns="0" tIns="0" rIns="0" bIns="0" rtlCol="0" anchor="ctr"/>
-          <a:lstStyle/>
-          <a:p>
-            <a:pPr marL="0" indent="0" algn="ctr">
-              <a:buNone/>
-            </a:pPr>
-            <a:r>
-              <a:rPr lang="en-US" sz="800" b="1" dirty="0">
-                <a:solidFill>
-                  <a:srgbClr val="FFFFFF"/>
-                </a:solidFill>
-                <a:latin typeface="Calibri" pitchFamily="34" charset="0"/>
-                <a:ea typeface="Calibri" pitchFamily="34" charset="-122"/>
-                <a:cs typeface="Calibri" pitchFamily="34" charset="-120"/>
-              </a:rPr>
-              <a:t>8</a:t>
-            </a:r>
-            <a:endParaRPr lang="en-US" sz="800" dirty="0"/>
-          </a:p>
-        </p:txBody>
-      </p:sp>
-      <p:sp>
-        <p:nvSpPr>
-          <p:cNvPr id="68" name="Text 65"/>
-          <p:cNvSpPr/>
-          <p:nvPr/>
-        </p:nvSpPr>
-        <p:spPr>
-          <a:xfrm>
-            <a:off x="8065008" y="5838444"/>
-            <a:ext cx="3666744" cy="256032"/>
-          </a:xfrm>
-          <a:prstGeom prst="rect">
-            <a:avLst/>
-          </a:prstGeom>
-          <a:noFill/>
-          <a:ln/>
-        </p:spPr>
-        <p:txBody>
-          <a:bodyPr wrap="square" lIns="0" tIns="0" rIns="0" bIns="0" rtlCol="0" anchor="b"/>
-          <a:lstStyle/>
-          <a:p>
-            <a:pPr marL="0" indent="0">
-              <a:buNone/>
-            </a:pPr>
-            <a:r>
-              <a:rPr lang="en-US" sz="930" b="1" dirty="0">
-                <a:solidFill>
-                  <a:srgbClr val="2C2849"/>
-                </a:solidFill>
-                <a:latin typeface="Calibri" pitchFamily="34" charset="0"/>
-                <a:ea typeface="Calibri" pitchFamily="34" charset="-122"/>
-                <a:cs typeface="Calibri" pitchFamily="34" charset="-120"/>
-              </a:rPr>
-              <a:t>Parada Programada 2027  ·  CAPEX</a:t>
-            </a:r>
-            <a:endParaRPr lang="en-US" sz="930" dirty="0"/>
-          </a:p>
-        </p:txBody>
-      </p:sp>
-      <p:sp>
-        <p:nvSpPr>
-          <p:cNvPr id="69" name="Text 66"/>
-          <p:cNvSpPr/>
-          <p:nvPr/>
-        </p:nvSpPr>
-        <p:spPr>
-          <a:xfrm>
-            <a:off x="8065008" y="6076188"/>
-            <a:ext cx="3666744" cy="201168"/>
-          </a:xfrm>
-          <a:prstGeom prst="rect">
-            <a:avLst/>
-          </a:prstGeom>
-          <a:noFill/>
-          <a:ln/>
-        </p:spPr>
-        <p:txBody>
-          <a:bodyPr wrap="square" lIns="0" tIns="0" rIns="0" bIns="0" rtlCol="0" anchor="ctr"/>
-          <a:lstStyle/>
-          <a:p>
-            <a:pPr marL="0" indent="0">
-              <a:buNone/>
-            </a:pPr>
-            <a:r>
-              <a:rPr lang="en-US" sz="820" dirty="0">
-                <a:solidFill>
-                  <a:srgbClr val="6B6682"/>
-                </a:solidFill>
-                <a:latin typeface="Calibri" pitchFamily="34" charset="0"/>
-                <a:ea typeface="Calibri" pitchFamily="34" charset="-122"/>
-                <a:cs typeface="Calibri" pitchFamily="34" charset="-120"/>
-              </a:rPr>
-              <a:t>90 pts · ~2.600 cama-dia · US$ 8,0M</a:t>
-            </a:r>
-            <a:endParaRPr lang="en-US" sz="820" dirty="0"/>
-          </a:p>
-        </p:txBody>
-      </p:sp>
-      <p:sp>
-        <p:nvSpPr>
-          <p:cNvPr id="71" name="Text 68"/>
-          <p:cNvSpPr/>
-          <p:nvPr/>
-        </p:nvSpPr>
-        <p:spPr>
-          <a:xfrm>
-            <a:off x="11338560" y="6547104"/>
-            <a:ext cx="457200" cy="256032"/>
-          </a:xfrm>
-          <a:prstGeom prst="rect">
-            <a:avLst/>
-          </a:prstGeom>
-          <a:noFill/>
-          <a:ln/>
-        </p:spPr>
-        <p:txBody>
-          <a:bodyPr wrap="square" lIns="0" tIns="0" rIns="0" bIns="0" rtlCol="0" anchor="ctr"/>
-          <a:lstStyle/>
-          <a:p>
-            <a:pPr marL="0" indent="0" algn="r">
-              <a:buNone/>
-            </a:pPr>
-            <a:r>
-              <a:rPr lang="en-US" sz="850" dirty="0">
-                <a:solidFill>
-                  <a:srgbClr val="6B6682"/>
-                </a:solidFill>
-                <a:latin typeface="Calibri" pitchFamily="34" charset="0"/>
-                <a:ea typeface="Calibri" pitchFamily="34" charset="-122"/>
-                <a:cs typeface="Calibri" pitchFamily="34" charset="-120"/>
-              </a:rPr>
-              <a:t>7</a:t>
-            </a:r>
-            <a:endParaRPr lang="en-US" sz="850" dirty="0"/>
           </a:p>
         </p:txBody>
       </p:sp>
